--- a/deck/NEXORA_AegisBrowse_Deck.pptx
+++ b/deck/NEXORA_AegisBrowse_Deck.pptx
@@ -2,18 +2,18 @@
 <file path=ppt/presentation.xml><?xml version="1.0" encoding="utf-8"?>
 <p:presentation xmlns:p="http://schemas.openxmlformats.org/presentationml/2006/main">
   <p:sldMasterIdLst>
-    <p:sldMasterId xmlns:r="http://schemas.openxmlformats.org/officeDocument/2006/relationships" id="2147483648" r:id="Rfa152bc3d19d4a09"/>
+    <p:sldMasterId xmlns:r="http://schemas.openxmlformats.org/officeDocument/2006/relationships" id="2147483648" r:id="Rd56eb3909b964a2f"/>
   </p:sldMasterIdLst>
   <p:notesMasterIdLst>
-    <p:notesMasterId xmlns:r="http://schemas.openxmlformats.org/officeDocument/2006/relationships" r:id="R1a53bd5eeaeb430b"/>
+    <p:notesMasterId xmlns:r="http://schemas.openxmlformats.org/officeDocument/2006/relationships" r:id="Rd06329f897904502"/>
   </p:notesMasterIdLst>
   <p:sldIdLst>
-    <p:sldId xmlns:r="http://schemas.openxmlformats.org/officeDocument/2006/relationships" id="256" r:id="R442338eeba184285"/>
-    <p:sldId xmlns:r="http://schemas.openxmlformats.org/officeDocument/2006/relationships" id="257" r:id="Rb61c1d1622d84245"/>
-    <p:sldId xmlns:r="http://schemas.openxmlformats.org/officeDocument/2006/relationships" id="258" r:id="R6d9aecdec6cb4918"/>
-    <p:sldId xmlns:r="http://schemas.openxmlformats.org/officeDocument/2006/relationships" id="259" r:id="R61e94ade827a4c62"/>
-    <p:sldId xmlns:r="http://schemas.openxmlformats.org/officeDocument/2006/relationships" id="260" r:id="R90a564cc79a94856"/>
-    <p:sldId xmlns:r="http://schemas.openxmlformats.org/officeDocument/2006/relationships" id="261" r:id="R8a82beced3934e8d"/>
+    <p:sldId xmlns:r="http://schemas.openxmlformats.org/officeDocument/2006/relationships" id="256" r:id="R030e6f89d0c54660"/>
+    <p:sldId xmlns:r="http://schemas.openxmlformats.org/officeDocument/2006/relationships" id="257" r:id="R5c35fb56d99a4ed8"/>
+    <p:sldId xmlns:r="http://schemas.openxmlformats.org/officeDocument/2006/relationships" id="258" r:id="R5032e7ef42c3434c"/>
+    <p:sldId xmlns:r="http://schemas.openxmlformats.org/officeDocument/2006/relationships" id="259" r:id="R6eb2dc8880fb4b2d"/>
+    <p:sldId xmlns:r="http://schemas.openxmlformats.org/officeDocument/2006/relationships" id="260" r:id="R330f7d6189614b5d"/>
+    <p:sldId xmlns:r="http://schemas.openxmlformats.org/officeDocument/2006/relationships" id="261" r:id="R1d1517b62c0e414d"/>
   </p:sldIdLst>
   <p:sldSz cx="12192000" cy="6858000"/>
   <p:notesSz cx="6858000" cy="9144000"/>
@@ -629,7 +629,7 @@
           <a:lstStyle xmlns:a="http://schemas.openxmlformats.org/drawingml/2006/main"/>
           <a:p xmlns:a="http://schemas.openxmlformats.org/drawingml/2006/main">
             <a:r>
-              <a:t>Source: project README.md; aegisbrowse_extension/src/ort/README.md; models/README.md; perception.js and service_worker.js. The optional loader falls back to DOM perception if runtime/model assets are unavailable. ort.webgpu.mjs is a load-safe placeholder, not a bundled working runtime. A trained ui_detector.onnx and the real browser distribution / WASM assets are pending. Browser visual inference is therefore not claimed as measured. The diagram shows current browser privacy/control flow with the planned visual path identified below; browser end-to-end measurements are still pending.</a:t>
+              <a:t>Source: aegisbrowse_extension/src/service_worker.js and privacy.js, src/ort/README.md, models/README.md, aegisbrowse_server/app.py. The demo executes one AEGIS_STEP per user trigger; it is not an autonomous repeating loop. Endpoint is restricted to loopback port 8000. The rules planner uses control metadata, not visual understanding. Goal sanitization is regex-based and does not cover every name/address. Missing optional ONNX assets produce DOM fallback. The local gate can BLOCK, CONFIRM TYPE, or ALLOW. Live target revalidation precedes execution. Browser verification is heuristic and needs broader testing. The trained model, real runtime assets, browser OCR, VLM validation and Firefox support are pending.</a:t>
             </a:r>
             <a:endParaRPr/>
           </a:p>
@@ -842,7 +842,7 @@
           <a:lstStyle xmlns:a="http://schemas.openxmlformats.org/drawingml/2006/main"/>
           <a:p xmlns:a="http://schemas.openxmlformats.org/drawingml/2006/main">
             <a:r>
-              <a:t>Sources: five research URLs are linked on the slide; project benchmark README, SELECTIVE_RESULTS.md, selective_results.json, loop_results.json. Development families are scholarship/HR; held-out families are health/municipal/banking/transport. Fresh pages_v3 changes the seed, not the four held-out families. Stress set drops image entries and about a third of value fields from the DOM; it is not a completely DOM-free dataset. Ground truth is read by the scorer, not the runtime. 408 sensitive annotations comprise 312 PII instances plus 96 secret fields. Synthetic photo placeholders do not establish face recognition. No public benchmark repository URL was supplied.</a:t>
+              <a:t>Project repository supplied by user: https://github.com/mynameisizhan-coder/AegisBrowse. Original demo URL https://youtu.be/heZiO6_-ZtE resolves to AegisBrowse by NEXORA; video content was not independently reviewed. Research URLs linked. Sources: SELECTIVE_RESULTS.md and stored JSON. Development families scholarship/HR; held-out health/municipal/banking/transport. pages_v3 is a fresh seed on the same four held-out families. DOM-blind variants remove image entries and about one third of value-field DOM data, not all DOM. Benchmark visual/OCR improvements are in Python, not the extension. Task-aware crop benefit needs a separate ablation.</a:t>
             </a:r>
             <a:endParaRPr/>
           </a:p>
@@ -916,7 +916,7 @@
   </p:cSld>
   <p:clrMap bg1="lt1" tx1="dk1" bg2="lt2" tx2="dk2" accent1="accent1" accent2="accent2" accent3="accent3" accent4="accent4" accent5="accent5" accent6="accent6" hlink="hlink" folHlink="folHlink"/>
   <p:sldLayoutIdLst>
-    <p:sldLayoutId xmlns:r="http://schemas.openxmlformats.org/officeDocument/2006/relationships" id="2147483649" r:id="R4a40a34a8f5b456a"/>
+    <p:sldLayoutId xmlns:r="http://schemas.openxmlformats.org/officeDocument/2006/relationships" id="2147483649" r:id="R2f361ea7000e4712"/>
   </p:sldLayoutIdLst>
   <p:hf sldNum="0" hdr="0" ftr="0" dt="0"/>
   <p:txStyles>
@@ -1480,7 +1480,7 @@
           <p:cNvPr id="2" name="Text 0">
             <a:extLst xmlns:a="http://schemas.openxmlformats.org/drawingml/2006/main">
               <a:ext uri="{FF2B5EF4-FFF2-40B4-BE49-F238E27FC236}">
-                <a16:creationId xmlns:a16="http://schemas.microsoft.com/office/drawing/2014/main" id="{15A0293D-9777-4ABF-AD64-7A08752E330E}"/>
+                <a16:creationId xmlns:a16="http://schemas.microsoft.com/office/drawing/2014/main" id="{FFD96903-3B33-40C0-84E0-E000F661857D}"/>
               </a:ext>
             </a:extLst>
           </p:cNvPr>
@@ -1530,7 +1530,7 @@
           <p:nvPr/>
         </p:nvPicPr>
         <p:blipFill>
-          <a:blip xmlns:r="http://schemas.openxmlformats.org/officeDocument/2006/relationships" xmlns:a="http://schemas.openxmlformats.org/drawingml/2006/main" r:embed="Ra752b394ff4e40f6"/>
+          <a:blip xmlns:r="http://schemas.openxmlformats.org/officeDocument/2006/relationships" xmlns:a="http://schemas.openxmlformats.org/drawingml/2006/main" r:embed="R85a2e09477834353"/>
           <a:stretch xmlns:a="http://schemas.openxmlformats.org/drawingml/2006/main">
             <a:fillRect l="0" t="0" r="0" b="0"/>
           </a:stretch>
@@ -1554,7 +1554,7 @@
           <p:nvPr/>
         </p:nvPicPr>
         <p:blipFill>
-          <a:blip xmlns:r="http://schemas.openxmlformats.org/officeDocument/2006/relationships" xmlns:a="http://schemas.openxmlformats.org/drawingml/2006/main" r:embed="R646584176e634729"/>
+          <a:blip xmlns:r="http://schemas.openxmlformats.org/officeDocument/2006/relationships" xmlns:a="http://schemas.openxmlformats.org/drawingml/2006/main" r:embed="R826a6c7c45494d1b"/>
           <a:stretch xmlns:a="http://schemas.openxmlformats.org/drawingml/2006/main">
             <a:fillRect l="0" t="0" r="0" b="0"/>
           </a:stretch>
@@ -1574,7 +1574,7 @@
           <p:cNvPr id="5" name="Text 1">
             <a:extLst xmlns:a="http://schemas.openxmlformats.org/drawingml/2006/main">
               <a:ext uri="{FF2B5EF4-FFF2-40B4-BE49-F238E27FC236}">
-                <a16:creationId xmlns:a16="http://schemas.microsoft.com/office/drawing/2014/main" id="{F3D6374F-6A3A-422B-BFE0-29E1B96F4652}"/>
+                <a16:creationId xmlns:a16="http://schemas.microsoft.com/office/drawing/2014/main" id="{6882F92A-5C98-43F7-8543-92D1A570E899}"/>
               </a:ext>
             </a:extLst>
           </p:cNvPr>
@@ -1620,7 +1620,7 @@
           <p:cNvPr id="6" name="Shape 2">
             <a:extLst xmlns:a="http://schemas.openxmlformats.org/drawingml/2006/main">
               <a:ext uri="{FF2B5EF4-FFF2-40B4-BE49-F238E27FC236}">
-                <a16:creationId xmlns:a16="http://schemas.microsoft.com/office/drawing/2014/main" id="{D51AC98D-4462-45ED-834A-C5260600585B}"/>
+                <a16:creationId xmlns:a16="http://schemas.microsoft.com/office/drawing/2014/main" id="{BEA4F131-CF7E-45C7-A9A0-45761361FB10}"/>
               </a:ext>
             </a:extLst>
           </p:cNvPr>
@@ -1647,7 +1647,7 @@
           <p:cNvPr id="7" name="Text 3">
             <a:extLst xmlns:a="http://schemas.openxmlformats.org/drawingml/2006/main">
               <a:ext uri="{FF2B5EF4-FFF2-40B4-BE49-F238E27FC236}">
-                <a16:creationId xmlns:a16="http://schemas.microsoft.com/office/drawing/2014/main" id="{D1E88866-0A28-469B-B217-EBC78779E21B}"/>
+                <a16:creationId xmlns:a16="http://schemas.microsoft.com/office/drawing/2014/main" id="{B1BEA329-40C1-4B3A-85A9-0E2A78EAF34C}"/>
               </a:ext>
             </a:extLst>
           </p:cNvPr>
@@ -1707,7 +1707,7 @@
           <p:cNvPr id="8" name="Shape 4">
             <a:extLst xmlns:a="http://schemas.openxmlformats.org/drawingml/2006/main">
               <a:ext uri="{FF2B5EF4-FFF2-40B4-BE49-F238E27FC236}">
-                <a16:creationId xmlns:a16="http://schemas.microsoft.com/office/drawing/2014/main" id="{E2636D07-3007-44DA-900D-46088C71A841}"/>
+                <a16:creationId xmlns:a16="http://schemas.microsoft.com/office/drawing/2014/main" id="{A5A1AC0F-37C6-4326-8BD0-A1C4A185F8BA}"/>
               </a:ext>
             </a:extLst>
           </p:cNvPr>
@@ -1734,7 +1734,7 @@
           <p:cNvPr id="9" name="Text 5">
             <a:extLst xmlns:a="http://schemas.openxmlformats.org/drawingml/2006/main">
               <a:ext uri="{FF2B5EF4-FFF2-40B4-BE49-F238E27FC236}">
-                <a16:creationId xmlns:a16="http://schemas.microsoft.com/office/drawing/2014/main" id="{F79A424F-9099-4C8C-A8A6-03F34FA88146}"/>
+                <a16:creationId xmlns:a16="http://schemas.microsoft.com/office/drawing/2014/main" id="{0F3D91A4-2ACF-462C-B5F4-6DFDE708C2F3}"/>
               </a:ext>
             </a:extLst>
           </p:cNvPr>
@@ -1794,7 +1794,7 @@
           <p:cNvPr id="10" name="Shape 6">
             <a:extLst xmlns:a="http://schemas.openxmlformats.org/drawingml/2006/main">
               <a:ext uri="{FF2B5EF4-FFF2-40B4-BE49-F238E27FC236}">
-                <a16:creationId xmlns:a16="http://schemas.microsoft.com/office/drawing/2014/main" id="{6E5BE6CC-B39E-431F-A16E-9C4770F57534}"/>
+                <a16:creationId xmlns:a16="http://schemas.microsoft.com/office/drawing/2014/main" id="{FD713E6A-82F6-4CC8-9B65-8DDEB11DE825}"/>
               </a:ext>
             </a:extLst>
           </p:cNvPr>
@@ -1821,7 +1821,7 @@
           <p:cNvPr id="11" name="Text 7">
             <a:extLst xmlns:a="http://schemas.openxmlformats.org/drawingml/2006/main">
               <a:ext uri="{FF2B5EF4-FFF2-40B4-BE49-F238E27FC236}">
-                <a16:creationId xmlns:a16="http://schemas.microsoft.com/office/drawing/2014/main" id="{8B8DDBF3-98B5-4178-95CD-142CECE3AA3F}"/>
+                <a16:creationId xmlns:a16="http://schemas.microsoft.com/office/drawing/2014/main" id="{FD014459-79A6-4F94-903F-F1DB5B697B56}"/>
               </a:ext>
             </a:extLst>
           </p:cNvPr>
@@ -1881,7 +1881,7 @@
           <p:cNvPr id="12" name="Shape 8">
             <a:extLst xmlns:a="http://schemas.openxmlformats.org/drawingml/2006/main">
               <a:ext uri="{FF2B5EF4-FFF2-40B4-BE49-F238E27FC236}">
-                <a16:creationId xmlns:a16="http://schemas.microsoft.com/office/drawing/2014/main" id="{0D60F24B-D60F-4FF7-A040-17E1E188E882}"/>
+                <a16:creationId xmlns:a16="http://schemas.microsoft.com/office/drawing/2014/main" id="{DADD8BEE-DE2B-4A74-90B6-7969821F6603}"/>
               </a:ext>
             </a:extLst>
           </p:cNvPr>
@@ -1908,7 +1908,7 @@
           <p:cNvPr id="13" name="Text 9">
             <a:extLst xmlns:a="http://schemas.openxmlformats.org/drawingml/2006/main">
               <a:ext uri="{FF2B5EF4-FFF2-40B4-BE49-F238E27FC236}">
-                <a16:creationId xmlns:a16="http://schemas.microsoft.com/office/drawing/2014/main" id="{AE7675F0-277D-419F-BD08-8E257A9757F7}"/>
+                <a16:creationId xmlns:a16="http://schemas.microsoft.com/office/drawing/2014/main" id="{15237C38-81A4-4888-9B1D-EE14EC8CF494}"/>
               </a:ext>
             </a:extLst>
           </p:cNvPr>
@@ -1968,7 +1968,7 @@
           <p:cNvPr id="14" name="Shape 10">
             <a:extLst xmlns:a="http://schemas.openxmlformats.org/drawingml/2006/main">
               <a:ext uri="{FF2B5EF4-FFF2-40B4-BE49-F238E27FC236}">
-                <a16:creationId xmlns:a16="http://schemas.microsoft.com/office/drawing/2014/main" id="{982167CE-50D6-426F-990A-130218465155}"/>
+                <a16:creationId xmlns:a16="http://schemas.microsoft.com/office/drawing/2014/main" id="{655BF8D2-D967-4A32-9589-FB896AB668FD}"/>
               </a:ext>
             </a:extLst>
           </p:cNvPr>
@@ -1995,7 +1995,7 @@
           <p:cNvPr id="15" name="Text 11">
             <a:extLst xmlns:a="http://schemas.openxmlformats.org/drawingml/2006/main">
               <a:ext uri="{FF2B5EF4-FFF2-40B4-BE49-F238E27FC236}">
-                <a16:creationId xmlns:a16="http://schemas.microsoft.com/office/drawing/2014/main" id="{66E1EC03-42B6-4617-8361-8CF091FC6322}"/>
+                <a16:creationId xmlns:a16="http://schemas.microsoft.com/office/drawing/2014/main" id="{E60768D9-2C8C-4F56-A524-B1FB11AAD3BC}"/>
               </a:ext>
             </a:extLst>
           </p:cNvPr>
@@ -2055,7 +2055,7 @@
           <p:cNvPr id="16" name="Shape 12">
             <a:extLst xmlns:a="http://schemas.openxmlformats.org/drawingml/2006/main">
               <a:ext uri="{FF2B5EF4-FFF2-40B4-BE49-F238E27FC236}">
-                <a16:creationId xmlns:a16="http://schemas.microsoft.com/office/drawing/2014/main" id="{626F521E-5DA1-44C2-A740-2DA98BC20161}"/>
+                <a16:creationId xmlns:a16="http://schemas.microsoft.com/office/drawing/2014/main" id="{9A433F76-10E9-44BC-A9C1-F5D69A1171A4}"/>
               </a:ext>
             </a:extLst>
           </p:cNvPr>
@@ -2082,7 +2082,7 @@
           <p:cNvPr id="17" name="Text 13">
             <a:extLst xmlns:a="http://schemas.openxmlformats.org/drawingml/2006/main">
               <a:ext uri="{FF2B5EF4-FFF2-40B4-BE49-F238E27FC236}">
-                <a16:creationId xmlns:a16="http://schemas.microsoft.com/office/drawing/2014/main" id="{B0F21EE7-B93F-4235-AE1D-521F41E70A0D}"/>
+                <a16:creationId xmlns:a16="http://schemas.microsoft.com/office/drawing/2014/main" id="{48DEA7CB-533E-4427-8981-DA05DA9CBFCD}"/>
               </a:ext>
             </a:extLst>
           </p:cNvPr>
@@ -2142,7 +2142,7 @@
           <p:cNvPr id="18" name="Shape 14">
             <a:extLst xmlns:a="http://schemas.openxmlformats.org/drawingml/2006/main">
               <a:ext uri="{FF2B5EF4-FFF2-40B4-BE49-F238E27FC236}">
-                <a16:creationId xmlns:a16="http://schemas.microsoft.com/office/drawing/2014/main" id="{BD94A480-68E1-4C35-846C-1C925081171F}"/>
+                <a16:creationId xmlns:a16="http://schemas.microsoft.com/office/drawing/2014/main" id="{C685F29D-D6FE-4F08-8555-4B87070FF703}"/>
               </a:ext>
             </a:extLst>
           </p:cNvPr>
@@ -2181,7 +2181,7 @@
           <p:cNvPr id="19" name="Text 15">
             <a:extLst xmlns:a="http://schemas.openxmlformats.org/drawingml/2006/main">
               <a:ext uri="{FF2B5EF4-FFF2-40B4-BE49-F238E27FC236}">
-                <a16:creationId xmlns:a16="http://schemas.microsoft.com/office/drawing/2014/main" id="{5F5CE42C-C80B-4CA6-9849-26D785D47111}"/>
+                <a16:creationId xmlns:a16="http://schemas.microsoft.com/office/drawing/2014/main" id="{5ADE9D82-F3E1-46D3-9D77-6B777B6B8304}"/>
               </a:ext>
             </a:extLst>
           </p:cNvPr>
@@ -2227,7 +2227,7 @@
           <p:cNvPr id="20" name="Text 16">
             <a:extLst xmlns:a="http://schemas.openxmlformats.org/drawingml/2006/main">
               <a:ext uri="{FF2B5EF4-FFF2-40B4-BE49-F238E27FC236}">
-                <a16:creationId xmlns:a16="http://schemas.microsoft.com/office/drawing/2014/main" id="{77C9BE54-D92A-4B0E-BE0A-AC737ADECC6D}"/>
+                <a16:creationId xmlns:a16="http://schemas.microsoft.com/office/drawing/2014/main" id="{BF50739D-3094-440E-A5CA-F9566A0CA0E9}"/>
               </a:ext>
             </a:extLst>
           </p:cNvPr>
@@ -2273,7 +2273,7 @@
           <p:cNvPr id="27" name="rev-1">
             <a:extLst xmlns:a="http://schemas.openxmlformats.org/drawingml/2006/main">
               <a:ext uri="{FF2B5EF4-FFF2-40B4-BE49-F238E27FC236}">
-                <a16:creationId xmlns:a16="http://schemas.microsoft.com/office/drawing/2014/main" id="{CCBC6B4A-CDFA-4E6D-9515-0FA4F1CE2440}"/>
+                <a16:creationId xmlns:a16="http://schemas.microsoft.com/office/drawing/2014/main" id="{92D84F6D-2915-4576-AB37-596ACE1FD6CD}"/>
               </a:ext>
             </a:extLst>
           </p:cNvPr>
@@ -2330,7 +2330,7 @@
                 <a:latin typeface="Calibri"/>
                 <a:ea typeface="Calibri"/>
                 <a:cs typeface="Calibri"/>
-                <a:hlinkClick xmlns:r="http://schemas.openxmlformats.org/officeDocument/2006/relationships" r:id="R1b1cc855e0d94de0"/>
+                <a:hlinkClick xmlns:r="http://schemas.openxmlformats.org/officeDocument/2006/relationships" r:id="Ra09fafb56bd44bbb"/>
               </a:rPr>
               <a:t>youtu.be/heZiO6_-ZtE</a:t>
             </a:r>
@@ -2340,7 +2340,7 @@
     </p:spTree>
     <p:extLst>
       <p:ext uri="{BB962C8B-B14F-4D97-AF65-F5344CB8AC3E}">
-        <p14:creationId xmlns:p14="http://schemas.microsoft.com/office/powerpoint/2010/main" val="59205310"/>
+        <p14:creationId xmlns:p14="http://schemas.microsoft.com/office/powerpoint/2010/main" val="1866396931"/>
       </p:ext>
     </p:extLst>
   </p:cSld>
@@ -2364,7 +2364,7 @@
           <p:cNvPr id="2" name="Shape 0">
             <a:extLst xmlns:a="http://schemas.openxmlformats.org/drawingml/2006/main">
               <a:ext uri="{FF2B5EF4-FFF2-40B4-BE49-F238E27FC236}">
-                <a16:creationId xmlns:a16="http://schemas.microsoft.com/office/drawing/2014/main" id="{05A8F150-5256-4080-BA88-7F3DCE4DEF5E}"/>
+                <a16:creationId xmlns:a16="http://schemas.microsoft.com/office/drawing/2014/main" id="{D1BA0A19-7B77-47F5-8054-59569A607CD5}"/>
               </a:ext>
             </a:extLst>
           </p:cNvPr>
@@ -2404,7 +2404,7 @@
           <p:cNvPr id="3" name="Text 1">
             <a:extLst xmlns:a="http://schemas.openxmlformats.org/drawingml/2006/main">
               <a:ext uri="{FF2B5EF4-FFF2-40B4-BE49-F238E27FC236}">
-                <a16:creationId xmlns:a16="http://schemas.microsoft.com/office/drawing/2014/main" id="{D50BFCF4-8411-40F0-AF47-918309909474}"/>
+                <a16:creationId xmlns:a16="http://schemas.microsoft.com/office/drawing/2014/main" id="{E1512FF9-2204-43CE-A6BD-FC33D79FC29B}"/>
               </a:ext>
             </a:extLst>
           </p:cNvPr>
@@ -2450,7 +2450,7 @@
           <p:cNvPr id="4" name="Text 2">
             <a:extLst xmlns:a="http://schemas.openxmlformats.org/drawingml/2006/main">
               <a:ext uri="{FF2B5EF4-FFF2-40B4-BE49-F238E27FC236}">
-                <a16:creationId xmlns:a16="http://schemas.microsoft.com/office/drawing/2014/main" id="{43E240D6-C2EE-4C94-B967-0F0BE87CE628}"/>
+                <a16:creationId xmlns:a16="http://schemas.microsoft.com/office/drawing/2014/main" id="{296A51F1-EC84-4938-BE4C-E64647EAF8A5}"/>
               </a:ext>
             </a:extLst>
           </p:cNvPr>
@@ -2500,7 +2500,7 @@
           <p:nvPr/>
         </p:nvPicPr>
         <p:blipFill>
-          <a:blip xmlns:r="http://schemas.openxmlformats.org/officeDocument/2006/relationships" xmlns:a="http://schemas.openxmlformats.org/drawingml/2006/main" r:embed="Rf2c01fab5ac54d50"/>
+          <a:blip xmlns:r="http://schemas.openxmlformats.org/officeDocument/2006/relationships" xmlns:a="http://schemas.openxmlformats.org/drawingml/2006/main" r:embed="R504176bb45764959"/>
           <a:stretch xmlns:a="http://schemas.openxmlformats.org/drawingml/2006/main">
             <a:fillRect l="0" t="0" r="0" b="0"/>
           </a:stretch>
@@ -2527,7 +2527,7 @@
           <p:cNvPr id="7" name="Shape 4">
             <a:extLst xmlns:a="http://schemas.openxmlformats.org/drawingml/2006/main">
               <a:ext uri="{FF2B5EF4-FFF2-40B4-BE49-F238E27FC236}">
-                <a16:creationId xmlns:a16="http://schemas.microsoft.com/office/drawing/2014/main" id="{0E157234-D361-4377-9935-AE8B9B6FB9DB}"/>
+                <a16:creationId xmlns:a16="http://schemas.microsoft.com/office/drawing/2014/main" id="{3AFB8C86-5B9D-4F33-9954-3909F3C7938F}"/>
               </a:ext>
             </a:extLst>
           </p:cNvPr>
@@ -2554,7 +2554,7 @@
           <p:cNvPr id="9" name="Text 6">
             <a:extLst xmlns:a="http://schemas.openxmlformats.org/drawingml/2006/main">
               <a:ext uri="{FF2B5EF4-FFF2-40B4-BE49-F238E27FC236}">
-                <a16:creationId xmlns:a16="http://schemas.microsoft.com/office/drawing/2014/main" id="{2D0A0940-E985-43F5-8F6C-ADE70B5A59F0}"/>
+                <a16:creationId xmlns:a16="http://schemas.microsoft.com/office/drawing/2014/main" id="{583EA1E5-0D19-486F-98F8-1A1FB9FDA7B4}"/>
               </a:ext>
             </a:extLst>
           </p:cNvPr>
@@ -2600,7 +2600,7 @@
           <p:cNvPr id="54" name="rev-2">
             <a:extLst xmlns:a="http://schemas.openxmlformats.org/drawingml/2006/main">
               <a:ext uri="{FF2B5EF4-FFF2-40B4-BE49-F238E27FC236}">
-                <a16:creationId xmlns:a16="http://schemas.microsoft.com/office/drawing/2014/main" id="{E62F9E81-4163-47ED-840B-A365B75BC426}"/>
+                <a16:creationId xmlns:a16="http://schemas.microsoft.com/office/drawing/2014/main" id="{97DDA08D-B8F3-4338-9C79-621D7F1D96B7}"/>
               </a:ext>
             </a:extLst>
           </p:cNvPr>
@@ -2631,7 +2631,7 @@
             <a:pPr>
               <a:defRPr sz="1500" b="1">
                 <a:solidFill>
-                  <a:srgbClr val="126D70"/>
+                  <a:srgbClr val="626B2E"/>
                 </a:solidFill>
                 <a:latin typeface="Calibri"/>
                 <a:ea typeface="Calibri"/>
@@ -2641,7 +2641,7 @@
             <a:r>
               <a:rPr sz="1500" b="1">
                 <a:solidFill>
-                  <a:srgbClr val="126D70"/>
+                  <a:srgbClr val="626B2E"/>
                 </a:solidFill>
                 <a:latin typeface="Calibri"/>
                 <a:ea typeface="Calibri"/>
@@ -2657,7 +2657,7 @@
           <p:cNvPr id="55" name="rev-3">
             <a:extLst xmlns:a="http://schemas.openxmlformats.org/drawingml/2006/main">
               <a:ext uri="{FF2B5EF4-FFF2-40B4-BE49-F238E27FC236}">
-                <a16:creationId xmlns:a16="http://schemas.microsoft.com/office/drawing/2014/main" id="{F0C3DBAF-B3F0-4426-98E5-1B5135323102}"/>
+                <a16:creationId xmlns:a16="http://schemas.microsoft.com/office/drawing/2014/main" id="{D64E63F1-98FA-44DD-9E27-9F0292406756}"/>
               </a:ext>
             </a:extLst>
           </p:cNvPr>
@@ -2714,7 +2714,7 @@
           <p:cNvPr id="56" name="step-4">
             <a:extLst xmlns:a="http://schemas.openxmlformats.org/drawingml/2006/main">
               <a:ext uri="{FF2B5EF4-FFF2-40B4-BE49-F238E27FC236}">
-                <a16:creationId xmlns:a16="http://schemas.microsoft.com/office/drawing/2014/main" id="{5AC7005D-7FB1-40B4-B713-BC357D2B7A2D}"/>
+                <a16:creationId xmlns:a16="http://schemas.microsoft.com/office/drawing/2014/main" id="{B3228DD0-7A0C-4838-8A61-9E52BD4406EE}"/>
               </a:ext>
             </a:extLst>
           </p:cNvPr>
@@ -2732,7 +2732,7 @@
             <a:avLst/>
           </a:prstGeom>
           <a:solidFill xmlns:a="http://schemas.openxmlformats.org/drawingml/2006/main">
-            <a:srgbClr val="126D70"/>
+            <a:srgbClr val="626B2E"/>
           </a:solidFill>
           <a:ln xmlns:a="http://schemas.openxmlformats.org/drawingml/2006/main" w="0">
             <a:noFill/>
@@ -2744,7 +2744,7 @@
           <p:cNvPr id="57" name="rev-5">
             <a:extLst xmlns:a="http://schemas.openxmlformats.org/drawingml/2006/main">
               <a:ext uri="{FF2B5EF4-FFF2-40B4-BE49-F238E27FC236}">
-                <a16:creationId xmlns:a16="http://schemas.microsoft.com/office/drawing/2014/main" id="{628F95B5-A1E7-4971-AE33-78D420FA5FEF}"/>
+                <a16:creationId xmlns:a16="http://schemas.microsoft.com/office/drawing/2014/main" id="{A0999AB7-0AD5-4384-8C24-FB4FF979F011}"/>
               </a:ext>
             </a:extLst>
           </p:cNvPr>
@@ -2801,7 +2801,7 @@
           <p:cNvPr id="58" name="rev-6">
             <a:extLst xmlns:a="http://schemas.openxmlformats.org/drawingml/2006/main">
               <a:ext uri="{FF2B5EF4-FFF2-40B4-BE49-F238E27FC236}">
-                <a16:creationId xmlns:a16="http://schemas.microsoft.com/office/drawing/2014/main" id="{DFD2C16F-5C57-493E-8290-6DBF0BDBBE2A}"/>
+                <a16:creationId xmlns:a16="http://schemas.microsoft.com/office/drawing/2014/main" id="{464C1964-07DA-4FC1-918F-4713879133AB}"/>
               </a:ext>
             </a:extLst>
           </p:cNvPr>
@@ -2832,7 +2832,7 @@
             <a:pPr>
               <a:defRPr sz="1725" b="1">
                 <a:solidFill>
-                  <a:srgbClr val="126D70"/>
+                  <a:srgbClr val="626B2E"/>
                 </a:solidFill>
                 <a:latin typeface="Calibri"/>
                 <a:ea typeface="Calibri"/>
@@ -2842,7 +2842,7 @@
             <a:r>
               <a:rPr sz="1725" b="1">
                 <a:solidFill>
-                  <a:srgbClr val="126D70"/>
+                  <a:srgbClr val="626B2E"/>
                 </a:solidFill>
                 <a:latin typeface="Calibri"/>
                 <a:ea typeface="Calibri"/>
@@ -2858,7 +2858,7 @@
           <p:cNvPr id="59" name="rev-7">
             <a:extLst xmlns:a="http://schemas.openxmlformats.org/drawingml/2006/main">
               <a:ext uri="{FF2B5EF4-FFF2-40B4-BE49-F238E27FC236}">
-                <a16:creationId xmlns:a16="http://schemas.microsoft.com/office/drawing/2014/main" id="{6C7F7EEB-7862-479F-9F78-3F4B875FB34C}"/>
+                <a16:creationId xmlns:a16="http://schemas.microsoft.com/office/drawing/2014/main" id="{C3217C92-76A1-48F9-9312-4B359800E5AD}"/>
               </a:ext>
             </a:extLst>
           </p:cNvPr>
@@ -2915,7 +2915,7 @@
           <p:cNvPr id="60" name="rev-8">
             <a:extLst xmlns:a="http://schemas.openxmlformats.org/drawingml/2006/main">
               <a:ext uri="{FF2B5EF4-FFF2-40B4-BE49-F238E27FC236}">
-                <a16:creationId xmlns:a16="http://schemas.microsoft.com/office/drawing/2014/main" id="{C52AC534-73D5-4CD8-9B2F-1A883F9A4EE2}"/>
+                <a16:creationId xmlns:a16="http://schemas.microsoft.com/office/drawing/2014/main" id="{D4702119-4F6B-4AAD-84BB-FA026A7DEBB2}"/>
               </a:ext>
             </a:extLst>
           </p:cNvPr>
@@ -2951,7 +2951,7 @@
           <p:nvPr/>
         </p:nvPicPr>
         <p:blipFill>
-          <a:blip xmlns:r="http://schemas.openxmlformats.org/officeDocument/2006/relationships" xmlns:a="http://schemas.openxmlformats.org/drawingml/2006/main" r:embed="Rec33d916ab2346a9"/>
+          <a:blip xmlns:r="http://schemas.openxmlformats.org/officeDocument/2006/relationships" xmlns:a="http://schemas.openxmlformats.org/drawingml/2006/main" r:embed="R0a5c541cd4ae4c2c"/>
           <a:stretch xmlns:a="http://schemas.openxmlformats.org/drawingml/2006/main"/>
         </p:blipFill>
         <p:spPr>
@@ -2969,7 +2969,7 @@
           <p:cNvPr id="62" name="step-9">
             <a:extLst xmlns:a="http://schemas.openxmlformats.org/drawingml/2006/main">
               <a:ext uri="{FF2B5EF4-FFF2-40B4-BE49-F238E27FC236}">
-                <a16:creationId xmlns:a16="http://schemas.microsoft.com/office/drawing/2014/main" id="{F7966938-F8DC-471F-B301-C3B4AA4F81A2}"/>
+                <a16:creationId xmlns:a16="http://schemas.microsoft.com/office/drawing/2014/main" id="{F7C94E70-98C9-46EE-AD4A-45543AD6B5CB}"/>
               </a:ext>
             </a:extLst>
           </p:cNvPr>
@@ -2987,7 +2987,7 @@
             <a:avLst/>
           </a:prstGeom>
           <a:solidFill xmlns:a="http://schemas.openxmlformats.org/drawingml/2006/main">
-            <a:srgbClr val="126D70"/>
+            <a:srgbClr val="626B2E"/>
           </a:solidFill>
           <a:ln xmlns:a="http://schemas.openxmlformats.org/drawingml/2006/main" w="0">
             <a:noFill/>
@@ -2999,7 +2999,7 @@
           <p:cNvPr id="63" name="rev-10">
             <a:extLst xmlns:a="http://schemas.openxmlformats.org/drawingml/2006/main">
               <a:ext uri="{FF2B5EF4-FFF2-40B4-BE49-F238E27FC236}">
-                <a16:creationId xmlns:a16="http://schemas.microsoft.com/office/drawing/2014/main" id="{8F007126-8C4B-4A9F-B2BC-93F137E3383A}"/>
+                <a16:creationId xmlns:a16="http://schemas.microsoft.com/office/drawing/2014/main" id="{B103DFE5-43D3-4A3B-AB0F-91E572F945FA}"/>
               </a:ext>
             </a:extLst>
           </p:cNvPr>
@@ -3056,7 +3056,7 @@
           <p:cNvPr id="64" name="rev-11">
             <a:extLst xmlns:a="http://schemas.openxmlformats.org/drawingml/2006/main">
               <a:ext uri="{FF2B5EF4-FFF2-40B4-BE49-F238E27FC236}">
-                <a16:creationId xmlns:a16="http://schemas.microsoft.com/office/drawing/2014/main" id="{85635CBA-0AC4-49D0-9346-89B4947B4A58}"/>
+                <a16:creationId xmlns:a16="http://schemas.microsoft.com/office/drawing/2014/main" id="{6F750DB9-FBF5-4E5E-8B30-6C566E45EC4A}"/>
               </a:ext>
             </a:extLst>
           </p:cNvPr>
@@ -3087,7 +3087,7 @@
             <a:pPr>
               <a:defRPr sz="1725" b="1">
                 <a:solidFill>
-                  <a:srgbClr val="126D70"/>
+                  <a:srgbClr val="626B2E"/>
                 </a:solidFill>
                 <a:latin typeface="Calibri"/>
                 <a:ea typeface="Calibri"/>
@@ -3097,7 +3097,7 @@
             <a:r>
               <a:rPr sz="1725" b="1">
                 <a:solidFill>
-                  <a:srgbClr val="126D70"/>
+                  <a:srgbClr val="626B2E"/>
                 </a:solidFill>
                 <a:latin typeface="Calibri"/>
                 <a:ea typeface="Calibri"/>
@@ -3113,7 +3113,7 @@
           <p:cNvPr id="65" name="rev-12">
             <a:extLst xmlns:a="http://schemas.openxmlformats.org/drawingml/2006/main">
               <a:ext uri="{FF2B5EF4-FFF2-40B4-BE49-F238E27FC236}">
-                <a16:creationId xmlns:a16="http://schemas.microsoft.com/office/drawing/2014/main" id="{C8CDCA74-E2A6-40B4-92D1-3DACF05CCB5E}"/>
+                <a16:creationId xmlns:a16="http://schemas.microsoft.com/office/drawing/2014/main" id="{0D79CB9E-1EDE-4B8C-A19F-C8EE245E3ACE}"/>
               </a:ext>
             </a:extLst>
           </p:cNvPr>
@@ -3160,7 +3160,7 @@
                 <a:ea typeface="Calibri"/>
                 <a:cs typeface="Calibri"/>
               </a:rPr>
-              <a:t>Structural + visual signals</a:t>
+              <a:t>DOM signals / reference CV overlay</a:t>
             </a:r>
           </a:p>
         </p:txBody>
@@ -3170,7 +3170,7 @@
           <p:cNvPr id="66" name="rev-13">
             <a:extLst xmlns:a="http://schemas.openxmlformats.org/drawingml/2006/main">
               <a:ext uri="{FF2B5EF4-FFF2-40B4-BE49-F238E27FC236}">
-                <a16:creationId xmlns:a16="http://schemas.microsoft.com/office/drawing/2014/main" id="{3E91B6D6-1064-48A9-92BB-DF4E02854691}"/>
+                <a16:creationId xmlns:a16="http://schemas.microsoft.com/office/drawing/2014/main" id="{98B4CC6E-70F4-4BDC-BE99-39A15A44EC83}"/>
               </a:ext>
             </a:extLst>
           </p:cNvPr>
@@ -3206,7 +3206,7 @@
           <p:nvPr/>
         </p:nvPicPr>
         <p:blipFill>
-          <a:blip xmlns:r="http://schemas.openxmlformats.org/officeDocument/2006/relationships" xmlns:a="http://schemas.openxmlformats.org/drawingml/2006/main" r:embed="R1dda0617dae44aa4"/>
+          <a:blip xmlns:r="http://schemas.openxmlformats.org/officeDocument/2006/relationships" xmlns:a="http://schemas.openxmlformats.org/drawingml/2006/main" r:embed="Rc3be5115fbd74190"/>
           <a:stretch xmlns:a="http://schemas.openxmlformats.org/drawingml/2006/main"/>
         </p:blipFill>
         <p:spPr>
@@ -3224,7 +3224,7 @@
           <p:cNvPr id="68" name="step-14">
             <a:extLst xmlns:a="http://schemas.openxmlformats.org/drawingml/2006/main">
               <a:ext uri="{FF2B5EF4-FFF2-40B4-BE49-F238E27FC236}">
-                <a16:creationId xmlns:a16="http://schemas.microsoft.com/office/drawing/2014/main" id="{A30CA544-0A41-455D-A890-7C70111B507F}"/>
+                <a16:creationId xmlns:a16="http://schemas.microsoft.com/office/drawing/2014/main" id="{E888FCF9-8025-4AD2-9F19-AE05990405C1}"/>
               </a:ext>
             </a:extLst>
           </p:cNvPr>
@@ -3242,7 +3242,7 @@
             <a:avLst/>
           </a:prstGeom>
           <a:solidFill xmlns:a="http://schemas.openxmlformats.org/drawingml/2006/main">
-            <a:srgbClr val="126D70"/>
+            <a:srgbClr val="626B2E"/>
           </a:solidFill>
           <a:ln xmlns:a="http://schemas.openxmlformats.org/drawingml/2006/main" w="0">
             <a:noFill/>
@@ -3254,7 +3254,7 @@
           <p:cNvPr id="69" name="rev-15">
             <a:extLst xmlns:a="http://schemas.openxmlformats.org/drawingml/2006/main">
               <a:ext uri="{FF2B5EF4-FFF2-40B4-BE49-F238E27FC236}">
-                <a16:creationId xmlns:a16="http://schemas.microsoft.com/office/drawing/2014/main" id="{B579A06B-B539-4264-84CA-6E8678F25226}"/>
+                <a16:creationId xmlns:a16="http://schemas.microsoft.com/office/drawing/2014/main" id="{8DE6C329-B023-466B-8C0E-4A49BB84CCB4}"/>
               </a:ext>
             </a:extLst>
           </p:cNvPr>
@@ -3311,7 +3311,7 @@
           <p:cNvPr id="70" name="rev-16">
             <a:extLst xmlns:a="http://schemas.openxmlformats.org/drawingml/2006/main">
               <a:ext uri="{FF2B5EF4-FFF2-40B4-BE49-F238E27FC236}">
-                <a16:creationId xmlns:a16="http://schemas.microsoft.com/office/drawing/2014/main" id="{83688962-8C24-4E43-809A-A16FC740FA78}"/>
+                <a16:creationId xmlns:a16="http://schemas.microsoft.com/office/drawing/2014/main" id="{FD11856B-4359-4F78-9D23-BBB4CBDF5CE3}"/>
               </a:ext>
             </a:extLst>
           </p:cNvPr>
@@ -3342,7 +3342,7 @@
             <a:pPr>
               <a:defRPr sz="1725" b="1">
                 <a:solidFill>
-                  <a:srgbClr val="126D70"/>
+                  <a:srgbClr val="626B2E"/>
                 </a:solidFill>
                 <a:latin typeface="Calibri"/>
                 <a:ea typeface="Calibri"/>
@@ -3352,7 +3352,7 @@
             <a:r>
               <a:rPr sz="1725" b="1">
                 <a:solidFill>
-                  <a:srgbClr val="126D70"/>
+                  <a:srgbClr val="626B2E"/>
                 </a:solidFill>
                 <a:latin typeface="Calibri"/>
                 <a:ea typeface="Calibri"/>
@@ -3368,7 +3368,7 @@
           <p:cNvPr id="71" name="rev-17">
             <a:extLst xmlns:a="http://schemas.openxmlformats.org/drawingml/2006/main">
               <a:ext uri="{FF2B5EF4-FFF2-40B4-BE49-F238E27FC236}">
-                <a16:creationId xmlns:a16="http://schemas.microsoft.com/office/drawing/2014/main" id="{192F419F-83BD-419E-A425-8BAD51E84D9F}"/>
+                <a16:creationId xmlns:a16="http://schemas.microsoft.com/office/drawing/2014/main" id="{310927BD-D740-44C1-B56D-8E825D63DF41}"/>
               </a:ext>
             </a:extLst>
           </p:cNvPr>
@@ -3425,7 +3425,7 @@
           <p:cNvPr id="72" name="rev-18">
             <a:extLst xmlns:a="http://schemas.openxmlformats.org/drawingml/2006/main">
               <a:ext uri="{FF2B5EF4-FFF2-40B4-BE49-F238E27FC236}">
-                <a16:creationId xmlns:a16="http://schemas.microsoft.com/office/drawing/2014/main" id="{1B6FA6AE-CADE-4B46-8C3A-5678038572DD}"/>
+                <a16:creationId xmlns:a16="http://schemas.microsoft.com/office/drawing/2014/main" id="{956C7A6B-C00C-4327-A9FA-02CD3D2A6C13}"/>
               </a:ext>
             </a:extLst>
           </p:cNvPr>
@@ -3461,7 +3461,7 @@
           <p:nvPr/>
         </p:nvPicPr>
         <p:blipFill>
-          <a:blip xmlns:r="http://schemas.openxmlformats.org/officeDocument/2006/relationships" xmlns:a="http://schemas.openxmlformats.org/drawingml/2006/main" r:embed="R04e64006379f49fd"/>
+          <a:blip xmlns:r="http://schemas.openxmlformats.org/officeDocument/2006/relationships" xmlns:a="http://schemas.openxmlformats.org/drawingml/2006/main" r:embed="R57b40524e5cd4523"/>
           <a:stretch xmlns:a="http://schemas.openxmlformats.org/drawingml/2006/main"/>
         </p:blipFill>
         <p:spPr>
@@ -3479,7 +3479,7 @@
           <p:cNvPr id="74" name="rev-19">
             <a:extLst xmlns:a="http://schemas.openxmlformats.org/drawingml/2006/main">
               <a:ext uri="{FF2B5EF4-FFF2-40B4-BE49-F238E27FC236}">
-                <a16:creationId xmlns:a16="http://schemas.microsoft.com/office/drawing/2014/main" id="{1EED089D-40C7-4CAD-9841-58FBEDBBC341}"/>
+                <a16:creationId xmlns:a16="http://schemas.microsoft.com/office/drawing/2014/main" id="{76D62C0D-E0D4-4CD1-8FF8-DDD54B08EDB5}"/>
               </a:ext>
             </a:extLst>
           </p:cNvPr>
@@ -3526,7 +3526,7 @@
                 <a:ea typeface="Calibri"/>
                 <a:cs typeface="Calibri"/>
               </a:rPr>
-              <a:t>Synthetic portal illustration</a:t>
+              <a:t>Illustration, not browser-model output</a:t>
             </a:r>
           </a:p>
         </p:txBody>
@@ -3536,7 +3536,7 @@
           <p:cNvPr id="75" name="">
             <a:extLst xmlns:a="http://schemas.openxmlformats.org/drawingml/2006/main">
               <a:ext uri="{FF2B5EF4-FFF2-40B4-BE49-F238E27FC236}">
-                <a16:creationId xmlns:a16="http://schemas.microsoft.com/office/drawing/2014/main" id="{53E01A7F-81D4-416A-85F7-C7163D7C67EB}"/>
+                <a16:creationId xmlns:a16="http://schemas.microsoft.com/office/drawing/2014/main" id="{53817546-492A-438D-8A58-04F7B5401C27}"/>
               </a:ext>
             </a:extLst>
           </p:cNvPr>
@@ -3554,7 +3554,7 @@
             <a:avLst/>
           </a:prstGeom>
           <a:solidFill xmlns:a="http://schemas.openxmlformats.org/drawingml/2006/main">
-            <a:srgbClr val="126D70"/>
+            <a:srgbClr val="626B2E"/>
           </a:solidFill>
           <a:ln xmlns:a="http://schemas.openxmlformats.org/drawingml/2006/main" w="0">
             <a:noFill/>
@@ -3566,7 +3566,7 @@
           <p:cNvPr id="76" name="">
             <a:extLst xmlns:a="http://schemas.openxmlformats.org/drawingml/2006/main">
               <a:ext uri="{FF2B5EF4-FFF2-40B4-BE49-F238E27FC236}">
-                <a16:creationId xmlns:a16="http://schemas.microsoft.com/office/drawing/2014/main" id="{1B68E160-94B9-4AB1-912F-FAA241AA118F}"/>
+                <a16:creationId xmlns:a16="http://schemas.microsoft.com/office/drawing/2014/main" id="{2FCFBAE3-263A-4920-984D-4C02EA6E0C53}"/>
               </a:ext>
             </a:extLst>
           </p:cNvPr>
@@ -3584,7 +3584,7 @@
             <a:avLst/>
           </a:prstGeom>
           <a:solidFill xmlns:a="http://schemas.openxmlformats.org/drawingml/2006/main">
-            <a:srgbClr val="126D70"/>
+            <a:srgbClr val="626B2E"/>
           </a:solidFill>
           <a:ln xmlns:a="http://schemas.openxmlformats.org/drawingml/2006/main" w="0">
             <a:noFill/>
@@ -3596,7 +3596,7 @@
           <p:cNvPr id="77" name="rev-20">
             <a:extLst xmlns:a="http://schemas.openxmlformats.org/drawingml/2006/main">
               <a:ext uri="{FF2B5EF4-FFF2-40B4-BE49-F238E27FC236}">
-                <a16:creationId xmlns:a16="http://schemas.microsoft.com/office/drawing/2014/main" id="{BFA78E0E-E70E-42F9-8AF5-72D196D2D830}"/>
+                <a16:creationId xmlns:a16="http://schemas.microsoft.com/office/drawing/2014/main" id="{F9A8D6BD-61F4-4627-B8E6-254850ABE45B}"/>
               </a:ext>
             </a:extLst>
           </p:cNvPr>
@@ -3627,7 +3627,7 @@
             <a:pPr>
               <a:defRPr sz="1200" b="1">
                 <a:solidFill>
-                  <a:srgbClr val="126D70"/>
+                  <a:srgbClr val="626B2E"/>
                 </a:solidFill>
                 <a:latin typeface="Calibri"/>
                 <a:ea typeface="Calibri"/>
@@ -3637,7 +3637,7 @@
             <a:r>
               <a:rPr sz="1200" b="1">
                 <a:solidFill>
-                  <a:srgbClr val="126D70"/>
+                  <a:srgbClr val="626B2E"/>
                 </a:solidFill>
                 <a:latin typeface="Calibri"/>
                 <a:ea typeface="Calibri"/>
@@ -3653,7 +3653,7 @@
           <p:cNvPr id="78" name="rev-21">
             <a:extLst xmlns:a="http://schemas.openxmlformats.org/drawingml/2006/main">
               <a:ext uri="{FF2B5EF4-FFF2-40B4-BE49-F238E27FC236}">
-                <a16:creationId xmlns:a16="http://schemas.microsoft.com/office/drawing/2014/main" id="{8E81A720-5DA6-4FED-920E-023A81EAED3E}"/>
+                <a16:creationId xmlns:a16="http://schemas.microsoft.com/office/drawing/2014/main" id="{AC476EBB-9D18-4557-A8F5-FB3BA0FD381E}"/>
               </a:ext>
             </a:extLst>
           </p:cNvPr>
@@ -3684,7 +3684,7 @@
             <a:pPr>
               <a:defRPr sz="1350" b="1">
                 <a:solidFill>
-                  <a:srgbClr val="126D70"/>
+                  <a:srgbClr val="626B2E"/>
                 </a:solidFill>
                 <a:latin typeface="Calibri"/>
                 <a:ea typeface="Calibri"/>
@@ -3694,7 +3694,7 @@
             <a:r>
               <a:rPr sz="1350" b="1">
                 <a:solidFill>
-                  <a:srgbClr val="126D70"/>
+                  <a:srgbClr val="626B2E"/>
                 </a:solidFill>
                 <a:latin typeface="Calibri"/>
                 <a:ea typeface="Calibri"/>
@@ -3710,7 +3710,7 @@
           <p:cNvPr id="79" name="path-22">
             <a:extLst xmlns:a="http://schemas.openxmlformats.org/drawingml/2006/main">
               <a:ext uri="{FF2B5EF4-FFF2-40B4-BE49-F238E27FC236}">
-                <a16:creationId xmlns:a16="http://schemas.microsoft.com/office/drawing/2014/main" id="{A6F66D8D-114B-4A2B-B493-ED36C6DB7C1C}"/>
+                <a16:creationId xmlns:a16="http://schemas.microsoft.com/office/drawing/2014/main" id="{97E46718-9372-43DE-863B-8C4DCBB1BE2A}"/>
               </a:ext>
             </a:extLst>
           </p:cNvPr>
@@ -3741,7 +3741,7 @@
           <p:cNvPr id="80" name="rev-23">
             <a:extLst xmlns:a="http://schemas.openxmlformats.org/drawingml/2006/main">
               <a:ext uri="{FF2B5EF4-FFF2-40B4-BE49-F238E27FC236}">
-                <a16:creationId xmlns:a16="http://schemas.microsoft.com/office/drawing/2014/main" id="{10369848-11E8-4D33-91F8-C1BF7E8EDE34}"/>
+                <a16:creationId xmlns:a16="http://schemas.microsoft.com/office/drawing/2014/main" id="{3374697C-6E8A-498F-BC85-3E764933F051}"/>
               </a:ext>
             </a:extLst>
           </p:cNvPr>
@@ -3772,7 +3772,7 @@
             <a:pPr>
               <a:defRPr sz="1500" b="1">
                 <a:solidFill>
-                  <a:srgbClr val="126D70"/>
+                  <a:srgbClr val="626B2E"/>
                 </a:solidFill>
                 <a:latin typeface="Calibri"/>
                 <a:ea typeface="Calibri"/>
@@ -3782,7 +3782,7 @@
             <a:r>
               <a:rPr sz="1500" b="1">
                 <a:solidFill>
-                  <a:srgbClr val="126D70"/>
+                  <a:srgbClr val="626B2E"/>
                 </a:solidFill>
                 <a:latin typeface="Calibri"/>
                 <a:ea typeface="Calibri"/>
@@ -3798,7 +3798,7 @@
           <p:cNvPr id="81" name="rev-24">
             <a:extLst xmlns:a="http://schemas.openxmlformats.org/drawingml/2006/main">
               <a:ext uri="{FF2B5EF4-FFF2-40B4-BE49-F238E27FC236}">
-                <a16:creationId xmlns:a16="http://schemas.microsoft.com/office/drawing/2014/main" id="{4DCC5981-5302-4A56-89B0-8104FC08264A}"/>
+                <a16:creationId xmlns:a16="http://schemas.microsoft.com/office/drawing/2014/main" id="{998D7038-BB7F-48EC-AC82-DC95121C07A6}"/>
               </a:ext>
             </a:extLst>
           </p:cNvPr>
@@ -3829,7 +3829,7 @@
             <a:pPr>
               <a:defRPr sz="1650" b="1">
                 <a:solidFill>
-                  <a:srgbClr val="126D70"/>
+                  <a:srgbClr val="626B2E"/>
                 </a:solidFill>
                 <a:latin typeface="Calibri"/>
                 <a:ea typeface="Calibri"/>
@@ -3839,7 +3839,7 @@
             <a:r>
               <a:rPr sz="1650" b="1">
                 <a:solidFill>
-                  <a:srgbClr val="126D70"/>
+                  <a:srgbClr val="626B2E"/>
                 </a:solidFill>
                 <a:latin typeface="Calibri"/>
                 <a:ea typeface="Calibri"/>
@@ -3855,7 +3855,7 @@
           <p:cNvPr id="82" name="rev-25">
             <a:extLst xmlns:a="http://schemas.openxmlformats.org/drawingml/2006/main">
               <a:ext uri="{FF2B5EF4-FFF2-40B4-BE49-F238E27FC236}">
-                <a16:creationId xmlns:a16="http://schemas.microsoft.com/office/drawing/2014/main" id="{DB25DB50-FDF4-4C35-B7AB-4C91707AB113}"/>
+                <a16:creationId xmlns:a16="http://schemas.microsoft.com/office/drawing/2014/main" id="{08F93DCD-95BA-44E2-B39B-69D7569E7AAF}"/>
               </a:ext>
             </a:extLst>
           </p:cNvPr>
@@ -3902,7 +3902,7 @@
                 <a:ea typeface="Calibri"/>
                 <a:cs typeface="Calibri"/>
               </a:rPr>
-              <a:t>One mask for pixels and text</a:t>
+              <a:t>Browser: pixels + metadata filtering</a:t>
             </a:r>
           </a:p>
         </p:txBody>
@@ -3912,7 +3912,7 @@
           <p:cNvPr id="83" name="rev-26">
             <a:extLst xmlns:a="http://schemas.openxmlformats.org/drawingml/2006/main">
               <a:ext uri="{FF2B5EF4-FFF2-40B4-BE49-F238E27FC236}">
-                <a16:creationId xmlns:a16="http://schemas.microsoft.com/office/drawing/2014/main" id="{A60984B5-C975-4BA7-8CCD-2EFEAB5C0623}"/>
+                <a16:creationId xmlns:a16="http://schemas.microsoft.com/office/drawing/2014/main" id="{D6F50D66-56C4-471E-9ADD-6A1FB2B1C582}"/>
               </a:ext>
             </a:extLst>
           </p:cNvPr>
@@ -3943,7 +3943,7 @@
             <a:pPr>
               <a:defRPr sz="1650" b="1">
                 <a:solidFill>
-                  <a:srgbClr val="126D70"/>
+                  <a:srgbClr val="626B2E"/>
                 </a:solidFill>
                 <a:latin typeface="Calibri"/>
                 <a:ea typeface="Calibri"/>
@@ -3953,7 +3953,7 @@
             <a:r>
               <a:rPr sz="1650" b="1">
                 <a:solidFill>
-                  <a:srgbClr val="126D70"/>
+                  <a:srgbClr val="626B2E"/>
                 </a:solidFill>
                 <a:latin typeface="Calibri"/>
                 <a:ea typeface="Calibri"/>
@@ -3969,7 +3969,7 @@
           <p:cNvPr id="84" name="rev-27">
             <a:extLst xmlns:a="http://schemas.openxmlformats.org/drawingml/2006/main">
               <a:ext uri="{FF2B5EF4-FFF2-40B4-BE49-F238E27FC236}">
-                <a16:creationId xmlns:a16="http://schemas.microsoft.com/office/drawing/2014/main" id="{11AB7BAA-D0FB-4185-BB2E-90D3695DF61D}"/>
+                <a16:creationId xmlns:a16="http://schemas.microsoft.com/office/drawing/2014/main" id="{7981BBCD-C64B-45B5-A73B-AFBDCB169A9C}"/>
               </a:ext>
             </a:extLst>
           </p:cNvPr>
@@ -4016,7 +4016,7 @@
                 <a:ea typeface="Calibri"/>
                 <a:cs typeface="Calibri"/>
               </a:rPr>
-              <a:t>OCR where DOM text is absent</a:t>
+              <a:t>CPU benchmark: OCR on DOM gaps</a:t>
             </a:r>
           </a:p>
         </p:txBody>
@@ -4026,7 +4026,7 @@
           <p:cNvPr id="85" name="rev-28">
             <a:extLst xmlns:a="http://schemas.openxmlformats.org/drawingml/2006/main">
               <a:ext uri="{FF2B5EF4-FFF2-40B4-BE49-F238E27FC236}">
-                <a16:creationId xmlns:a16="http://schemas.microsoft.com/office/drawing/2014/main" id="{0031FFFD-E446-4635-9BA4-B0DA58ED08C5}"/>
+                <a16:creationId xmlns:a16="http://schemas.microsoft.com/office/drawing/2014/main" id="{DDD4D30E-D629-4C7E-A06F-BF445EE66DA2}"/>
               </a:ext>
             </a:extLst>
           </p:cNvPr>
@@ -4057,7 +4057,7 @@
             <a:pPr>
               <a:defRPr sz="1650" b="1">
                 <a:solidFill>
-                  <a:srgbClr val="126D70"/>
+                  <a:srgbClr val="626B2E"/>
                 </a:solidFill>
                 <a:latin typeface="Calibri"/>
                 <a:ea typeface="Calibri"/>
@@ -4067,7 +4067,7 @@
             <a:r>
               <a:rPr sz="1650" b="1">
                 <a:solidFill>
-                  <a:srgbClr val="126D70"/>
+                  <a:srgbClr val="626B2E"/>
                 </a:solidFill>
                 <a:latin typeface="Calibri"/>
                 <a:ea typeface="Calibri"/>
@@ -4083,7 +4083,7 @@
           <p:cNvPr id="86" name="rev-29">
             <a:extLst xmlns:a="http://schemas.openxmlformats.org/drawingml/2006/main">
               <a:ext uri="{FF2B5EF4-FFF2-40B4-BE49-F238E27FC236}">
-                <a16:creationId xmlns:a16="http://schemas.microsoft.com/office/drawing/2014/main" id="{4785700F-CFBA-489D-A5F8-3B7856601EB8}"/>
+                <a16:creationId xmlns:a16="http://schemas.microsoft.com/office/drawing/2014/main" id="{CEE1BCB1-6FA6-465E-91C2-DE24BA10628C}"/>
               </a:ext>
             </a:extLst>
           </p:cNvPr>
@@ -4130,7 +4130,7 @@
                 <a:ea typeface="Calibri"/>
                 <a:cs typeface="Calibri"/>
               </a:rPr>
-              <a:t>Send only the useful context</a:t>
+              <a:t>Browser: crop + selected controls</a:t>
             </a:r>
           </a:p>
         </p:txBody>
@@ -4138,7 +4138,7 @@
     </p:spTree>
     <p:extLst>
       <p:ext uri="{BB962C8B-B14F-4D97-AF65-F5344CB8AC3E}">
-        <p14:creationId xmlns:p14="http://schemas.microsoft.com/office/powerpoint/2010/main" val="416045631"/>
+        <p14:creationId xmlns:p14="http://schemas.microsoft.com/office/powerpoint/2010/main" val="463174166"/>
       </p:ext>
     </p:extLst>
   </p:cSld>
@@ -4162,7 +4162,7 @@
           <p:cNvPr id="2" name="Shape 0">
             <a:extLst xmlns:a="http://schemas.openxmlformats.org/drawingml/2006/main">
               <a:ext uri="{FF2B5EF4-FFF2-40B4-BE49-F238E27FC236}">
-                <a16:creationId xmlns:a16="http://schemas.microsoft.com/office/drawing/2014/main" id="{97E76C27-6159-45F9-8126-268F9EC2442E}"/>
+                <a16:creationId xmlns:a16="http://schemas.microsoft.com/office/drawing/2014/main" id="{FE724757-1BAA-4E15-8C69-6C7EF02090F1}"/>
               </a:ext>
             </a:extLst>
           </p:cNvPr>
@@ -4202,7 +4202,7 @@
           <p:cNvPr id="3" name="Text 1">
             <a:extLst xmlns:a="http://schemas.openxmlformats.org/drawingml/2006/main">
               <a:ext uri="{FF2B5EF4-FFF2-40B4-BE49-F238E27FC236}">
-                <a16:creationId xmlns:a16="http://schemas.microsoft.com/office/drawing/2014/main" id="{131ACADF-D9F8-4A6E-A56D-610B37C6B4D4}"/>
+                <a16:creationId xmlns:a16="http://schemas.microsoft.com/office/drawing/2014/main" id="{BB5BF03E-E1F7-4CEA-B8C6-38D83EDB03EA}"/>
               </a:ext>
             </a:extLst>
           </p:cNvPr>
@@ -4248,7 +4248,7 @@
           <p:cNvPr id="4" name="Text 2">
             <a:extLst xmlns:a="http://schemas.openxmlformats.org/drawingml/2006/main">
               <a:ext uri="{FF2B5EF4-FFF2-40B4-BE49-F238E27FC236}">
-                <a16:creationId xmlns:a16="http://schemas.microsoft.com/office/drawing/2014/main" id="{129FC09F-BF25-40E1-857E-D4C210255F18}"/>
+                <a16:creationId xmlns:a16="http://schemas.microsoft.com/office/drawing/2014/main" id="{D35AE9D8-4D34-41C7-AD1C-60F62009145E}"/>
               </a:ext>
             </a:extLst>
           </p:cNvPr>
@@ -4291,14 +4291,14 @@
       </p:sp>
       <p:pic>
         <p:nvPicPr>
-          <p:cNvPr id="138" name="Image 0"/>
+          <p:cNvPr id="142" name="Image 0"/>
           <p:cNvPicPr>
             <a:picLocks xmlns:a="http://schemas.openxmlformats.org/drawingml/2006/main" noChangeAspect="1"/>
           </p:cNvPicPr>
           <p:nvPr/>
         </p:nvPicPr>
         <p:blipFill>
-          <a:blip xmlns:r="http://schemas.openxmlformats.org/officeDocument/2006/relationships" xmlns:a="http://schemas.openxmlformats.org/drawingml/2006/main" r:embed="R39eead2720a140a5"/>
+          <a:blip xmlns:r="http://schemas.openxmlformats.org/officeDocument/2006/relationships" xmlns:a="http://schemas.openxmlformats.org/drawingml/2006/main" r:embed="Rbb2c54bab4d6416c"/>
           <a:stretch xmlns:a="http://schemas.openxmlformats.org/drawingml/2006/main">
             <a:fillRect l="0" t="0" r="0" b="0"/>
           </a:stretch>
@@ -4325,7 +4325,7 @@
           <p:cNvPr id="7" name="Shape 4">
             <a:extLst xmlns:a="http://schemas.openxmlformats.org/drawingml/2006/main">
               <a:ext uri="{FF2B5EF4-FFF2-40B4-BE49-F238E27FC236}">
-                <a16:creationId xmlns:a16="http://schemas.microsoft.com/office/drawing/2014/main" id="{4C3784D7-5191-44B2-B283-ACCD51CEECF4}"/>
+                <a16:creationId xmlns:a16="http://schemas.microsoft.com/office/drawing/2014/main" id="{F17DFBD7-5647-4708-8E81-C0ABBCD27F8F}"/>
               </a:ext>
             </a:extLst>
           </p:cNvPr>
@@ -4352,7 +4352,7 @@
           <p:cNvPr id="9" name="Text 6">
             <a:extLst xmlns:a="http://schemas.openxmlformats.org/drawingml/2006/main">
               <a:ext uri="{FF2B5EF4-FFF2-40B4-BE49-F238E27FC236}">
-                <a16:creationId xmlns:a16="http://schemas.microsoft.com/office/drawing/2014/main" id="{46FDB595-4399-4667-8E51-D3B655EF4295}"/>
+                <a16:creationId xmlns:a16="http://schemas.microsoft.com/office/drawing/2014/main" id="{64C6C344-2278-47B0-A3D5-9F7B48D686AC}"/>
               </a:ext>
             </a:extLst>
           </p:cNvPr>
@@ -4398,7 +4398,7 @@
           <p:cNvPr id="92" name="rev-30">
             <a:extLst xmlns:a="http://schemas.openxmlformats.org/drawingml/2006/main">
               <a:ext uri="{FF2B5EF4-FFF2-40B4-BE49-F238E27FC236}">
-                <a16:creationId xmlns:a16="http://schemas.microsoft.com/office/drawing/2014/main" id="{3A49499A-AE0C-4654-A0E6-6ACAF77B10FB}"/>
+                <a16:creationId xmlns:a16="http://schemas.microsoft.com/office/drawing/2014/main" id="{9FB2B01D-C42F-4F1B-92B4-31D51964C289}"/>
               </a:ext>
             </a:extLst>
           </p:cNvPr>
@@ -4429,7 +4429,7 @@
             <a:pPr>
               <a:defRPr sz="1500" b="1">
                 <a:solidFill>
-                  <a:srgbClr val="6D4C80"/>
+                  <a:srgbClr val="594463"/>
                 </a:solidFill>
                 <a:latin typeface="Calibri"/>
                 <a:ea typeface="Calibri"/>
@@ -4439,7 +4439,7 @@
             <a:r>
               <a:rPr sz="1500" b="1">
                 <a:solidFill>
-                  <a:srgbClr val="6D4C80"/>
+                  <a:srgbClr val="594463"/>
                 </a:solidFill>
                 <a:latin typeface="Calibri"/>
                 <a:ea typeface="Calibri"/>
@@ -4455,7 +4455,7 @@
           <p:cNvPr id="93" name="rev-31">
             <a:extLst xmlns:a="http://schemas.openxmlformats.org/drawingml/2006/main">
               <a:ext uri="{FF2B5EF4-FFF2-40B4-BE49-F238E27FC236}">
-                <a16:creationId xmlns:a16="http://schemas.microsoft.com/office/drawing/2014/main" id="{1AFCC0C6-546F-4640-8836-00B25B41D859}"/>
+                <a16:creationId xmlns:a16="http://schemas.microsoft.com/office/drawing/2014/main" id="{7B441A04-0760-4CF9-8F40-D4FE41CD1824}"/>
               </a:ext>
             </a:extLst>
           </p:cNvPr>
@@ -4502,7 +4502,7 @@
                 <a:ea typeface="Calibri"/>
                 <a:cs typeface="Calibri"/>
               </a:rPr>
-              <a:t>The browser protects data and controls every action</a:t>
+              <a:t>One user-triggered step, with privacy before transmission</a:t>
             </a:r>
           </a:p>
         </p:txBody>
@@ -4512,7 +4512,7 @@
           <p:cNvPr id="94" name="rev-32">
             <a:extLst xmlns:a="http://schemas.openxmlformats.org/drawingml/2006/main">
               <a:ext uri="{FF2B5EF4-FFF2-40B4-BE49-F238E27FC236}">
-                <a16:creationId xmlns:a16="http://schemas.microsoft.com/office/drawing/2014/main" id="{505E6529-3B10-430C-9C4C-DE6BFABD944B}"/>
+                <a16:creationId xmlns:a16="http://schemas.microsoft.com/office/drawing/2014/main" id="{EB453FE5-518F-449F-ACC0-AF1BF4AB6C08}"/>
               </a:ext>
             </a:extLst>
           </p:cNvPr>
@@ -4524,17 +4524,17 @@
         <p:spPr>
           <a:xfrm xmlns:a="http://schemas.openxmlformats.org/drawingml/2006/main">
             <a:off x="457200" y="1857375"/>
-            <a:ext cx="7686675" cy="2847975"/>
+            <a:ext cx="7686675" cy="2990850"/>
           </a:xfrm>
           <a:prstGeom xmlns:a="http://schemas.openxmlformats.org/drawingml/2006/main" prst="rect">
             <a:avLst/>
           </a:prstGeom>
           <a:solidFill xmlns:a="http://schemas.openxmlformats.org/drawingml/2006/main">
-            <a:srgbClr val="F1EDF6"/>
+            <a:srgbClr val="F1EDF3"/>
           </a:solidFill>
           <a:ln xmlns:a="http://schemas.openxmlformats.org/drawingml/2006/main" w="9525">
             <a:solidFill>
-              <a:srgbClr val="F1EDF6"/>
+              <a:srgbClr val="F1EDF3"/>
             </a:solidFill>
           </a:ln>
         </p:spPr>
@@ -4544,7 +4544,7 @@
           <p:cNvPr id="95" name="rev-33">
             <a:extLst xmlns:a="http://schemas.openxmlformats.org/drawingml/2006/main">
               <a:ext uri="{FF2B5EF4-FFF2-40B4-BE49-F238E27FC236}">
-                <a16:creationId xmlns:a16="http://schemas.microsoft.com/office/drawing/2014/main" id="{9F9667A2-1970-4118-A70B-4F00EC8F04F1}"/>
+                <a16:creationId xmlns:a16="http://schemas.microsoft.com/office/drawing/2014/main" id="{50815575-2640-497E-9472-1149C90EDEF5}"/>
               </a:ext>
             </a:extLst>
           </p:cNvPr>
@@ -4575,7 +4575,7 @@
             <a:pPr>
               <a:defRPr sz="1350" b="1">
                 <a:solidFill>
-                  <a:srgbClr val="6D4C80"/>
+                  <a:srgbClr val="594463"/>
                 </a:solidFill>
                 <a:latin typeface="Calibri"/>
                 <a:ea typeface="Calibri"/>
@@ -4585,13 +4585,13 @@
             <a:r>
               <a:rPr sz="1350" b="1">
                 <a:solidFill>
-                  <a:srgbClr val="6D4C80"/>
-                </a:solidFill>
-                <a:latin typeface="Calibri"/>
-                <a:ea typeface="Calibri"/>
-                <a:cs typeface="Calibri"/>
-              </a:rPr>
-              <a:t>CLIENT / BROWSER</a:t>
+                  <a:srgbClr val="594463"/>
+                </a:solidFill>
+                <a:latin typeface="Calibri"/>
+                <a:ea typeface="Calibri"/>
+                <a:cs typeface="Calibri"/>
+              </a:rPr>
+              <a:t>CHROME EXTENSION</a:t>
             </a:r>
           </a:p>
         </p:txBody>
@@ -4601,19 +4601,19 @@
           <p:cNvPr id="96" name="rev-34">
             <a:extLst xmlns:a="http://schemas.openxmlformats.org/drawingml/2006/main">
               <a:ext uri="{FF2B5EF4-FFF2-40B4-BE49-F238E27FC236}">
-                <a16:creationId xmlns:a16="http://schemas.microsoft.com/office/drawing/2014/main" id="{153C6D2D-E3D1-4E00-A58A-EB8CA43B6D43}"/>
-              </a:ext>
-            </a:extLst>
-          </p:cNvPr>
-          <p:cNvSpPr>
-            <a:spLocks xmlns:a="http://schemas.openxmlformats.org/drawingml/2006/main" noGrp="1"/>
-          </p:cNvSpPr>
-          <p:nvPr/>
-        </p:nvSpPr>
-        <p:spPr>
-          <a:xfrm xmlns:a="http://schemas.openxmlformats.org/drawingml/2006/main">
-            <a:off x="9467850" y="1981200"/>
-            <a:ext cx="2266950" cy="257175"/>
+                <a16:creationId xmlns:a16="http://schemas.microsoft.com/office/drawing/2014/main" id="{03431F45-DE0A-43CA-B75C-9B2F916801F7}"/>
+              </a:ext>
+            </a:extLst>
+          </p:cNvPr>
+          <p:cNvSpPr>
+            <a:spLocks xmlns:a="http://schemas.openxmlformats.org/drawingml/2006/main" noGrp="1"/>
+          </p:cNvSpPr>
+          <p:nvPr/>
+        </p:nvSpPr>
+        <p:spPr>
+          <a:xfrm xmlns:a="http://schemas.openxmlformats.org/drawingml/2006/main">
+            <a:off x="9258300" y="1981200"/>
+            <a:ext cx="2476500" cy="257175"/>
           </a:xfrm>
           <a:prstGeom xmlns:a="http://schemas.openxmlformats.org/drawingml/2006/main" prst="rect">
             <a:avLst/>
@@ -4630,25 +4630,25 @@
           <a:lstStyle xmlns:a="http://schemas.openxmlformats.org/drawingml/2006/main"/>
           <a:p xmlns:a="http://schemas.openxmlformats.org/drawingml/2006/main">
             <a:pPr>
-              <a:defRPr sz="1350" b="1">
-                <a:solidFill>
-                  <a:srgbClr val="6D4C80"/>
-                </a:solidFill>
-                <a:latin typeface="Calibri"/>
-                <a:ea typeface="Calibri"/>
-                <a:cs typeface="Calibri"/>
-              </a:defRPr>
-            </a:pPr>
-            <a:r>
-              <a:rPr sz="1350" b="1">
-                <a:solidFill>
-                  <a:srgbClr val="6D4C80"/>
-                </a:solidFill>
-                <a:latin typeface="Calibri"/>
-                <a:ea typeface="Calibri"/>
-                <a:cs typeface="Calibri"/>
-              </a:rPr>
-              <a:t>SERVER</a:t>
+              <a:defRPr sz="1275" b="1">
+                <a:solidFill>
+                  <a:srgbClr val="594463"/>
+                </a:solidFill>
+                <a:latin typeface="Calibri"/>
+                <a:ea typeface="Calibri"/>
+                <a:cs typeface="Calibri"/>
+              </a:defRPr>
+            </a:pPr>
+            <a:r>
+              <a:rPr sz="1275" b="1">
+                <a:solidFill>
+                  <a:srgbClr val="594463"/>
+                </a:solidFill>
+                <a:latin typeface="Calibri"/>
+                <a:ea typeface="Calibri"/>
+                <a:cs typeface="Calibri"/>
+              </a:rPr>
+              <a:t>LOCAL FASTAPI SERVER</a:t>
             </a:r>
           </a:p>
         </p:txBody>
@@ -4658,7 +4658,7 @@
           <p:cNvPr id="97" name="rev-35">
             <a:extLst xmlns:a="http://schemas.openxmlformats.org/drawingml/2006/main">
               <a:ext uri="{FF2B5EF4-FFF2-40B4-BE49-F238E27FC236}">
-                <a16:creationId xmlns:a16="http://schemas.microsoft.com/office/drawing/2014/main" id="{49716971-9F67-4231-9498-C7B0488E3077}"/>
+                <a16:creationId xmlns:a16="http://schemas.microsoft.com/office/drawing/2014/main" id="{F0EC485B-1445-497F-BC5B-109283883D12}"/>
               </a:ext>
             </a:extLst>
           </p:cNvPr>
@@ -4680,7 +4680,7 @@
           </a:solidFill>
           <a:ln xmlns:a="http://schemas.openxmlformats.org/drawingml/2006/main" w="9525">
             <a:solidFill>
-              <a:srgbClr val="6D4C80"/>
+              <a:srgbClr val="594463"/>
             </a:solidFill>
           </a:ln>
         </p:spPr>
@@ -4690,7 +4690,7 @@
           <p:cNvPr id="98" name="rev-36">
             <a:extLst xmlns:a="http://schemas.openxmlformats.org/drawingml/2006/main">
               <a:ext uri="{FF2B5EF4-FFF2-40B4-BE49-F238E27FC236}">
-                <a16:creationId xmlns:a16="http://schemas.microsoft.com/office/drawing/2014/main" id="{02542A37-3181-473F-A249-FE88FB1DCE98}"/>
+                <a16:creationId xmlns:a16="http://schemas.microsoft.com/office/drawing/2014/main" id="{501CBCFE-310C-4BC6-B622-34822A4F1EF5}"/>
               </a:ext>
             </a:extLst>
           </p:cNvPr>
@@ -4721,7 +4721,7 @@
             <a:pPr>
               <a:defRPr sz="1575" b="1">
                 <a:solidFill>
-                  <a:srgbClr val="6D4C80"/>
+                  <a:srgbClr val="594463"/>
                 </a:solidFill>
                 <a:latin typeface="Calibri"/>
                 <a:ea typeface="Calibri"/>
@@ -4731,7 +4731,7 @@
             <a:r>
               <a:rPr sz="1575" b="1">
                 <a:solidFill>
-                  <a:srgbClr val="6D4C80"/>
+                  <a:srgbClr val="594463"/>
                 </a:solidFill>
                 <a:latin typeface="Calibri"/>
                 <a:ea typeface="Calibri"/>
@@ -4747,7 +4747,7 @@
           <p:cNvPr id="99" name="rev-37">
             <a:extLst xmlns:a="http://schemas.openxmlformats.org/drawingml/2006/main">
               <a:ext uri="{FF2B5EF4-FFF2-40B4-BE49-F238E27FC236}">
-                <a16:creationId xmlns:a16="http://schemas.microsoft.com/office/drawing/2014/main" id="{887AB0A4-A4C7-458C-9BB7-BD1655A52794}"/>
+                <a16:creationId xmlns:a16="http://schemas.microsoft.com/office/drawing/2014/main" id="{2151AC68-7DD9-45E6-91D8-7884349B96E6}"/>
               </a:ext>
             </a:extLst>
           </p:cNvPr>
@@ -4794,7 +4794,7 @@
                 <a:ea typeface="Calibri"/>
                 <a:cs typeface="Calibri"/>
               </a:rPr>
-              <a:t>Screen + DOM</a:t>
+              <a:t>Screenshot + DOM</a:t>
             </a:r>
           </a:p>
           <a:p xmlns:a="http://schemas.openxmlformats.org/drawingml/2006/main">
@@ -4827,7 +4827,7 @@
           <p:cNvPr id="100" name="rev-38">
             <a:extLst xmlns:a="http://schemas.openxmlformats.org/drawingml/2006/main">
               <a:ext uri="{FF2B5EF4-FFF2-40B4-BE49-F238E27FC236}">
-                <a16:creationId xmlns:a16="http://schemas.microsoft.com/office/drawing/2014/main" id="{8E537412-79FC-4AE8-82B0-EE698431CDFF}"/>
+                <a16:creationId xmlns:a16="http://schemas.microsoft.com/office/drawing/2014/main" id="{5C205B9A-DA79-45F3-B4B1-2812EBEDB805}"/>
               </a:ext>
             </a:extLst>
           </p:cNvPr>
@@ -4849,7 +4849,7 @@
           </a:solidFill>
           <a:ln xmlns:a="http://schemas.openxmlformats.org/drawingml/2006/main" w="9525">
             <a:solidFill>
-              <a:srgbClr val="6D4C80"/>
+              <a:srgbClr val="594463"/>
             </a:solidFill>
           </a:ln>
         </p:spPr>
@@ -4859,7 +4859,7 @@
           <p:cNvPr id="101" name="rev-39">
             <a:extLst xmlns:a="http://schemas.openxmlformats.org/drawingml/2006/main">
               <a:ext uri="{FF2B5EF4-FFF2-40B4-BE49-F238E27FC236}">
-                <a16:creationId xmlns:a16="http://schemas.microsoft.com/office/drawing/2014/main" id="{23405F93-45AE-4DF9-92B0-82DEACEC552C}"/>
+                <a16:creationId xmlns:a16="http://schemas.microsoft.com/office/drawing/2014/main" id="{85D904F5-6424-440C-B4D9-637C24D7B759}"/>
               </a:ext>
             </a:extLst>
           </p:cNvPr>
@@ -4890,7 +4890,7 @@
             <a:pPr>
               <a:defRPr sz="1575" b="1">
                 <a:solidFill>
-                  <a:srgbClr val="6D4C80"/>
+                  <a:srgbClr val="594463"/>
                 </a:solidFill>
                 <a:latin typeface="Calibri"/>
                 <a:ea typeface="Calibri"/>
@@ -4900,13 +4900,13 @@
             <a:r>
               <a:rPr sz="1575" b="1">
                 <a:solidFill>
-                  <a:srgbClr val="6D4C80"/>
-                </a:solidFill>
-                <a:latin typeface="Calibri"/>
-                <a:ea typeface="Calibri"/>
-                <a:cs typeface="Calibri"/>
-              </a:rPr>
-              <a:t>2  Sanitize</a:t>
+                  <a:srgbClr val="594463"/>
+                </a:solidFill>
+                <a:latin typeface="Calibri"/>
+                <a:ea typeface="Calibri"/>
+                <a:cs typeface="Calibri"/>
+              </a:rPr>
+              <a:t>2  Redact</a:t>
             </a:r>
           </a:p>
         </p:txBody>
@@ -4916,7 +4916,7 @@
           <p:cNvPr id="102" name="rev-40">
             <a:extLst xmlns:a="http://schemas.openxmlformats.org/drawingml/2006/main">
               <a:ext uri="{FF2B5EF4-FFF2-40B4-BE49-F238E27FC236}">
-                <a16:creationId xmlns:a16="http://schemas.microsoft.com/office/drawing/2014/main" id="{348A65C6-8D1A-4939-ACB8-83524F495637}"/>
+                <a16:creationId xmlns:a16="http://schemas.microsoft.com/office/drawing/2014/main" id="{25CADEE2-7995-4A9E-8843-B593BB5B0AC7}"/>
               </a:ext>
             </a:extLst>
           </p:cNvPr>
@@ -4963,7 +4963,7 @@
                 <a:ea typeface="Calibri"/>
                 <a:cs typeface="Calibri"/>
               </a:rPr>
-              <a:t>Mask sensitive pixels</a:t>
+              <a:t>Mask recognized PII</a:t>
             </a:r>
           </a:p>
           <a:p xmlns:a="http://schemas.openxmlformats.org/drawingml/2006/main">
@@ -4986,7 +4986,7 @@
                 <a:ea typeface="Calibri"/>
                 <a:cs typeface="Calibri"/>
               </a:rPr>
-              <a:t>and text locally</a:t>
+              <a:t>Filter sensitive controls</a:t>
             </a:r>
           </a:p>
         </p:txBody>
@@ -4996,7 +4996,7 @@
           <p:cNvPr id="103" name="rev-41">
             <a:extLst xmlns:a="http://schemas.openxmlformats.org/drawingml/2006/main">
               <a:ext uri="{FF2B5EF4-FFF2-40B4-BE49-F238E27FC236}">
-                <a16:creationId xmlns:a16="http://schemas.microsoft.com/office/drawing/2014/main" id="{FFE6B855-D32E-4426-BE35-3DBD57AF57D6}"/>
+                <a16:creationId xmlns:a16="http://schemas.microsoft.com/office/drawing/2014/main" id="{12015DE3-A5DA-44DC-809B-8824CDB95322}"/>
               </a:ext>
             </a:extLst>
           </p:cNvPr>
@@ -5018,7 +5018,7 @@
           </a:solidFill>
           <a:ln xmlns:a="http://schemas.openxmlformats.org/drawingml/2006/main" w="9525">
             <a:solidFill>
-              <a:srgbClr val="6D4C80"/>
+              <a:srgbClr val="594463"/>
             </a:solidFill>
           </a:ln>
         </p:spPr>
@@ -5028,7 +5028,7 @@
           <p:cNvPr id="104" name="rev-42">
             <a:extLst xmlns:a="http://schemas.openxmlformats.org/drawingml/2006/main">
               <a:ext uri="{FF2B5EF4-FFF2-40B4-BE49-F238E27FC236}">
-                <a16:creationId xmlns:a16="http://schemas.microsoft.com/office/drawing/2014/main" id="{81709EDD-3B6A-46A6-A013-95B70260254F}"/>
+                <a16:creationId xmlns:a16="http://schemas.microsoft.com/office/drawing/2014/main" id="{DA493822-AA45-4054-9E04-7D9EDB291375}"/>
               </a:ext>
             </a:extLst>
           </p:cNvPr>
@@ -5059,7 +5059,7 @@
             <a:pPr>
               <a:defRPr sz="1575" b="1">
                 <a:solidFill>
-                  <a:srgbClr val="6D4C80"/>
+                  <a:srgbClr val="594463"/>
                 </a:solidFill>
                 <a:latin typeface="Calibri"/>
                 <a:ea typeface="Calibri"/>
@@ -5069,13 +5069,13 @@
             <a:r>
               <a:rPr sz="1575" b="1">
                 <a:solidFill>
-                  <a:srgbClr val="6D4C80"/>
-                </a:solidFill>
-                <a:latin typeface="Calibri"/>
-                <a:ea typeface="Calibri"/>
-                <a:cs typeface="Calibri"/>
-              </a:rPr>
-              <a:t>3  Select</a:t>
+                  <a:srgbClr val="594463"/>
+                </a:solidFill>
+                <a:latin typeface="Calibri"/>
+                <a:ea typeface="Calibri"/>
+                <a:cs typeface="Calibri"/>
+              </a:rPr>
+              <a:t>3  Minimize</a:t>
             </a:r>
           </a:p>
         </p:txBody>
@@ -5085,7 +5085,7 @@
           <p:cNvPr id="105" name="rev-43">
             <a:extLst xmlns:a="http://schemas.openxmlformats.org/drawingml/2006/main">
               <a:ext uri="{FF2B5EF4-FFF2-40B4-BE49-F238E27FC236}">
-                <a16:creationId xmlns:a16="http://schemas.microsoft.com/office/drawing/2014/main" id="{C37F7C75-AAD5-4F20-B5E6-B79E2EE80739}"/>
+                <a16:creationId xmlns:a16="http://schemas.microsoft.com/office/drawing/2014/main" id="{F4393019-3704-4F8D-96D7-DB516A6955C8}"/>
               </a:ext>
             </a:extLst>
           </p:cNvPr>
@@ -5132,7 +5132,7 @@
                 <a:ea typeface="Calibri"/>
                 <a:cs typeface="Calibri"/>
               </a:rPr>
-              <a:t>Goal-relevant crop</a:t>
+              <a:t>Crop by task</a:t>
             </a:r>
           </a:p>
           <a:p xmlns:a="http://schemas.openxmlformats.org/drawingml/2006/main">
@@ -5155,7 +5155,7 @@
                 <a:ea typeface="Calibri"/>
                 <a:cs typeface="Calibri"/>
               </a:rPr>
-              <a:t>Safe control metadata</a:t>
+              <a:t>Tokenize PII in goal</a:t>
             </a:r>
           </a:p>
         </p:txBody>
@@ -5165,7 +5165,7 @@
           <p:cNvPr id="106" name="rev-44">
             <a:extLst xmlns:a="http://schemas.openxmlformats.org/drawingml/2006/main">
               <a:ext uri="{FF2B5EF4-FFF2-40B4-BE49-F238E27FC236}">
-                <a16:creationId xmlns:a16="http://schemas.microsoft.com/office/drawing/2014/main" id="{CA0415F9-AAEA-40AB-81FA-4C6D09857880}"/>
+                <a16:creationId xmlns:a16="http://schemas.microsoft.com/office/drawing/2014/main" id="{0B7F0D81-8459-4E91-B337-89DEA8D4292E}"/>
               </a:ext>
             </a:extLst>
           </p:cNvPr>
@@ -5183,11 +5183,11 @@
             <a:avLst/>
           </a:prstGeom>
           <a:solidFill xmlns:a="http://schemas.openxmlformats.org/drawingml/2006/main">
-            <a:srgbClr val="6D4C80"/>
+            <a:srgbClr val="594463"/>
           </a:solidFill>
           <a:ln xmlns:a="http://schemas.openxmlformats.org/drawingml/2006/main" w="9525">
             <a:solidFill>
-              <a:srgbClr val="6D4C80"/>
+              <a:srgbClr val="594463"/>
             </a:solidFill>
           </a:ln>
         </p:spPr>
@@ -5197,7 +5197,7 @@
           <p:cNvPr id="107" name="rev-45">
             <a:extLst xmlns:a="http://schemas.openxmlformats.org/drawingml/2006/main">
               <a:ext uri="{FF2B5EF4-FFF2-40B4-BE49-F238E27FC236}">
-                <a16:creationId xmlns:a16="http://schemas.microsoft.com/office/drawing/2014/main" id="{741C7A84-33E1-4755-9989-9EE20FDA29BA}"/>
+                <a16:creationId xmlns:a16="http://schemas.microsoft.com/office/drawing/2014/main" id="{880974FC-43AF-41E9-BB13-B7366486F493}"/>
               </a:ext>
             </a:extLst>
           </p:cNvPr>
@@ -5254,7 +5254,7 @@
           <p:cNvPr id="108" name="rev-46">
             <a:extLst xmlns:a="http://schemas.openxmlformats.org/drawingml/2006/main">
               <a:ext uri="{FF2B5EF4-FFF2-40B4-BE49-F238E27FC236}">
-                <a16:creationId xmlns:a16="http://schemas.microsoft.com/office/drawing/2014/main" id="{1FD6BB9D-0DCC-4A86-9526-0224A3872C48}"/>
+                <a16:creationId xmlns:a16="http://schemas.microsoft.com/office/drawing/2014/main" id="{1787E023-205B-426E-844A-D2C91A3CB69C}"/>
               </a:ext>
             </a:extLst>
           </p:cNvPr>
@@ -5301,7 +5301,7 @@
                 <a:ea typeface="Calibri"/>
                 <a:cs typeface="Calibri"/>
               </a:rPr>
-              <a:t>Rules planner today</a:t>
+              <a:t>Rules select a control</a:t>
             </a:r>
           </a:p>
           <a:p xmlns:a="http://schemas.openxmlformats.org/drawingml/2006/main">
@@ -5324,14 +5324,14 @@
                 <a:ea typeface="Calibri"/>
                 <a:cs typeface="Calibri"/>
               </a:rPr>
-              <a:t>JSON action response</a:t>
+              <a:t>Return a JSON action</a:t>
             </a:r>
           </a:p>
         </p:txBody>
       </p:sp>
       <p:cxnSp>
         <p:nvCxnSpPr>
-          <p:cNvPr id="158" name=""/>
+          <p:cNvPr id="162" name=""/>
           <p:cNvCxnSpPr>
             <a:stCxn xmlns:a="http://schemas.openxmlformats.org/drawingml/2006/main" id="97" idx="3"/>
             <a:endCxn xmlns:a="http://schemas.openxmlformats.org/drawingml/2006/main" id="100" idx="1"/>
@@ -5348,7 +5348,7 @@
           </a:prstGeom>
           <a:ln xmlns:a="http://schemas.openxmlformats.org/drawingml/2006/main" w="19050">
             <a:solidFill>
-              <a:srgbClr val="6D4C80"/>
+              <a:srgbClr val="594463"/>
             </a:solidFill>
             <a:tailEnd type="triangle" w="sm" len="sm"/>
           </a:ln>
@@ -5356,7 +5356,7 @@
       </p:cxnSp>
       <p:cxnSp>
         <p:nvCxnSpPr>
-          <p:cNvPr id="159" name=""/>
+          <p:cNvPr id="163" name=""/>
           <p:cNvCxnSpPr>
             <a:stCxn xmlns:a="http://schemas.openxmlformats.org/drawingml/2006/main" id="100" idx="3"/>
             <a:endCxn xmlns:a="http://schemas.openxmlformats.org/drawingml/2006/main" id="103" idx="1"/>
@@ -5373,7 +5373,7 @@
           </a:prstGeom>
           <a:ln xmlns:a="http://schemas.openxmlformats.org/drawingml/2006/main" w="19050">
             <a:solidFill>
-              <a:srgbClr val="6D4C80"/>
+              <a:srgbClr val="594463"/>
             </a:solidFill>
             <a:tailEnd type="triangle" w="sm" len="sm"/>
           </a:ln>
@@ -5384,7 +5384,7 @@
           <p:cNvPr id="111" name="path-47">
             <a:extLst xmlns:a="http://schemas.openxmlformats.org/drawingml/2006/main">
               <a:ext uri="{FF2B5EF4-FFF2-40B4-BE49-F238E27FC236}">
-                <a16:creationId xmlns:a16="http://schemas.microsoft.com/office/drawing/2014/main" id="{46111B48-3F9C-4ECC-B3E9-1410880A802D}"/>
+                <a16:creationId xmlns:a16="http://schemas.microsoft.com/office/drawing/2014/main" id="{DE16B43E-1B2F-44CD-97DC-18B7B9716522}"/>
               </a:ext>
             </a:extLst>
           </p:cNvPr>
@@ -5396,7 +5396,7 @@
         <p:spPr>
           <a:xfrm xmlns:a="http://schemas.openxmlformats.org/drawingml/2006/main">
             <a:off x="8791575" y="2143125"/>
-            <a:ext cx="0" cy="2438400"/>
+            <a:ext cx="0" cy="2619375"/>
           </a:xfrm>
           <a:prstGeom xmlns:a="http://schemas.openxmlformats.org/drawingml/2006/main" prst="line">
             <a:avLst/>
@@ -5415,7 +5415,7 @@
           <p:cNvPr id="112" name="rev-48">
             <a:extLst xmlns:a="http://schemas.openxmlformats.org/drawingml/2006/main">
               <a:ext uri="{FF2B5EF4-FFF2-40B4-BE49-F238E27FC236}">
-                <a16:creationId xmlns:a16="http://schemas.microsoft.com/office/drawing/2014/main" id="{4BC011EA-BF2D-4006-81AF-65BA1B50035D}"/>
+                <a16:creationId xmlns:a16="http://schemas.microsoft.com/office/drawing/2014/main" id="{E93BA72E-7A44-43A2-88E8-00970CA08485}"/>
               </a:ext>
             </a:extLst>
           </p:cNvPr>
@@ -5462,7 +5462,7 @@
                 <a:ea typeface="Calibri"/>
                 <a:cs typeface="Calibri"/>
               </a:rPr>
-              <a:t>NETWORK</a:t>
+              <a:t>REQUEST</a:t>
             </a:r>
           </a:p>
           <a:p xmlns:a="http://schemas.openxmlformats.org/drawingml/2006/main">
@@ -5492,7 +5492,7 @@
       </p:sp>
       <p:cxnSp>
         <p:nvCxnSpPr>
-          <p:cNvPr id="162" name=""/>
+          <p:cNvPr id="166" name=""/>
           <p:cNvCxnSpPr>
             <a:stCxn xmlns:a="http://schemas.openxmlformats.org/drawingml/2006/main" id="103" idx="3"/>
             <a:endCxn xmlns:a="http://schemas.openxmlformats.org/drawingml/2006/main" id="106" idx="1"/>
@@ -5509,7 +5509,7 @@
           </a:prstGeom>
           <a:ln xmlns:a="http://schemas.openxmlformats.org/drawingml/2006/main" w="19050">
             <a:solidFill>
-              <a:srgbClr val="6D4C80"/>
+              <a:srgbClr val="594463"/>
             </a:solidFill>
             <a:tailEnd type="triangle" w="sm" len="sm"/>
           </a:ln>
@@ -5520,19 +5520,19 @@
           <p:cNvPr id="114" name="rev-49">
             <a:extLst xmlns:a="http://schemas.openxmlformats.org/drawingml/2006/main">
               <a:ext uri="{FF2B5EF4-FFF2-40B4-BE49-F238E27FC236}">
-                <a16:creationId xmlns:a16="http://schemas.microsoft.com/office/drawing/2014/main" id="{F74D9A47-E6E9-4C70-90AA-83ED8229A2EA}"/>
-              </a:ext>
-            </a:extLst>
-          </p:cNvPr>
-          <p:cNvSpPr>
-            <a:spLocks xmlns:a="http://schemas.openxmlformats.org/drawingml/2006/main" noGrp="1"/>
-          </p:cNvSpPr>
-          <p:nvPr/>
-        </p:nvSpPr>
-        <p:spPr>
-          <a:xfrm xmlns:a="http://schemas.openxmlformats.org/drawingml/2006/main">
-            <a:off x="8134350" y="2362200"/>
-            <a:ext cx="1228725" cy="400050"/>
+                <a16:creationId xmlns:a16="http://schemas.microsoft.com/office/drawing/2014/main" id="{944EC878-1579-4441-89A7-DCFB999D1FA1}"/>
+              </a:ext>
+            </a:extLst>
+          </p:cNvPr>
+          <p:cNvSpPr>
+            <a:spLocks xmlns:a="http://schemas.openxmlformats.org/drawingml/2006/main" noGrp="1"/>
+          </p:cNvSpPr>
+          <p:nvPr/>
+        </p:nvSpPr>
+        <p:spPr>
+          <a:xfrm xmlns:a="http://schemas.openxmlformats.org/drawingml/2006/main">
+            <a:off x="8096250" y="2333625"/>
+            <a:ext cx="1333500" cy="419100"/>
           </a:xfrm>
           <a:prstGeom xmlns:a="http://schemas.openxmlformats.org/drawingml/2006/main" prst="rect">
             <a:avLst/>
@@ -5551,7 +5551,7 @@
             <a:pPr algn="ctr">
               <a:defRPr sz="1200">
                 <a:solidFill>
-                  <a:srgbClr val="6D4C80"/>
+                  <a:srgbClr val="594463"/>
                 </a:solidFill>
                 <a:latin typeface="Calibri"/>
                 <a:ea typeface="Calibri"/>
@@ -5561,20 +5561,20 @@
             <a:r>
               <a:rPr sz="1200">
                 <a:solidFill>
-                  <a:srgbClr val="6D4C80"/>
-                </a:solidFill>
-                <a:latin typeface="Calibri"/>
-                <a:ea typeface="Calibri"/>
-                <a:cs typeface="Calibri"/>
-              </a:rPr>
-              <a:t>Sanitized</a:t>
+                  <a:srgbClr val="594463"/>
+                </a:solidFill>
+                <a:latin typeface="Calibri"/>
+                <a:ea typeface="Calibri"/>
+                <a:cs typeface="Calibri"/>
+              </a:rPr>
+              <a:t>Filtered PNG</a:t>
             </a:r>
           </a:p>
           <a:p xmlns:a="http://schemas.openxmlformats.org/drawingml/2006/main">
             <a:pPr algn="ctr">
               <a:defRPr sz="1200">
                 <a:solidFill>
-                  <a:srgbClr val="6D4C80"/>
+                  <a:srgbClr val="594463"/>
                 </a:solidFill>
                 <a:latin typeface="Calibri"/>
                 <a:ea typeface="Calibri"/>
@@ -5584,35 +5584,181 @@
             <a:r>
               <a:rPr sz="1200">
                 <a:solidFill>
-                  <a:srgbClr val="6D4C80"/>
-                </a:solidFill>
-                <a:latin typeface="Calibri"/>
-                <a:ea typeface="Calibri"/>
-                <a:cs typeface="Calibri"/>
-              </a:rPr>
-              <a:t>request</a:t>
-            </a:r>
-          </a:p>
-        </p:txBody>
-      </p:sp>
-      <p:sp>
-        <p:nvSpPr>
-          <p:cNvPr id="115" name="rev-50">
-            <a:extLst xmlns:a="http://schemas.openxmlformats.org/drawingml/2006/main">
-              <a:ext uri="{FF2B5EF4-FFF2-40B4-BE49-F238E27FC236}">
-                <a16:creationId xmlns:a16="http://schemas.microsoft.com/office/drawing/2014/main" id="{6122DE28-5453-4AF3-A352-B30B13786452}"/>
-              </a:ext>
-            </a:extLst>
-          </p:cNvPr>
-          <p:cNvSpPr>
-            <a:spLocks xmlns:a="http://schemas.openxmlformats.org/drawingml/2006/main" noGrp="1"/>
-          </p:cNvSpPr>
-          <p:nvPr/>
-        </p:nvSpPr>
-        <p:spPr>
-          <a:xfrm xmlns:a="http://schemas.openxmlformats.org/drawingml/2006/main">
-            <a:off x="5457825" y="3629025"/>
-            <a:ext cx="2486025" cy="904875"/>
+                  <a:srgbClr val="594463"/>
+                </a:solidFill>
+                <a:latin typeface="Calibri"/>
+                <a:ea typeface="Calibri"/>
+                <a:cs typeface="Calibri"/>
+              </a:rPr>
+              <a:t>+ metadata</a:t>
+            </a:r>
+          </a:p>
+        </p:txBody>
+      </p:sp>
+      <p:sp>
+        <p:nvSpPr>
+          <p:cNvPr id="115" name="local-action-gate">
+            <a:extLst xmlns:a="http://schemas.openxmlformats.org/drawingml/2006/main">
+              <a:ext uri="{FF2B5EF4-FFF2-40B4-BE49-F238E27FC236}">
+                <a16:creationId xmlns:a16="http://schemas.microsoft.com/office/drawing/2014/main" id="{348E2863-AFF6-40D6-89B8-965710379C55}"/>
+              </a:ext>
+            </a:extLst>
+          </p:cNvPr>
+          <p:cNvSpPr>
+            <a:spLocks xmlns:a="http://schemas.openxmlformats.org/drawingml/2006/main" noGrp="1"/>
+          </p:cNvSpPr>
+          <p:nvPr/>
+        </p:nvSpPr>
+        <p:spPr>
+          <a:xfrm xmlns:a="http://schemas.openxmlformats.org/drawingml/2006/main">
+            <a:off x="6067425" y="3562350"/>
+            <a:ext cx="1876425" cy="990600"/>
+          </a:xfrm>
+          <a:prstGeom xmlns:a="http://schemas.openxmlformats.org/drawingml/2006/main" prst="diamond">
+            <a:avLst/>
+          </a:prstGeom>
+          <a:solidFill xmlns:a="http://schemas.openxmlformats.org/drawingml/2006/main">
+            <a:srgbClr val="FFFFFF"/>
+          </a:solidFill>
+          <a:ln xmlns:a="http://schemas.openxmlformats.org/drawingml/2006/main" w="14288">
+            <a:solidFill>
+              <a:srgbClr val="594463"/>
+            </a:solidFill>
+          </a:ln>
+        </p:spPr>
+      </p:sp>
+      <p:sp>
+        <p:nvSpPr>
+          <p:cNvPr id="116" name="rev-50">
+            <a:extLst xmlns:a="http://schemas.openxmlformats.org/drawingml/2006/main">
+              <a:ext uri="{FF2B5EF4-FFF2-40B4-BE49-F238E27FC236}">
+                <a16:creationId xmlns:a16="http://schemas.microsoft.com/office/drawing/2014/main" id="{D89AEC68-2EB8-4AD8-9AA1-2467E62AE135}"/>
+              </a:ext>
+            </a:extLst>
+          </p:cNvPr>
+          <p:cNvSpPr>
+            <a:spLocks xmlns:a="http://schemas.openxmlformats.org/drawingml/2006/main" noGrp="1"/>
+          </p:cNvSpPr>
+          <p:nvPr/>
+        </p:nvSpPr>
+        <p:spPr>
+          <a:xfrm xmlns:a="http://schemas.openxmlformats.org/drawingml/2006/main">
+            <a:off x="6391275" y="3810000"/>
+            <a:ext cx="1238250" cy="247650"/>
+          </a:xfrm>
+          <a:prstGeom xmlns:a="http://schemas.openxmlformats.org/drawingml/2006/main" prst="rect">
+            <a:avLst/>
+          </a:prstGeom>
+          <a:noFill xmlns:a="http://schemas.openxmlformats.org/drawingml/2006/main"/>
+          <a:ln xmlns:a="http://schemas.openxmlformats.org/drawingml/2006/main" w="0">
+            <a:noFill/>
+          </a:ln>
+        </p:spPr>
+        <p:txBody>
+          <a:bodyPr xmlns:a="http://schemas.openxmlformats.org/drawingml/2006/main" wrap="square" lIns="0" tIns="0" rIns="0" bIns="0" anchor="t">
+            <a:noAutofit/>
+          </a:bodyPr>
+          <a:lstStyle xmlns:a="http://schemas.openxmlformats.org/drawingml/2006/main"/>
+          <a:p xmlns:a="http://schemas.openxmlformats.org/drawingml/2006/main">
+            <a:pPr algn="ctr">
+              <a:defRPr sz="1575" b="1">
+                <a:solidFill>
+                  <a:srgbClr val="594463"/>
+                </a:solidFill>
+                <a:latin typeface="Calibri"/>
+                <a:ea typeface="Calibri"/>
+                <a:cs typeface="Calibri"/>
+              </a:defRPr>
+            </a:pPr>
+            <a:r>
+              <a:rPr sz="1575" b="1">
+                <a:solidFill>
+                  <a:srgbClr val="594463"/>
+                </a:solidFill>
+                <a:latin typeface="Calibri"/>
+                <a:ea typeface="Calibri"/>
+                <a:cs typeface="Calibri"/>
+              </a:rPr>
+              <a:t>5  Gate</a:t>
+            </a:r>
+          </a:p>
+        </p:txBody>
+      </p:sp>
+      <p:sp>
+        <p:nvSpPr>
+          <p:cNvPr id="117" name="rev-51">
+            <a:extLst xmlns:a="http://schemas.openxmlformats.org/drawingml/2006/main">
+              <a:ext uri="{FF2B5EF4-FFF2-40B4-BE49-F238E27FC236}">
+                <a16:creationId xmlns:a16="http://schemas.microsoft.com/office/drawing/2014/main" id="{83EDE391-366B-44BC-8DF6-7F5542E16057}"/>
+              </a:ext>
+            </a:extLst>
+          </p:cNvPr>
+          <p:cNvSpPr>
+            <a:spLocks xmlns:a="http://schemas.openxmlformats.org/drawingml/2006/main" noGrp="1"/>
+          </p:cNvSpPr>
+          <p:nvPr/>
+        </p:nvSpPr>
+        <p:spPr>
+          <a:xfrm xmlns:a="http://schemas.openxmlformats.org/drawingml/2006/main">
+            <a:off x="6305550" y="4086225"/>
+            <a:ext cx="1419225" cy="209550"/>
+          </a:xfrm>
+          <a:prstGeom xmlns:a="http://schemas.openxmlformats.org/drawingml/2006/main" prst="rect">
+            <a:avLst/>
+          </a:prstGeom>
+          <a:noFill xmlns:a="http://schemas.openxmlformats.org/drawingml/2006/main"/>
+          <a:ln xmlns:a="http://schemas.openxmlformats.org/drawingml/2006/main" w="0">
+            <a:noFill/>
+          </a:ln>
+        </p:spPr>
+        <p:txBody>
+          <a:bodyPr xmlns:a="http://schemas.openxmlformats.org/drawingml/2006/main" wrap="square" lIns="0" tIns="0" rIns="0" bIns="0" anchor="t">
+            <a:noAutofit/>
+          </a:bodyPr>
+          <a:lstStyle xmlns:a="http://schemas.openxmlformats.org/drawingml/2006/main"/>
+          <a:p xmlns:a="http://schemas.openxmlformats.org/drawingml/2006/main">
+            <a:pPr algn="ctr">
+              <a:defRPr sz="1200">
+                <a:solidFill>
+                  <a:srgbClr val="202B36"/>
+                </a:solidFill>
+                <a:latin typeface="Calibri"/>
+                <a:ea typeface="Calibri"/>
+                <a:cs typeface="Calibri"/>
+              </a:defRPr>
+            </a:pPr>
+            <a:r>
+              <a:rPr sz="1200">
+                <a:solidFill>
+                  <a:srgbClr val="202B36"/>
+                </a:solidFill>
+                <a:latin typeface="Calibri"/>
+                <a:ea typeface="Calibri"/>
+                <a:cs typeface="Calibri"/>
+              </a:rPr>
+              <a:t>Target + origin</a:t>
+            </a:r>
+          </a:p>
+        </p:txBody>
+      </p:sp>
+      <p:sp>
+        <p:nvSpPr>
+          <p:cNvPr id="118" name="rev-52">
+            <a:extLst xmlns:a="http://schemas.openxmlformats.org/drawingml/2006/main">
+              <a:ext uri="{FF2B5EF4-FFF2-40B4-BE49-F238E27FC236}">
+                <a16:creationId xmlns:a16="http://schemas.microsoft.com/office/drawing/2014/main" id="{D09B3CD3-25F8-427E-AF72-64C6F0F0EFD0}"/>
+              </a:ext>
+            </a:extLst>
+          </p:cNvPr>
+          <p:cNvSpPr>
+            <a:spLocks xmlns:a="http://schemas.openxmlformats.org/drawingml/2006/main" noGrp="1"/>
+          </p:cNvSpPr>
+          <p:nvPr/>
+        </p:nvSpPr>
+        <p:spPr>
+          <a:xfrm xmlns:a="http://schemas.openxmlformats.org/drawingml/2006/main">
+            <a:off x="3448050" y="3600450"/>
+            <a:ext cx="2085975" cy="923925"/>
           </a:xfrm>
           <a:prstGeom xmlns:a="http://schemas.openxmlformats.org/drawingml/2006/main" prst="rect">
             <a:avLst/>
@@ -5622,29 +5768,29 @@
           </a:solidFill>
           <a:ln xmlns:a="http://schemas.openxmlformats.org/drawingml/2006/main" w="9525">
             <a:solidFill>
-              <a:srgbClr val="6D4C80"/>
+              <a:srgbClr val="594463"/>
             </a:solidFill>
           </a:ln>
         </p:spPr>
       </p:sp>
       <p:sp>
         <p:nvSpPr>
-          <p:cNvPr id="116" name="rev-51">
-            <a:extLst xmlns:a="http://schemas.openxmlformats.org/drawingml/2006/main">
-              <a:ext uri="{FF2B5EF4-FFF2-40B4-BE49-F238E27FC236}">
-                <a16:creationId xmlns:a16="http://schemas.microsoft.com/office/drawing/2014/main" id="{602F99D3-05BB-4B76-8572-13630192BAC9}"/>
-              </a:ext>
-            </a:extLst>
-          </p:cNvPr>
-          <p:cNvSpPr>
-            <a:spLocks xmlns:a="http://schemas.openxmlformats.org/drawingml/2006/main" noGrp="1"/>
-          </p:cNvSpPr>
-          <p:nvPr/>
-        </p:nvSpPr>
-        <p:spPr>
-          <a:xfrm xmlns:a="http://schemas.openxmlformats.org/drawingml/2006/main">
-            <a:off x="5610225" y="3752850"/>
-            <a:ext cx="2181225" cy="266700"/>
+          <p:cNvPr id="119" name="rev-53">
+            <a:extLst xmlns:a="http://schemas.openxmlformats.org/drawingml/2006/main">
+              <a:ext uri="{FF2B5EF4-FFF2-40B4-BE49-F238E27FC236}">
+                <a16:creationId xmlns:a16="http://schemas.microsoft.com/office/drawing/2014/main" id="{CEBF90E3-939D-4F85-8A43-E26D3DF4C575}"/>
+              </a:ext>
+            </a:extLst>
+          </p:cNvPr>
+          <p:cNvSpPr>
+            <a:spLocks xmlns:a="http://schemas.openxmlformats.org/drawingml/2006/main" noGrp="1"/>
+          </p:cNvSpPr>
+          <p:nvPr/>
+        </p:nvSpPr>
+        <p:spPr>
+          <a:xfrm xmlns:a="http://schemas.openxmlformats.org/drawingml/2006/main">
+            <a:off x="3600450" y="3724275"/>
+            <a:ext cx="1781175" cy="266700"/>
           </a:xfrm>
           <a:prstGeom xmlns:a="http://schemas.openxmlformats.org/drawingml/2006/main" prst="rect">
             <a:avLst/>
@@ -5663,7 +5809,7 @@
             <a:pPr>
               <a:defRPr sz="1575" b="1">
                 <a:solidFill>
-                  <a:srgbClr val="6D4C80"/>
+                  <a:srgbClr val="594463"/>
                 </a:solidFill>
                 <a:latin typeface="Calibri"/>
                 <a:ea typeface="Calibri"/>
@@ -5673,35 +5819,35 @@
             <a:r>
               <a:rPr sz="1575" b="1">
                 <a:solidFill>
-                  <a:srgbClr val="6D4C80"/>
-                </a:solidFill>
-                <a:latin typeface="Calibri"/>
-                <a:ea typeface="Calibri"/>
-                <a:cs typeface="Calibri"/>
-              </a:rPr>
-              <a:t>5  Validate + execute</a:t>
-            </a:r>
-          </a:p>
-        </p:txBody>
-      </p:sp>
-      <p:sp>
-        <p:nvSpPr>
-          <p:cNvPr id="117" name="rev-52">
-            <a:extLst xmlns:a="http://schemas.openxmlformats.org/drawingml/2006/main">
-              <a:ext uri="{FF2B5EF4-FFF2-40B4-BE49-F238E27FC236}">
-                <a16:creationId xmlns:a16="http://schemas.microsoft.com/office/drawing/2014/main" id="{DD0B4A41-E5FF-4042-98A5-ED78A1D96A49}"/>
-              </a:ext>
-            </a:extLst>
-          </p:cNvPr>
-          <p:cNvSpPr>
-            <a:spLocks xmlns:a="http://schemas.openxmlformats.org/drawingml/2006/main" noGrp="1"/>
-          </p:cNvSpPr>
-          <p:nvPr/>
-        </p:nvSpPr>
-        <p:spPr>
-          <a:xfrm xmlns:a="http://schemas.openxmlformats.org/drawingml/2006/main">
-            <a:off x="5610225" y="4086225"/>
-            <a:ext cx="2181225" cy="400050"/>
+                  <a:srgbClr val="594463"/>
+                </a:solidFill>
+                <a:latin typeface="Calibri"/>
+                <a:ea typeface="Calibri"/>
+                <a:cs typeface="Calibri"/>
+              </a:rPr>
+              <a:t>6  Execute</a:t>
+            </a:r>
+          </a:p>
+        </p:txBody>
+      </p:sp>
+      <p:sp>
+        <p:nvSpPr>
+          <p:cNvPr id="120" name="rev-54">
+            <a:extLst xmlns:a="http://schemas.openxmlformats.org/drawingml/2006/main">
+              <a:ext uri="{FF2B5EF4-FFF2-40B4-BE49-F238E27FC236}">
+                <a16:creationId xmlns:a16="http://schemas.microsoft.com/office/drawing/2014/main" id="{4E3F7C06-097D-477F-B0FB-3903101F2EFB}"/>
+              </a:ext>
+            </a:extLst>
+          </p:cNvPr>
+          <p:cNvSpPr>
+            <a:spLocks xmlns:a="http://schemas.openxmlformats.org/drawingml/2006/main" noGrp="1"/>
+          </p:cNvSpPr>
+          <p:nvPr/>
+        </p:nvSpPr>
+        <p:spPr>
+          <a:xfrm xmlns:a="http://schemas.openxmlformats.org/drawingml/2006/main">
+            <a:off x="3600450" y="4057650"/>
+            <a:ext cx="1781175" cy="419100"/>
           </a:xfrm>
           <a:prstGeom xmlns:a="http://schemas.openxmlformats.org/drawingml/2006/main" prst="rect">
             <a:avLst/>
@@ -5736,7 +5882,7 @@
                 <a:ea typeface="Calibri"/>
                 <a:cs typeface="Calibri"/>
               </a:rPr>
-              <a:t>Recheck target / origin</a:t>
+              <a:t>Recheck live target</a:t>
             </a:r>
           </a:p>
           <a:p xmlns:a="http://schemas.openxmlformats.org/drawingml/2006/main">
@@ -5766,22 +5912,22 @@
       </p:sp>
       <p:sp>
         <p:nvSpPr>
-          <p:cNvPr id="118" name="rev-53">
-            <a:extLst xmlns:a="http://schemas.openxmlformats.org/drawingml/2006/main">
-              <a:ext uri="{FF2B5EF4-FFF2-40B4-BE49-F238E27FC236}">
-                <a16:creationId xmlns:a16="http://schemas.microsoft.com/office/drawing/2014/main" id="{1B7CD890-A7CE-40C4-8925-75A502D831C1}"/>
-              </a:ext>
-            </a:extLst>
-          </p:cNvPr>
-          <p:cNvSpPr>
-            <a:spLocks xmlns:a="http://schemas.openxmlformats.org/drawingml/2006/main" noGrp="1"/>
-          </p:cNvSpPr>
-          <p:nvPr/>
-        </p:nvSpPr>
-        <p:spPr>
-          <a:xfrm xmlns:a="http://schemas.openxmlformats.org/drawingml/2006/main">
-            <a:off x="2962275" y="3629025"/>
-            <a:ext cx="2209800" cy="904875"/>
+          <p:cNvPr id="121" name="rev-55">
+            <a:extLst xmlns:a="http://schemas.openxmlformats.org/drawingml/2006/main">
+              <a:ext uri="{FF2B5EF4-FFF2-40B4-BE49-F238E27FC236}">
+                <a16:creationId xmlns:a16="http://schemas.microsoft.com/office/drawing/2014/main" id="{CEF6CCB7-151E-420B-9BA7-C3DBFC7A100E}"/>
+              </a:ext>
+            </a:extLst>
+          </p:cNvPr>
+          <p:cNvSpPr>
+            <a:spLocks xmlns:a="http://schemas.openxmlformats.org/drawingml/2006/main" noGrp="1"/>
+          </p:cNvSpPr>
+          <p:nvPr/>
+        </p:nvSpPr>
+        <p:spPr>
+          <a:xfrm xmlns:a="http://schemas.openxmlformats.org/drawingml/2006/main">
+            <a:off x="638175" y="3600450"/>
+            <a:ext cx="2276475" cy="923925"/>
           </a:xfrm>
           <a:prstGeom xmlns:a="http://schemas.openxmlformats.org/drawingml/2006/main" prst="rect">
             <a:avLst/>
@@ -5791,29 +5937,29 @@
           </a:solidFill>
           <a:ln xmlns:a="http://schemas.openxmlformats.org/drawingml/2006/main" w="9525">
             <a:solidFill>
-              <a:srgbClr val="6D4C80"/>
+              <a:srgbClr val="594463"/>
             </a:solidFill>
           </a:ln>
         </p:spPr>
       </p:sp>
       <p:sp>
         <p:nvSpPr>
-          <p:cNvPr id="119" name="rev-54">
-            <a:extLst xmlns:a="http://schemas.openxmlformats.org/drawingml/2006/main">
-              <a:ext uri="{FF2B5EF4-FFF2-40B4-BE49-F238E27FC236}">
-                <a16:creationId xmlns:a16="http://schemas.microsoft.com/office/drawing/2014/main" id="{5641516C-7E1A-427E-BF7C-811BF6B1AD7E}"/>
-              </a:ext>
-            </a:extLst>
-          </p:cNvPr>
-          <p:cNvSpPr>
-            <a:spLocks xmlns:a="http://schemas.openxmlformats.org/drawingml/2006/main" noGrp="1"/>
-          </p:cNvSpPr>
-          <p:nvPr/>
-        </p:nvSpPr>
-        <p:spPr>
-          <a:xfrm xmlns:a="http://schemas.openxmlformats.org/drawingml/2006/main">
-            <a:off x="3114675" y="3752850"/>
-            <a:ext cx="1905000" cy="266700"/>
+          <p:cNvPr id="122" name="rev-56">
+            <a:extLst xmlns:a="http://schemas.openxmlformats.org/drawingml/2006/main">
+              <a:ext uri="{FF2B5EF4-FFF2-40B4-BE49-F238E27FC236}">
+                <a16:creationId xmlns:a16="http://schemas.microsoft.com/office/drawing/2014/main" id="{29A58C71-AA95-4A54-A9CB-AC8A9F1735B0}"/>
+              </a:ext>
+            </a:extLst>
+          </p:cNvPr>
+          <p:cNvSpPr>
+            <a:spLocks xmlns:a="http://schemas.openxmlformats.org/drawingml/2006/main" noGrp="1"/>
+          </p:cNvSpPr>
+          <p:nvPr/>
+        </p:nvSpPr>
+        <p:spPr>
+          <a:xfrm xmlns:a="http://schemas.openxmlformats.org/drawingml/2006/main">
+            <a:off x="790575" y="3724275"/>
+            <a:ext cx="1971675" cy="266700"/>
           </a:xfrm>
           <a:prstGeom xmlns:a="http://schemas.openxmlformats.org/drawingml/2006/main" prst="rect">
             <a:avLst/>
@@ -5832,7 +5978,7 @@
             <a:pPr>
               <a:defRPr sz="1575" b="1">
                 <a:solidFill>
-                  <a:srgbClr val="6D4C80"/>
+                  <a:srgbClr val="594463"/>
                 </a:solidFill>
                 <a:latin typeface="Calibri"/>
                 <a:ea typeface="Calibri"/>
@@ -5842,35 +5988,35 @@
             <a:r>
               <a:rPr sz="1575" b="1">
                 <a:solidFill>
-                  <a:srgbClr val="6D4C80"/>
-                </a:solidFill>
-                <a:latin typeface="Calibri"/>
-                <a:ea typeface="Calibri"/>
-                <a:cs typeface="Calibri"/>
-              </a:rPr>
-              <a:t>6  Verify</a:t>
-            </a:r>
-          </a:p>
-        </p:txBody>
-      </p:sp>
-      <p:sp>
-        <p:nvSpPr>
-          <p:cNvPr id="120" name="rev-55">
-            <a:extLst xmlns:a="http://schemas.openxmlformats.org/drawingml/2006/main">
-              <a:ext uri="{FF2B5EF4-FFF2-40B4-BE49-F238E27FC236}">
-                <a16:creationId xmlns:a16="http://schemas.microsoft.com/office/drawing/2014/main" id="{EF9E4DFF-2E68-4501-A1BE-350F8CC3D2CA}"/>
-              </a:ext>
-            </a:extLst>
-          </p:cNvPr>
-          <p:cNvSpPr>
-            <a:spLocks xmlns:a="http://schemas.openxmlformats.org/drawingml/2006/main" noGrp="1"/>
-          </p:cNvSpPr>
-          <p:nvPr/>
-        </p:nvSpPr>
-        <p:spPr>
-          <a:xfrm xmlns:a="http://schemas.openxmlformats.org/drawingml/2006/main">
-            <a:off x="3114675" y="4086225"/>
-            <a:ext cx="1905000" cy="400050"/>
+                  <a:srgbClr val="594463"/>
+                </a:solidFill>
+                <a:latin typeface="Calibri"/>
+                <a:ea typeface="Calibri"/>
+                <a:cs typeface="Calibri"/>
+              </a:rPr>
+              <a:t>7  Verify</a:t>
+            </a:r>
+          </a:p>
+        </p:txBody>
+      </p:sp>
+      <p:sp>
+        <p:nvSpPr>
+          <p:cNvPr id="123" name="rev-57">
+            <a:extLst xmlns:a="http://schemas.openxmlformats.org/drawingml/2006/main">
+              <a:ext uri="{FF2B5EF4-FFF2-40B4-BE49-F238E27FC236}">
+                <a16:creationId xmlns:a16="http://schemas.microsoft.com/office/drawing/2014/main" id="{D2C235E7-6410-4604-8A8A-7A30F36DA649}"/>
+              </a:ext>
+            </a:extLst>
+          </p:cNvPr>
+          <p:cNvSpPr>
+            <a:spLocks xmlns:a="http://schemas.openxmlformats.org/drawingml/2006/main" noGrp="1"/>
+          </p:cNvSpPr>
+          <p:nvPr/>
+        </p:nvSpPr>
+        <p:spPr>
+          <a:xfrm xmlns:a="http://schemas.openxmlformats.org/drawingml/2006/main">
+            <a:off x="790575" y="4057650"/>
+            <a:ext cx="1971675" cy="419100"/>
           </a:xfrm>
           <a:prstGeom xmlns:a="http://schemas.openxmlformats.org/drawingml/2006/main" prst="rect">
             <a:avLst/>
@@ -5905,7 +6051,7 @@
                 <a:ea typeface="Calibri"/>
                 <a:cs typeface="Calibri"/>
               </a:rPr>
-              <a:t>Confirm expected change</a:t>
+              <a:t>Check download / UI</a:t>
             </a:r>
           </a:p>
           <a:p xmlns:a="http://schemas.openxmlformats.org/drawingml/2006/main">
@@ -5928,14 +6074,14 @@
                 <a:ea typeface="Calibri"/>
                 <a:cs typeface="Calibri"/>
               </a:rPr>
-              <a:t>Observe again if needed</a:t>
+              <a:t>Report result to user</a:t>
             </a:r>
           </a:p>
         </p:txBody>
       </p:sp>
       <p:cxnSp>
         <p:nvCxnSpPr>
-          <p:cNvPr id="170" name=""/>
+          <p:cNvPr id="177" name=""/>
           <p:cNvCxnSpPr>
             <a:stCxn xmlns:a="http://schemas.openxmlformats.org/drawingml/2006/main" id="115" idx="1"/>
             <a:endCxn xmlns:a="http://schemas.openxmlformats.org/drawingml/2006/main" id="118" idx="3"/>
@@ -5944,130 +6090,63 @@
         </p:nvCxnSpPr>
         <p:spPr>
           <a:xfrm xmlns:a="http://schemas.openxmlformats.org/drawingml/2006/main" flipH="1">
-            <a:off x="5172075" y="4081463"/>
-            <a:ext cx="285750" cy="0"/>
+            <a:off x="5534025" y="4057650"/>
+            <a:ext cx="533400" cy="4763"/>
           </a:xfrm>
           <a:prstGeom xmlns:a="http://schemas.openxmlformats.org/drawingml/2006/main" prst="straightConnector1">
             <a:avLst/>
           </a:prstGeom>
           <a:ln xmlns:a="http://schemas.openxmlformats.org/drawingml/2006/main" w="19050">
             <a:solidFill>
-              <a:srgbClr val="6D4C80"/>
+              <a:srgbClr val="594463"/>
             </a:solidFill>
             <a:tailEnd type="triangle" w="sm" len="sm"/>
           </a:ln>
         </p:spPr>
       </p:cxnSp>
-      <p:sp>
-        <p:nvSpPr>
-          <p:cNvPr id="122" name="path-56">
-            <a:extLst xmlns:a="http://schemas.openxmlformats.org/drawingml/2006/main">
-              <a:ext uri="{FF2B5EF4-FFF2-40B4-BE49-F238E27FC236}">
-                <a16:creationId xmlns:a16="http://schemas.microsoft.com/office/drawing/2014/main" id="{5124BF9C-123A-46FA-9805-E2DD6221FE61}"/>
-              </a:ext>
-            </a:extLst>
-          </p:cNvPr>
-          <p:cNvSpPr>
-            <a:spLocks xmlns:a="http://schemas.openxmlformats.org/drawingml/2006/main" noGrp="1"/>
-          </p:cNvSpPr>
-          <p:nvPr/>
-        </p:nvSpPr>
-        <p:spPr>
-          <a:xfrm xmlns:a="http://schemas.openxmlformats.org/drawingml/2006/main">
-            <a:off x="10601325" y="3314700"/>
-            <a:ext cx="0" cy="762000"/>
-          </a:xfrm>
-          <a:prstGeom xmlns:a="http://schemas.openxmlformats.org/drawingml/2006/main" prst="line">
-            <a:avLst/>
-          </a:prstGeom>
-          <a:noFill xmlns:a="http://schemas.openxmlformats.org/drawingml/2006/main"/>
-          <a:ln xmlns:a="http://schemas.openxmlformats.org/drawingml/2006/main" w="14288">
+      <p:cxnSp>
+        <p:nvCxnSpPr>
+          <p:cNvPr id="178" name=""/>
+          <p:cNvCxnSpPr>
+            <a:stCxn xmlns:a="http://schemas.openxmlformats.org/drawingml/2006/main" id="118" idx="1"/>
+            <a:endCxn xmlns:a="http://schemas.openxmlformats.org/drawingml/2006/main" id="121" idx="3"/>
+          </p:cNvCxnSpPr>
+          <p:nvPr/>
+        </p:nvCxnSpPr>
+        <p:spPr>
+          <a:xfrm xmlns:a="http://schemas.openxmlformats.org/drawingml/2006/main" flipH="1">
+            <a:off x="2914650" y="4062413"/>
+            <a:ext cx="533400" cy="0"/>
+          </a:xfrm>
+          <a:prstGeom xmlns:a="http://schemas.openxmlformats.org/drawingml/2006/main" prst="straightConnector1">
+            <a:avLst/>
+          </a:prstGeom>
+          <a:ln xmlns:a="http://schemas.openxmlformats.org/drawingml/2006/main" w="19050">
             <a:solidFill>
-              <a:srgbClr val="6D4C80"/>
+              <a:srgbClr val="594463"/>
             </a:solidFill>
-            <a:prstDash val="solid"/>
-          </a:ln>
-        </p:spPr>
-      </p:sp>
-      <p:sp>
-        <p:nvSpPr>
-          <p:cNvPr id="123" name="path-57">
-            <a:extLst xmlns:a="http://schemas.openxmlformats.org/drawingml/2006/main">
-              <a:ext uri="{FF2B5EF4-FFF2-40B4-BE49-F238E27FC236}">
-                <a16:creationId xmlns:a16="http://schemas.microsoft.com/office/drawing/2014/main" id="{BA9B0E36-6452-4EA6-9AB8-F8E20D897514}"/>
-              </a:ext>
-            </a:extLst>
-          </p:cNvPr>
-          <p:cNvSpPr>
-            <a:spLocks xmlns:a="http://schemas.openxmlformats.org/drawingml/2006/main" noGrp="1"/>
-          </p:cNvSpPr>
-          <p:nvPr/>
-        </p:nvSpPr>
-        <p:spPr>
-          <a:xfrm xmlns:a="http://schemas.openxmlformats.org/drawingml/2006/main">
-            <a:off x="8115300" y="4076700"/>
-            <a:ext cx="2486025" cy="0"/>
-          </a:xfrm>
-          <a:prstGeom xmlns:a="http://schemas.openxmlformats.org/drawingml/2006/main" prst="line">
-            <a:avLst/>
-          </a:prstGeom>
-          <a:noFill xmlns:a="http://schemas.openxmlformats.org/drawingml/2006/main"/>
-          <a:ln xmlns:a="http://schemas.openxmlformats.org/drawingml/2006/main" w="14288">
-            <a:solidFill>
-              <a:srgbClr val="6D4C80"/>
-            </a:solidFill>
-            <a:prstDash val="solid"/>
-          </a:ln>
-        </p:spPr>
-      </p:sp>
-      <p:sp>
-        <p:nvSpPr>
-          <p:cNvPr id="124" name="">
-            <a:extLst xmlns:a="http://schemas.openxmlformats.org/drawingml/2006/main">
-              <a:ext uri="{FF2B5EF4-FFF2-40B4-BE49-F238E27FC236}">
-                <a16:creationId xmlns:a16="http://schemas.microsoft.com/office/drawing/2014/main" id="{1707E5B6-4A1E-48AA-95E6-31C33B80AD9F}"/>
-              </a:ext>
-            </a:extLst>
-          </p:cNvPr>
-          <p:cNvSpPr>
-            <a:spLocks xmlns:a="http://schemas.openxmlformats.org/drawingml/2006/main" noGrp="1"/>
-          </p:cNvSpPr>
-          <p:nvPr/>
-        </p:nvSpPr>
-        <p:spPr>
-          <a:xfrm xmlns:a="http://schemas.openxmlformats.org/drawingml/2006/main">
-            <a:off x="7943850" y="4019550"/>
-            <a:ext cx="238125" cy="114300"/>
-          </a:xfrm>
-          <a:prstGeom xmlns:a="http://schemas.openxmlformats.org/drawingml/2006/main" prst="leftArrow">
-            <a:avLst/>
-          </a:prstGeom>
-          <a:solidFill xmlns:a="http://schemas.openxmlformats.org/drawingml/2006/main">
-            <a:srgbClr val="6D4C80"/>
-          </a:solidFill>
-          <a:ln xmlns:a="http://schemas.openxmlformats.org/drawingml/2006/main" w="0">
-            <a:noFill/>
-          </a:ln>
-        </p:spPr>
-      </p:sp>
-      <p:sp>
-        <p:nvSpPr>
-          <p:cNvPr id="125" name="rev-58">
-            <a:extLst xmlns:a="http://schemas.openxmlformats.org/drawingml/2006/main">
-              <a:ext uri="{FF2B5EF4-FFF2-40B4-BE49-F238E27FC236}">
-                <a16:creationId xmlns:a16="http://schemas.microsoft.com/office/drawing/2014/main" id="{AF3B471A-FF29-41C7-9044-A56F26008098}"/>
-              </a:ext>
-            </a:extLst>
-          </p:cNvPr>
-          <p:cNvSpPr>
-            <a:spLocks xmlns:a="http://schemas.openxmlformats.org/drawingml/2006/main" noGrp="1"/>
-          </p:cNvSpPr>
-          <p:nvPr/>
-        </p:nvSpPr>
-        <p:spPr>
-          <a:xfrm xmlns:a="http://schemas.openxmlformats.org/drawingml/2006/main">
-            <a:off x="9048750" y="3714750"/>
-            <a:ext cx="1657350" cy="257175"/>
+            <a:tailEnd type="triangle" w="sm" len="sm"/>
+          </a:ln>
+        </p:spPr>
+      </p:cxnSp>
+      <p:sp>
+        <p:nvSpPr>
+          <p:cNvPr id="126" name="rev-58">
+            <a:extLst xmlns:a="http://schemas.openxmlformats.org/drawingml/2006/main">
+              <a:ext uri="{FF2B5EF4-FFF2-40B4-BE49-F238E27FC236}">
+                <a16:creationId xmlns:a16="http://schemas.microsoft.com/office/drawing/2014/main" id="{DEF92435-72ED-434A-8009-655FC72931EE}"/>
+              </a:ext>
+            </a:extLst>
+          </p:cNvPr>
+          <p:cNvSpPr>
+            <a:spLocks xmlns:a="http://schemas.openxmlformats.org/drawingml/2006/main" noGrp="1"/>
+          </p:cNvSpPr>
+          <p:nvPr/>
+        </p:nvSpPr>
+        <p:spPr>
+          <a:xfrm xmlns:a="http://schemas.openxmlformats.org/drawingml/2006/main">
+            <a:off x="5553075" y="3743325"/>
+            <a:ext cx="504825" cy="209550"/>
           </a:xfrm>
           <a:prstGeom xmlns:a="http://schemas.openxmlformats.org/drawingml/2006/main" prst="rect">
             <a:avLst/>
@@ -6083,48 +6162,48 @@
           </a:bodyPr>
           <a:lstStyle xmlns:a="http://schemas.openxmlformats.org/drawingml/2006/main"/>
           <a:p xmlns:a="http://schemas.openxmlformats.org/drawingml/2006/main">
-            <a:pPr>
-              <a:defRPr sz="1200">
-                <a:solidFill>
-                  <a:srgbClr val="6D4C80"/>
-                </a:solidFill>
-                <a:latin typeface="Calibri"/>
-                <a:ea typeface="Calibri"/>
-                <a:cs typeface="Calibri"/>
-              </a:defRPr>
-            </a:pPr>
-            <a:r>
-              <a:rPr sz="1200">
-                <a:solidFill>
-                  <a:srgbClr val="6D4C80"/>
-                </a:solidFill>
-                <a:latin typeface="Calibri"/>
-                <a:ea typeface="Calibri"/>
-                <a:cs typeface="Calibri"/>
-              </a:rPr>
-              <a:t>Returned action</a:t>
-            </a:r>
-          </a:p>
-        </p:txBody>
-      </p:sp>
-      <p:sp>
-        <p:nvSpPr>
-          <p:cNvPr id="126" name="path-59">
-            <a:extLst xmlns:a="http://schemas.openxmlformats.org/drawingml/2006/main">
-              <a:ext uri="{FF2B5EF4-FFF2-40B4-BE49-F238E27FC236}">
-                <a16:creationId xmlns:a16="http://schemas.microsoft.com/office/drawing/2014/main" id="{CEEBA813-E07D-4714-8A3D-EEFA4008A61B}"/>
-              </a:ext>
-            </a:extLst>
-          </p:cNvPr>
-          <p:cNvSpPr>
-            <a:spLocks xmlns:a="http://schemas.openxmlformats.org/drawingml/2006/main" noGrp="1"/>
-          </p:cNvSpPr>
-          <p:nvPr/>
-        </p:nvSpPr>
-        <p:spPr>
-          <a:xfrm xmlns:a="http://schemas.openxmlformats.org/drawingml/2006/main">
-            <a:off x="1638300" y="4076700"/>
-            <a:ext cx="1323975" cy="0"/>
+            <a:pPr algn="ctr">
+              <a:defRPr sz="975">
+                <a:solidFill>
+                  <a:srgbClr val="594463"/>
+                </a:solidFill>
+                <a:latin typeface="Calibri"/>
+                <a:ea typeface="Calibri"/>
+                <a:cs typeface="Calibri"/>
+              </a:defRPr>
+            </a:pPr>
+            <a:r>
+              <a:rPr sz="975">
+                <a:solidFill>
+                  <a:srgbClr val="594463"/>
+                </a:solidFill>
+                <a:latin typeface="Calibri"/>
+                <a:ea typeface="Calibri"/>
+                <a:cs typeface="Calibri"/>
+              </a:rPr>
+              <a:t>Allow</a:t>
+            </a:r>
+          </a:p>
+        </p:txBody>
+      </p:sp>
+      <p:sp>
+        <p:nvSpPr>
+          <p:cNvPr id="127" name="path-59">
+            <a:extLst xmlns:a="http://schemas.openxmlformats.org/drawingml/2006/main">
+              <a:ext uri="{FF2B5EF4-FFF2-40B4-BE49-F238E27FC236}">
+                <a16:creationId xmlns:a16="http://schemas.microsoft.com/office/drawing/2014/main" id="{417597D3-B7D9-4439-95EB-E944FD35C8F7}"/>
+              </a:ext>
+            </a:extLst>
+          </p:cNvPr>
+          <p:cNvSpPr>
+            <a:spLocks xmlns:a="http://schemas.openxmlformats.org/drawingml/2006/main" noGrp="1"/>
+          </p:cNvSpPr>
+          <p:nvPr/>
+        </p:nvSpPr>
+        <p:spPr>
+          <a:xfrm xmlns:a="http://schemas.openxmlformats.org/drawingml/2006/main">
+            <a:off x="10601325" y="3314700"/>
+            <a:ext cx="0" cy="742950"/>
           </a:xfrm>
           <a:prstGeom xmlns:a="http://schemas.openxmlformats.org/drawingml/2006/main" prst="line">
             <a:avLst/>
@@ -6132,7 +6211,7 @@
           <a:noFill xmlns:a="http://schemas.openxmlformats.org/drawingml/2006/main"/>
           <a:ln xmlns:a="http://schemas.openxmlformats.org/drawingml/2006/main" w="14288">
             <a:solidFill>
-              <a:srgbClr val="6D4C80"/>
+              <a:srgbClr val="594463"/>
             </a:solidFill>
             <a:prstDash val="solid"/>
           </a:ln>
@@ -6140,22 +6219,22 @@
       </p:sp>
       <p:sp>
         <p:nvSpPr>
-          <p:cNvPr id="127" name="path-60">
-            <a:extLst xmlns:a="http://schemas.openxmlformats.org/drawingml/2006/main">
-              <a:ext uri="{FF2B5EF4-FFF2-40B4-BE49-F238E27FC236}">
-                <a16:creationId xmlns:a16="http://schemas.microsoft.com/office/drawing/2014/main" id="{CE286B12-D270-414B-B988-956729BA164F}"/>
-              </a:ext>
-            </a:extLst>
-          </p:cNvPr>
-          <p:cNvSpPr>
-            <a:spLocks xmlns:a="http://schemas.openxmlformats.org/drawingml/2006/main" noGrp="1"/>
-          </p:cNvSpPr>
-          <p:nvPr/>
-        </p:nvSpPr>
-        <p:spPr>
-          <a:xfrm xmlns:a="http://schemas.openxmlformats.org/drawingml/2006/main">
-            <a:off x="1638300" y="3314700"/>
-            <a:ext cx="0" cy="762000"/>
+          <p:cNvPr id="128" name="path-60">
+            <a:extLst xmlns:a="http://schemas.openxmlformats.org/drawingml/2006/main">
+              <a:ext uri="{FF2B5EF4-FFF2-40B4-BE49-F238E27FC236}">
+                <a16:creationId xmlns:a16="http://schemas.microsoft.com/office/drawing/2014/main" id="{76322C6B-9B1D-49AD-921E-80D555FDC9C6}"/>
+              </a:ext>
+            </a:extLst>
+          </p:cNvPr>
+          <p:cNvSpPr>
+            <a:spLocks xmlns:a="http://schemas.openxmlformats.org/drawingml/2006/main" noGrp="1"/>
+          </p:cNvSpPr>
+          <p:nvPr/>
+        </p:nvSpPr>
+        <p:spPr>
+          <a:xfrm xmlns:a="http://schemas.openxmlformats.org/drawingml/2006/main">
+            <a:off x="8115300" y="4057650"/>
+            <a:ext cx="2486025" cy="0"/>
           </a:xfrm>
           <a:prstGeom xmlns:a="http://schemas.openxmlformats.org/drawingml/2006/main" prst="line">
             <a:avLst/>
@@ -6163,7 +6242,7 @@
           <a:noFill xmlns:a="http://schemas.openxmlformats.org/drawingml/2006/main"/>
           <a:ln xmlns:a="http://schemas.openxmlformats.org/drawingml/2006/main" w="14288">
             <a:solidFill>
-              <a:srgbClr val="6D4C80"/>
+              <a:srgbClr val="594463"/>
             </a:solidFill>
             <a:prstDash val="solid"/>
           </a:ln>
@@ -6171,28 +6250,28 @@
       </p:sp>
       <p:sp>
         <p:nvSpPr>
-          <p:cNvPr id="128" name="">
-            <a:extLst xmlns:a="http://schemas.openxmlformats.org/drawingml/2006/main">
-              <a:ext uri="{FF2B5EF4-FFF2-40B4-BE49-F238E27FC236}">
-                <a16:creationId xmlns:a16="http://schemas.microsoft.com/office/drawing/2014/main" id="{E04F9ED9-538B-45BC-8353-49FFFCD62B9B}"/>
-              </a:ext>
-            </a:extLst>
-          </p:cNvPr>
-          <p:cNvSpPr>
-            <a:spLocks xmlns:a="http://schemas.openxmlformats.org/drawingml/2006/main" noGrp="1"/>
-          </p:cNvSpPr>
-          <p:nvPr/>
-        </p:nvSpPr>
-        <p:spPr>
-          <a:xfrm xmlns:a="http://schemas.openxmlformats.org/drawingml/2006/main">
-            <a:off x="1581150" y="3305175"/>
-            <a:ext cx="114300" cy="209550"/>
-          </a:xfrm>
-          <a:prstGeom xmlns:a="http://schemas.openxmlformats.org/drawingml/2006/main" prst="upArrow">
+          <p:cNvPr id="129" name="">
+            <a:extLst xmlns:a="http://schemas.openxmlformats.org/drawingml/2006/main">
+              <a:ext uri="{FF2B5EF4-FFF2-40B4-BE49-F238E27FC236}">
+                <a16:creationId xmlns:a16="http://schemas.microsoft.com/office/drawing/2014/main" id="{7F7AECAF-F406-45BF-89F7-9CA9F29250B7}"/>
+              </a:ext>
+            </a:extLst>
+          </p:cNvPr>
+          <p:cNvSpPr>
+            <a:spLocks xmlns:a="http://schemas.openxmlformats.org/drawingml/2006/main" noGrp="1"/>
+          </p:cNvSpPr>
+          <p:nvPr/>
+        </p:nvSpPr>
+        <p:spPr>
+          <a:xfrm xmlns:a="http://schemas.openxmlformats.org/drawingml/2006/main">
+            <a:off x="7943850" y="4000500"/>
+            <a:ext cx="238125" cy="114300"/>
+          </a:xfrm>
+          <a:prstGeom xmlns:a="http://schemas.openxmlformats.org/drawingml/2006/main" prst="leftArrow">
             <a:avLst/>
           </a:prstGeom>
           <a:solidFill xmlns:a="http://schemas.openxmlformats.org/drawingml/2006/main">
-            <a:srgbClr val="6D4C80"/>
+            <a:srgbClr val="594463"/>
           </a:solidFill>
           <a:ln xmlns:a="http://schemas.openxmlformats.org/drawingml/2006/main" w="0">
             <a:noFill/>
@@ -6201,22 +6280,22 @@
       </p:sp>
       <p:sp>
         <p:nvSpPr>
-          <p:cNvPr id="129" name="rev-61">
-            <a:extLst xmlns:a="http://schemas.openxmlformats.org/drawingml/2006/main">
-              <a:ext uri="{FF2B5EF4-FFF2-40B4-BE49-F238E27FC236}">
-                <a16:creationId xmlns:a16="http://schemas.microsoft.com/office/drawing/2014/main" id="{74BFB223-63E5-479A-BE6F-E575D081F085}"/>
-              </a:ext>
-            </a:extLst>
-          </p:cNvPr>
-          <p:cNvSpPr>
-            <a:spLocks xmlns:a="http://schemas.openxmlformats.org/drawingml/2006/main" noGrp="1"/>
-          </p:cNvSpPr>
-          <p:nvPr/>
-        </p:nvSpPr>
-        <p:spPr>
-          <a:xfrm xmlns:a="http://schemas.openxmlformats.org/drawingml/2006/main">
-            <a:off x="733425" y="3695700"/>
-            <a:ext cx="1047750" cy="409575"/>
+          <p:cNvPr id="130" name="rev-61">
+            <a:extLst xmlns:a="http://schemas.openxmlformats.org/drawingml/2006/main">
+              <a:ext uri="{FF2B5EF4-FFF2-40B4-BE49-F238E27FC236}">
+                <a16:creationId xmlns:a16="http://schemas.microsoft.com/office/drawing/2014/main" id="{9A850307-AA70-4F2C-8DA2-6B32C71F00E1}"/>
+              </a:ext>
+            </a:extLst>
+          </p:cNvPr>
+          <p:cNvSpPr>
+            <a:spLocks xmlns:a="http://schemas.openxmlformats.org/drawingml/2006/main" noGrp="1"/>
+          </p:cNvSpPr>
+          <p:nvPr/>
+        </p:nvSpPr>
+        <p:spPr>
+          <a:xfrm xmlns:a="http://schemas.openxmlformats.org/drawingml/2006/main">
+            <a:off x="9277350" y="3705225"/>
+            <a:ext cx="1543050" cy="257175"/>
           </a:xfrm>
           <a:prstGeom xmlns:a="http://schemas.openxmlformats.org/drawingml/2006/main" prst="rect">
             <a:avLst/>
@@ -6235,7 +6314,7 @@
             <a:pPr>
               <a:defRPr sz="1200">
                 <a:solidFill>
-                  <a:srgbClr val="6D4C80"/>
+                  <a:srgbClr val="594463"/>
                 </a:solidFill>
                 <a:latin typeface="Calibri"/>
                 <a:ea typeface="Calibri"/>
@@ -6245,58 +6324,35 @@
             <a:r>
               <a:rPr sz="1200">
                 <a:solidFill>
-                  <a:srgbClr val="6D4C80"/>
-                </a:solidFill>
-                <a:latin typeface="Calibri"/>
-                <a:ea typeface="Calibri"/>
-                <a:cs typeface="Calibri"/>
-              </a:rPr>
-              <a:t>Repeat after</a:t>
-            </a:r>
-          </a:p>
-          <a:p xmlns:a="http://schemas.openxmlformats.org/drawingml/2006/main">
-            <a:pPr>
-              <a:defRPr sz="1200">
-                <a:solidFill>
-                  <a:srgbClr val="6D4C80"/>
-                </a:solidFill>
-                <a:latin typeface="Calibri"/>
-                <a:ea typeface="Calibri"/>
-                <a:cs typeface="Calibri"/>
-              </a:defRPr>
-            </a:pPr>
-            <a:r>
-              <a:rPr sz="1200">
-                <a:solidFill>
-                  <a:srgbClr val="6D4C80"/>
-                </a:solidFill>
-                <a:latin typeface="Calibri"/>
-                <a:ea typeface="Calibri"/>
-                <a:cs typeface="Calibri"/>
-              </a:rPr>
-              <a:t>action</a:t>
-            </a:r>
-          </a:p>
-        </p:txBody>
-      </p:sp>
-      <p:sp>
-        <p:nvSpPr>
-          <p:cNvPr id="130" name="rev-62">
-            <a:extLst xmlns:a="http://schemas.openxmlformats.org/drawingml/2006/main">
-              <a:ext uri="{FF2B5EF4-FFF2-40B4-BE49-F238E27FC236}">
-                <a16:creationId xmlns:a16="http://schemas.microsoft.com/office/drawing/2014/main" id="{C4D4ADA4-D450-43FA-AAE9-56BD87B3D9F4}"/>
-              </a:ext>
-            </a:extLst>
-          </p:cNvPr>
-          <p:cNvSpPr>
-            <a:spLocks xmlns:a="http://schemas.openxmlformats.org/drawingml/2006/main" noGrp="1"/>
-          </p:cNvSpPr>
-          <p:nvPr/>
-        </p:nvSpPr>
-        <p:spPr>
-          <a:xfrm xmlns:a="http://schemas.openxmlformats.org/drawingml/2006/main">
-            <a:off x="457200" y="4953000"/>
-            <a:ext cx="5334000" cy="247650"/>
+                  <a:srgbClr val="594463"/>
+                </a:solidFill>
+                <a:latin typeface="Calibri"/>
+                <a:ea typeface="Calibri"/>
+                <a:cs typeface="Calibri"/>
+              </a:rPr>
+              <a:t>JSON action</a:t>
+            </a:r>
+          </a:p>
+        </p:txBody>
+      </p:sp>
+      <p:sp>
+        <p:nvSpPr>
+          <p:cNvPr id="131" name="rev-62">
+            <a:extLst xmlns:a="http://schemas.openxmlformats.org/drawingml/2006/main">
+              <a:ext uri="{FF2B5EF4-FFF2-40B4-BE49-F238E27FC236}">
+                <a16:creationId xmlns:a16="http://schemas.microsoft.com/office/drawing/2014/main" id="{3211EA1D-7A66-4710-B1BB-07A85D7CC67E}"/>
+              </a:ext>
+            </a:extLst>
+          </p:cNvPr>
+          <p:cNvSpPr>
+            <a:spLocks xmlns:a="http://schemas.openxmlformats.org/drawingml/2006/main" noGrp="1"/>
+          </p:cNvSpPr>
+          <p:nvPr/>
+        </p:nvSpPr>
+        <p:spPr>
+          <a:xfrm xmlns:a="http://schemas.openxmlformats.org/drawingml/2006/main">
+            <a:off x="4829175" y="4591050"/>
+            <a:ext cx="3190875" cy="209550"/>
           </a:xfrm>
           <a:prstGeom xmlns:a="http://schemas.openxmlformats.org/drawingml/2006/main" prst="rect">
             <a:avLst/>
@@ -6313,47 +6369,47 @@
           <a:lstStyle xmlns:a="http://schemas.openxmlformats.org/drawingml/2006/main"/>
           <a:p xmlns:a="http://schemas.openxmlformats.org/drawingml/2006/main">
             <a:pPr>
-              <a:defRPr sz="1500" b="1">
-                <a:solidFill>
-                  <a:srgbClr val="6D4C80"/>
-                </a:solidFill>
-                <a:latin typeface="Calibri"/>
-                <a:ea typeface="Calibri"/>
-                <a:cs typeface="Calibri"/>
-              </a:defRPr>
-            </a:pPr>
-            <a:r>
-              <a:rPr sz="1500" b="1">
-                <a:solidFill>
-                  <a:srgbClr val="6D4C80"/>
-                </a:solidFill>
-                <a:latin typeface="Calibri"/>
-                <a:ea typeface="Calibri"/>
-                <a:cs typeface="Calibri"/>
-              </a:rPr>
-              <a:t>Demo stage</a:t>
-            </a:r>
-          </a:p>
-        </p:txBody>
-      </p:sp>
-      <p:sp>
-        <p:nvSpPr>
-          <p:cNvPr id="131" name="rev-63">
-            <a:extLst xmlns:a="http://schemas.openxmlformats.org/drawingml/2006/main">
-              <a:ext uri="{FF2B5EF4-FFF2-40B4-BE49-F238E27FC236}">
-                <a16:creationId xmlns:a16="http://schemas.microsoft.com/office/drawing/2014/main" id="{578222C6-8530-4D93-AF7A-36356B296EB3}"/>
-              </a:ext>
-            </a:extLst>
-          </p:cNvPr>
-          <p:cNvSpPr>
-            <a:spLocks xmlns:a="http://schemas.openxmlformats.org/drawingml/2006/main" noGrp="1"/>
-          </p:cNvSpPr>
-          <p:nvPr/>
-        </p:nvSpPr>
-        <p:spPr>
-          <a:xfrm xmlns:a="http://schemas.openxmlformats.org/drawingml/2006/main">
-            <a:off x="457200" y="5334000"/>
-            <a:ext cx="5305425" cy="685800"/>
+              <a:defRPr sz="1050" b="1">
+                <a:solidFill>
+                  <a:srgbClr val="594463"/>
+                </a:solidFill>
+                <a:latin typeface="Calibri"/>
+                <a:ea typeface="Calibri"/>
+                <a:cs typeface="Calibri"/>
+              </a:defRPr>
+            </a:pPr>
+            <a:r>
+              <a:rPr sz="1050" b="1">
+                <a:solidFill>
+                  <a:srgbClr val="594463"/>
+                </a:solidFill>
+                <a:latin typeface="Calibri"/>
+                <a:ea typeface="Calibri"/>
+                <a:cs typeface="Calibri"/>
+              </a:rPr>
+              <a:t>Blocked: stop. TYPE: request confirmation.</a:t>
+            </a:r>
+          </a:p>
+        </p:txBody>
+      </p:sp>
+      <p:sp>
+        <p:nvSpPr>
+          <p:cNvPr id="132" name="rev-63">
+            <a:extLst xmlns:a="http://schemas.openxmlformats.org/drawingml/2006/main">
+              <a:ext uri="{FF2B5EF4-FFF2-40B4-BE49-F238E27FC236}">
+                <a16:creationId xmlns:a16="http://schemas.microsoft.com/office/drawing/2014/main" id="{9057863F-6FE6-4D7D-8FE5-FE84823D06BC}"/>
+              </a:ext>
+            </a:extLst>
+          </p:cNvPr>
+          <p:cNvSpPr>
+            <a:spLocks xmlns:a="http://schemas.openxmlformats.org/drawingml/2006/main" noGrp="1"/>
+          </p:cNvSpPr>
+          <p:nvPr/>
+        </p:nvSpPr>
+        <p:spPr>
+          <a:xfrm xmlns:a="http://schemas.openxmlformats.org/drawingml/2006/main">
+            <a:off x="638175" y="4600575"/>
+            <a:ext cx="4114800" cy="209550"/>
           </a:xfrm>
           <a:prstGeom xmlns:a="http://schemas.openxmlformats.org/drawingml/2006/main" prst="rect">
             <a:avLst/>
@@ -6370,70 +6426,47 @@
           <a:lstStyle xmlns:a="http://schemas.openxmlformats.org/drawingml/2006/main"/>
           <a:p xmlns:a="http://schemas.openxmlformats.org/drawingml/2006/main">
             <a:pPr>
-              <a:defRPr sz="1500">
-                <a:solidFill>
-                  <a:srgbClr val="202B36"/>
-                </a:solidFill>
-                <a:latin typeface="Calibri"/>
-                <a:ea typeface="Calibri"/>
-                <a:cs typeface="Calibri"/>
-              </a:defRPr>
-            </a:pPr>
-            <a:r>
-              <a:rPr sz="1500">
-                <a:solidFill>
-                  <a:srgbClr val="202B36"/>
-                </a:solidFill>
-                <a:latin typeface="Calibri"/>
-                <a:ea typeface="Calibri"/>
-                <a:cs typeface="Calibri"/>
-              </a:rPr>
-              <a:t>Chrome MV3 extension + FastAPI rules server</a:t>
-            </a:r>
-          </a:p>
-          <a:p xmlns:a="http://schemas.openxmlformats.org/drawingml/2006/main">
-            <a:pPr>
-              <a:defRPr sz="1500">
-                <a:solidFill>
-                  <a:srgbClr val="202B36"/>
-                </a:solidFill>
-                <a:latin typeface="Calibri"/>
-                <a:ea typeface="Calibri"/>
-                <a:cs typeface="Calibri"/>
-              </a:defRPr>
-            </a:pPr>
-            <a:r>
-              <a:rPr sz="1500">
-                <a:solidFill>
-                  <a:srgbClr val="202B36"/>
-                </a:solidFill>
-                <a:latin typeface="Calibri"/>
-                <a:ea typeface="Calibri"/>
-                <a:cs typeface="Calibri"/>
-              </a:rPr>
-              <a:t>DOM privacy, goal crop, guarded action and verification</a:t>
-            </a:r>
-          </a:p>
-        </p:txBody>
-      </p:sp>
-      <p:sp>
-        <p:nvSpPr>
-          <p:cNvPr id="132" name="rev-64">
-            <a:extLst xmlns:a="http://schemas.openxmlformats.org/drawingml/2006/main">
-              <a:ext uri="{FF2B5EF4-FFF2-40B4-BE49-F238E27FC236}">
-                <a16:creationId xmlns:a16="http://schemas.microsoft.com/office/drawing/2014/main" id="{68F9CD0E-833E-48BB-BE07-628D4346F9E4}"/>
-              </a:ext>
-            </a:extLst>
-          </p:cNvPr>
-          <p:cNvSpPr>
-            <a:spLocks xmlns:a="http://schemas.openxmlformats.org/drawingml/2006/main" noGrp="1"/>
-          </p:cNvSpPr>
-          <p:nvPr/>
-        </p:nvSpPr>
-        <p:spPr>
-          <a:xfrm xmlns:a="http://schemas.openxmlformats.org/drawingml/2006/main">
-            <a:off x="6276975" y="4953000"/>
-            <a:ext cx="5457825" cy="247650"/>
+              <a:defRPr sz="1125">
+                <a:solidFill>
+                  <a:srgbClr val="53616D"/>
+                </a:solidFill>
+                <a:latin typeface="Calibri"/>
+                <a:ea typeface="Calibri"/>
+                <a:cs typeface="Calibri"/>
+              </a:defRPr>
+            </a:pPr>
+            <a:r>
+              <a:rPr sz="1125">
+                <a:solidFill>
+                  <a:srgbClr val="53616D"/>
+                </a:solidFill>
+                <a:latin typeface="Calibri"/>
+                <a:ea typeface="Calibri"/>
+                <a:cs typeface="Calibri"/>
+              </a:rPr>
+              <a:t>User can run the next step after verification.</a:t>
+            </a:r>
+          </a:p>
+        </p:txBody>
+      </p:sp>
+      <p:sp>
+        <p:nvSpPr>
+          <p:cNvPr id="133" name="rev-64">
+            <a:extLst xmlns:a="http://schemas.openxmlformats.org/drawingml/2006/main">
+              <a:ext uri="{FF2B5EF4-FFF2-40B4-BE49-F238E27FC236}">
+                <a16:creationId xmlns:a16="http://schemas.microsoft.com/office/drawing/2014/main" id="{7885DD9F-F4F0-4265-ACA5-AA57A1925A41}"/>
+              </a:ext>
+            </a:extLst>
+          </p:cNvPr>
+          <p:cNvSpPr>
+            <a:spLocks xmlns:a="http://schemas.openxmlformats.org/drawingml/2006/main" noGrp="1"/>
+          </p:cNvSpPr>
+          <p:nvPr/>
+        </p:nvSpPr>
+        <p:spPr>
+          <a:xfrm xmlns:a="http://schemas.openxmlformats.org/drawingml/2006/main">
+            <a:off x="9029700" y="4581525"/>
+            <a:ext cx="2705100" cy="209550"/>
           </a:xfrm>
           <a:prstGeom xmlns:a="http://schemas.openxmlformats.org/drawingml/2006/main" prst="rect">
             <a:avLst/>
@@ -6449,48 +6482,48 @@
           </a:bodyPr>
           <a:lstStyle xmlns:a="http://schemas.openxmlformats.org/drawingml/2006/main"/>
           <a:p xmlns:a="http://schemas.openxmlformats.org/drawingml/2006/main">
-            <a:pPr>
-              <a:defRPr sz="1500" b="1">
-                <a:solidFill>
-                  <a:srgbClr val="6D4C80"/>
-                </a:solidFill>
-                <a:latin typeface="Calibri"/>
-                <a:ea typeface="Calibri"/>
-                <a:cs typeface="Calibri"/>
-              </a:defRPr>
-            </a:pPr>
-            <a:r>
-              <a:rPr sz="1500" b="1">
-                <a:solidFill>
-                  <a:srgbClr val="6D4C80"/>
-                </a:solidFill>
-                <a:latin typeface="Calibri"/>
-                <a:ea typeface="Calibri"/>
-                <a:cs typeface="Calibri"/>
-              </a:rPr>
-              <a:t>ONNX Runtime Web: integration scaffold</a:t>
-            </a:r>
-          </a:p>
-        </p:txBody>
-      </p:sp>
-      <p:sp>
-        <p:nvSpPr>
-          <p:cNvPr id="133" name="rev-65">
-            <a:extLst xmlns:a="http://schemas.openxmlformats.org/drawingml/2006/main">
-              <a:ext uri="{FF2B5EF4-FFF2-40B4-BE49-F238E27FC236}">
-                <a16:creationId xmlns:a16="http://schemas.microsoft.com/office/drawing/2014/main" id="{C1C339A2-69F5-45CD-B5B5-860FE1FF794A}"/>
-              </a:ext>
-            </a:extLst>
-          </p:cNvPr>
-          <p:cNvSpPr>
-            <a:spLocks xmlns:a="http://schemas.openxmlformats.org/drawingml/2006/main" noGrp="1"/>
-          </p:cNvSpPr>
-          <p:nvPr/>
-        </p:nvSpPr>
-        <p:spPr>
-          <a:xfrm xmlns:a="http://schemas.openxmlformats.org/drawingml/2006/main">
-            <a:off x="6276975" y="5334000"/>
-            <a:ext cx="5457825" cy="685800"/>
+            <a:pPr algn="ctr">
+              <a:defRPr sz="1125">
+                <a:solidFill>
+                  <a:srgbClr val="53616D"/>
+                </a:solidFill>
+                <a:latin typeface="Calibri"/>
+                <a:ea typeface="Calibri"/>
+                <a:cs typeface="Calibri"/>
+              </a:defRPr>
+            </a:pPr>
+            <a:r>
+              <a:rPr sz="1125">
+                <a:solidFill>
+                  <a:srgbClr val="53616D"/>
+                </a:solidFill>
+                <a:latin typeface="Calibri"/>
+                <a:ea typeface="Calibri"/>
+                <a:cs typeface="Calibri"/>
+              </a:rPr>
+              <a:t>Demo endpoint: localhost:8000</a:t>
+            </a:r>
+          </a:p>
+        </p:txBody>
+      </p:sp>
+      <p:sp>
+        <p:nvSpPr>
+          <p:cNvPr id="134" name="rev-65">
+            <a:extLst xmlns:a="http://schemas.openxmlformats.org/drawingml/2006/main">
+              <a:ext uri="{FF2B5EF4-FFF2-40B4-BE49-F238E27FC236}">
+                <a16:creationId xmlns:a16="http://schemas.microsoft.com/office/drawing/2014/main" id="{96085A5A-AD8B-4A1A-AA84-49227667179E}"/>
+              </a:ext>
+            </a:extLst>
+          </p:cNvPr>
+          <p:cNvSpPr>
+            <a:spLocks xmlns:a="http://schemas.openxmlformats.org/drawingml/2006/main" noGrp="1"/>
+          </p:cNvSpPr>
+          <p:nvPr/>
+        </p:nvSpPr>
+        <p:spPr>
+          <a:xfrm xmlns:a="http://schemas.openxmlformats.org/drawingml/2006/main">
+            <a:off x="457200" y="5114925"/>
+            <a:ext cx="5238750" cy="247650"/>
           </a:xfrm>
           <a:prstGeom xmlns:a="http://schemas.openxmlformats.org/drawingml/2006/main" prst="rect">
             <a:avLst/>
@@ -6507,70 +6540,47 @@
           <a:lstStyle xmlns:a="http://schemas.openxmlformats.org/drawingml/2006/main"/>
           <a:p xmlns:a="http://schemas.openxmlformats.org/drawingml/2006/main">
             <a:pPr>
-              <a:defRPr sz="1500">
-                <a:solidFill>
-                  <a:srgbClr val="202B36"/>
-                </a:solidFill>
-                <a:latin typeface="Calibri"/>
-                <a:ea typeface="Calibri"/>
-                <a:cs typeface="Calibri"/>
-              </a:defRPr>
-            </a:pPr>
-            <a:r>
-              <a:rPr sz="1500">
-                <a:solidFill>
-                  <a:srgbClr val="202B36"/>
-                </a:solidFill>
-                <a:latin typeface="Calibri"/>
-                <a:ea typeface="Calibri"/>
-                <a:cs typeface="Calibri"/>
-              </a:rPr>
-              <a:t>Optional loader and fallback are in place.</a:t>
-            </a:r>
-          </a:p>
-          <a:p xmlns:a="http://schemas.openxmlformats.org/drawingml/2006/main">
-            <a:pPr>
-              <a:defRPr sz="1500">
-                <a:solidFill>
-                  <a:srgbClr val="202B36"/>
-                </a:solidFill>
-                <a:latin typeface="Calibri"/>
-                <a:ea typeface="Calibri"/>
-                <a:cs typeface="Calibri"/>
-              </a:defRPr>
-            </a:pPr>
-            <a:r>
-              <a:rPr sz="1500">
-                <a:solidFill>
-                  <a:srgbClr val="202B36"/>
-                </a:solidFill>
-                <a:latin typeface="Calibri"/>
-                <a:ea typeface="Calibri"/>
-                <a:cs typeface="Calibri"/>
-              </a:rPr>
-              <a:t>Real runtime assets + trained detector are pending.</a:t>
-            </a:r>
-          </a:p>
-        </p:txBody>
-      </p:sp>
-      <p:sp>
-        <p:nvSpPr>
-          <p:cNvPr id="134" name="rev-66">
-            <a:extLst xmlns:a="http://schemas.openxmlformats.org/drawingml/2006/main">
-              <a:ext uri="{FF2B5EF4-FFF2-40B4-BE49-F238E27FC236}">
-                <a16:creationId xmlns:a16="http://schemas.microsoft.com/office/drawing/2014/main" id="{26558155-4FF8-4568-83A4-6E09C0F1B7B9}"/>
-              </a:ext>
-            </a:extLst>
-          </p:cNvPr>
-          <p:cNvSpPr>
-            <a:spLocks xmlns:a="http://schemas.openxmlformats.org/drawingml/2006/main" noGrp="1"/>
-          </p:cNvSpPr>
-          <p:nvPr/>
-        </p:nvSpPr>
-        <p:spPr>
-          <a:xfrm xmlns:a="http://schemas.openxmlformats.org/drawingml/2006/main">
-            <a:off x="457200" y="6162675"/>
-            <a:ext cx="11277600" cy="238125"/>
+              <a:defRPr sz="1500" b="1">
+                <a:solidFill>
+                  <a:srgbClr val="594463"/>
+                </a:solidFill>
+                <a:latin typeface="Calibri"/>
+                <a:ea typeface="Calibri"/>
+                <a:cs typeface="Calibri"/>
+              </a:defRPr>
+            </a:pPr>
+            <a:r>
+              <a:rPr sz="1500" b="1">
+                <a:solidFill>
+                  <a:srgbClr val="594463"/>
+                </a:solidFill>
+                <a:latin typeface="Calibri"/>
+                <a:ea typeface="Calibri"/>
+                <a:cs typeface="Calibri"/>
+              </a:rPr>
+              <a:t>Demo stage</a:t>
+            </a:r>
+          </a:p>
+        </p:txBody>
+      </p:sp>
+      <p:sp>
+        <p:nvSpPr>
+          <p:cNvPr id="135" name="rev-66">
+            <a:extLst xmlns:a="http://schemas.openxmlformats.org/drawingml/2006/main">
+              <a:ext uri="{FF2B5EF4-FFF2-40B4-BE49-F238E27FC236}">
+                <a16:creationId xmlns:a16="http://schemas.microsoft.com/office/drawing/2014/main" id="{3B7E2DB5-BCFE-43CC-A39C-153D0D92D7CB}"/>
+              </a:ext>
+            </a:extLst>
+          </p:cNvPr>
+          <p:cNvSpPr>
+            <a:spLocks xmlns:a="http://schemas.openxmlformats.org/drawingml/2006/main" noGrp="1"/>
+          </p:cNvSpPr>
+          <p:nvPr/>
+        </p:nvSpPr>
+        <p:spPr>
+          <a:xfrm xmlns:a="http://schemas.openxmlformats.org/drawingml/2006/main">
+            <a:off x="457200" y="5495925"/>
+            <a:ext cx="5400675" cy="571500"/>
           </a:xfrm>
           <a:prstGeom xmlns:a="http://schemas.openxmlformats.org/drawingml/2006/main" prst="rect">
             <a:avLst/>
@@ -6587,6 +6597,223 @@
           <a:lstStyle xmlns:a="http://schemas.openxmlformats.org/drawingml/2006/main"/>
           <a:p xmlns:a="http://schemas.openxmlformats.org/drawingml/2006/main">
             <a:pPr>
+              <a:defRPr sz="1500">
+                <a:solidFill>
+                  <a:srgbClr val="202B36"/>
+                </a:solidFill>
+                <a:latin typeface="Calibri"/>
+                <a:ea typeface="Calibri"/>
+                <a:cs typeface="Calibri"/>
+              </a:defRPr>
+            </a:pPr>
+            <a:r>
+              <a:rPr sz="1500">
+                <a:solidFill>
+                  <a:srgbClr val="202B36"/>
+                </a:solidFill>
+                <a:latin typeface="Calibri"/>
+                <a:ea typeface="Calibri"/>
+                <a:cs typeface="Calibri"/>
+              </a:rPr>
+              <a:t>DOM privacy + goal crop + guarded execution</a:t>
+            </a:r>
+          </a:p>
+          <a:p xmlns:a="http://schemas.openxmlformats.org/drawingml/2006/main">
+            <a:pPr>
+              <a:defRPr sz="1500">
+                <a:solidFill>
+                  <a:srgbClr val="202B36"/>
+                </a:solidFill>
+                <a:latin typeface="Calibri"/>
+                <a:ea typeface="Calibri"/>
+                <a:cs typeface="Calibri"/>
+              </a:defRPr>
+            </a:pPr>
+            <a:r>
+              <a:rPr sz="1500">
+                <a:solidFill>
+                  <a:srgbClr val="202B36"/>
+                </a:solidFill>
+                <a:latin typeface="Calibri"/>
+                <a:ea typeface="Calibri"/>
+                <a:cs typeface="Calibri"/>
+              </a:rPr>
+              <a:t>Rules planner uses disclosed control metadata</a:t>
+            </a:r>
+          </a:p>
+        </p:txBody>
+      </p:sp>
+      <p:sp>
+        <p:nvSpPr>
+          <p:cNvPr id="136" name="rev-67">
+            <a:extLst xmlns:a="http://schemas.openxmlformats.org/drawingml/2006/main">
+              <a:ext uri="{FF2B5EF4-FFF2-40B4-BE49-F238E27FC236}">
+                <a16:creationId xmlns:a16="http://schemas.microsoft.com/office/drawing/2014/main" id="{8FED531C-4156-43EF-9A70-CB020A0530B7}"/>
+              </a:ext>
+            </a:extLst>
+          </p:cNvPr>
+          <p:cNvSpPr>
+            <a:spLocks xmlns:a="http://schemas.openxmlformats.org/drawingml/2006/main" noGrp="1"/>
+          </p:cNvSpPr>
+          <p:nvPr/>
+        </p:nvSpPr>
+        <p:spPr>
+          <a:xfrm xmlns:a="http://schemas.openxmlformats.org/drawingml/2006/main">
+            <a:off x="6276975" y="5114925"/>
+            <a:ext cx="5457825" cy="247650"/>
+          </a:xfrm>
+          <a:prstGeom xmlns:a="http://schemas.openxmlformats.org/drawingml/2006/main" prst="rect">
+            <a:avLst/>
+          </a:prstGeom>
+          <a:noFill xmlns:a="http://schemas.openxmlformats.org/drawingml/2006/main"/>
+          <a:ln xmlns:a="http://schemas.openxmlformats.org/drawingml/2006/main" w="0">
+            <a:noFill/>
+          </a:ln>
+        </p:spPr>
+        <p:txBody>
+          <a:bodyPr xmlns:a="http://schemas.openxmlformats.org/drawingml/2006/main" wrap="square" lIns="0" tIns="0" rIns="0" bIns="0" anchor="t">
+            <a:noAutofit/>
+          </a:bodyPr>
+          <a:lstStyle xmlns:a="http://schemas.openxmlformats.org/drawingml/2006/main"/>
+          <a:p xmlns:a="http://schemas.openxmlformats.org/drawingml/2006/main">
+            <a:pPr>
+              <a:defRPr sz="1500" b="1">
+                <a:solidFill>
+                  <a:srgbClr val="594463"/>
+                </a:solidFill>
+                <a:latin typeface="Calibri"/>
+                <a:ea typeface="Calibri"/>
+                <a:cs typeface="Calibri"/>
+              </a:defRPr>
+            </a:pPr>
+            <a:r>
+              <a:rPr sz="1500" b="1">
+                <a:solidFill>
+                  <a:srgbClr val="594463"/>
+                </a:solidFill>
+                <a:latin typeface="Calibri"/>
+                <a:ea typeface="Calibri"/>
+                <a:cs typeface="Calibri"/>
+              </a:rPr>
+              <a:t>ONNX Runtime Web: integration scaffold</a:t>
+            </a:r>
+          </a:p>
+        </p:txBody>
+      </p:sp>
+      <p:sp>
+        <p:nvSpPr>
+          <p:cNvPr id="137" name="rev-68">
+            <a:extLst xmlns:a="http://schemas.openxmlformats.org/drawingml/2006/main">
+              <a:ext uri="{FF2B5EF4-FFF2-40B4-BE49-F238E27FC236}">
+                <a16:creationId xmlns:a16="http://schemas.microsoft.com/office/drawing/2014/main" id="{60672CB8-77FD-446F-BACC-E50D11FDA3F4}"/>
+              </a:ext>
+            </a:extLst>
+          </p:cNvPr>
+          <p:cNvSpPr>
+            <a:spLocks xmlns:a="http://schemas.openxmlformats.org/drawingml/2006/main" noGrp="1"/>
+          </p:cNvSpPr>
+          <p:nvPr/>
+        </p:nvSpPr>
+        <p:spPr>
+          <a:xfrm xmlns:a="http://schemas.openxmlformats.org/drawingml/2006/main">
+            <a:off x="6276975" y="5495925"/>
+            <a:ext cx="5457825" cy="571500"/>
+          </a:xfrm>
+          <a:prstGeom xmlns:a="http://schemas.openxmlformats.org/drawingml/2006/main" prst="rect">
+            <a:avLst/>
+          </a:prstGeom>
+          <a:noFill xmlns:a="http://schemas.openxmlformats.org/drawingml/2006/main"/>
+          <a:ln xmlns:a="http://schemas.openxmlformats.org/drawingml/2006/main" w="0">
+            <a:noFill/>
+          </a:ln>
+        </p:spPr>
+        <p:txBody>
+          <a:bodyPr xmlns:a="http://schemas.openxmlformats.org/drawingml/2006/main" wrap="square" lIns="0" tIns="0" rIns="0" bIns="0" anchor="t">
+            <a:noAutofit/>
+          </a:bodyPr>
+          <a:lstStyle xmlns:a="http://schemas.openxmlformats.org/drawingml/2006/main"/>
+          <a:p xmlns:a="http://schemas.openxmlformats.org/drawingml/2006/main">
+            <a:pPr>
+              <a:defRPr sz="1500">
+                <a:solidFill>
+                  <a:srgbClr val="202B36"/>
+                </a:solidFill>
+                <a:latin typeface="Calibri"/>
+                <a:ea typeface="Calibri"/>
+                <a:cs typeface="Calibri"/>
+              </a:defRPr>
+            </a:pPr>
+            <a:r>
+              <a:rPr sz="1500">
+                <a:solidFill>
+                  <a:srgbClr val="202B36"/>
+                </a:solidFill>
+                <a:latin typeface="Calibri"/>
+                <a:ea typeface="Calibri"/>
+                <a:cs typeface="Calibri"/>
+              </a:rPr>
+              <a:t>Optional loader with DOM fallback is in place.</a:t>
+            </a:r>
+          </a:p>
+          <a:p xmlns:a="http://schemas.openxmlformats.org/drawingml/2006/main">
+            <a:pPr>
+              <a:defRPr sz="1500">
+                <a:solidFill>
+                  <a:srgbClr val="202B36"/>
+                </a:solidFill>
+                <a:latin typeface="Calibri"/>
+                <a:ea typeface="Calibri"/>
+                <a:cs typeface="Calibri"/>
+              </a:defRPr>
+            </a:pPr>
+            <a:r>
+              <a:rPr sz="1500">
+                <a:solidFill>
+                  <a:srgbClr val="202B36"/>
+                </a:solidFill>
+                <a:latin typeface="Calibri"/>
+                <a:ea typeface="Calibri"/>
+                <a:cs typeface="Calibri"/>
+              </a:rPr>
+              <a:t>Trained detector + real runtime assets are pending.</a:t>
+            </a:r>
+          </a:p>
+        </p:txBody>
+      </p:sp>
+      <p:sp>
+        <p:nvSpPr>
+          <p:cNvPr id="138" name="rev-69">
+            <a:extLst xmlns:a="http://schemas.openxmlformats.org/drawingml/2006/main">
+              <a:ext uri="{FF2B5EF4-FFF2-40B4-BE49-F238E27FC236}">
+                <a16:creationId xmlns:a16="http://schemas.microsoft.com/office/drawing/2014/main" id="{FF02A56C-21FC-4289-A72A-6BAD78747772}"/>
+              </a:ext>
+            </a:extLst>
+          </p:cNvPr>
+          <p:cNvSpPr>
+            <a:spLocks xmlns:a="http://schemas.openxmlformats.org/drawingml/2006/main" noGrp="1"/>
+          </p:cNvSpPr>
+          <p:nvPr/>
+        </p:nvSpPr>
+        <p:spPr>
+          <a:xfrm xmlns:a="http://schemas.openxmlformats.org/drawingml/2006/main">
+            <a:off x="457200" y="6181725"/>
+            <a:ext cx="11277600" cy="209550"/>
+          </a:xfrm>
+          <a:prstGeom xmlns:a="http://schemas.openxmlformats.org/drawingml/2006/main" prst="rect">
+            <a:avLst/>
+          </a:prstGeom>
+          <a:noFill xmlns:a="http://schemas.openxmlformats.org/drawingml/2006/main"/>
+          <a:ln xmlns:a="http://schemas.openxmlformats.org/drawingml/2006/main" w="0">
+            <a:noFill/>
+          </a:ln>
+        </p:spPr>
+        <p:txBody>
+          <a:bodyPr xmlns:a="http://schemas.openxmlformats.org/drawingml/2006/main" wrap="square" lIns="0" tIns="0" rIns="0" bIns="0" anchor="t">
+            <a:noAutofit/>
+          </a:bodyPr>
+          <a:lstStyle xmlns:a="http://schemas.openxmlformats.org/drawingml/2006/main"/>
+          <a:p xmlns:a="http://schemas.openxmlformats.org/drawingml/2006/main">
+            <a:pPr>
               <a:defRPr sz="1125">
                 <a:solidFill>
                   <a:srgbClr val="53616D"/>
@@ -6605,7 +6832,7 @@
                 <a:ea typeface="Calibri"/>
                 <a:cs typeface="Calibri"/>
               </a:rPr>
-              <a:t>Target visual path: ONNX Runtime Web with WebGPU / WASM. Open-weight VLM and Firefox validation are next milestones.</a:t>
+              <a:t>Next: browser visual/OCR path, WebGPU / WASM timing, VLM integration tests and Firefox validation.</a:t>
             </a:r>
           </a:p>
         </p:txBody>
@@ -6613,7 +6840,7 @@
     </p:spTree>
     <p:extLst>
       <p:ext uri="{BB962C8B-B14F-4D97-AF65-F5344CB8AC3E}">
-        <p14:creationId xmlns:p14="http://schemas.microsoft.com/office/powerpoint/2010/main" val="1671987697"/>
+        <p14:creationId xmlns:p14="http://schemas.microsoft.com/office/powerpoint/2010/main" val="1496366426"/>
       </p:ext>
     </p:extLst>
   </p:cSld>
@@ -6637,7 +6864,7 @@
           <p:cNvPr id="2" name="Shape 0">
             <a:extLst xmlns:a="http://schemas.openxmlformats.org/drawingml/2006/main">
               <a:ext uri="{FF2B5EF4-FFF2-40B4-BE49-F238E27FC236}">
-                <a16:creationId xmlns:a16="http://schemas.microsoft.com/office/drawing/2014/main" id="{D1FB72EA-7C9A-46DF-BC21-87B65ED6DD70}"/>
+                <a16:creationId xmlns:a16="http://schemas.microsoft.com/office/drawing/2014/main" id="{E948E927-D752-4F09-B9B1-372C73BD1FA4}"/>
               </a:ext>
             </a:extLst>
           </p:cNvPr>
@@ -6677,7 +6904,7 @@
           <p:cNvPr id="3" name="Text 1">
             <a:extLst xmlns:a="http://schemas.openxmlformats.org/drawingml/2006/main">
               <a:ext uri="{FF2B5EF4-FFF2-40B4-BE49-F238E27FC236}">
-                <a16:creationId xmlns:a16="http://schemas.microsoft.com/office/drawing/2014/main" id="{82CFFA72-FA87-42A9-A22D-94C5587F83FF}"/>
+                <a16:creationId xmlns:a16="http://schemas.microsoft.com/office/drawing/2014/main" id="{FB986ADB-69BB-4FC2-BA42-F09E3775F52D}"/>
               </a:ext>
             </a:extLst>
           </p:cNvPr>
@@ -6723,7 +6950,7 @@
           <p:cNvPr id="4" name="Text 2">
             <a:extLst xmlns:a="http://schemas.openxmlformats.org/drawingml/2006/main">
               <a:ext uri="{FF2B5EF4-FFF2-40B4-BE49-F238E27FC236}">
-                <a16:creationId xmlns:a16="http://schemas.microsoft.com/office/drawing/2014/main" id="{15AA84DC-4A95-4E81-BD55-4F0AE4E457F5}"/>
+                <a16:creationId xmlns:a16="http://schemas.microsoft.com/office/drawing/2014/main" id="{4AFE63F5-1941-49F5-BCF0-19A200FDBD2C}"/>
               </a:ext>
             </a:extLst>
           </p:cNvPr>
@@ -6773,7 +7000,7 @@
           <p:nvPr/>
         </p:nvPicPr>
         <p:blipFill>
-          <a:blip xmlns:r="http://schemas.openxmlformats.org/officeDocument/2006/relationships" xmlns:a="http://schemas.openxmlformats.org/drawingml/2006/main" r:embed="Reba551bc525646fe"/>
+          <a:blip xmlns:r="http://schemas.openxmlformats.org/officeDocument/2006/relationships" xmlns:a="http://schemas.openxmlformats.org/drawingml/2006/main" r:embed="R4299a0c252894dd2"/>
           <a:stretch xmlns:a="http://schemas.openxmlformats.org/drawingml/2006/main">
             <a:fillRect l="0" t="0" r="0" b="0"/>
           </a:stretch>
@@ -6800,7 +7027,7 @@
           <p:cNvPr id="7" name="Shape 4">
             <a:extLst xmlns:a="http://schemas.openxmlformats.org/drawingml/2006/main">
               <a:ext uri="{FF2B5EF4-FFF2-40B4-BE49-F238E27FC236}">
-                <a16:creationId xmlns:a16="http://schemas.microsoft.com/office/drawing/2014/main" id="{9C7C90C2-416D-4945-A2F7-5C52F30D2162}"/>
+                <a16:creationId xmlns:a16="http://schemas.microsoft.com/office/drawing/2014/main" id="{169F2EC0-C456-42E4-9377-CCE555ECA369}"/>
               </a:ext>
             </a:extLst>
           </p:cNvPr>
@@ -6827,7 +7054,7 @@
           <p:cNvPr id="9" name="Text 6">
             <a:extLst xmlns:a="http://schemas.openxmlformats.org/drawingml/2006/main">
               <a:ext uri="{FF2B5EF4-FFF2-40B4-BE49-F238E27FC236}">
-                <a16:creationId xmlns:a16="http://schemas.microsoft.com/office/drawing/2014/main" id="{F675C74C-50D8-4EF7-B763-59704AE2C417}"/>
+                <a16:creationId xmlns:a16="http://schemas.microsoft.com/office/drawing/2014/main" id="{D6F065A1-7CF6-4134-9D2C-46A02C654709}"/>
               </a:ext>
             </a:extLst>
           </p:cNvPr>
@@ -6870,10 +7097,10 @@
       </p:sp>
       <p:sp>
         <p:nvSpPr>
-          <p:cNvPr id="98" name="rev-67">
-            <a:extLst xmlns:a="http://schemas.openxmlformats.org/drawingml/2006/main">
-              <a:ext uri="{FF2B5EF4-FFF2-40B4-BE49-F238E27FC236}">
-                <a16:creationId xmlns:a16="http://schemas.microsoft.com/office/drawing/2014/main" id="{C6247E5C-4CA5-48E3-9C7C-BAEDB72D0407}"/>
+          <p:cNvPr id="98" name="rev-70">
+            <a:extLst xmlns:a="http://schemas.openxmlformats.org/drawingml/2006/main">
+              <a:ext uri="{FF2B5EF4-FFF2-40B4-BE49-F238E27FC236}">
+                <a16:creationId xmlns:a16="http://schemas.microsoft.com/office/drawing/2014/main" id="{3954B6F9-FF04-4DD2-9F00-9F4D0DD2BF03}"/>
               </a:ext>
             </a:extLst>
           </p:cNvPr>
@@ -6927,10 +7154,10 @@
       </p:sp>
       <p:sp>
         <p:nvSpPr>
-          <p:cNvPr id="99" name="rev-68">
-            <a:extLst xmlns:a="http://schemas.openxmlformats.org/drawingml/2006/main">
-              <a:ext uri="{FF2B5EF4-FFF2-40B4-BE49-F238E27FC236}">
-                <a16:creationId xmlns:a16="http://schemas.microsoft.com/office/drawing/2014/main" id="{36A8D00D-9FDA-4BA1-AD4A-C003EC90DF60}"/>
+          <p:cNvPr id="99" name="rev-71">
+            <a:extLst xmlns:a="http://schemas.openxmlformats.org/drawingml/2006/main">
+              <a:ext uri="{FF2B5EF4-FFF2-40B4-BE49-F238E27FC236}">
+                <a16:creationId xmlns:a16="http://schemas.microsoft.com/office/drawing/2014/main" id="{321D6175-A2D5-4A05-AF93-6B89CFDAF6DA}"/>
               </a:ext>
             </a:extLst>
           </p:cNvPr>
@@ -6977,7 +7204,7 @@
                 <a:ea typeface="Calibri"/>
                 <a:cs typeface="Calibri"/>
               </a:rPr>
-              <a:t>48 fresh synthetic pages / 4 portal families / 408 sensitive annotations</a:t>
+              <a:t>CPU reference benchmark: 48 fresh synthetic pages / 408 sensitive annotations</a:t>
             </a:r>
           </a:p>
         </p:txBody>
@@ -7505,10 +7732,10 @@
       </p:graphicFrame>
       <p:sp>
         <p:nvSpPr>
-          <p:cNvPr id="101" name="rev-69">
-            <a:extLst xmlns:a="http://schemas.openxmlformats.org/drawingml/2006/main">
-              <a:ext uri="{FF2B5EF4-FFF2-40B4-BE49-F238E27FC236}">
-                <a16:creationId xmlns:a16="http://schemas.microsoft.com/office/drawing/2014/main" id="{C7CC81F6-1D0E-4717-8F14-6317CB84C9BF}"/>
+          <p:cNvPr id="101" name="rev-72">
+            <a:extLst xmlns:a="http://schemas.openxmlformats.org/drawingml/2006/main">
+              <a:ext uri="{FF2B5EF4-FFF2-40B4-BE49-F238E27FC236}">
+                <a16:creationId xmlns:a16="http://schemas.microsoft.com/office/drawing/2014/main" id="{E4A49F45-B239-4CE5-BA2D-D3644EAF0DB4}"/>
               </a:ext>
             </a:extLst>
           </p:cNvPr>
@@ -7562,10 +7789,10 @@
       </p:sp>
       <p:sp>
         <p:nvSpPr>
-          <p:cNvPr id="102" name="rev-70">
-            <a:extLst xmlns:a="http://schemas.openxmlformats.org/drawingml/2006/main">
-              <a:ext uri="{FF2B5EF4-FFF2-40B4-BE49-F238E27FC236}">
-                <a16:creationId xmlns:a16="http://schemas.microsoft.com/office/drawing/2014/main" id="{B9C11372-E837-451D-9093-37245424DD0C}"/>
+          <p:cNvPr id="102" name="rev-73">
+            <a:extLst xmlns:a="http://schemas.openxmlformats.org/drawingml/2006/main">
+              <a:ext uri="{FF2B5EF4-FFF2-40B4-BE49-F238E27FC236}">
+                <a16:creationId xmlns:a16="http://schemas.microsoft.com/office/drawing/2014/main" id="{D3B2B3C6-99F6-4AA4-994A-1BB1892D1B5F}"/>
               </a:ext>
             </a:extLst>
           </p:cNvPr>
@@ -7612,17 +7839,17 @@
                 <a:ea typeface="Calibri"/>
                 <a:cs typeface="Calibri"/>
               </a:rPr>
-              <a:t>Python-process RAM excludes Tesseract child memory. Timing excludes browser execution and verification.</a:t>
-            </a:r>
-          </a:p>
-        </p:txBody>
-      </p:sp>
-      <p:sp>
-        <p:nvSpPr>
-          <p:cNvPr id="103" name="rev-71">
-            <a:extLst xmlns:a="http://schemas.openxmlformats.org/drawingml/2006/main">
-              <a:ext uri="{FF2B5EF4-FFF2-40B4-BE49-F238E27FC236}">
-                <a16:creationId xmlns:a16="http://schemas.microsoft.com/office/drawing/2014/main" id="{2B983907-36FB-4A7A-B9CA-A052184773E2}"/>
+              <a:t>RAM and CPU exclude the Tesseract child process. Latency excludes browser execution and verification.</a:t>
+            </a:r>
+          </a:p>
+        </p:txBody>
+      </p:sp>
+      <p:sp>
+        <p:nvSpPr>
+          <p:cNvPr id="103" name="rev-74">
+            <a:extLst xmlns:a="http://schemas.openxmlformats.org/drawingml/2006/main">
+              <a:ext uri="{FF2B5EF4-FFF2-40B4-BE49-F238E27FC236}">
+                <a16:creationId xmlns:a16="http://schemas.microsoft.com/office/drawing/2014/main" id="{A50E234F-0208-45FA-8692-1C8DE1A19AA8}"/>
               </a:ext>
             </a:extLst>
           </p:cNvPr>
@@ -7676,10 +7903,10 @@
       </p:sp>
       <p:sp>
         <p:nvSpPr>
-          <p:cNvPr id="104" name="rev-72">
-            <a:extLst xmlns:a="http://schemas.openxmlformats.org/drawingml/2006/main">
-              <a:ext uri="{FF2B5EF4-FFF2-40B4-BE49-F238E27FC236}">
-                <a16:creationId xmlns:a16="http://schemas.microsoft.com/office/drawing/2014/main" id="{D36E5892-B6C0-43EC-B696-E0694E9E42F4}"/>
+          <p:cNvPr id="104" name="rev-75">
+            <a:extLst xmlns:a="http://schemas.openxmlformats.org/drawingml/2006/main">
+              <a:ext uri="{FF2B5EF4-FFF2-40B4-BE49-F238E27FC236}">
+                <a16:creationId xmlns:a16="http://schemas.microsoft.com/office/drawing/2014/main" id="{2D238F3F-936D-48E2-8A1C-D294B85FD082}"/>
               </a:ext>
             </a:extLst>
           </p:cNvPr>
@@ -7726,17 +7953,17 @@
                 <a:ea typeface="Calibri"/>
                 <a:cs typeface="Calibri"/>
               </a:rPr>
-              <a:t>DOM-blind recall: 0.878. Improve OCR with field labels. Container rejection already reduces whole-card masking.</a:t>
-            </a:r>
-          </a:p>
-        </p:txBody>
-      </p:sp>
-      <p:sp>
-        <p:nvSpPr>
-          <p:cNvPr id="105" name="rev-73">
-            <a:extLst xmlns:a="http://schemas.openxmlformats.org/drawingml/2006/main">
-              <a:ext uri="{FF2B5EF4-FFF2-40B4-BE49-F238E27FC236}">
-                <a16:creationId xmlns:a16="http://schemas.microsoft.com/office/drawing/2014/main" id="{4E791101-553C-4372-8291-F65ED89BD54B}"/>
+              <a:t>DOM-blind redaction recall: 0.878. Add label-aware OCR, then port and test selective escalation in the browser.</a:t>
+            </a:r>
+          </a:p>
+        </p:txBody>
+      </p:sp>
+      <p:sp>
+        <p:nvSpPr>
+          <p:cNvPr id="105" name="rev-76">
+            <a:extLst xmlns:a="http://schemas.openxmlformats.org/drawingml/2006/main">
+              <a:ext uri="{FF2B5EF4-FFF2-40B4-BE49-F238E27FC236}">
+                <a16:creationId xmlns:a16="http://schemas.microsoft.com/office/drawing/2014/main" id="{E830935B-8FC6-4AA0-AB18-63761A7CD4D2}"/>
               </a:ext>
             </a:extLst>
           </p:cNvPr>
@@ -7790,10 +8017,10 @@
       </p:sp>
       <p:sp>
         <p:nvSpPr>
-          <p:cNvPr id="106" name="step-74">
-            <a:extLst xmlns:a="http://schemas.openxmlformats.org/drawingml/2006/main">
-              <a:ext uri="{FF2B5EF4-FFF2-40B4-BE49-F238E27FC236}">
-                <a16:creationId xmlns:a16="http://schemas.microsoft.com/office/drawing/2014/main" id="{F482F48C-B7A8-4F85-8607-324C72F076C9}"/>
+          <p:cNvPr id="106" name="step-77">
+            <a:extLst xmlns:a="http://schemas.openxmlformats.org/drawingml/2006/main">
+              <a:ext uri="{FF2B5EF4-FFF2-40B4-BE49-F238E27FC236}">
+                <a16:creationId xmlns:a16="http://schemas.microsoft.com/office/drawing/2014/main" id="{23447DE5-DCC5-4A46-BD71-2FB552CC8E7E}"/>
               </a:ext>
             </a:extLst>
           </p:cNvPr>
@@ -7820,10 +8047,10 @@
       </p:sp>
       <p:sp>
         <p:nvSpPr>
-          <p:cNvPr id="107" name="rev-75">
-            <a:extLst xmlns:a="http://schemas.openxmlformats.org/drawingml/2006/main">
-              <a:ext uri="{FF2B5EF4-FFF2-40B4-BE49-F238E27FC236}">
-                <a16:creationId xmlns:a16="http://schemas.microsoft.com/office/drawing/2014/main" id="{9F7F6E59-3381-4893-9A1C-6E312E978A3A}"/>
+          <p:cNvPr id="107" name="rev-78">
+            <a:extLst xmlns:a="http://schemas.openxmlformats.org/drawingml/2006/main">
+              <a:ext uri="{FF2B5EF4-FFF2-40B4-BE49-F238E27FC236}">
+                <a16:creationId xmlns:a16="http://schemas.microsoft.com/office/drawing/2014/main" id="{B29718D0-B31C-404E-B3D2-194203CD2E21}"/>
               </a:ext>
             </a:extLst>
           </p:cNvPr>
@@ -7877,10 +8104,10 @@
       </p:sp>
       <p:sp>
         <p:nvSpPr>
-          <p:cNvPr id="108" name="rev-76">
-            <a:extLst xmlns:a="http://schemas.openxmlformats.org/drawingml/2006/main">
-              <a:ext uri="{FF2B5EF4-FFF2-40B4-BE49-F238E27FC236}">
-                <a16:creationId xmlns:a16="http://schemas.microsoft.com/office/drawing/2014/main" id="{A51F1A8A-336E-483D-9C92-FF98401F8463}"/>
+          <p:cNvPr id="108" name="rev-79">
+            <a:extLst xmlns:a="http://schemas.openxmlformats.org/drawingml/2006/main">
+              <a:ext uri="{FF2B5EF4-FFF2-40B4-BE49-F238E27FC236}">
+                <a16:creationId xmlns:a16="http://schemas.microsoft.com/office/drawing/2014/main" id="{D76AFFCB-192D-4E9C-8B3D-A3C1B3302405}"/>
               </a:ext>
             </a:extLst>
           </p:cNvPr>
@@ -7934,10 +8161,10 @@
       </p:sp>
       <p:sp>
         <p:nvSpPr>
-          <p:cNvPr id="109" name="rev-77">
-            <a:extLst xmlns:a="http://schemas.openxmlformats.org/drawingml/2006/main">
-              <a:ext uri="{FF2B5EF4-FFF2-40B4-BE49-F238E27FC236}">
-                <a16:creationId xmlns:a16="http://schemas.microsoft.com/office/drawing/2014/main" id="{66802A7D-B4DF-4BF9-A051-A477C34465E2}"/>
+          <p:cNvPr id="109" name="rev-80">
+            <a:extLst xmlns:a="http://schemas.openxmlformats.org/drawingml/2006/main">
+              <a:ext uri="{FF2B5EF4-FFF2-40B4-BE49-F238E27FC236}">
+                <a16:creationId xmlns:a16="http://schemas.microsoft.com/office/drawing/2014/main" id="{5D20AE8A-3797-4D22-80F5-F5CF711F821C}"/>
               </a:ext>
             </a:extLst>
           </p:cNvPr>
@@ -7991,10 +8218,10 @@
       </p:sp>
       <p:sp>
         <p:nvSpPr>
-          <p:cNvPr id="110" name="step-78">
-            <a:extLst xmlns:a="http://schemas.openxmlformats.org/drawingml/2006/main">
-              <a:ext uri="{FF2B5EF4-FFF2-40B4-BE49-F238E27FC236}">
-                <a16:creationId xmlns:a16="http://schemas.microsoft.com/office/drawing/2014/main" id="{0C957E13-F963-4AFC-B520-7D91A476C2B5}"/>
+          <p:cNvPr id="110" name="step-81">
+            <a:extLst xmlns:a="http://schemas.openxmlformats.org/drawingml/2006/main">
+              <a:ext uri="{FF2B5EF4-FFF2-40B4-BE49-F238E27FC236}">
+                <a16:creationId xmlns:a16="http://schemas.microsoft.com/office/drawing/2014/main" id="{0EE94A36-492E-4931-8878-B4F95AE7E171}"/>
               </a:ext>
             </a:extLst>
           </p:cNvPr>
@@ -8021,10 +8248,10 @@
       </p:sp>
       <p:sp>
         <p:nvSpPr>
-          <p:cNvPr id="111" name="rev-79">
-            <a:extLst xmlns:a="http://schemas.openxmlformats.org/drawingml/2006/main">
-              <a:ext uri="{FF2B5EF4-FFF2-40B4-BE49-F238E27FC236}">
-                <a16:creationId xmlns:a16="http://schemas.microsoft.com/office/drawing/2014/main" id="{B7A38C79-BC8D-4F48-8462-43CB43415826}"/>
+          <p:cNvPr id="111" name="rev-82">
+            <a:extLst xmlns:a="http://schemas.openxmlformats.org/drawingml/2006/main">
+              <a:ext uri="{FF2B5EF4-FFF2-40B4-BE49-F238E27FC236}">
+                <a16:creationId xmlns:a16="http://schemas.microsoft.com/office/drawing/2014/main" id="{A2788331-DBF3-4513-9CCD-19A43839AC59}"/>
               </a:ext>
             </a:extLst>
           </p:cNvPr>
@@ -8078,10 +8305,10 @@
       </p:sp>
       <p:sp>
         <p:nvSpPr>
-          <p:cNvPr id="112" name="rev-80">
-            <a:extLst xmlns:a="http://schemas.openxmlformats.org/drawingml/2006/main">
-              <a:ext uri="{FF2B5EF4-FFF2-40B4-BE49-F238E27FC236}">
-                <a16:creationId xmlns:a16="http://schemas.microsoft.com/office/drawing/2014/main" id="{1AC24DE6-E66B-4256-B9AA-48AA3D3AD137}"/>
+          <p:cNvPr id="112" name="rev-83">
+            <a:extLst xmlns:a="http://schemas.openxmlformats.org/drawingml/2006/main">
+              <a:ext uri="{FF2B5EF4-FFF2-40B4-BE49-F238E27FC236}">
+                <a16:creationId xmlns:a16="http://schemas.microsoft.com/office/drawing/2014/main" id="{0F32349A-9672-4E8A-894C-758C5824ACB4}"/>
               </a:ext>
             </a:extLst>
           </p:cNvPr>
@@ -8135,10 +8362,10 @@
       </p:sp>
       <p:sp>
         <p:nvSpPr>
-          <p:cNvPr id="113" name="rev-81">
-            <a:extLst xmlns:a="http://schemas.openxmlformats.org/drawingml/2006/main">
-              <a:ext uri="{FF2B5EF4-FFF2-40B4-BE49-F238E27FC236}">
-                <a16:creationId xmlns:a16="http://schemas.microsoft.com/office/drawing/2014/main" id="{6CE733EF-EBD7-4EC7-BCED-EF62F71C0379}"/>
+          <p:cNvPr id="113" name="rev-84">
+            <a:extLst xmlns:a="http://schemas.openxmlformats.org/drawingml/2006/main">
+              <a:ext uri="{FF2B5EF4-FFF2-40B4-BE49-F238E27FC236}">
+                <a16:creationId xmlns:a16="http://schemas.microsoft.com/office/drawing/2014/main" id="{6C6DB5D8-3350-4972-93FC-59C0D6072286}"/>
               </a:ext>
             </a:extLst>
           </p:cNvPr>
@@ -8192,10 +8419,10 @@
       </p:sp>
       <p:sp>
         <p:nvSpPr>
-          <p:cNvPr id="114" name="step-82">
-            <a:extLst xmlns:a="http://schemas.openxmlformats.org/drawingml/2006/main">
-              <a:ext uri="{FF2B5EF4-FFF2-40B4-BE49-F238E27FC236}">
-                <a16:creationId xmlns:a16="http://schemas.microsoft.com/office/drawing/2014/main" id="{467D7EE1-9D15-4C7F-9B2A-09CDFA24E252}"/>
+          <p:cNvPr id="114" name="step-85">
+            <a:extLst xmlns:a="http://schemas.openxmlformats.org/drawingml/2006/main">
+              <a:ext uri="{FF2B5EF4-FFF2-40B4-BE49-F238E27FC236}">
+                <a16:creationId xmlns:a16="http://schemas.microsoft.com/office/drawing/2014/main" id="{F02ACD20-E526-443D-866B-71A66E9FA4BD}"/>
               </a:ext>
             </a:extLst>
           </p:cNvPr>
@@ -8222,10 +8449,10 @@
       </p:sp>
       <p:sp>
         <p:nvSpPr>
-          <p:cNvPr id="115" name="rev-83">
-            <a:extLst xmlns:a="http://schemas.openxmlformats.org/drawingml/2006/main">
-              <a:ext uri="{FF2B5EF4-FFF2-40B4-BE49-F238E27FC236}">
-                <a16:creationId xmlns:a16="http://schemas.microsoft.com/office/drawing/2014/main" id="{A1CFC833-9805-476A-B619-FF18F7A032DC}"/>
+          <p:cNvPr id="115" name="rev-86">
+            <a:extLst xmlns:a="http://schemas.openxmlformats.org/drawingml/2006/main">
+              <a:ext uri="{FF2B5EF4-FFF2-40B4-BE49-F238E27FC236}">
+                <a16:creationId xmlns:a16="http://schemas.microsoft.com/office/drawing/2014/main" id="{643860C8-CCCD-4457-A485-7E334B721BF1}"/>
               </a:ext>
             </a:extLst>
           </p:cNvPr>
@@ -8279,10 +8506,10 @@
       </p:sp>
       <p:sp>
         <p:nvSpPr>
-          <p:cNvPr id="116" name="rev-84">
-            <a:extLst xmlns:a="http://schemas.openxmlformats.org/drawingml/2006/main">
-              <a:ext uri="{FF2B5EF4-FFF2-40B4-BE49-F238E27FC236}">
-                <a16:creationId xmlns:a16="http://schemas.microsoft.com/office/drawing/2014/main" id="{D89F63AB-65AB-4F95-87D9-B0845A605042}"/>
+          <p:cNvPr id="116" name="rev-87">
+            <a:extLst xmlns:a="http://schemas.openxmlformats.org/drawingml/2006/main">
+              <a:ext uri="{FF2B5EF4-FFF2-40B4-BE49-F238E27FC236}">
+                <a16:creationId xmlns:a16="http://schemas.microsoft.com/office/drawing/2014/main" id="{9469513C-889A-439F-9495-0388F111BFDB}"/>
               </a:ext>
             </a:extLst>
           </p:cNvPr>
@@ -8336,10 +8563,10 @@
       </p:sp>
       <p:sp>
         <p:nvSpPr>
-          <p:cNvPr id="117" name="rev-85">
-            <a:extLst xmlns:a="http://schemas.openxmlformats.org/drawingml/2006/main">
-              <a:ext uri="{FF2B5EF4-FFF2-40B4-BE49-F238E27FC236}">
-                <a16:creationId xmlns:a16="http://schemas.microsoft.com/office/drawing/2014/main" id="{192B0F87-EBBE-44CD-A17E-183F72A9DCA0}"/>
+          <p:cNvPr id="117" name="rev-88">
+            <a:extLst xmlns:a="http://schemas.openxmlformats.org/drawingml/2006/main">
+              <a:ext uri="{FF2B5EF4-FFF2-40B4-BE49-F238E27FC236}">
+                <a16:creationId xmlns:a16="http://schemas.microsoft.com/office/drawing/2014/main" id="{9F0F8AD2-5AC9-40D6-ACB0-03C3780B928A}"/>
               </a:ext>
             </a:extLst>
           </p:cNvPr>
@@ -8394,7 +8621,7 @@
     </p:spTree>
     <p:extLst>
       <p:ext uri="{BB962C8B-B14F-4D97-AF65-F5344CB8AC3E}">
-        <p14:creationId xmlns:p14="http://schemas.microsoft.com/office/powerpoint/2010/main" val="1294272875"/>
+        <p14:creationId xmlns:p14="http://schemas.microsoft.com/office/powerpoint/2010/main" val="1399969059"/>
       </p:ext>
     </p:extLst>
   </p:cSld>
@@ -8418,7 +8645,7 @@
           <p:cNvPr id="2" name="Shape 0">
             <a:extLst xmlns:a="http://schemas.openxmlformats.org/drawingml/2006/main">
               <a:ext uri="{FF2B5EF4-FFF2-40B4-BE49-F238E27FC236}">
-                <a16:creationId xmlns:a16="http://schemas.microsoft.com/office/drawing/2014/main" id="{D8BA7EFB-046B-4A91-B307-C7DD0112A03D}"/>
+                <a16:creationId xmlns:a16="http://schemas.microsoft.com/office/drawing/2014/main" id="{FCF51B21-30AA-49FA-8D89-BF33DCFEBAE5}"/>
               </a:ext>
             </a:extLst>
           </p:cNvPr>
@@ -8458,7 +8685,7 @@
           <p:cNvPr id="3" name="Text 1">
             <a:extLst xmlns:a="http://schemas.openxmlformats.org/drawingml/2006/main">
               <a:ext uri="{FF2B5EF4-FFF2-40B4-BE49-F238E27FC236}">
-                <a16:creationId xmlns:a16="http://schemas.microsoft.com/office/drawing/2014/main" id="{4494F372-F4E0-4569-886D-6267329DBEA2}"/>
+                <a16:creationId xmlns:a16="http://schemas.microsoft.com/office/drawing/2014/main" id="{E25A6B43-97A1-426C-BE97-262E8A504593}"/>
               </a:ext>
             </a:extLst>
           </p:cNvPr>
@@ -8504,7 +8731,7 @@
           <p:cNvPr id="4" name="Text 2">
             <a:extLst xmlns:a="http://schemas.openxmlformats.org/drawingml/2006/main">
               <a:ext uri="{FF2B5EF4-FFF2-40B4-BE49-F238E27FC236}">
-                <a16:creationId xmlns:a16="http://schemas.microsoft.com/office/drawing/2014/main" id="{1F2DCC31-9601-4B6A-8859-6B4535DBEE8D}"/>
+                <a16:creationId xmlns:a16="http://schemas.microsoft.com/office/drawing/2014/main" id="{544C295D-A093-41CA-8ADF-39FEA7D5A937}"/>
               </a:ext>
             </a:extLst>
           </p:cNvPr>
@@ -8554,7 +8781,7 @@
           <p:nvPr/>
         </p:nvPicPr>
         <p:blipFill>
-          <a:blip xmlns:r="http://schemas.openxmlformats.org/officeDocument/2006/relationships" xmlns:a="http://schemas.openxmlformats.org/drawingml/2006/main" r:embed="Rd8bcb81572864700"/>
+          <a:blip xmlns:r="http://schemas.openxmlformats.org/officeDocument/2006/relationships" xmlns:a="http://schemas.openxmlformats.org/drawingml/2006/main" r:embed="R89c4bca2056844c5"/>
           <a:stretch xmlns:a="http://schemas.openxmlformats.org/drawingml/2006/main">
             <a:fillRect l="0" t="0" r="0" b="0"/>
           </a:stretch>
@@ -8581,7 +8808,7 @@
           <p:cNvPr id="7" name="Shape 4">
             <a:extLst xmlns:a="http://schemas.openxmlformats.org/drawingml/2006/main">
               <a:ext uri="{FF2B5EF4-FFF2-40B4-BE49-F238E27FC236}">
-                <a16:creationId xmlns:a16="http://schemas.microsoft.com/office/drawing/2014/main" id="{8C6E963E-E7F3-4DA9-A782-F39ECAE5333F}"/>
+                <a16:creationId xmlns:a16="http://schemas.microsoft.com/office/drawing/2014/main" id="{550C2030-2162-4359-A507-ED53EAB85406}"/>
               </a:ext>
             </a:extLst>
           </p:cNvPr>
@@ -8608,7 +8835,7 @@
           <p:cNvPr id="9" name="Text 6">
             <a:extLst xmlns:a="http://schemas.openxmlformats.org/drawingml/2006/main">
               <a:ext uri="{FF2B5EF4-FFF2-40B4-BE49-F238E27FC236}">
-                <a16:creationId xmlns:a16="http://schemas.microsoft.com/office/drawing/2014/main" id="{182524CB-71F8-49BC-B1EF-2A69D5B5B931}"/>
+                <a16:creationId xmlns:a16="http://schemas.microsoft.com/office/drawing/2014/main" id="{9387D32B-91CD-4335-BF12-05D9633B7B7B}"/>
               </a:ext>
             </a:extLst>
           </p:cNvPr>
@@ -8651,10 +8878,10 @@
       </p:sp>
       <p:sp>
         <p:nvSpPr>
-          <p:cNvPr id="64" name="rev-86">
-            <a:extLst xmlns:a="http://schemas.openxmlformats.org/drawingml/2006/main">
-              <a:ext uri="{FF2B5EF4-FFF2-40B4-BE49-F238E27FC236}">
-                <a16:creationId xmlns:a16="http://schemas.microsoft.com/office/drawing/2014/main" id="{787D02BA-F2D6-4B8A-985B-F76CE98C9B00}"/>
+          <p:cNvPr id="64" name="rev-89">
+            <a:extLst xmlns:a="http://schemas.openxmlformats.org/drawingml/2006/main">
+              <a:ext uri="{FF2B5EF4-FFF2-40B4-BE49-F238E27FC236}">
+                <a16:creationId xmlns:a16="http://schemas.microsoft.com/office/drawing/2014/main" id="{F48BE0D0-70C8-4887-9ABE-D7238B235A6E}"/>
               </a:ext>
             </a:extLst>
           </p:cNvPr>
@@ -8685,7 +8912,7 @@
             <a:pPr>
               <a:defRPr sz="1500" b="1">
                 <a:solidFill>
-                  <a:srgbClr val="356B49"/>
+                  <a:srgbClr val="266466"/>
                 </a:solidFill>
                 <a:latin typeface="Calibri"/>
                 <a:ea typeface="Calibri"/>
@@ -8695,7 +8922,7 @@
             <a:r>
               <a:rPr sz="1500" b="1">
                 <a:solidFill>
-                  <a:srgbClr val="356B49"/>
+                  <a:srgbClr val="266466"/>
                 </a:solidFill>
                 <a:latin typeface="Calibri"/>
                 <a:ea typeface="Calibri"/>
@@ -8708,10 +8935,10 @@
       </p:sp>
       <p:sp>
         <p:nvSpPr>
-          <p:cNvPr id="65" name="rev-87">
-            <a:extLst xmlns:a="http://schemas.openxmlformats.org/drawingml/2006/main">
-              <a:ext uri="{FF2B5EF4-FFF2-40B4-BE49-F238E27FC236}">
-                <a16:creationId xmlns:a16="http://schemas.microsoft.com/office/drawing/2014/main" id="{778CA446-51EA-4601-AE38-F51E49821111}"/>
+          <p:cNvPr id="65" name="rev-90">
+            <a:extLst xmlns:a="http://schemas.openxmlformats.org/drawingml/2006/main">
+              <a:ext uri="{FF2B5EF4-FFF2-40B4-BE49-F238E27FC236}">
+                <a16:creationId xmlns:a16="http://schemas.microsoft.com/office/drawing/2014/main" id="{73E34827-C578-4696-9BD4-6CEA665C1665}"/>
               </a:ext>
             </a:extLst>
           </p:cNvPr>
@@ -8765,10 +8992,10 @@
       </p:sp>
       <p:sp>
         <p:nvSpPr>
-          <p:cNvPr id="66" name="rev-88">
-            <a:extLst xmlns:a="http://schemas.openxmlformats.org/drawingml/2006/main">
-              <a:ext uri="{FF2B5EF4-FFF2-40B4-BE49-F238E27FC236}">
-                <a16:creationId xmlns:a16="http://schemas.microsoft.com/office/drawing/2014/main" id="{99BC9931-3C69-45A6-8C3A-D5B2C185F565}"/>
+          <p:cNvPr id="66" name="rev-91">
+            <a:extLst xmlns:a="http://schemas.openxmlformats.org/drawingml/2006/main">
+              <a:ext uri="{FF2B5EF4-FFF2-40B4-BE49-F238E27FC236}">
+                <a16:creationId xmlns:a16="http://schemas.microsoft.com/office/drawing/2014/main" id="{F0E5F9CF-17E3-4FBB-BB28-EEBC5124506D}"/>
               </a:ext>
             </a:extLst>
           </p:cNvPr>
@@ -8822,10 +9049,10 @@
       </p:sp>
       <p:sp>
         <p:nvSpPr>
-          <p:cNvPr id="67" name="rev-89">
-            <a:extLst xmlns:a="http://schemas.openxmlformats.org/drawingml/2006/main">
-              <a:ext uri="{FF2B5EF4-FFF2-40B4-BE49-F238E27FC236}">
-                <a16:creationId xmlns:a16="http://schemas.microsoft.com/office/drawing/2014/main" id="{EDBF61B6-DB18-4E6D-B91C-D31123FF35CB}"/>
+          <p:cNvPr id="67" name="rev-92">
+            <a:extLst xmlns:a="http://schemas.openxmlformats.org/drawingml/2006/main">
+              <a:ext uri="{FF2B5EF4-FFF2-40B4-BE49-F238E27FC236}">
+                <a16:creationId xmlns:a16="http://schemas.microsoft.com/office/drawing/2014/main" id="{6CC7137E-F64D-4EA8-8A6C-6F2EBB805D21}"/>
               </a:ext>
             </a:extLst>
           </p:cNvPr>
@@ -8856,7 +9083,7 @@
             <a:pPr>
               <a:defRPr sz="1500" b="1">
                 <a:solidFill>
-                  <a:srgbClr val="356B49"/>
+                  <a:srgbClr val="266466"/>
                 </a:solidFill>
                 <a:latin typeface="Calibri"/>
                 <a:ea typeface="Calibri"/>
@@ -8866,7 +9093,7 @@
             <a:r>
               <a:rPr sz="1500" b="1">
                 <a:solidFill>
-                  <a:srgbClr val="356B49"/>
+                  <a:srgbClr val="266466"/>
                 </a:solidFill>
                 <a:latin typeface="Calibri"/>
                 <a:ea typeface="Calibri"/>
@@ -8879,10 +9106,10 @@
       </p:sp>
       <p:sp>
         <p:nvSpPr>
-          <p:cNvPr id="68" name="rev-90">
-            <a:extLst xmlns:a="http://schemas.openxmlformats.org/drawingml/2006/main">
-              <a:ext uri="{FF2B5EF4-FFF2-40B4-BE49-F238E27FC236}">
-                <a16:creationId xmlns:a16="http://schemas.microsoft.com/office/drawing/2014/main" id="{03FA27E7-1D28-431D-BDAE-DE6ABA3560C9}"/>
+          <p:cNvPr id="68" name="rev-93">
+            <a:extLst xmlns:a="http://schemas.openxmlformats.org/drawingml/2006/main">
+              <a:ext uri="{FF2B5EF4-FFF2-40B4-BE49-F238E27FC236}">
+                <a16:creationId xmlns:a16="http://schemas.microsoft.com/office/drawing/2014/main" id="{F3521BDE-88B1-4C82-967A-AF6787B6B23F}"/>
               </a:ext>
             </a:extLst>
           </p:cNvPr>
@@ -8913,7 +9140,7 @@
             <a:pPr>
               <a:defRPr sz="2550" b="1">
                 <a:solidFill>
-                  <a:srgbClr val="356B49"/>
+                  <a:srgbClr val="266466"/>
                 </a:solidFill>
                 <a:latin typeface="Calibri"/>
                 <a:ea typeface="Calibri"/>
@@ -8923,7 +9150,7 @@
             <a:r>
               <a:rPr sz="2550" b="1">
                 <a:solidFill>
-                  <a:srgbClr val="356B49"/>
+                  <a:srgbClr val="266466"/>
                 </a:solidFill>
                 <a:latin typeface="Calibri"/>
                 <a:ea typeface="Calibri"/>
@@ -8936,10 +9163,10 @@
       </p:sp>
       <p:sp>
         <p:nvSpPr>
-          <p:cNvPr id="69" name="rev-91">
-            <a:extLst xmlns:a="http://schemas.openxmlformats.org/drawingml/2006/main">
-              <a:ext uri="{FF2B5EF4-FFF2-40B4-BE49-F238E27FC236}">
-                <a16:creationId xmlns:a16="http://schemas.microsoft.com/office/drawing/2014/main" id="{B3AD6ED3-1301-43D8-878F-6F9DD6F53F75}"/>
+          <p:cNvPr id="69" name="rev-94">
+            <a:extLst xmlns:a="http://schemas.openxmlformats.org/drawingml/2006/main">
+              <a:ext uri="{FF2B5EF4-FFF2-40B4-BE49-F238E27FC236}">
+                <a16:creationId xmlns:a16="http://schemas.microsoft.com/office/drawing/2014/main" id="{85901FE8-9A1C-4C67-B540-006EEEF43AEC}"/>
               </a:ext>
             </a:extLst>
           </p:cNvPr>
@@ -8970,7 +9197,7 @@
             <a:pPr>
               <a:defRPr sz="1725" b="1">
                 <a:solidFill>
-                  <a:srgbClr val="356B49"/>
+                  <a:srgbClr val="266466"/>
                 </a:solidFill>
                 <a:latin typeface="Calibri"/>
                 <a:ea typeface="Calibri"/>
@@ -8980,7 +9207,7 @@
             <a:r>
               <a:rPr sz="1725" b="1">
                 <a:solidFill>
-                  <a:srgbClr val="356B49"/>
+                  <a:srgbClr val="266466"/>
                 </a:solidFill>
                 <a:latin typeface="Calibri"/>
                 <a:ea typeface="Calibri"/>
@@ -8993,10 +9220,10 @@
       </p:sp>
       <p:sp>
         <p:nvSpPr>
-          <p:cNvPr id="70" name="rev-92">
-            <a:extLst xmlns:a="http://schemas.openxmlformats.org/drawingml/2006/main">
-              <a:ext uri="{FF2B5EF4-FFF2-40B4-BE49-F238E27FC236}">
-                <a16:creationId xmlns:a16="http://schemas.microsoft.com/office/drawing/2014/main" id="{17F23B3C-DBE8-40FB-AF67-2CA49CE1BD0F}"/>
+          <p:cNvPr id="70" name="rev-95">
+            <a:extLst xmlns:a="http://schemas.openxmlformats.org/drawingml/2006/main">
+              <a:ext uri="{FF2B5EF4-FFF2-40B4-BE49-F238E27FC236}">
+                <a16:creationId xmlns:a16="http://schemas.microsoft.com/office/drawing/2014/main" id="{7F7B8651-669F-427C-AF3F-C7439EE4B260}"/>
               </a:ext>
             </a:extLst>
           </p:cNvPr>
@@ -9014,21 +9241,21 @@
             <a:avLst/>
           </a:prstGeom>
           <a:solidFill xmlns:a="http://schemas.openxmlformats.org/drawingml/2006/main">
-            <a:srgbClr val="EDF4EE"/>
+            <a:srgbClr val="EAF3F3"/>
           </a:solidFill>
           <a:ln xmlns:a="http://schemas.openxmlformats.org/drawingml/2006/main" w="9525">
             <a:solidFill>
-              <a:srgbClr val="EDF4EE"/>
+              <a:srgbClr val="EAF3F3"/>
             </a:solidFill>
           </a:ln>
         </p:spPr>
       </p:sp>
       <p:sp>
         <p:nvSpPr>
-          <p:cNvPr id="71" name="rev-93">
-            <a:extLst xmlns:a="http://schemas.openxmlformats.org/drawingml/2006/main">
-              <a:ext uri="{FF2B5EF4-FFF2-40B4-BE49-F238E27FC236}">
-                <a16:creationId xmlns:a16="http://schemas.microsoft.com/office/drawing/2014/main" id="{CE0143E9-98C0-468A-B3C3-3486482BF317}"/>
+          <p:cNvPr id="71" name="rev-96">
+            <a:extLst xmlns:a="http://schemas.openxmlformats.org/drawingml/2006/main">
+              <a:ext uri="{FF2B5EF4-FFF2-40B4-BE49-F238E27FC236}">
+                <a16:creationId xmlns:a16="http://schemas.microsoft.com/office/drawing/2014/main" id="{3CAA44C9-B78E-4DFE-8BF8-2DCD0060A346}"/>
               </a:ext>
             </a:extLst>
           </p:cNvPr>
@@ -9082,10 +9309,10 @@
       </p:sp>
       <p:sp>
         <p:nvSpPr>
-          <p:cNvPr id="72" name="rev-94">
-            <a:extLst xmlns:a="http://schemas.openxmlformats.org/drawingml/2006/main">
-              <a:ext uri="{FF2B5EF4-FFF2-40B4-BE49-F238E27FC236}">
-                <a16:creationId xmlns:a16="http://schemas.microsoft.com/office/drawing/2014/main" id="{BE97153D-B413-4F16-A459-26ED8EDB0416}"/>
+          <p:cNvPr id="72" name="rev-97">
+            <a:extLst xmlns:a="http://schemas.openxmlformats.org/drawingml/2006/main">
+              <a:ext uri="{FF2B5EF4-FFF2-40B4-BE49-F238E27FC236}">
+                <a16:creationId xmlns:a16="http://schemas.microsoft.com/office/drawing/2014/main" id="{CEEF7720-20E9-48A1-996E-DB5A4178DF76}"/>
               </a:ext>
             </a:extLst>
           </p:cNvPr>
@@ -9142,7 +9369,7 @@
           <p:cNvPr id="73" name="">
             <a:extLst xmlns:a="http://schemas.openxmlformats.org/drawingml/2006/main">
               <a:ext uri="{FF2B5EF4-FFF2-40B4-BE49-F238E27FC236}">
-                <a16:creationId xmlns:a16="http://schemas.microsoft.com/office/drawing/2014/main" id="{3FEC6991-D11F-46BC-9FDA-3804910A6342}"/>
+                <a16:creationId xmlns:a16="http://schemas.microsoft.com/office/drawing/2014/main" id="{CA0577FC-EA2F-4088-B041-7A80F1FD0F56}"/>
               </a:ext>
             </a:extLst>
           </p:cNvPr>
@@ -9160,7 +9387,7 @@
             <a:avLst/>
           </a:prstGeom>
           <a:solidFill xmlns:a="http://schemas.openxmlformats.org/drawingml/2006/main">
-            <a:srgbClr val="356B49"/>
+            <a:srgbClr val="266466"/>
           </a:solidFill>
           <a:ln xmlns:a="http://schemas.openxmlformats.org/drawingml/2006/main" w="0">
             <a:noFill/>
@@ -9169,10 +9396,10 @@
       </p:sp>
       <p:sp>
         <p:nvSpPr>
-          <p:cNvPr id="74" name="rev-95">
-            <a:extLst xmlns:a="http://schemas.openxmlformats.org/drawingml/2006/main">
-              <a:ext uri="{FF2B5EF4-FFF2-40B4-BE49-F238E27FC236}">
-                <a16:creationId xmlns:a16="http://schemas.microsoft.com/office/drawing/2014/main" id="{944B8FB2-9DC0-455C-B68B-333116D64F7B}"/>
+          <p:cNvPr id="74" name="rev-98">
+            <a:extLst xmlns:a="http://schemas.openxmlformats.org/drawingml/2006/main">
+              <a:ext uri="{FF2B5EF4-FFF2-40B4-BE49-F238E27FC236}">
+                <a16:creationId xmlns:a16="http://schemas.microsoft.com/office/drawing/2014/main" id="{0830E4A0-FCE6-479E-B052-7F53D4CC8AEB}"/>
               </a:ext>
             </a:extLst>
           </p:cNvPr>
@@ -9229,7 +9456,7 @@
           <p:cNvPr id="75" name="">
             <a:extLst xmlns:a="http://schemas.openxmlformats.org/drawingml/2006/main">
               <a:ext uri="{FF2B5EF4-FFF2-40B4-BE49-F238E27FC236}">
-                <a16:creationId xmlns:a16="http://schemas.microsoft.com/office/drawing/2014/main" id="{1F726D44-56FD-45EE-BE8A-707FB71E602D}"/>
+                <a16:creationId xmlns:a16="http://schemas.microsoft.com/office/drawing/2014/main" id="{B7910F0D-199F-46C8-A37E-D1A7002B67F5}"/>
               </a:ext>
             </a:extLst>
           </p:cNvPr>
@@ -9247,7 +9474,7 @@
             <a:avLst/>
           </a:prstGeom>
           <a:solidFill xmlns:a="http://schemas.openxmlformats.org/drawingml/2006/main">
-            <a:srgbClr val="356B49"/>
+            <a:srgbClr val="266466"/>
           </a:solidFill>
           <a:ln xmlns:a="http://schemas.openxmlformats.org/drawingml/2006/main" w="0">
             <a:noFill/>
@@ -9256,10 +9483,10 @@
       </p:sp>
       <p:sp>
         <p:nvSpPr>
-          <p:cNvPr id="76" name="rev-96">
-            <a:extLst xmlns:a="http://schemas.openxmlformats.org/drawingml/2006/main">
-              <a:ext uri="{FF2B5EF4-FFF2-40B4-BE49-F238E27FC236}">
-                <a16:creationId xmlns:a16="http://schemas.microsoft.com/office/drawing/2014/main" id="{3526E565-EEB5-48D5-9701-49E01E1AAA58}"/>
+          <p:cNvPr id="76" name="rev-99">
+            <a:extLst xmlns:a="http://schemas.openxmlformats.org/drawingml/2006/main">
+              <a:ext uri="{FF2B5EF4-FFF2-40B4-BE49-F238E27FC236}">
+                <a16:creationId xmlns:a16="http://schemas.microsoft.com/office/drawing/2014/main" id="{19506F70-4F13-4055-B018-A6682851EB56}"/>
               </a:ext>
             </a:extLst>
           </p:cNvPr>
@@ -9290,7 +9517,7 @@
             <a:pPr>
               <a:defRPr sz="2550" b="1">
                 <a:solidFill>
-                  <a:srgbClr val="356B49"/>
+                  <a:srgbClr val="266466"/>
                 </a:solidFill>
                 <a:latin typeface="Calibri"/>
                 <a:ea typeface="Calibri"/>
@@ -9300,7 +9527,7 @@
             <a:r>
               <a:rPr sz="2550" b="1">
                 <a:solidFill>
-                  <a:srgbClr val="356B49"/>
+                  <a:srgbClr val="266466"/>
                 </a:solidFill>
                 <a:latin typeface="Calibri"/>
                 <a:ea typeface="Calibri"/>
@@ -9313,10 +9540,10 @@
       </p:sp>
       <p:sp>
         <p:nvSpPr>
-          <p:cNvPr id="77" name="rev-97">
-            <a:extLst xmlns:a="http://schemas.openxmlformats.org/drawingml/2006/main">
-              <a:ext uri="{FF2B5EF4-FFF2-40B4-BE49-F238E27FC236}">
-                <a16:creationId xmlns:a16="http://schemas.microsoft.com/office/drawing/2014/main" id="{7775104E-8ECF-46DC-B5B8-6E9A622EBFC8}"/>
+          <p:cNvPr id="77" name="rev-100">
+            <a:extLst xmlns:a="http://schemas.openxmlformats.org/drawingml/2006/main">
+              <a:ext uri="{FF2B5EF4-FFF2-40B4-BE49-F238E27FC236}">
+                <a16:creationId xmlns:a16="http://schemas.microsoft.com/office/drawing/2014/main" id="{5FB05DD9-3CCD-4033-A813-6FE971A5E2F0}"/>
               </a:ext>
             </a:extLst>
           </p:cNvPr>
@@ -9347,7 +9574,7 @@
             <a:pPr>
               <a:defRPr sz="1725" b="1">
                 <a:solidFill>
-                  <a:srgbClr val="356B49"/>
+                  <a:srgbClr val="266466"/>
                 </a:solidFill>
                 <a:latin typeface="Calibri"/>
                 <a:ea typeface="Calibri"/>
@@ -9357,7 +9584,7 @@
             <a:r>
               <a:rPr sz="1725" b="1">
                 <a:solidFill>
-                  <a:srgbClr val="356B49"/>
+                  <a:srgbClr val="266466"/>
                 </a:solidFill>
                 <a:latin typeface="Calibri"/>
                 <a:ea typeface="Calibri"/>
@@ -9370,10 +9597,10 @@
       </p:sp>
       <p:sp>
         <p:nvSpPr>
-          <p:cNvPr id="78" name="rev-98">
-            <a:extLst xmlns:a="http://schemas.openxmlformats.org/drawingml/2006/main">
-              <a:ext uri="{FF2B5EF4-FFF2-40B4-BE49-F238E27FC236}">
-                <a16:creationId xmlns:a16="http://schemas.microsoft.com/office/drawing/2014/main" id="{BAAA259C-F61A-4B17-B00E-FF817C6C31B1}"/>
+          <p:cNvPr id="78" name="rev-101">
+            <a:extLst xmlns:a="http://schemas.openxmlformats.org/drawingml/2006/main">
+              <a:ext uri="{FF2B5EF4-FFF2-40B4-BE49-F238E27FC236}">
+                <a16:creationId xmlns:a16="http://schemas.microsoft.com/office/drawing/2014/main" id="{3F65EE96-18E7-4648-A26D-55D7FA870B07}"/>
               </a:ext>
             </a:extLst>
           </p:cNvPr>
@@ -9391,21 +9618,21 @@
             <a:avLst/>
           </a:prstGeom>
           <a:solidFill xmlns:a="http://schemas.openxmlformats.org/drawingml/2006/main">
-            <a:srgbClr val="EDF4EE"/>
+            <a:srgbClr val="EAF3F3"/>
           </a:solidFill>
           <a:ln xmlns:a="http://schemas.openxmlformats.org/drawingml/2006/main" w="9525">
             <a:solidFill>
-              <a:srgbClr val="EDF4EE"/>
+              <a:srgbClr val="EAF3F3"/>
             </a:solidFill>
           </a:ln>
         </p:spPr>
       </p:sp>
       <p:sp>
         <p:nvSpPr>
-          <p:cNvPr id="79" name="rev-99">
-            <a:extLst xmlns:a="http://schemas.openxmlformats.org/drawingml/2006/main">
-              <a:ext uri="{FF2B5EF4-FFF2-40B4-BE49-F238E27FC236}">
-                <a16:creationId xmlns:a16="http://schemas.microsoft.com/office/drawing/2014/main" id="{542B92F7-7F71-4C44-AA88-A01435D65810}"/>
+          <p:cNvPr id="79" name="rev-102">
+            <a:extLst xmlns:a="http://schemas.openxmlformats.org/drawingml/2006/main">
+              <a:ext uri="{FF2B5EF4-FFF2-40B4-BE49-F238E27FC236}">
+                <a16:creationId xmlns:a16="http://schemas.microsoft.com/office/drawing/2014/main" id="{BF593927-9867-4857-BE2C-CE6B2564B4F9}"/>
               </a:ext>
             </a:extLst>
           </p:cNvPr>
@@ -9459,10 +9686,10 @@
       </p:sp>
       <p:sp>
         <p:nvSpPr>
-          <p:cNvPr id="80" name="rev-100">
-            <a:extLst xmlns:a="http://schemas.openxmlformats.org/drawingml/2006/main">
-              <a:ext uri="{FF2B5EF4-FFF2-40B4-BE49-F238E27FC236}">
-                <a16:creationId xmlns:a16="http://schemas.microsoft.com/office/drawing/2014/main" id="{41DEF0D4-9482-477F-839C-F2951B723975}"/>
+          <p:cNvPr id="80" name="rev-103">
+            <a:extLst xmlns:a="http://schemas.openxmlformats.org/drawingml/2006/main">
+              <a:ext uri="{FF2B5EF4-FFF2-40B4-BE49-F238E27FC236}">
+                <a16:creationId xmlns:a16="http://schemas.microsoft.com/office/drawing/2014/main" id="{03FF3DDF-8574-4B1A-A399-2194E83AA3CD}"/>
               </a:ext>
             </a:extLst>
           </p:cNvPr>
@@ -9519,7 +9746,7 @@
           <p:cNvPr id="81" name="">
             <a:extLst xmlns:a="http://schemas.openxmlformats.org/drawingml/2006/main">
               <a:ext uri="{FF2B5EF4-FFF2-40B4-BE49-F238E27FC236}">
-                <a16:creationId xmlns:a16="http://schemas.microsoft.com/office/drawing/2014/main" id="{E593EA85-BBD8-4E6F-8DD6-D2DD7403EEB8}"/>
+                <a16:creationId xmlns:a16="http://schemas.microsoft.com/office/drawing/2014/main" id="{FF5D8D8B-3710-4E67-9B52-AE8B8AC44AC8}"/>
               </a:ext>
             </a:extLst>
           </p:cNvPr>
@@ -9537,7 +9764,7 @@
             <a:avLst/>
           </a:prstGeom>
           <a:solidFill xmlns:a="http://schemas.openxmlformats.org/drawingml/2006/main">
-            <a:srgbClr val="356B49"/>
+            <a:srgbClr val="266466"/>
           </a:solidFill>
           <a:ln xmlns:a="http://schemas.openxmlformats.org/drawingml/2006/main" w="0">
             <a:noFill/>
@@ -9546,10 +9773,10 @@
       </p:sp>
       <p:sp>
         <p:nvSpPr>
-          <p:cNvPr id="82" name="rev-101">
-            <a:extLst xmlns:a="http://schemas.openxmlformats.org/drawingml/2006/main">
-              <a:ext uri="{FF2B5EF4-FFF2-40B4-BE49-F238E27FC236}">
-                <a16:creationId xmlns:a16="http://schemas.microsoft.com/office/drawing/2014/main" id="{BB66A16A-E62B-42D8-A9E9-DE9D2EAAF463}"/>
+          <p:cNvPr id="82" name="rev-104">
+            <a:extLst xmlns:a="http://schemas.openxmlformats.org/drawingml/2006/main">
+              <a:ext uri="{FF2B5EF4-FFF2-40B4-BE49-F238E27FC236}">
+                <a16:creationId xmlns:a16="http://schemas.microsoft.com/office/drawing/2014/main" id="{DB6EB0F8-0FF7-4165-952F-6DB77C87C1A6}"/>
               </a:ext>
             </a:extLst>
           </p:cNvPr>
@@ -9606,7 +9833,7 @@
           <p:cNvPr id="83" name="">
             <a:extLst xmlns:a="http://schemas.openxmlformats.org/drawingml/2006/main">
               <a:ext uri="{FF2B5EF4-FFF2-40B4-BE49-F238E27FC236}">
-                <a16:creationId xmlns:a16="http://schemas.microsoft.com/office/drawing/2014/main" id="{BB7A1565-E4D4-4A75-8A1A-6C49A46F0CFF}"/>
+                <a16:creationId xmlns:a16="http://schemas.microsoft.com/office/drawing/2014/main" id="{9FD0D890-BE77-4DB0-9376-17326D932E5A}"/>
               </a:ext>
             </a:extLst>
           </p:cNvPr>
@@ -9624,7 +9851,7 @@
             <a:avLst/>
           </a:prstGeom>
           <a:solidFill xmlns:a="http://schemas.openxmlformats.org/drawingml/2006/main">
-            <a:srgbClr val="356B49"/>
+            <a:srgbClr val="266466"/>
           </a:solidFill>
           <a:ln xmlns:a="http://schemas.openxmlformats.org/drawingml/2006/main" w="0">
             <a:noFill/>
@@ -9633,10 +9860,10 @@
       </p:sp>
       <p:sp>
         <p:nvSpPr>
-          <p:cNvPr id="84" name="rev-102">
-            <a:extLst xmlns:a="http://schemas.openxmlformats.org/drawingml/2006/main">
-              <a:ext uri="{FF2B5EF4-FFF2-40B4-BE49-F238E27FC236}">
-                <a16:creationId xmlns:a16="http://schemas.microsoft.com/office/drawing/2014/main" id="{19C550B3-85F3-483E-A198-EB240BD04D5B}"/>
+          <p:cNvPr id="84" name="rev-105">
+            <a:extLst xmlns:a="http://schemas.openxmlformats.org/drawingml/2006/main">
+              <a:ext uri="{FF2B5EF4-FFF2-40B4-BE49-F238E27FC236}">
+                <a16:creationId xmlns:a16="http://schemas.microsoft.com/office/drawing/2014/main" id="{8AB6CB25-829B-4035-85AF-C0F7CBDF3009}"/>
               </a:ext>
             </a:extLst>
           </p:cNvPr>
@@ -9667,7 +9894,7 @@
             <a:pPr>
               <a:defRPr sz="2550" b="1">
                 <a:solidFill>
-                  <a:srgbClr val="356B49"/>
+                  <a:srgbClr val="266466"/>
                 </a:solidFill>
                 <a:latin typeface="Calibri"/>
                 <a:ea typeface="Calibri"/>
@@ -9677,7 +9904,7 @@
             <a:r>
               <a:rPr sz="2550" b="1">
                 <a:solidFill>
-                  <a:srgbClr val="356B49"/>
+                  <a:srgbClr val="266466"/>
                 </a:solidFill>
                 <a:latin typeface="Calibri"/>
                 <a:ea typeface="Calibri"/>
@@ -9690,10 +9917,10 @@
       </p:sp>
       <p:sp>
         <p:nvSpPr>
-          <p:cNvPr id="85" name="rev-103">
-            <a:extLst xmlns:a="http://schemas.openxmlformats.org/drawingml/2006/main">
-              <a:ext uri="{FF2B5EF4-FFF2-40B4-BE49-F238E27FC236}">
-                <a16:creationId xmlns:a16="http://schemas.microsoft.com/office/drawing/2014/main" id="{C05E33A7-5DDB-4029-A8D5-740D3F8092AB}"/>
+          <p:cNvPr id="85" name="rev-106">
+            <a:extLst xmlns:a="http://schemas.openxmlformats.org/drawingml/2006/main">
+              <a:ext uri="{FF2B5EF4-FFF2-40B4-BE49-F238E27FC236}">
+                <a16:creationId xmlns:a16="http://schemas.microsoft.com/office/drawing/2014/main" id="{B55BDB1D-82E6-4EB5-BE62-1A868E9D2121}"/>
               </a:ext>
             </a:extLst>
           </p:cNvPr>
@@ -9724,7 +9951,7 @@
             <a:pPr>
               <a:defRPr sz="1725" b="1">
                 <a:solidFill>
-                  <a:srgbClr val="356B49"/>
+                  <a:srgbClr val="266466"/>
                 </a:solidFill>
                 <a:latin typeface="Calibri"/>
                 <a:ea typeface="Calibri"/>
@@ -9734,7 +9961,7 @@
             <a:r>
               <a:rPr sz="1725" b="1">
                 <a:solidFill>
-                  <a:srgbClr val="356B49"/>
+                  <a:srgbClr val="266466"/>
                 </a:solidFill>
                 <a:latin typeface="Calibri"/>
                 <a:ea typeface="Calibri"/>
@@ -9747,10 +9974,10 @@
       </p:sp>
       <p:sp>
         <p:nvSpPr>
-          <p:cNvPr id="86" name="rev-104">
-            <a:extLst xmlns:a="http://schemas.openxmlformats.org/drawingml/2006/main">
-              <a:ext uri="{FF2B5EF4-FFF2-40B4-BE49-F238E27FC236}">
-                <a16:creationId xmlns:a16="http://schemas.microsoft.com/office/drawing/2014/main" id="{3B3CA122-82BC-445E-A907-C9735518EF21}"/>
+          <p:cNvPr id="86" name="rev-107">
+            <a:extLst xmlns:a="http://schemas.openxmlformats.org/drawingml/2006/main">
+              <a:ext uri="{FF2B5EF4-FFF2-40B4-BE49-F238E27FC236}">
+                <a16:creationId xmlns:a16="http://schemas.microsoft.com/office/drawing/2014/main" id="{E046A72D-EFE3-42E6-AFB7-171F5D2943A3}"/>
               </a:ext>
             </a:extLst>
           </p:cNvPr>
@@ -9768,21 +9995,21 @@
             <a:avLst/>
           </a:prstGeom>
           <a:solidFill xmlns:a="http://schemas.openxmlformats.org/drawingml/2006/main">
-            <a:srgbClr val="EDF4EE"/>
+            <a:srgbClr val="EAF3F3"/>
           </a:solidFill>
           <a:ln xmlns:a="http://schemas.openxmlformats.org/drawingml/2006/main" w="9525">
             <a:solidFill>
-              <a:srgbClr val="EDF4EE"/>
+              <a:srgbClr val="EAF3F3"/>
             </a:solidFill>
           </a:ln>
         </p:spPr>
       </p:sp>
       <p:sp>
         <p:nvSpPr>
-          <p:cNvPr id="87" name="rev-105">
-            <a:extLst xmlns:a="http://schemas.openxmlformats.org/drawingml/2006/main">
-              <a:ext uri="{FF2B5EF4-FFF2-40B4-BE49-F238E27FC236}">
-                <a16:creationId xmlns:a16="http://schemas.microsoft.com/office/drawing/2014/main" id="{43AACBBA-60CB-4130-9370-ABCA5A1BE5E4}"/>
+          <p:cNvPr id="87" name="rev-108">
+            <a:extLst xmlns:a="http://schemas.openxmlformats.org/drawingml/2006/main">
+              <a:ext uri="{FF2B5EF4-FFF2-40B4-BE49-F238E27FC236}">
+                <a16:creationId xmlns:a16="http://schemas.microsoft.com/office/drawing/2014/main" id="{AC535D08-F35A-4B25-B7C3-CAD438D863C6}"/>
               </a:ext>
             </a:extLst>
           </p:cNvPr>
@@ -9836,10 +10063,10 @@
       </p:sp>
       <p:sp>
         <p:nvSpPr>
-          <p:cNvPr id="88" name="rev-106">
-            <a:extLst xmlns:a="http://schemas.openxmlformats.org/drawingml/2006/main">
-              <a:ext uri="{FF2B5EF4-FFF2-40B4-BE49-F238E27FC236}">
-                <a16:creationId xmlns:a16="http://schemas.microsoft.com/office/drawing/2014/main" id="{E865D1E8-B27D-4350-8A2E-365476D95B6B}"/>
+          <p:cNvPr id="88" name="rev-109">
+            <a:extLst xmlns:a="http://schemas.openxmlformats.org/drawingml/2006/main">
+              <a:ext uri="{FF2B5EF4-FFF2-40B4-BE49-F238E27FC236}">
+                <a16:creationId xmlns:a16="http://schemas.microsoft.com/office/drawing/2014/main" id="{F733BFC4-2F83-4C60-9170-33F0D85ABC61}"/>
               </a:ext>
             </a:extLst>
           </p:cNvPr>
@@ -9896,7 +10123,7 @@
           <p:cNvPr id="89" name="">
             <a:extLst xmlns:a="http://schemas.openxmlformats.org/drawingml/2006/main">
               <a:ext uri="{FF2B5EF4-FFF2-40B4-BE49-F238E27FC236}">
-                <a16:creationId xmlns:a16="http://schemas.microsoft.com/office/drawing/2014/main" id="{3466CF68-E018-4C8B-A158-5130F70FFF71}"/>
+                <a16:creationId xmlns:a16="http://schemas.microsoft.com/office/drawing/2014/main" id="{5E3A92B1-65DA-4B0E-9735-509197086B11}"/>
               </a:ext>
             </a:extLst>
           </p:cNvPr>
@@ -9914,7 +10141,7 @@
             <a:avLst/>
           </a:prstGeom>
           <a:solidFill xmlns:a="http://schemas.openxmlformats.org/drawingml/2006/main">
-            <a:srgbClr val="356B49"/>
+            <a:srgbClr val="266466"/>
           </a:solidFill>
           <a:ln xmlns:a="http://schemas.openxmlformats.org/drawingml/2006/main" w="0">
             <a:noFill/>
@@ -9923,10 +10150,10 @@
       </p:sp>
       <p:sp>
         <p:nvSpPr>
-          <p:cNvPr id="90" name="rev-107">
-            <a:extLst xmlns:a="http://schemas.openxmlformats.org/drawingml/2006/main">
-              <a:ext uri="{FF2B5EF4-FFF2-40B4-BE49-F238E27FC236}">
-                <a16:creationId xmlns:a16="http://schemas.microsoft.com/office/drawing/2014/main" id="{216DEFA5-F526-4AF2-A483-BB33B43E8331}"/>
+          <p:cNvPr id="90" name="rev-110">
+            <a:extLst xmlns:a="http://schemas.openxmlformats.org/drawingml/2006/main">
+              <a:ext uri="{FF2B5EF4-FFF2-40B4-BE49-F238E27FC236}">
+                <a16:creationId xmlns:a16="http://schemas.microsoft.com/office/drawing/2014/main" id="{D8B879C5-5044-4AF0-A04E-7BA760625B2A}"/>
               </a:ext>
             </a:extLst>
           </p:cNvPr>
@@ -9980,10 +10207,10 @@
       </p:sp>
       <p:sp>
         <p:nvSpPr>
-          <p:cNvPr id="91" name="rev-108">
-            <a:extLst xmlns:a="http://schemas.openxmlformats.org/drawingml/2006/main">
-              <a:ext uri="{FF2B5EF4-FFF2-40B4-BE49-F238E27FC236}">
-                <a16:creationId xmlns:a16="http://schemas.microsoft.com/office/drawing/2014/main" id="{3E156BBD-F566-4F4B-859E-36A972564130}"/>
+          <p:cNvPr id="91" name="rev-111">
+            <a:extLst xmlns:a="http://schemas.openxmlformats.org/drawingml/2006/main">
+              <a:ext uri="{FF2B5EF4-FFF2-40B4-BE49-F238E27FC236}">
+                <a16:creationId xmlns:a16="http://schemas.microsoft.com/office/drawing/2014/main" id="{22B3D8C1-31EB-4ACB-A655-2405561557AE}"/>
               </a:ext>
             </a:extLst>
           </p:cNvPr>
@@ -10014,7 +10241,7 @@
             <a:pPr>
               <a:defRPr sz="1275" b="1">
                 <a:solidFill>
-                  <a:srgbClr val="356B49"/>
+                  <a:srgbClr val="266466"/>
                 </a:solidFill>
                 <a:latin typeface="Calibri"/>
                 <a:ea typeface="Calibri"/>
@@ -10024,23 +10251,23 @@
             <a:r>
               <a:rPr sz="1275" b="1">
                 <a:solidFill>
-                  <a:srgbClr val="356B49"/>
-                </a:solidFill>
-                <a:latin typeface="Calibri"/>
-                <a:ea typeface="Calibri"/>
-                <a:cs typeface="Calibri"/>
-              </a:rPr>
-              <a:t>Measured on 48 synthetic pages: sanitize, send and select a control</a:t>
-            </a:r>
-          </a:p>
-        </p:txBody>
-      </p:sp>
-      <p:sp>
-        <p:nvSpPr>
-          <p:cNvPr id="92" name="rev-109">
-            <a:extLst xmlns:a="http://schemas.openxmlformats.org/drawingml/2006/main">
-              <a:ext uri="{FF2B5EF4-FFF2-40B4-BE49-F238E27FC236}">
-                <a16:creationId xmlns:a16="http://schemas.microsoft.com/office/drawing/2014/main" id="{BC995700-F7F8-49B3-AE06-366D4DB84B14}"/>
+                  <a:srgbClr val="266466"/>
+                </a:solidFill>
+                <a:latin typeface="Calibri"/>
+                <a:ea typeface="Calibri"/>
+                <a:cs typeface="Calibri"/>
+              </a:rPr>
+              <a:t>CPU harness: 48 pages, sanitized context sent and target selected</a:t>
+            </a:r>
+          </a:p>
+        </p:txBody>
+      </p:sp>
+      <p:sp>
+        <p:nvSpPr>
+          <p:cNvPr id="92" name="rev-112">
+            <a:extLst xmlns:a="http://schemas.openxmlformats.org/drawingml/2006/main">
+              <a:ext uri="{FF2B5EF4-FFF2-40B4-BE49-F238E27FC236}">
+                <a16:creationId xmlns:a16="http://schemas.microsoft.com/office/drawing/2014/main" id="{F0E9C594-8CCA-45EE-A608-C85F42EA8850}"/>
               </a:ext>
             </a:extLst>
           </p:cNvPr>
@@ -10071,7 +10298,7 @@
             <a:pPr>
               <a:defRPr sz="1275" b="1">
                 <a:solidFill>
-                  <a:srgbClr val="356B49"/>
+                  <a:srgbClr val="266466"/>
                 </a:solidFill>
                 <a:latin typeface="Calibri"/>
                 <a:ea typeface="Calibri"/>
@@ -10081,7 +10308,7 @@
             <a:r>
               <a:rPr sz="1275" b="1">
                 <a:solidFill>
-                  <a:srgbClr val="356B49"/>
+                  <a:srgbClr val="266466"/>
                 </a:solidFill>
                 <a:latin typeface="Calibri"/>
                 <a:ea typeface="Calibri"/>
@@ -10094,10 +10321,10 @@
       </p:sp>
       <p:sp>
         <p:nvSpPr>
-          <p:cNvPr id="93" name="rev-110">
-            <a:extLst xmlns:a="http://schemas.openxmlformats.org/drawingml/2006/main">
-              <a:ext uri="{FF2B5EF4-FFF2-40B4-BE49-F238E27FC236}">
-                <a16:creationId xmlns:a16="http://schemas.microsoft.com/office/drawing/2014/main" id="{7A9CFD6F-51A1-4D88-B188-8FF00F9A3AB3}"/>
+          <p:cNvPr id="93" name="rev-113">
+            <a:extLst xmlns:a="http://schemas.openxmlformats.org/drawingml/2006/main">
+              <a:ext uri="{FF2B5EF4-FFF2-40B4-BE49-F238E27FC236}">
+                <a16:creationId xmlns:a16="http://schemas.microsoft.com/office/drawing/2014/main" id="{C06FF758-F807-4041-915C-4C7D13EA9888}"/>
               </a:ext>
             </a:extLst>
           </p:cNvPr>
@@ -10124,10 +10351,10 @@
       </p:sp>
       <p:sp>
         <p:nvSpPr>
-          <p:cNvPr id="94" name="rev-111">
-            <a:extLst xmlns:a="http://schemas.openxmlformats.org/drawingml/2006/main">
-              <a:ext uri="{FF2B5EF4-FFF2-40B4-BE49-F238E27FC236}">
-                <a16:creationId xmlns:a16="http://schemas.microsoft.com/office/drawing/2014/main" id="{9EC71A1F-EA5A-4504-95B9-E93F4D334FAE}"/>
+          <p:cNvPr id="94" name="rev-114">
+            <a:extLst xmlns:a="http://schemas.openxmlformats.org/drawingml/2006/main">
+              <a:ext uri="{FF2B5EF4-FFF2-40B4-BE49-F238E27FC236}">
+                <a16:creationId xmlns:a16="http://schemas.microsoft.com/office/drawing/2014/main" id="{1CF3CF65-5FFD-4C94-889F-BF9820809E66}"/>
               </a:ext>
             </a:extLst>
           </p:cNvPr>
@@ -10158,7 +10385,7 @@
             <a:pPr>
               <a:defRPr sz="1500" b="1">
                 <a:solidFill>
-                  <a:srgbClr val="356B49"/>
+                  <a:srgbClr val="266466"/>
                 </a:solidFill>
                 <a:latin typeface="Calibri"/>
                 <a:ea typeface="Calibri"/>
@@ -10168,7 +10395,7 @@
             <a:r>
               <a:rPr sz="1500" b="1">
                 <a:solidFill>
-                  <a:srgbClr val="356B49"/>
+                  <a:srgbClr val="266466"/>
                 </a:solidFill>
                 <a:latin typeface="Calibri"/>
                 <a:ea typeface="Calibri"/>
@@ -10181,10 +10408,10 @@
       </p:sp>
       <p:sp>
         <p:nvSpPr>
-          <p:cNvPr id="95" name="rev-112">
-            <a:extLst xmlns:a="http://schemas.openxmlformats.org/drawingml/2006/main">
-              <a:ext uri="{FF2B5EF4-FFF2-40B4-BE49-F238E27FC236}">
-                <a16:creationId xmlns:a16="http://schemas.microsoft.com/office/drawing/2014/main" id="{3901C2AD-187D-4A3B-ABDB-5E26431D8D7B}"/>
+          <p:cNvPr id="95" name="rev-115">
+            <a:extLst xmlns:a="http://schemas.openxmlformats.org/drawingml/2006/main">
+              <a:ext uri="{FF2B5EF4-FFF2-40B4-BE49-F238E27FC236}">
+                <a16:creationId xmlns:a16="http://schemas.microsoft.com/office/drawing/2014/main" id="{A42FCA48-51ED-4F9A-820D-031C04B6659B}"/>
               </a:ext>
             </a:extLst>
           </p:cNvPr>
@@ -10238,10 +10465,10 @@
       </p:sp>
       <p:sp>
         <p:nvSpPr>
-          <p:cNvPr id="96" name="rev-113">
-            <a:extLst xmlns:a="http://schemas.openxmlformats.org/drawingml/2006/main">
-              <a:ext uri="{FF2B5EF4-FFF2-40B4-BE49-F238E27FC236}">
-                <a16:creationId xmlns:a16="http://schemas.microsoft.com/office/drawing/2014/main" id="{FB5EDD45-FD08-47D5-A809-4D5AF76AA195}"/>
+          <p:cNvPr id="96" name="rev-116">
+            <a:extLst xmlns:a="http://schemas.openxmlformats.org/drawingml/2006/main">
+              <a:ext uri="{FF2B5EF4-FFF2-40B4-BE49-F238E27FC236}">
+                <a16:creationId xmlns:a16="http://schemas.microsoft.com/office/drawing/2014/main" id="{45B27709-6EE8-496F-B510-71CD8BD232CB}"/>
               </a:ext>
             </a:extLst>
           </p:cNvPr>
@@ -10272,7 +10499,7 @@
             <a:pPr>
               <a:defRPr sz="2550" b="1">
                 <a:solidFill>
-                  <a:srgbClr val="356B49"/>
+                  <a:srgbClr val="266466"/>
                 </a:solidFill>
                 <a:latin typeface="Calibri"/>
                 <a:ea typeface="Calibri"/>
@@ -10282,7 +10509,7 @@
             <a:r>
               <a:rPr sz="2550" b="1">
                 <a:solidFill>
-                  <a:srgbClr val="356B49"/>
+                  <a:srgbClr val="266466"/>
                 </a:solidFill>
                 <a:latin typeface="Calibri"/>
                 <a:ea typeface="Calibri"/>
@@ -10295,10 +10522,10 @@
       </p:sp>
       <p:sp>
         <p:nvSpPr>
-          <p:cNvPr id="97" name="rev-114">
-            <a:extLst xmlns:a="http://schemas.openxmlformats.org/drawingml/2006/main">
-              <a:ext uri="{FF2B5EF4-FFF2-40B4-BE49-F238E27FC236}">
-                <a16:creationId xmlns:a16="http://schemas.microsoft.com/office/drawing/2014/main" id="{06465C09-77E4-4919-B5C7-CE02245E023F}"/>
+          <p:cNvPr id="97" name="rev-117">
+            <a:extLst xmlns:a="http://schemas.openxmlformats.org/drawingml/2006/main">
+              <a:ext uri="{FF2B5EF4-FFF2-40B4-BE49-F238E27FC236}">
+                <a16:creationId xmlns:a16="http://schemas.microsoft.com/office/drawing/2014/main" id="{962C3718-6CA0-4DEC-8A35-8057C259396D}"/>
               </a:ext>
             </a:extLst>
           </p:cNvPr>
@@ -10352,10 +10579,10 @@
       </p:sp>
       <p:sp>
         <p:nvSpPr>
-          <p:cNvPr id="98" name="rev-115">
-            <a:extLst xmlns:a="http://schemas.openxmlformats.org/drawingml/2006/main">
-              <a:ext uri="{FF2B5EF4-FFF2-40B4-BE49-F238E27FC236}">
-                <a16:creationId xmlns:a16="http://schemas.microsoft.com/office/drawing/2014/main" id="{FCB2D7D5-154F-4C40-B4BC-9C3B16CCFB04}"/>
+          <p:cNvPr id="98" name="rev-118">
+            <a:extLst xmlns:a="http://schemas.openxmlformats.org/drawingml/2006/main">
+              <a:ext uri="{FF2B5EF4-FFF2-40B4-BE49-F238E27FC236}">
+                <a16:creationId xmlns:a16="http://schemas.microsoft.com/office/drawing/2014/main" id="{812DE7C5-3E4C-470D-BECC-BE0E96177BF3}"/>
               </a:ext>
             </a:extLst>
           </p:cNvPr>
@@ -10409,10 +10636,10 @@
       </p:sp>
       <p:sp>
         <p:nvSpPr>
-          <p:cNvPr id="99" name="rev-116">
-            <a:extLst xmlns:a="http://schemas.openxmlformats.org/drawingml/2006/main">
-              <a:ext uri="{FF2B5EF4-FFF2-40B4-BE49-F238E27FC236}">
-                <a16:creationId xmlns:a16="http://schemas.microsoft.com/office/drawing/2014/main" id="{0DA1FC84-CEB2-4FAC-ADAC-756A9FDEF59A}"/>
+          <p:cNvPr id="99" name="rev-119">
+            <a:extLst xmlns:a="http://schemas.openxmlformats.org/drawingml/2006/main">
+              <a:ext uri="{FF2B5EF4-FFF2-40B4-BE49-F238E27FC236}">
+                <a16:creationId xmlns:a16="http://schemas.microsoft.com/office/drawing/2014/main" id="{DABF5BE9-622A-4FC6-87DB-545255A7AE7A}"/>
               </a:ext>
             </a:extLst>
           </p:cNvPr>
@@ -10443,7 +10670,7 @@
             <a:pPr>
               <a:defRPr sz="2550" b="1">
                 <a:solidFill>
-                  <a:srgbClr val="356B49"/>
+                  <a:srgbClr val="266466"/>
                 </a:solidFill>
                 <a:latin typeface="Calibri"/>
                 <a:ea typeface="Calibri"/>
@@ -10453,7 +10680,7 @@
             <a:r>
               <a:rPr sz="2550" b="1">
                 <a:solidFill>
-                  <a:srgbClr val="356B49"/>
+                  <a:srgbClr val="266466"/>
                 </a:solidFill>
                 <a:latin typeface="Calibri"/>
                 <a:ea typeface="Calibri"/>
@@ -10466,10 +10693,10 @@
       </p:sp>
       <p:sp>
         <p:nvSpPr>
-          <p:cNvPr id="100" name="rev-117">
-            <a:extLst xmlns:a="http://schemas.openxmlformats.org/drawingml/2006/main">
-              <a:ext uri="{FF2B5EF4-FFF2-40B4-BE49-F238E27FC236}">
-                <a16:creationId xmlns:a16="http://schemas.microsoft.com/office/drawing/2014/main" id="{CF8575E7-B1C0-421A-B15D-E1388BC51A5B}"/>
+          <p:cNvPr id="100" name="rev-120">
+            <a:extLst xmlns:a="http://schemas.openxmlformats.org/drawingml/2006/main">
+              <a:ext uri="{FF2B5EF4-FFF2-40B4-BE49-F238E27FC236}">
+                <a16:creationId xmlns:a16="http://schemas.microsoft.com/office/drawing/2014/main" id="{0813AE2F-7B8A-4FD3-9049-6D41019303B8}"/>
               </a:ext>
             </a:extLst>
           </p:cNvPr>
@@ -10523,10 +10750,10 @@
       </p:sp>
       <p:sp>
         <p:nvSpPr>
-          <p:cNvPr id="101" name="rev-118">
-            <a:extLst xmlns:a="http://schemas.openxmlformats.org/drawingml/2006/main">
-              <a:ext uri="{FF2B5EF4-FFF2-40B4-BE49-F238E27FC236}">
-                <a16:creationId xmlns:a16="http://schemas.microsoft.com/office/drawing/2014/main" id="{C46B4AF2-6A1C-4228-973D-89A6FCEB67FC}"/>
+          <p:cNvPr id="101" name="rev-121">
+            <a:extLst xmlns:a="http://schemas.openxmlformats.org/drawingml/2006/main">
+              <a:ext uri="{FF2B5EF4-FFF2-40B4-BE49-F238E27FC236}">
+                <a16:creationId xmlns:a16="http://schemas.microsoft.com/office/drawing/2014/main" id="{3E424DB8-3CD5-4FAF-AD52-44C3785BE1FD}"/>
               </a:ext>
             </a:extLst>
           </p:cNvPr>
@@ -10580,10 +10807,10 @@
       </p:sp>
       <p:sp>
         <p:nvSpPr>
-          <p:cNvPr id="102" name="rev-119">
-            <a:extLst xmlns:a="http://schemas.openxmlformats.org/drawingml/2006/main">
-              <a:ext uri="{FF2B5EF4-FFF2-40B4-BE49-F238E27FC236}">
-                <a16:creationId xmlns:a16="http://schemas.microsoft.com/office/drawing/2014/main" id="{EE63535B-3A06-4A12-856B-C8E43D3A2348}"/>
+          <p:cNvPr id="102" name="rev-122">
+            <a:extLst xmlns:a="http://schemas.openxmlformats.org/drawingml/2006/main">
+              <a:ext uri="{FF2B5EF4-FFF2-40B4-BE49-F238E27FC236}">
+                <a16:creationId xmlns:a16="http://schemas.microsoft.com/office/drawing/2014/main" id="{43D4FDE6-40FB-443F-878A-D2733F67E860}"/>
               </a:ext>
             </a:extLst>
           </p:cNvPr>
@@ -10614,7 +10841,7 @@
             <a:pPr>
               <a:defRPr sz="2550" b="1">
                 <a:solidFill>
-                  <a:srgbClr val="356B49"/>
+                  <a:srgbClr val="266466"/>
                 </a:solidFill>
                 <a:latin typeface="Calibri"/>
                 <a:ea typeface="Calibri"/>
@@ -10624,7 +10851,7 @@
             <a:r>
               <a:rPr sz="2550" b="1">
                 <a:solidFill>
-                  <a:srgbClr val="356B49"/>
+                  <a:srgbClr val="266466"/>
                 </a:solidFill>
                 <a:latin typeface="Calibri"/>
                 <a:ea typeface="Calibri"/>
@@ -10637,10 +10864,10 @@
       </p:sp>
       <p:sp>
         <p:nvSpPr>
-          <p:cNvPr id="103" name="rev-120">
-            <a:extLst xmlns:a="http://schemas.openxmlformats.org/drawingml/2006/main">
-              <a:ext uri="{FF2B5EF4-FFF2-40B4-BE49-F238E27FC236}">
-                <a16:creationId xmlns:a16="http://schemas.microsoft.com/office/drawing/2014/main" id="{44B6D89E-A185-4ED1-A67B-5426334B0CC5}"/>
+          <p:cNvPr id="103" name="rev-123">
+            <a:extLst xmlns:a="http://schemas.openxmlformats.org/drawingml/2006/main">
+              <a:ext uri="{FF2B5EF4-FFF2-40B4-BE49-F238E27FC236}">
+                <a16:creationId xmlns:a16="http://schemas.microsoft.com/office/drawing/2014/main" id="{A12D893B-01B5-412C-A11A-45D6D8B6E64F}"/>
               </a:ext>
             </a:extLst>
           </p:cNvPr>
@@ -10687,17 +10914,17 @@
                 <a:ea typeface="Calibri"/>
                 <a:cs typeface="Calibri"/>
               </a:rPr>
-              <a:t>Lower Python CPU time / page</a:t>
-            </a:r>
-          </a:p>
-        </p:txBody>
-      </p:sp>
-      <p:sp>
-        <p:nvSpPr>
-          <p:cNvPr id="104" name="rev-121">
-            <a:extLst xmlns:a="http://schemas.openxmlformats.org/drawingml/2006/main">
-              <a:ext uri="{FF2B5EF4-FFF2-40B4-BE49-F238E27FC236}">
-                <a16:creationId xmlns:a16="http://schemas.microsoft.com/office/drawing/2014/main" id="{F2CFC35A-35DF-4C3D-8F66-EE4A153BAE78}"/>
+              <a:t>Lower Python-process CPU / page</a:t>
+            </a:r>
+          </a:p>
+        </p:txBody>
+      </p:sp>
+      <p:sp>
+        <p:nvSpPr>
+          <p:cNvPr id="104" name="rev-124">
+            <a:extLst xmlns:a="http://schemas.openxmlformats.org/drawingml/2006/main">
+              <a:ext uri="{FF2B5EF4-FFF2-40B4-BE49-F238E27FC236}">
+                <a16:creationId xmlns:a16="http://schemas.microsoft.com/office/drawing/2014/main" id="{DCE3932E-08B1-4FC7-88EC-A190238757D5}"/>
               </a:ext>
             </a:extLst>
           </p:cNvPr>
@@ -10751,10 +10978,10 @@
       </p:sp>
       <p:sp>
         <p:nvSpPr>
-          <p:cNvPr id="105" name="rev-122">
-            <a:extLst xmlns:a="http://schemas.openxmlformats.org/drawingml/2006/main">
-              <a:ext uri="{FF2B5EF4-FFF2-40B4-BE49-F238E27FC236}">
-                <a16:creationId xmlns:a16="http://schemas.microsoft.com/office/drawing/2014/main" id="{8894147E-9425-489B-BC1B-AA4980EFDCA7}"/>
+          <p:cNvPr id="105" name="rev-125">
+            <a:extLst xmlns:a="http://schemas.openxmlformats.org/drawingml/2006/main">
+              <a:ext uri="{FF2B5EF4-FFF2-40B4-BE49-F238E27FC236}">
+                <a16:creationId xmlns:a16="http://schemas.microsoft.com/office/drawing/2014/main" id="{AC08CF92-8D19-4F35-97B2-1EF6D616C162}"/>
               </a:ext>
             </a:extLst>
           </p:cNvPr>
@@ -10785,7 +11012,7 @@
             <a:pPr>
               <a:defRPr sz="2550" b="1">
                 <a:solidFill>
-                  <a:srgbClr val="356B49"/>
+                  <a:srgbClr val="266466"/>
                 </a:solidFill>
                 <a:latin typeface="Calibri"/>
                 <a:ea typeface="Calibri"/>
@@ -10795,7 +11022,7 @@
             <a:r>
               <a:rPr sz="2550" b="1">
                 <a:solidFill>
-                  <a:srgbClr val="356B49"/>
+                  <a:srgbClr val="266466"/>
                 </a:solidFill>
                 <a:latin typeface="Calibri"/>
                 <a:ea typeface="Calibri"/>
@@ -10808,10 +11035,10 @@
       </p:sp>
       <p:sp>
         <p:nvSpPr>
-          <p:cNvPr id="106" name="rev-123">
-            <a:extLst xmlns:a="http://schemas.openxmlformats.org/drawingml/2006/main">
-              <a:ext uri="{FF2B5EF4-FFF2-40B4-BE49-F238E27FC236}">
-                <a16:creationId xmlns:a16="http://schemas.microsoft.com/office/drawing/2014/main" id="{AB6A5DDB-2E02-42B7-8D1B-05A9B9AA31D1}"/>
+          <p:cNvPr id="106" name="rev-126">
+            <a:extLst xmlns:a="http://schemas.openxmlformats.org/drawingml/2006/main">
+              <a:ext uri="{FF2B5EF4-FFF2-40B4-BE49-F238E27FC236}">
+                <a16:creationId xmlns:a16="http://schemas.microsoft.com/office/drawing/2014/main" id="{1AF13BD4-FAA8-4C51-80AB-30F6D13D8E3F}"/>
               </a:ext>
             </a:extLst>
           </p:cNvPr>
@@ -10866,7 +11093,7 @@
     </p:spTree>
     <p:extLst>
       <p:ext uri="{BB962C8B-B14F-4D97-AF65-F5344CB8AC3E}">
-        <p14:creationId xmlns:p14="http://schemas.microsoft.com/office/powerpoint/2010/main" val="701854478"/>
+        <p14:creationId xmlns:p14="http://schemas.microsoft.com/office/powerpoint/2010/main" val="2023219172"/>
       </p:ext>
     </p:extLst>
   </p:cSld>
@@ -10890,7 +11117,7 @@
           <p:cNvPr id="2" name="Shape 0">
             <a:extLst xmlns:a="http://schemas.openxmlformats.org/drawingml/2006/main">
               <a:ext uri="{FF2B5EF4-FFF2-40B4-BE49-F238E27FC236}">
-                <a16:creationId xmlns:a16="http://schemas.microsoft.com/office/drawing/2014/main" id="{E668F516-11A7-475E-AFA6-0C3FA09A5CB0}"/>
+                <a16:creationId xmlns:a16="http://schemas.microsoft.com/office/drawing/2014/main" id="{7E7B6E14-F629-4718-95A2-4F95D0D8E001}"/>
               </a:ext>
             </a:extLst>
           </p:cNvPr>
@@ -10930,7 +11157,7 @@
           <p:cNvPr id="3" name="Text 1">
             <a:extLst xmlns:a="http://schemas.openxmlformats.org/drawingml/2006/main">
               <a:ext uri="{FF2B5EF4-FFF2-40B4-BE49-F238E27FC236}">
-                <a16:creationId xmlns:a16="http://schemas.microsoft.com/office/drawing/2014/main" id="{A6D0E9F6-045E-4488-8D8D-CAB9BF2499CD}"/>
+                <a16:creationId xmlns:a16="http://schemas.microsoft.com/office/drawing/2014/main" id="{F2C2BA5C-4A6A-468A-A8BA-CCF634EB85AA}"/>
               </a:ext>
             </a:extLst>
           </p:cNvPr>
@@ -10976,7 +11203,7 @@
           <p:cNvPr id="4" name="Text 2">
             <a:extLst xmlns:a="http://schemas.openxmlformats.org/drawingml/2006/main">
               <a:ext uri="{FF2B5EF4-FFF2-40B4-BE49-F238E27FC236}">
-                <a16:creationId xmlns:a16="http://schemas.microsoft.com/office/drawing/2014/main" id="{7D6E6D01-9E8D-4A01-9CEB-E9168BC31E45}"/>
+                <a16:creationId xmlns:a16="http://schemas.microsoft.com/office/drawing/2014/main" id="{AAF3797E-C9AC-40EE-A4E6-82B9FCCAD72B}"/>
               </a:ext>
             </a:extLst>
           </p:cNvPr>
@@ -11019,14 +11246,14 @@
       </p:sp>
       <p:pic>
         <p:nvPicPr>
-          <p:cNvPr id="96" name="Image 0"/>
+          <p:cNvPr id="88" name="Image 0"/>
           <p:cNvPicPr>
             <a:picLocks xmlns:a="http://schemas.openxmlformats.org/drawingml/2006/main" noChangeAspect="1"/>
           </p:cNvPicPr>
           <p:nvPr/>
         </p:nvPicPr>
         <p:blipFill>
-          <a:blip xmlns:r="http://schemas.openxmlformats.org/officeDocument/2006/relationships" xmlns:a="http://schemas.openxmlformats.org/drawingml/2006/main" r:embed="R8acfd5432efb4cb2"/>
+          <a:blip xmlns:r="http://schemas.openxmlformats.org/officeDocument/2006/relationships" xmlns:a="http://schemas.openxmlformats.org/drawingml/2006/main" r:embed="Rb0aeaba2cb564904"/>
           <a:stretch xmlns:a="http://schemas.openxmlformats.org/drawingml/2006/main">
             <a:fillRect l="0" t="0" r="0" b="0"/>
           </a:stretch>
@@ -11053,7 +11280,7 @@
           <p:cNvPr id="7" name="Shape 4">
             <a:extLst xmlns:a="http://schemas.openxmlformats.org/drawingml/2006/main">
               <a:ext uri="{FF2B5EF4-FFF2-40B4-BE49-F238E27FC236}">
-                <a16:creationId xmlns:a16="http://schemas.microsoft.com/office/drawing/2014/main" id="{8768D130-1CB6-4830-9C41-523E06D02C08}"/>
+                <a16:creationId xmlns:a16="http://schemas.microsoft.com/office/drawing/2014/main" id="{E7F2EDCA-AAD3-457B-BA8A-E32A7D87D231}"/>
               </a:ext>
             </a:extLst>
           </p:cNvPr>
@@ -11080,7 +11307,7 @@
           <p:cNvPr id="9" name="Text 6">
             <a:extLst xmlns:a="http://schemas.openxmlformats.org/drawingml/2006/main">
               <a:ext uri="{FF2B5EF4-FFF2-40B4-BE49-F238E27FC236}">
-                <a16:creationId xmlns:a16="http://schemas.microsoft.com/office/drawing/2014/main" id="{1660092C-ECEE-4841-8996-66B7E604DE65}"/>
+                <a16:creationId xmlns:a16="http://schemas.microsoft.com/office/drawing/2014/main" id="{EE0E83E8-9378-4B10-AD9F-1B472498476D}"/>
               </a:ext>
             </a:extLst>
           </p:cNvPr>
@@ -11123,10 +11350,10 @@
       </p:sp>
       <p:sp>
         <p:nvSpPr>
-          <p:cNvPr id="51" name="rev-124">
-            <a:extLst xmlns:a="http://schemas.openxmlformats.org/drawingml/2006/main">
-              <a:ext uri="{FF2B5EF4-FFF2-40B4-BE49-F238E27FC236}">
-                <a16:creationId xmlns:a16="http://schemas.microsoft.com/office/drawing/2014/main" id="{55393081-1C8D-412F-81AF-1DFA6B84D516}"/>
+          <p:cNvPr id="51" name="rev-127">
+            <a:extLst xmlns:a="http://schemas.openxmlformats.org/drawingml/2006/main">
+              <a:ext uri="{FF2B5EF4-FFF2-40B4-BE49-F238E27FC236}">
+                <a16:creationId xmlns:a16="http://schemas.microsoft.com/office/drawing/2014/main" id="{2AD56AB7-CA3D-41AE-B30E-CC56A9D78491}"/>
               </a:ext>
             </a:extLst>
           </p:cNvPr>
@@ -11180,21 +11407,21 @@
       </p:sp>
       <p:sp>
         <p:nvSpPr>
-          <p:cNvPr id="52" name="rev-125">
-            <a:extLst xmlns:a="http://schemas.openxmlformats.org/drawingml/2006/main">
-              <a:ext uri="{FF2B5EF4-FFF2-40B4-BE49-F238E27FC236}">
-                <a16:creationId xmlns:a16="http://schemas.microsoft.com/office/drawing/2014/main" id="{50998231-215C-4A2E-A6CB-69AF9C60620A}"/>
-              </a:ext>
-            </a:extLst>
-          </p:cNvPr>
-          <p:cNvSpPr>
-            <a:spLocks xmlns:a="http://schemas.openxmlformats.org/drawingml/2006/main" noGrp="1"/>
-          </p:cNvSpPr>
-          <p:nvPr/>
-        </p:nvSpPr>
-        <p:spPr>
-          <a:xfrm xmlns:a="http://schemas.openxmlformats.org/drawingml/2006/main">
-            <a:off x="457200" y="1400175"/>
+          <p:cNvPr id="52" name="rev-128">
+            <a:extLst xmlns:a="http://schemas.openxmlformats.org/drawingml/2006/main">
+              <a:ext uri="{FF2B5EF4-FFF2-40B4-BE49-F238E27FC236}">
+                <a16:creationId xmlns:a16="http://schemas.microsoft.com/office/drawing/2014/main" id="{ADFE56B2-2509-4DEB-8E98-0D892B375793}"/>
+              </a:ext>
+            </a:extLst>
+          </p:cNvPr>
+          <p:cNvSpPr>
+            <a:spLocks xmlns:a="http://schemas.openxmlformats.org/drawingml/2006/main" noGrp="1"/>
+          </p:cNvSpPr>
+          <p:nvPr/>
+        </p:nvSpPr>
+        <p:spPr>
+          <a:xfrm xmlns:a="http://schemas.openxmlformats.org/drawingml/2006/main">
+            <a:off x="457200" y="1457325"/>
             <a:ext cx="1476375" cy="247650"/>
           </a:xfrm>
           <a:prstGeom xmlns:a="http://schemas.openxmlformats.org/drawingml/2006/main" prst="rect">
@@ -11237,21 +11464,21 @@
       </p:sp>
       <p:sp>
         <p:nvSpPr>
-          <p:cNvPr id="53" name="rev-126">
-            <a:extLst xmlns:a="http://schemas.openxmlformats.org/drawingml/2006/main">
-              <a:ext uri="{FF2B5EF4-FFF2-40B4-BE49-F238E27FC236}">
-                <a16:creationId xmlns:a16="http://schemas.microsoft.com/office/drawing/2014/main" id="{76B7AFD0-9902-43D0-B2AA-3A10F8F52B34}"/>
-              </a:ext>
-            </a:extLst>
-          </p:cNvPr>
-          <p:cNvSpPr>
-            <a:spLocks xmlns:a="http://schemas.openxmlformats.org/drawingml/2006/main" noGrp="1"/>
-          </p:cNvSpPr>
-          <p:nvPr/>
-        </p:nvSpPr>
-        <p:spPr>
-          <a:xfrm xmlns:a="http://schemas.openxmlformats.org/drawingml/2006/main">
-            <a:off x="2047875" y="1400175"/>
+          <p:cNvPr id="53" name="rev-129">
+            <a:extLst xmlns:a="http://schemas.openxmlformats.org/drawingml/2006/main">
+              <a:ext uri="{FF2B5EF4-FFF2-40B4-BE49-F238E27FC236}">
+                <a16:creationId xmlns:a16="http://schemas.microsoft.com/office/drawing/2014/main" id="{52501D60-7AE3-4A0D-8355-F1B2A1CF709A}"/>
+              </a:ext>
+            </a:extLst>
+          </p:cNvPr>
+          <p:cNvSpPr>
+            <a:spLocks xmlns:a="http://schemas.openxmlformats.org/drawingml/2006/main" noGrp="1"/>
+          </p:cNvSpPr>
+          <p:nvPr/>
+        </p:nvSpPr>
+        <p:spPr>
+          <a:xfrm xmlns:a="http://schemas.openxmlformats.org/drawingml/2006/main">
+            <a:off x="2047875" y="1457325"/>
             <a:ext cx="3810000" cy="257175"/>
           </a:xfrm>
           <a:prstGeom xmlns:a="http://schemas.openxmlformats.org/drawingml/2006/main" prst="rect">
@@ -11294,21 +11521,21 @@
       </p:sp>
       <p:sp>
         <p:nvSpPr>
-          <p:cNvPr id="54" name="rev-127">
-            <a:extLst xmlns:a="http://schemas.openxmlformats.org/drawingml/2006/main">
-              <a:ext uri="{FF2B5EF4-FFF2-40B4-BE49-F238E27FC236}">
-                <a16:creationId xmlns:a16="http://schemas.microsoft.com/office/drawing/2014/main" id="{E8CA7DEA-3720-4386-B09F-FB25D4AFDFB6}"/>
-              </a:ext>
-            </a:extLst>
-          </p:cNvPr>
-          <p:cNvSpPr>
-            <a:spLocks xmlns:a="http://schemas.openxmlformats.org/drawingml/2006/main" noGrp="1"/>
-          </p:cNvSpPr>
-          <p:nvPr/>
-        </p:nvSpPr>
-        <p:spPr>
-          <a:xfrm xmlns:a="http://schemas.openxmlformats.org/drawingml/2006/main">
-            <a:off x="2047875" y="1657350"/>
+          <p:cNvPr id="54" name="rev-130">
+            <a:extLst xmlns:a="http://schemas.openxmlformats.org/drawingml/2006/main">
+              <a:ext uri="{FF2B5EF4-FFF2-40B4-BE49-F238E27FC236}">
+                <a16:creationId xmlns:a16="http://schemas.microsoft.com/office/drawing/2014/main" id="{AC74AF72-CB2D-4A19-939F-EB975DB23123}"/>
+              </a:ext>
+            </a:extLst>
+          </p:cNvPr>
+          <p:cNvSpPr>
+            <a:spLocks xmlns:a="http://schemas.openxmlformats.org/drawingml/2006/main" noGrp="1"/>
+          </p:cNvSpPr>
+          <p:nvPr/>
+        </p:nvSpPr>
+        <p:spPr>
+          <a:xfrm xmlns:a="http://schemas.openxmlformats.org/drawingml/2006/main">
+            <a:off x="2047875" y="1714500"/>
             <a:ext cx="3667125" cy="238125"/>
           </a:xfrm>
           <a:prstGeom xmlns:a="http://schemas.openxmlformats.org/drawingml/2006/main" prst="rect">
@@ -11343,7 +11570,7 @@
                 <a:latin typeface="Calibri"/>
                 <a:ea typeface="Calibri"/>
                 <a:cs typeface="Calibri"/>
-                <a:hlinkClick xmlns:r="http://schemas.openxmlformats.org/officeDocument/2006/relationships" r:id="Rbc54f299f11844a4"/>
+                <a:hlinkClick xmlns:r="http://schemas.openxmlformats.org/officeDocument/2006/relationships" r:id="R172ebeb170d44efd"/>
               </a:rPr>
               <a:t>arxiv.org/abs/2306.06070</a:t>
             </a:r>
@@ -11352,21 +11579,21 @@
       </p:sp>
       <p:sp>
         <p:nvSpPr>
-          <p:cNvPr id="55" name="rev-128">
-            <a:extLst xmlns:a="http://schemas.openxmlformats.org/drawingml/2006/main">
-              <a:ext uri="{FF2B5EF4-FFF2-40B4-BE49-F238E27FC236}">
-                <a16:creationId xmlns:a16="http://schemas.microsoft.com/office/drawing/2014/main" id="{C015979C-B016-4753-956A-0805A2E9D8A1}"/>
-              </a:ext>
-            </a:extLst>
-          </p:cNvPr>
-          <p:cNvSpPr>
-            <a:spLocks xmlns:a="http://schemas.openxmlformats.org/drawingml/2006/main" noGrp="1"/>
-          </p:cNvSpPr>
-          <p:nvPr/>
-        </p:nvSpPr>
-        <p:spPr>
-          <a:xfrm xmlns:a="http://schemas.openxmlformats.org/drawingml/2006/main">
-            <a:off x="457200" y="2028825"/>
+          <p:cNvPr id="55" name="rev-131">
+            <a:extLst xmlns:a="http://schemas.openxmlformats.org/drawingml/2006/main">
+              <a:ext uri="{FF2B5EF4-FFF2-40B4-BE49-F238E27FC236}">
+                <a16:creationId xmlns:a16="http://schemas.microsoft.com/office/drawing/2014/main" id="{2BA3F126-EA7A-4014-809D-3261A1BA4E23}"/>
+              </a:ext>
+            </a:extLst>
+          </p:cNvPr>
+          <p:cNvSpPr>
+            <a:spLocks xmlns:a="http://schemas.openxmlformats.org/drawingml/2006/main" noGrp="1"/>
+          </p:cNvSpPr>
+          <p:nvPr/>
+        </p:nvSpPr>
+        <p:spPr>
+          <a:xfrm xmlns:a="http://schemas.openxmlformats.org/drawingml/2006/main">
+            <a:off x="457200" y="2085975"/>
             <a:ext cx="1476375" cy="247650"/>
           </a:xfrm>
           <a:prstGeom xmlns:a="http://schemas.openxmlformats.org/drawingml/2006/main" prst="rect">
@@ -11409,21 +11636,21 @@
       </p:sp>
       <p:sp>
         <p:nvSpPr>
-          <p:cNvPr id="56" name="rev-129">
-            <a:extLst xmlns:a="http://schemas.openxmlformats.org/drawingml/2006/main">
-              <a:ext uri="{FF2B5EF4-FFF2-40B4-BE49-F238E27FC236}">
-                <a16:creationId xmlns:a16="http://schemas.microsoft.com/office/drawing/2014/main" id="{FF2065AC-3095-4FBB-A89F-4F38C339694F}"/>
-              </a:ext>
-            </a:extLst>
-          </p:cNvPr>
-          <p:cNvSpPr>
-            <a:spLocks xmlns:a="http://schemas.openxmlformats.org/drawingml/2006/main" noGrp="1"/>
-          </p:cNvSpPr>
-          <p:nvPr/>
-        </p:nvSpPr>
-        <p:spPr>
-          <a:xfrm xmlns:a="http://schemas.openxmlformats.org/drawingml/2006/main">
-            <a:off x="2047875" y="2028825"/>
+          <p:cNvPr id="56" name="rev-132">
+            <a:extLst xmlns:a="http://schemas.openxmlformats.org/drawingml/2006/main">
+              <a:ext uri="{FF2B5EF4-FFF2-40B4-BE49-F238E27FC236}">
+                <a16:creationId xmlns:a16="http://schemas.microsoft.com/office/drawing/2014/main" id="{55AA49F6-25DF-4FCB-8AD8-817086FFE91A}"/>
+              </a:ext>
+            </a:extLst>
+          </p:cNvPr>
+          <p:cNvSpPr>
+            <a:spLocks xmlns:a="http://schemas.openxmlformats.org/drawingml/2006/main" noGrp="1"/>
+          </p:cNvSpPr>
+          <p:nvPr/>
+        </p:nvSpPr>
+        <p:spPr>
+          <a:xfrm xmlns:a="http://schemas.openxmlformats.org/drawingml/2006/main">
+            <a:off x="2047875" y="2085975"/>
             <a:ext cx="3810000" cy="257175"/>
           </a:xfrm>
           <a:prstGeom xmlns:a="http://schemas.openxmlformats.org/drawingml/2006/main" prst="rect">
@@ -11466,21 +11693,21 @@
       </p:sp>
       <p:sp>
         <p:nvSpPr>
-          <p:cNvPr id="57" name="rev-130">
-            <a:extLst xmlns:a="http://schemas.openxmlformats.org/drawingml/2006/main">
-              <a:ext uri="{FF2B5EF4-FFF2-40B4-BE49-F238E27FC236}">
-                <a16:creationId xmlns:a16="http://schemas.microsoft.com/office/drawing/2014/main" id="{58C8FC2F-B0BD-41FC-9B9E-9F93D2D54346}"/>
-              </a:ext>
-            </a:extLst>
-          </p:cNvPr>
-          <p:cNvSpPr>
-            <a:spLocks xmlns:a="http://schemas.openxmlformats.org/drawingml/2006/main" noGrp="1"/>
-          </p:cNvSpPr>
-          <p:nvPr/>
-        </p:nvSpPr>
-        <p:spPr>
-          <a:xfrm xmlns:a="http://schemas.openxmlformats.org/drawingml/2006/main">
-            <a:off x="2047875" y="2286000"/>
+          <p:cNvPr id="57" name="rev-133">
+            <a:extLst xmlns:a="http://schemas.openxmlformats.org/drawingml/2006/main">
+              <a:ext uri="{FF2B5EF4-FFF2-40B4-BE49-F238E27FC236}">
+                <a16:creationId xmlns:a16="http://schemas.microsoft.com/office/drawing/2014/main" id="{0F787A49-3809-4C87-88A5-3B53BB7E0E13}"/>
+              </a:ext>
+            </a:extLst>
+          </p:cNvPr>
+          <p:cNvSpPr>
+            <a:spLocks xmlns:a="http://schemas.openxmlformats.org/drawingml/2006/main" noGrp="1"/>
+          </p:cNvSpPr>
+          <p:nvPr/>
+        </p:nvSpPr>
+        <p:spPr>
+          <a:xfrm xmlns:a="http://schemas.openxmlformats.org/drawingml/2006/main">
+            <a:off x="2047875" y="2343150"/>
             <a:ext cx="3667125" cy="238125"/>
           </a:xfrm>
           <a:prstGeom xmlns:a="http://schemas.openxmlformats.org/drawingml/2006/main" prst="rect">
@@ -11515,7 +11742,7 @@
                 <a:latin typeface="Calibri"/>
                 <a:ea typeface="Calibri"/>
                 <a:cs typeface="Calibri"/>
-                <a:hlinkClick xmlns:r="http://schemas.openxmlformats.org/officeDocument/2006/relationships" r:id="R04cba4cdd62d4800"/>
+                <a:hlinkClick xmlns:r="http://schemas.openxmlformats.org/officeDocument/2006/relationships" r:id="R03b02278e725400d"/>
               </a:rPr>
               <a:t>arxiv.org/abs/2401.01614</a:t>
             </a:r>
@@ -11524,21 +11751,21 @@
       </p:sp>
       <p:sp>
         <p:nvSpPr>
-          <p:cNvPr id="58" name="rev-131">
-            <a:extLst xmlns:a="http://schemas.openxmlformats.org/drawingml/2006/main">
-              <a:ext uri="{FF2B5EF4-FFF2-40B4-BE49-F238E27FC236}">
-                <a16:creationId xmlns:a16="http://schemas.microsoft.com/office/drawing/2014/main" id="{80D565D5-6948-4994-BEB0-96C9BAEE2A5A}"/>
-              </a:ext>
-            </a:extLst>
-          </p:cNvPr>
-          <p:cNvSpPr>
-            <a:spLocks xmlns:a="http://schemas.openxmlformats.org/drawingml/2006/main" noGrp="1"/>
-          </p:cNvSpPr>
-          <p:nvPr/>
-        </p:nvSpPr>
-        <p:spPr>
-          <a:xfrm xmlns:a="http://schemas.openxmlformats.org/drawingml/2006/main">
-            <a:off x="457200" y="2657475"/>
+          <p:cNvPr id="58" name="rev-134">
+            <a:extLst xmlns:a="http://schemas.openxmlformats.org/drawingml/2006/main">
+              <a:ext uri="{FF2B5EF4-FFF2-40B4-BE49-F238E27FC236}">
+                <a16:creationId xmlns:a16="http://schemas.microsoft.com/office/drawing/2014/main" id="{0715AF52-248D-4ECD-B378-8F7AA5AF2508}"/>
+              </a:ext>
+            </a:extLst>
+          </p:cNvPr>
+          <p:cNvSpPr>
+            <a:spLocks xmlns:a="http://schemas.openxmlformats.org/drawingml/2006/main" noGrp="1"/>
+          </p:cNvSpPr>
+          <p:nvPr/>
+        </p:nvSpPr>
+        <p:spPr>
+          <a:xfrm xmlns:a="http://schemas.openxmlformats.org/drawingml/2006/main">
+            <a:off x="457200" y="2714625"/>
             <a:ext cx="1476375" cy="247650"/>
           </a:xfrm>
           <a:prstGeom xmlns:a="http://schemas.openxmlformats.org/drawingml/2006/main" prst="rect">
@@ -11581,21 +11808,21 @@
       </p:sp>
       <p:sp>
         <p:nvSpPr>
-          <p:cNvPr id="59" name="rev-132">
-            <a:extLst xmlns:a="http://schemas.openxmlformats.org/drawingml/2006/main">
-              <a:ext uri="{FF2B5EF4-FFF2-40B4-BE49-F238E27FC236}">
-                <a16:creationId xmlns:a16="http://schemas.microsoft.com/office/drawing/2014/main" id="{A9873771-0728-4D63-84E0-FE23A99064BA}"/>
-              </a:ext>
-            </a:extLst>
-          </p:cNvPr>
-          <p:cNvSpPr>
-            <a:spLocks xmlns:a="http://schemas.openxmlformats.org/drawingml/2006/main" noGrp="1"/>
-          </p:cNvSpPr>
-          <p:nvPr/>
-        </p:nvSpPr>
-        <p:spPr>
-          <a:xfrm xmlns:a="http://schemas.openxmlformats.org/drawingml/2006/main">
-            <a:off x="2047875" y="2657475"/>
+          <p:cNvPr id="59" name="rev-135">
+            <a:extLst xmlns:a="http://schemas.openxmlformats.org/drawingml/2006/main">
+              <a:ext uri="{FF2B5EF4-FFF2-40B4-BE49-F238E27FC236}">
+                <a16:creationId xmlns:a16="http://schemas.microsoft.com/office/drawing/2014/main" id="{F09A9137-3630-4109-AA88-A646D12E5242}"/>
+              </a:ext>
+            </a:extLst>
+          </p:cNvPr>
+          <p:cNvSpPr>
+            <a:spLocks xmlns:a="http://schemas.openxmlformats.org/drawingml/2006/main" noGrp="1"/>
+          </p:cNvSpPr>
+          <p:nvPr/>
+        </p:nvSpPr>
+        <p:spPr>
+          <a:xfrm xmlns:a="http://schemas.openxmlformats.org/drawingml/2006/main">
+            <a:off x="2047875" y="2714625"/>
             <a:ext cx="3810000" cy="257175"/>
           </a:xfrm>
           <a:prstGeom xmlns:a="http://schemas.openxmlformats.org/drawingml/2006/main" prst="rect">
@@ -11638,21 +11865,21 @@
       </p:sp>
       <p:sp>
         <p:nvSpPr>
-          <p:cNvPr id="60" name="rev-133">
-            <a:extLst xmlns:a="http://schemas.openxmlformats.org/drawingml/2006/main">
-              <a:ext uri="{FF2B5EF4-FFF2-40B4-BE49-F238E27FC236}">
-                <a16:creationId xmlns:a16="http://schemas.microsoft.com/office/drawing/2014/main" id="{26639318-8EDA-4D77-A640-A49A3C6028C6}"/>
-              </a:ext>
-            </a:extLst>
-          </p:cNvPr>
-          <p:cNvSpPr>
-            <a:spLocks xmlns:a="http://schemas.openxmlformats.org/drawingml/2006/main" noGrp="1"/>
-          </p:cNvSpPr>
-          <p:nvPr/>
-        </p:nvSpPr>
-        <p:spPr>
-          <a:xfrm xmlns:a="http://schemas.openxmlformats.org/drawingml/2006/main">
-            <a:off x="2047875" y="2914650"/>
+          <p:cNvPr id="60" name="rev-136">
+            <a:extLst xmlns:a="http://schemas.openxmlformats.org/drawingml/2006/main">
+              <a:ext uri="{FF2B5EF4-FFF2-40B4-BE49-F238E27FC236}">
+                <a16:creationId xmlns:a16="http://schemas.microsoft.com/office/drawing/2014/main" id="{29FA69EA-3EFF-4B5C-93C9-1D506CB53680}"/>
+              </a:ext>
+            </a:extLst>
+          </p:cNvPr>
+          <p:cNvSpPr>
+            <a:spLocks xmlns:a="http://schemas.openxmlformats.org/drawingml/2006/main" noGrp="1"/>
+          </p:cNvSpPr>
+          <p:nvPr/>
+        </p:nvSpPr>
+        <p:spPr>
+          <a:xfrm xmlns:a="http://schemas.openxmlformats.org/drawingml/2006/main">
+            <a:off x="2047875" y="2971800"/>
             <a:ext cx="3667125" cy="238125"/>
           </a:xfrm>
           <a:prstGeom xmlns:a="http://schemas.openxmlformats.org/drawingml/2006/main" prst="rect">
@@ -11687,7 +11914,7 @@
                 <a:latin typeface="Calibri"/>
                 <a:ea typeface="Calibri"/>
                 <a:cs typeface="Calibri"/>
-                <a:hlinkClick xmlns:r="http://schemas.openxmlformats.org/officeDocument/2006/relationships" r:id="R4a129045b37d4593"/>
+                <a:hlinkClick xmlns:r="http://schemas.openxmlformats.org/officeDocument/2006/relationships" r:id="Rd82c1273f93c40ba"/>
               </a:rPr>
               <a:t>arxiv.org/abs/2408.00203</a:t>
             </a:r>
@@ -11696,21 +11923,21 @@
       </p:sp>
       <p:sp>
         <p:nvSpPr>
-          <p:cNvPr id="61" name="rev-134">
-            <a:extLst xmlns:a="http://schemas.openxmlformats.org/drawingml/2006/main">
-              <a:ext uri="{FF2B5EF4-FFF2-40B4-BE49-F238E27FC236}">
-                <a16:creationId xmlns:a16="http://schemas.microsoft.com/office/drawing/2014/main" id="{67A24431-D2F4-464C-B93D-83D0DCCAA84E}"/>
-              </a:ext>
-            </a:extLst>
-          </p:cNvPr>
-          <p:cNvSpPr>
-            <a:spLocks xmlns:a="http://schemas.openxmlformats.org/drawingml/2006/main" noGrp="1"/>
-          </p:cNvSpPr>
-          <p:nvPr/>
-        </p:nvSpPr>
-        <p:spPr>
-          <a:xfrm xmlns:a="http://schemas.openxmlformats.org/drawingml/2006/main">
-            <a:off x="457200" y="3286125"/>
+          <p:cNvPr id="61" name="rev-137">
+            <a:extLst xmlns:a="http://schemas.openxmlformats.org/drawingml/2006/main">
+              <a:ext uri="{FF2B5EF4-FFF2-40B4-BE49-F238E27FC236}">
+                <a16:creationId xmlns:a16="http://schemas.microsoft.com/office/drawing/2014/main" id="{156BC2CB-D80B-44C7-BEEE-E6A5F9E6005B}"/>
+              </a:ext>
+            </a:extLst>
+          </p:cNvPr>
+          <p:cNvSpPr>
+            <a:spLocks xmlns:a="http://schemas.openxmlformats.org/drawingml/2006/main" noGrp="1"/>
+          </p:cNvSpPr>
+          <p:nvPr/>
+        </p:nvSpPr>
+        <p:spPr>
+          <a:xfrm xmlns:a="http://schemas.openxmlformats.org/drawingml/2006/main">
+            <a:off x="457200" y="3343275"/>
             <a:ext cx="1476375" cy="247650"/>
           </a:xfrm>
           <a:prstGeom xmlns:a="http://schemas.openxmlformats.org/drawingml/2006/main" prst="rect">
@@ -11753,21 +11980,21 @@
       </p:sp>
       <p:sp>
         <p:nvSpPr>
-          <p:cNvPr id="62" name="rev-135">
-            <a:extLst xmlns:a="http://schemas.openxmlformats.org/drawingml/2006/main">
-              <a:ext uri="{FF2B5EF4-FFF2-40B4-BE49-F238E27FC236}">
-                <a16:creationId xmlns:a16="http://schemas.microsoft.com/office/drawing/2014/main" id="{001F380E-7830-445E-B8B5-12FCA22A26D7}"/>
-              </a:ext>
-            </a:extLst>
-          </p:cNvPr>
-          <p:cNvSpPr>
-            <a:spLocks xmlns:a="http://schemas.openxmlformats.org/drawingml/2006/main" noGrp="1"/>
-          </p:cNvSpPr>
-          <p:nvPr/>
-        </p:nvSpPr>
-        <p:spPr>
-          <a:xfrm xmlns:a="http://schemas.openxmlformats.org/drawingml/2006/main">
-            <a:off x="2047875" y="3286125"/>
+          <p:cNvPr id="62" name="rev-138">
+            <a:extLst xmlns:a="http://schemas.openxmlformats.org/drawingml/2006/main">
+              <a:ext uri="{FF2B5EF4-FFF2-40B4-BE49-F238E27FC236}">
+                <a16:creationId xmlns:a16="http://schemas.microsoft.com/office/drawing/2014/main" id="{5090DF9E-2698-4BDC-9AB9-B280FBE96315}"/>
+              </a:ext>
+            </a:extLst>
+          </p:cNvPr>
+          <p:cNvSpPr>
+            <a:spLocks xmlns:a="http://schemas.openxmlformats.org/drawingml/2006/main" noGrp="1"/>
+          </p:cNvSpPr>
+          <p:nvPr/>
+        </p:nvSpPr>
+        <p:spPr>
+          <a:xfrm xmlns:a="http://schemas.openxmlformats.org/drawingml/2006/main">
+            <a:off x="2047875" y="3343275"/>
             <a:ext cx="3810000" cy="257175"/>
           </a:xfrm>
           <a:prstGeom xmlns:a="http://schemas.openxmlformats.org/drawingml/2006/main" prst="rect">
@@ -11810,21 +12037,21 @@
       </p:sp>
       <p:sp>
         <p:nvSpPr>
-          <p:cNvPr id="63" name="rev-136">
-            <a:extLst xmlns:a="http://schemas.openxmlformats.org/drawingml/2006/main">
-              <a:ext uri="{FF2B5EF4-FFF2-40B4-BE49-F238E27FC236}">
-                <a16:creationId xmlns:a16="http://schemas.microsoft.com/office/drawing/2014/main" id="{197DC6DF-DD47-4554-AFC3-6AC0B4123850}"/>
-              </a:ext>
-            </a:extLst>
-          </p:cNvPr>
-          <p:cNvSpPr>
-            <a:spLocks xmlns:a="http://schemas.openxmlformats.org/drawingml/2006/main" noGrp="1"/>
-          </p:cNvSpPr>
-          <p:nvPr/>
-        </p:nvSpPr>
-        <p:spPr>
-          <a:xfrm xmlns:a="http://schemas.openxmlformats.org/drawingml/2006/main">
-            <a:off x="2047875" y="3543300"/>
+          <p:cNvPr id="63" name="rev-139">
+            <a:extLst xmlns:a="http://schemas.openxmlformats.org/drawingml/2006/main">
+              <a:ext uri="{FF2B5EF4-FFF2-40B4-BE49-F238E27FC236}">
+                <a16:creationId xmlns:a16="http://schemas.microsoft.com/office/drawing/2014/main" id="{B21F8CA1-5D86-4DEF-9B09-36B1EE9D847B}"/>
+              </a:ext>
+            </a:extLst>
+          </p:cNvPr>
+          <p:cNvSpPr>
+            <a:spLocks xmlns:a="http://schemas.openxmlformats.org/drawingml/2006/main" noGrp="1"/>
+          </p:cNvSpPr>
+          <p:nvPr/>
+        </p:nvSpPr>
+        <p:spPr>
+          <a:xfrm xmlns:a="http://schemas.openxmlformats.org/drawingml/2006/main">
+            <a:off x="2047875" y="3600450"/>
             <a:ext cx="3667125" cy="238125"/>
           </a:xfrm>
           <a:prstGeom xmlns:a="http://schemas.openxmlformats.org/drawingml/2006/main" prst="rect">
@@ -11859,7 +12086,7 @@
                 <a:latin typeface="Calibri"/>
                 <a:ea typeface="Calibri"/>
                 <a:cs typeface="Calibri"/>
-                <a:hlinkClick xmlns:r="http://schemas.openxmlformats.org/officeDocument/2006/relationships" r:id="R15b357e2255a4a45"/>
+                <a:hlinkClick xmlns:r="http://schemas.openxmlformats.org/officeDocument/2006/relationships" r:id="Ref4521fcb89a4f49"/>
               </a:rPr>
               <a:t>arxiv.org/abs/2509.11939</a:t>
             </a:r>
@@ -11868,21 +12095,21 @@
       </p:sp>
       <p:sp>
         <p:nvSpPr>
-          <p:cNvPr id="64" name="rev-137">
-            <a:extLst xmlns:a="http://schemas.openxmlformats.org/drawingml/2006/main">
-              <a:ext uri="{FF2B5EF4-FFF2-40B4-BE49-F238E27FC236}">
-                <a16:creationId xmlns:a16="http://schemas.microsoft.com/office/drawing/2014/main" id="{CD2C0AF2-2D5F-4C23-8060-8502F4309BB0}"/>
-              </a:ext>
-            </a:extLst>
-          </p:cNvPr>
-          <p:cNvSpPr>
-            <a:spLocks xmlns:a="http://schemas.openxmlformats.org/drawingml/2006/main" noGrp="1"/>
-          </p:cNvSpPr>
-          <p:nvPr/>
-        </p:nvSpPr>
-        <p:spPr>
-          <a:xfrm xmlns:a="http://schemas.openxmlformats.org/drawingml/2006/main">
-            <a:off x="457200" y="3914775"/>
+          <p:cNvPr id="64" name="rev-140">
+            <a:extLst xmlns:a="http://schemas.openxmlformats.org/drawingml/2006/main">
+              <a:ext uri="{FF2B5EF4-FFF2-40B4-BE49-F238E27FC236}">
+                <a16:creationId xmlns:a16="http://schemas.microsoft.com/office/drawing/2014/main" id="{F8231961-E5F1-4D8F-A60B-92B54A134E22}"/>
+              </a:ext>
+            </a:extLst>
+          </p:cNvPr>
+          <p:cNvSpPr>
+            <a:spLocks xmlns:a="http://schemas.openxmlformats.org/drawingml/2006/main" noGrp="1"/>
+          </p:cNvSpPr>
+          <p:nvPr/>
+        </p:nvSpPr>
+        <p:spPr>
+          <a:xfrm xmlns:a="http://schemas.openxmlformats.org/drawingml/2006/main">
+            <a:off x="457200" y="3971925"/>
             <a:ext cx="1476375" cy="247650"/>
           </a:xfrm>
           <a:prstGeom xmlns:a="http://schemas.openxmlformats.org/drawingml/2006/main" prst="rect">
@@ -11925,21 +12152,21 @@
       </p:sp>
       <p:sp>
         <p:nvSpPr>
-          <p:cNvPr id="65" name="rev-138">
-            <a:extLst xmlns:a="http://schemas.openxmlformats.org/drawingml/2006/main">
-              <a:ext uri="{FF2B5EF4-FFF2-40B4-BE49-F238E27FC236}">
-                <a16:creationId xmlns:a16="http://schemas.microsoft.com/office/drawing/2014/main" id="{5F263716-F6B4-4C39-8FA0-C94F5A78D1AB}"/>
-              </a:ext>
-            </a:extLst>
-          </p:cNvPr>
-          <p:cNvSpPr>
-            <a:spLocks xmlns:a="http://schemas.openxmlformats.org/drawingml/2006/main" noGrp="1"/>
-          </p:cNvSpPr>
-          <p:nvPr/>
-        </p:nvSpPr>
-        <p:spPr>
-          <a:xfrm xmlns:a="http://schemas.openxmlformats.org/drawingml/2006/main">
-            <a:off x="2047875" y="3914775"/>
+          <p:cNvPr id="65" name="rev-141">
+            <a:extLst xmlns:a="http://schemas.openxmlformats.org/drawingml/2006/main">
+              <a:ext uri="{FF2B5EF4-FFF2-40B4-BE49-F238E27FC236}">
+                <a16:creationId xmlns:a16="http://schemas.microsoft.com/office/drawing/2014/main" id="{6722EB09-E746-4A1C-8BF8-00AAA2DF5FC0}"/>
+              </a:ext>
+            </a:extLst>
+          </p:cNvPr>
+          <p:cNvSpPr>
+            <a:spLocks xmlns:a="http://schemas.openxmlformats.org/drawingml/2006/main" noGrp="1"/>
+          </p:cNvSpPr>
+          <p:nvPr/>
+        </p:nvSpPr>
+        <p:spPr>
+          <a:xfrm xmlns:a="http://schemas.openxmlformats.org/drawingml/2006/main">
+            <a:off x="2047875" y="3971925"/>
             <a:ext cx="3810000" cy="257175"/>
           </a:xfrm>
           <a:prstGeom xmlns:a="http://schemas.openxmlformats.org/drawingml/2006/main" prst="rect">
@@ -11982,21 +12209,21 @@
       </p:sp>
       <p:sp>
         <p:nvSpPr>
-          <p:cNvPr id="66" name="rev-139">
-            <a:extLst xmlns:a="http://schemas.openxmlformats.org/drawingml/2006/main">
-              <a:ext uri="{FF2B5EF4-FFF2-40B4-BE49-F238E27FC236}">
-                <a16:creationId xmlns:a16="http://schemas.microsoft.com/office/drawing/2014/main" id="{D9A69285-C696-4C64-8B67-A340F6C03441}"/>
-              </a:ext>
-            </a:extLst>
-          </p:cNvPr>
-          <p:cNvSpPr>
-            <a:spLocks xmlns:a="http://schemas.openxmlformats.org/drawingml/2006/main" noGrp="1"/>
-          </p:cNvSpPr>
-          <p:nvPr/>
-        </p:nvSpPr>
-        <p:spPr>
-          <a:xfrm xmlns:a="http://schemas.openxmlformats.org/drawingml/2006/main">
-            <a:off x="2047875" y="4171950"/>
+          <p:cNvPr id="66" name="rev-142">
+            <a:extLst xmlns:a="http://schemas.openxmlformats.org/drawingml/2006/main">
+              <a:ext uri="{FF2B5EF4-FFF2-40B4-BE49-F238E27FC236}">
+                <a16:creationId xmlns:a16="http://schemas.microsoft.com/office/drawing/2014/main" id="{80A3D3C9-9FF8-4B6F-A82C-341F587D2473}"/>
+              </a:ext>
+            </a:extLst>
+          </p:cNvPr>
+          <p:cNvSpPr>
+            <a:spLocks xmlns:a="http://schemas.openxmlformats.org/drawingml/2006/main" noGrp="1"/>
+          </p:cNvSpPr>
+          <p:nvPr/>
+        </p:nvSpPr>
+        <p:spPr>
+          <a:xfrm xmlns:a="http://schemas.openxmlformats.org/drawingml/2006/main">
+            <a:off x="2047875" y="4229100"/>
             <a:ext cx="3667125" cy="238125"/>
           </a:xfrm>
           <a:prstGeom xmlns:a="http://schemas.openxmlformats.org/drawingml/2006/main" prst="rect">
@@ -12031,7 +12258,7 @@
                 <a:latin typeface="Calibri"/>
                 <a:ea typeface="Calibri"/>
                 <a:cs typeface="Calibri"/>
-                <a:hlinkClick xmlns:r="http://schemas.openxmlformats.org/officeDocument/2006/relationships" r:id="R7ae6faaab70f4250"/>
+                <a:hlinkClick xmlns:r="http://schemas.openxmlformats.org/officeDocument/2006/relationships" r:id="R6c2a1de204ab4dab"/>
               </a:rPr>
               <a:t>arxiv.org/abs/2603.17357</a:t>
             </a:r>
@@ -12040,10 +12267,10 @@
       </p:sp>
       <p:sp>
         <p:nvSpPr>
-          <p:cNvPr id="67" name="rev-140">
-            <a:extLst xmlns:a="http://schemas.openxmlformats.org/drawingml/2006/main">
-              <a:ext uri="{FF2B5EF4-FFF2-40B4-BE49-F238E27FC236}">
-                <a16:creationId xmlns:a16="http://schemas.microsoft.com/office/drawing/2014/main" id="{080BB602-B3BA-4E7B-A09C-B659358DE760}"/>
+          <p:cNvPr id="67" name="rev-143">
+            <a:extLst xmlns:a="http://schemas.openxmlformats.org/drawingml/2006/main">
+              <a:ext uri="{FF2B5EF4-FFF2-40B4-BE49-F238E27FC236}">
+                <a16:creationId xmlns:a16="http://schemas.microsoft.com/office/drawing/2014/main" id="{D1273BDA-E41E-4720-B821-B48CCDA1C8EF}"/>
               </a:ext>
             </a:extLst>
           </p:cNvPr>
@@ -12090,116 +12317,29 @@
                 <a:ea typeface="Calibri"/>
                 <a:cs typeface="Calibri"/>
               </a:rPr>
-              <a:t>Prior work and our contribution</a:t>
-            </a:r>
-          </a:p>
-        </p:txBody>
-      </p:sp>
-      <p:sp>
-        <p:nvSpPr>
-          <p:cNvPr id="68" name="step-141">
-            <a:extLst xmlns:a="http://schemas.openxmlformats.org/drawingml/2006/main">
-              <a:ext uri="{FF2B5EF4-FFF2-40B4-BE49-F238E27FC236}">
-                <a16:creationId xmlns:a16="http://schemas.microsoft.com/office/drawing/2014/main" id="{634F57DF-A403-4387-A3A7-16EAB4653D75}"/>
-              </a:ext>
-            </a:extLst>
-          </p:cNvPr>
-          <p:cNvSpPr>
-            <a:spLocks xmlns:a="http://schemas.openxmlformats.org/drawingml/2006/main" noGrp="1"/>
-          </p:cNvSpPr>
-          <p:nvPr/>
-        </p:nvSpPr>
-        <p:spPr>
-          <a:xfrm xmlns:a="http://schemas.openxmlformats.org/drawingml/2006/main">
-            <a:off x="6477000" y="1847850"/>
-            <a:ext cx="285750" cy="285750"/>
-          </a:xfrm>
-          <a:prstGeom xmlns:a="http://schemas.openxmlformats.org/drawingml/2006/main" prst="ellipse">
-            <a:avLst/>
-          </a:prstGeom>
-          <a:solidFill xmlns:a="http://schemas.openxmlformats.org/drawingml/2006/main">
-            <a:srgbClr val="8C4966"/>
-          </a:solidFill>
-          <a:ln xmlns:a="http://schemas.openxmlformats.org/drawingml/2006/main" w="0">
-            <a:noFill/>
-          </a:ln>
-        </p:spPr>
-      </p:sp>
-      <p:sp>
-        <p:nvSpPr>
-          <p:cNvPr id="69" name="rev-142">
-            <a:extLst xmlns:a="http://schemas.openxmlformats.org/drawingml/2006/main">
-              <a:ext uri="{FF2B5EF4-FFF2-40B4-BE49-F238E27FC236}">
-                <a16:creationId xmlns:a16="http://schemas.microsoft.com/office/drawing/2014/main" id="{C2B65911-7A7C-4DE1-AA1D-2C85726477AD}"/>
-              </a:ext>
-            </a:extLst>
-          </p:cNvPr>
-          <p:cNvSpPr>
-            <a:spLocks xmlns:a="http://schemas.openxmlformats.org/drawingml/2006/main" noGrp="1"/>
-          </p:cNvSpPr>
-          <p:nvPr/>
-        </p:nvSpPr>
-        <p:spPr>
-          <a:xfrm xmlns:a="http://schemas.openxmlformats.org/drawingml/2006/main">
-            <a:off x="6477000" y="1866900"/>
-            <a:ext cx="285750" cy="257175"/>
-          </a:xfrm>
-          <a:prstGeom xmlns:a="http://schemas.openxmlformats.org/drawingml/2006/main" prst="rect">
-            <a:avLst/>
-          </a:prstGeom>
-          <a:noFill xmlns:a="http://schemas.openxmlformats.org/drawingml/2006/main"/>
-          <a:ln xmlns:a="http://schemas.openxmlformats.org/drawingml/2006/main" w="0">
-            <a:noFill/>
-          </a:ln>
-        </p:spPr>
-        <p:txBody>
-          <a:bodyPr xmlns:a="http://schemas.openxmlformats.org/drawingml/2006/main" wrap="square" lIns="0" tIns="0" rIns="0" bIns="0" anchor="ctr">
-            <a:noAutofit/>
-          </a:bodyPr>
-          <a:lstStyle xmlns:a="http://schemas.openxmlformats.org/drawingml/2006/main"/>
-          <a:p xmlns:a="http://schemas.openxmlformats.org/drawingml/2006/main">
-            <a:pPr algn="ctr">
-              <a:defRPr sz="1350" b="1">
-                <a:solidFill>
-                  <a:srgbClr val="FFFFFF"/>
-                </a:solidFill>
-                <a:latin typeface="Calibri"/>
-                <a:ea typeface="Calibri"/>
-                <a:cs typeface="Calibri"/>
-              </a:defRPr>
-            </a:pPr>
-            <a:r>
-              <a:rPr sz="1350" b="1">
-                <a:solidFill>
-                  <a:srgbClr val="FFFFFF"/>
-                </a:solidFill>
-                <a:latin typeface="Calibri"/>
-                <a:ea typeface="Calibri"/>
-                <a:cs typeface="Calibri"/>
-              </a:rPr>
-              <a:t>1</a:t>
-            </a:r>
-          </a:p>
-        </p:txBody>
-      </p:sp>
-      <p:sp>
-        <p:nvSpPr>
-          <p:cNvPr id="70" name="rev-143">
-            <a:extLst xmlns:a="http://schemas.openxmlformats.org/drawingml/2006/main">
-              <a:ext uri="{FF2B5EF4-FFF2-40B4-BE49-F238E27FC236}">
-                <a16:creationId xmlns:a16="http://schemas.microsoft.com/office/drawing/2014/main" id="{89E2ED96-D631-4D7A-A173-A88DE0C3582E}"/>
-              </a:ext>
-            </a:extLst>
-          </p:cNvPr>
-          <p:cNvSpPr>
-            <a:spLocks xmlns:a="http://schemas.openxmlformats.org/drawingml/2006/main" noGrp="1"/>
-          </p:cNvSpPr>
-          <p:nvPr/>
-        </p:nvSpPr>
-        <p:spPr>
-          <a:xfrm xmlns:a="http://schemas.openxmlformats.org/drawingml/2006/main">
-            <a:off x="6896100" y="1857375"/>
-            <a:ext cx="4838700" cy="257175"/>
+              <a:t>Prototype and demonstration</a:t>
+            </a:r>
+          </a:p>
+        </p:txBody>
+      </p:sp>
+      <p:sp>
+        <p:nvSpPr>
+          <p:cNvPr id="68" name="rev-144">
+            <a:extLst xmlns:a="http://schemas.openxmlformats.org/drawingml/2006/main">
+              <a:ext uri="{FF2B5EF4-FFF2-40B4-BE49-F238E27FC236}">
+                <a16:creationId xmlns:a16="http://schemas.microsoft.com/office/drawing/2014/main" id="{3B4CAC34-F095-4D64-A0D8-D0870A8D7489}"/>
+              </a:ext>
+            </a:extLst>
+          </p:cNvPr>
+          <p:cNvSpPr>
+            <a:spLocks xmlns:a="http://schemas.openxmlformats.org/drawingml/2006/main" noGrp="1"/>
+          </p:cNvSpPr>
+          <p:nvPr/>
+        </p:nvSpPr>
+        <p:spPr>
+          <a:xfrm xmlns:a="http://schemas.openxmlformats.org/drawingml/2006/main">
+            <a:off x="6477000" y="1828800"/>
+            <a:ext cx="5257800" cy="276225"/>
           </a:xfrm>
           <a:prstGeom xmlns:a="http://schemas.openxmlformats.org/drawingml/2006/main" prst="rect">
             <a:avLst/>
@@ -12216,7 +12356,7 @@
           <a:lstStyle xmlns:a="http://schemas.openxmlformats.org/drawingml/2006/main"/>
           <a:p xmlns:a="http://schemas.openxmlformats.org/drawingml/2006/main">
             <a:pPr>
-              <a:defRPr sz="1650" b="1">
+              <a:defRPr sz="1725" b="1">
                 <a:solidFill>
                   <a:srgbClr val="8C4966"/>
                 </a:solidFill>
@@ -12226,7 +12366,7 @@
               </a:defRPr>
             </a:pPr>
             <a:r>
-              <a:rPr sz="1650" b="1">
+              <a:rPr sz="1725" b="1">
                 <a:solidFill>
                   <a:srgbClr val="8C4966"/>
                 </a:solidFill>
@@ -12234,29 +12374,29 @@
                 <a:ea typeface="Calibri"/>
                 <a:cs typeface="Calibri"/>
               </a:rPr>
-              <a:t>Established foundations</a:t>
-            </a:r>
-          </a:p>
-        </p:txBody>
-      </p:sp>
-      <p:sp>
-        <p:nvSpPr>
-          <p:cNvPr id="71" name="rev-144">
-            <a:extLst xmlns:a="http://schemas.openxmlformats.org/drawingml/2006/main">
-              <a:ext uri="{FF2B5EF4-FFF2-40B4-BE49-F238E27FC236}">
-                <a16:creationId xmlns:a16="http://schemas.microsoft.com/office/drawing/2014/main" id="{AD1FC044-863B-44CD-8183-5C24D2B80EA8}"/>
-              </a:ext>
-            </a:extLst>
-          </p:cNvPr>
-          <p:cNvSpPr>
-            <a:spLocks xmlns:a="http://schemas.openxmlformats.org/drawingml/2006/main" noGrp="1"/>
-          </p:cNvSpPr>
-          <p:nvPr/>
-        </p:nvSpPr>
-        <p:spPr>
-          <a:xfrm xmlns:a="http://schemas.openxmlformats.org/drawingml/2006/main">
-            <a:off x="6896100" y="2209800"/>
-            <a:ext cx="4743450" cy="466725"/>
+              <a:t>GitHub repository</a:t>
+            </a:r>
+          </a:p>
+        </p:txBody>
+      </p:sp>
+      <p:sp>
+        <p:nvSpPr>
+          <p:cNvPr id="69" name="rev-145">
+            <a:extLst xmlns:a="http://schemas.openxmlformats.org/drawingml/2006/main">
+              <a:ext uri="{FF2B5EF4-FFF2-40B4-BE49-F238E27FC236}">
+                <a16:creationId xmlns:a16="http://schemas.microsoft.com/office/drawing/2014/main" id="{FC50383F-BBFC-462E-A4ED-0546E974AD3D}"/>
+              </a:ext>
+            </a:extLst>
+          </p:cNvPr>
+          <p:cNvSpPr>
+            <a:spLocks xmlns:a="http://schemas.openxmlformats.org/drawingml/2006/main" noGrp="1"/>
+          </p:cNvSpPr>
+          <p:nvPr/>
+        </p:nvSpPr>
+        <p:spPr>
+          <a:xfrm xmlns:a="http://schemas.openxmlformats.org/drawingml/2006/main">
+            <a:off x="6477000" y="2181225"/>
+            <a:ext cx="5257800" cy="266700"/>
           </a:xfrm>
           <a:prstGeom xmlns:a="http://schemas.openxmlformats.org/drawingml/2006/main" prst="rect">
             <a:avLst/>
@@ -12275,7 +12415,7 @@
             <a:pPr>
               <a:defRPr sz="1425">
                 <a:solidFill>
-                  <a:srgbClr val="202B36"/>
+                  <a:srgbClr val="8C4966"/>
                 </a:solidFill>
                 <a:latin typeface="Calibri"/>
                 <a:ea typeface="Calibri"/>
@@ -12285,153 +12425,36 @@
             <a:r>
               <a:rPr sz="1425">
                 <a:solidFill>
-                  <a:srgbClr val="202B36"/>
-                </a:solidFill>
-                <a:latin typeface="Calibri"/>
-                <a:ea typeface="Calibri"/>
-                <a:cs typeface="Calibri"/>
-              </a:rPr>
-              <a:t>Local privacy filtering + visual interface parsing</a:t>
-            </a:r>
-          </a:p>
-        </p:txBody>
-      </p:sp>
-      <p:sp>
-        <p:nvSpPr>
-          <p:cNvPr id="72" name="path-145">
-            <a:extLst xmlns:a="http://schemas.openxmlformats.org/drawingml/2006/main">
-              <a:ext uri="{FF2B5EF4-FFF2-40B4-BE49-F238E27FC236}">
-                <a16:creationId xmlns:a16="http://schemas.microsoft.com/office/drawing/2014/main" id="{1C4506D5-769C-4E46-81D1-DE94534DA938}"/>
-              </a:ext>
-            </a:extLst>
-          </p:cNvPr>
-          <p:cNvSpPr>
-            <a:spLocks xmlns:a="http://schemas.openxmlformats.org/drawingml/2006/main" noGrp="1"/>
-          </p:cNvSpPr>
-          <p:nvPr/>
-        </p:nvSpPr>
-        <p:spPr>
-          <a:xfrm xmlns:a="http://schemas.openxmlformats.org/drawingml/2006/main">
-            <a:off x="6619875" y="2162175"/>
-            <a:ext cx="0" cy="552450"/>
-          </a:xfrm>
-          <a:prstGeom xmlns:a="http://schemas.openxmlformats.org/drawingml/2006/main" prst="line">
-            <a:avLst/>
-          </a:prstGeom>
-          <a:noFill xmlns:a="http://schemas.openxmlformats.org/drawingml/2006/main"/>
-          <a:ln xmlns:a="http://schemas.openxmlformats.org/drawingml/2006/main" w="14288">
-            <a:solidFill>
-              <a:srgbClr val="CBD3DA"/>
-            </a:solidFill>
-            <a:prstDash val="solid"/>
-          </a:ln>
-        </p:spPr>
-      </p:sp>
-      <p:sp>
-        <p:nvSpPr>
-          <p:cNvPr id="73" name="step-146">
-            <a:extLst xmlns:a="http://schemas.openxmlformats.org/drawingml/2006/main">
-              <a:ext uri="{FF2B5EF4-FFF2-40B4-BE49-F238E27FC236}">
-                <a16:creationId xmlns:a16="http://schemas.microsoft.com/office/drawing/2014/main" id="{ADA148D1-04E2-4084-90C2-C5DFBC094384}"/>
-              </a:ext>
-            </a:extLst>
-          </p:cNvPr>
-          <p:cNvSpPr>
-            <a:spLocks xmlns:a="http://schemas.openxmlformats.org/drawingml/2006/main" noGrp="1"/>
-          </p:cNvSpPr>
-          <p:nvPr/>
-        </p:nvSpPr>
-        <p:spPr>
-          <a:xfrm xmlns:a="http://schemas.openxmlformats.org/drawingml/2006/main">
-            <a:off x="6477000" y="2771775"/>
-            <a:ext cx="285750" cy="285750"/>
-          </a:xfrm>
-          <a:prstGeom xmlns:a="http://schemas.openxmlformats.org/drawingml/2006/main" prst="ellipse">
-            <a:avLst/>
-          </a:prstGeom>
-          <a:solidFill xmlns:a="http://schemas.openxmlformats.org/drawingml/2006/main">
-            <a:srgbClr val="8C4966"/>
-          </a:solidFill>
-          <a:ln xmlns:a="http://schemas.openxmlformats.org/drawingml/2006/main" w="0">
-            <a:noFill/>
-          </a:ln>
-        </p:spPr>
-      </p:sp>
-      <p:sp>
-        <p:nvSpPr>
-          <p:cNvPr id="74" name="rev-147">
-            <a:extLst xmlns:a="http://schemas.openxmlformats.org/drawingml/2006/main">
-              <a:ext uri="{FF2B5EF4-FFF2-40B4-BE49-F238E27FC236}">
-                <a16:creationId xmlns:a16="http://schemas.microsoft.com/office/drawing/2014/main" id="{1308779F-A66C-481D-8A14-9EE0D24B9999}"/>
-              </a:ext>
-            </a:extLst>
-          </p:cNvPr>
-          <p:cNvSpPr>
-            <a:spLocks xmlns:a="http://schemas.openxmlformats.org/drawingml/2006/main" noGrp="1"/>
-          </p:cNvSpPr>
-          <p:nvPr/>
-        </p:nvSpPr>
-        <p:spPr>
-          <a:xfrm xmlns:a="http://schemas.openxmlformats.org/drawingml/2006/main">
-            <a:off x="6477000" y="2790825"/>
-            <a:ext cx="285750" cy="257175"/>
-          </a:xfrm>
-          <a:prstGeom xmlns:a="http://schemas.openxmlformats.org/drawingml/2006/main" prst="rect">
-            <a:avLst/>
-          </a:prstGeom>
-          <a:noFill xmlns:a="http://schemas.openxmlformats.org/drawingml/2006/main"/>
-          <a:ln xmlns:a="http://schemas.openxmlformats.org/drawingml/2006/main" w="0">
-            <a:noFill/>
-          </a:ln>
-        </p:spPr>
-        <p:txBody>
-          <a:bodyPr xmlns:a="http://schemas.openxmlformats.org/drawingml/2006/main" wrap="square" lIns="0" tIns="0" rIns="0" bIns="0" anchor="ctr">
-            <a:noAutofit/>
-          </a:bodyPr>
-          <a:lstStyle xmlns:a="http://schemas.openxmlformats.org/drawingml/2006/main"/>
-          <a:p xmlns:a="http://schemas.openxmlformats.org/drawingml/2006/main">
-            <a:pPr algn="ctr">
-              <a:defRPr sz="1350" b="1">
-                <a:solidFill>
-                  <a:srgbClr val="FFFFFF"/>
-                </a:solidFill>
-                <a:latin typeface="Calibri"/>
-                <a:ea typeface="Calibri"/>
-                <a:cs typeface="Calibri"/>
-              </a:defRPr>
-            </a:pPr>
-            <a:r>
-              <a:rPr sz="1350" b="1">
-                <a:solidFill>
-                  <a:srgbClr val="FFFFFF"/>
-                </a:solidFill>
-                <a:latin typeface="Calibri"/>
-                <a:ea typeface="Calibri"/>
-                <a:cs typeface="Calibri"/>
-              </a:rPr>
-              <a:t>2</a:t>
-            </a:r>
-          </a:p>
-        </p:txBody>
-      </p:sp>
-      <p:sp>
-        <p:nvSpPr>
-          <p:cNvPr id="75" name="rev-148">
-            <a:extLst xmlns:a="http://schemas.openxmlformats.org/drawingml/2006/main">
-              <a:ext uri="{FF2B5EF4-FFF2-40B4-BE49-F238E27FC236}">
-                <a16:creationId xmlns:a16="http://schemas.microsoft.com/office/drawing/2014/main" id="{C3FF6982-29D0-4B9D-8219-091937A88BE1}"/>
-              </a:ext>
-            </a:extLst>
-          </p:cNvPr>
-          <p:cNvSpPr>
-            <a:spLocks xmlns:a="http://schemas.openxmlformats.org/drawingml/2006/main" noGrp="1"/>
-          </p:cNvSpPr>
-          <p:nvPr/>
-        </p:nvSpPr>
-        <p:spPr>
-          <a:xfrm xmlns:a="http://schemas.openxmlformats.org/drawingml/2006/main">
-            <a:off x="6896100" y="2781300"/>
-            <a:ext cx="4838700" cy="257175"/>
+                  <a:srgbClr val="8C4966"/>
+                </a:solidFill>
+                <a:latin typeface="Calibri"/>
+                <a:ea typeface="Calibri"/>
+                <a:cs typeface="Calibri"/>
+                <a:hlinkClick xmlns:r="http://schemas.openxmlformats.org/officeDocument/2006/relationships" r:id="R387f54d874f74fda"/>
+              </a:rPr>
+              <a:t>github.com/mynameisizhan-coder/AegisBrowse</a:t>
+            </a:r>
+          </a:p>
+        </p:txBody>
+      </p:sp>
+      <p:sp>
+        <p:nvSpPr>
+          <p:cNvPr id="70" name="rev-146">
+            <a:extLst xmlns:a="http://schemas.openxmlformats.org/drawingml/2006/main">
+              <a:ext uri="{FF2B5EF4-FFF2-40B4-BE49-F238E27FC236}">
+                <a16:creationId xmlns:a16="http://schemas.microsoft.com/office/drawing/2014/main" id="{F35BB0A1-E807-4F92-ABA2-19D5A93688D5}"/>
+              </a:ext>
+            </a:extLst>
+          </p:cNvPr>
+          <p:cNvSpPr>
+            <a:spLocks xmlns:a="http://schemas.openxmlformats.org/drawingml/2006/main" noGrp="1"/>
+          </p:cNvSpPr>
+          <p:nvPr/>
+        </p:nvSpPr>
+        <p:spPr>
+          <a:xfrm xmlns:a="http://schemas.openxmlformats.org/drawingml/2006/main">
+            <a:off x="6477000" y="2495550"/>
+            <a:ext cx="5257800" cy="257175"/>
           </a:xfrm>
           <a:prstGeom xmlns:a="http://schemas.openxmlformats.org/drawingml/2006/main" prst="rect">
             <a:avLst/>
@@ -12448,47 +12471,47 @@
           <a:lstStyle xmlns:a="http://schemas.openxmlformats.org/drawingml/2006/main"/>
           <a:p xmlns:a="http://schemas.openxmlformats.org/drawingml/2006/main">
             <a:pPr>
-              <a:defRPr sz="1650" b="1">
-                <a:solidFill>
-                  <a:srgbClr val="8C4966"/>
-                </a:solidFill>
-                <a:latin typeface="Calibri"/>
-                <a:ea typeface="Calibri"/>
-                <a:cs typeface="Calibri"/>
-              </a:defRPr>
-            </a:pPr>
-            <a:r>
-              <a:rPr sz="1650" b="1">
-                <a:solidFill>
-                  <a:srgbClr val="8C4966"/>
-                </a:solidFill>
-                <a:latin typeface="Calibri"/>
-                <a:ea typeface="Calibri"/>
-                <a:cs typeface="Calibri"/>
-              </a:rPr>
-              <a:t>Our evaluated change</a:t>
-            </a:r>
-          </a:p>
-        </p:txBody>
-      </p:sp>
-      <p:sp>
-        <p:nvSpPr>
-          <p:cNvPr id="76" name="rev-149">
-            <a:extLst xmlns:a="http://schemas.openxmlformats.org/drawingml/2006/main">
-              <a:ext uri="{FF2B5EF4-FFF2-40B4-BE49-F238E27FC236}">
-                <a16:creationId xmlns:a16="http://schemas.microsoft.com/office/drawing/2014/main" id="{62C464D7-DE48-4881-9B56-005B8FB23B0E}"/>
-              </a:ext>
-            </a:extLst>
-          </p:cNvPr>
-          <p:cNvSpPr>
-            <a:spLocks xmlns:a="http://schemas.openxmlformats.org/drawingml/2006/main" noGrp="1"/>
-          </p:cNvSpPr>
-          <p:nvPr/>
-        </p:nvSpPr>
-        <p:spPr>
-          <a:xfrm xmlns:a="http://schemas.openxmlformats.org/drawingml/2006/main">
-            <a:off x="6896100" y="3133725"/>
-            <a:ext cx="4714875" cy="561975"/>
+              <a:defRPr sz="1350">
+                <a:solidFill>
+                  <a:srgbClr val="53616D"/>
+                </a:solidFill>
+                <a:latin typeface="Calibri"/>
+                <a:ea typeface="Calibri"/>
+                <a:cs typeface="Calibri"/>
+              </a:defRPr>
+            </a:pPr>
+            <a:r>
+              <a:rPr sz="1350">
+                <a:solidFill>
+                  <a:srgbClr val="53616D"/>
+                </a:solidFill>
+                <a:latin typeface="Calibri"/>
+                <a:ea typeface="Calibri"/>
+                <a:cs typeface="Calibri"/>
+              </a:rPr>
+              <a:t>Extension, server, benchmark scripts and results</a:t>
+            </a:r>
+          </a:p>
+        </p:txBody>
+      </p:sp>
+      <p:sp>
+        <p:nvSpPr>
+          <p:cNvPr id="71" name="rev-147">
+            <a:extLst xmlns:a="http://schemas.openxmlformats.org/drawingml/2006/main">
+              <a:ext uri="{FF2B5EF4-FFF2-40B4-BE49-F238E27FC236}">
+                <a16:creationId xmlns:a16="http://schemas.microsoft.com/office/drawing/2014/main" id="{13C73787-2AF7-40BD-BF3E-EDD7F1920AD1}"/>
+              </a:ext>
+            </a:extLst>
+          </p:cNvPr>
+          <p:cNvSpPr>
+            <a:spLocks xmlns:a="http://schemas.openxmlformats.org/drawingml/2006/main" noGrp="1"/>
+          </p:cNvSpPr>
+          <p:nvPr/>
+        </p:nvSpPr>
+        <p:spPr>
+          <a:xfrm xmlns:a="http://schemas.openxmlformats.org/drawingml/2006/main">
+            <a:off x="6477000" y="2933700"/>
+            <a:ext cx="5257800" cy="276225"/>
           </a:xfrm>
           <a:prstGeom xmlns:a="http://schemas.openxmlformats.org/drawingml/2006/main" prst="rect">
             <a:avLst/>
@@ -12505,165 +12528,47 @@
           <a:lstStyle xmlns:a="http://schemas.openxmlformats.org/drawingml/2006/main"/>
           <a:p xmlns:a="http://schemas.openxmlformats.org/drawingml/2006/main">
             <a:pPr>
-              <a:defRPr sz="1425">
-                <a:solidFill>
-                  <a:srgbClr val="202B36"/>
-                </a:solidFill>
-                <a:latin typeface="Calibri"/>
-                <a:ea typeface="Calibri"/>
-                <a:cs typeface="Calibri"/>
-              </a:defRPr>
-            </a:pPr>
-            <a:r>
-              <a:rPr sz="1425">
-                <a:solidFill>
-                  <a:srgbClr val="202B36"/>
-                </a:solidFill>
-                <a:latin typeface="Calibri"/>
-                <a:ea typeface="Calibri"/>
-                <a:cs typeface="Calibri"/>
-              </a:rPr>
-              <a:t>Reject content containers as photos; run OCR only where DOM text is absent.</a:t>
-            </a:r>
-          </a:p>
-        </p:txBody>
-      </p:sp>
-      <p:sp>
-        <p:nvSpPr>
-          <p:cNvPr id="77" name="path-150">
-            <a:extLst xmlns:a="http://schemas.openxmlformats.org/drawingml/2006/main">
-              <a:ext uri="{FF2B5EF4-FFF2-40B4-BE49-F238E27FC236}">
-                <a16:creationId xmlns:a16="http://schemas.microsoft.com/office/drawing/2014/main" id="{74B12AE5-86F9-4295-98F5-DDB102A8DF4B}"/>
-              </a:ext>
-            </a:extLst>
-          </p:cNvPr>
-          <p:cNvSpPr>
-            <a:spLocks xmlns:a="http://schemas.openxmlformats.org/drawingml/2006/main" noGrp="1"/>
-          </p:cNvSpPr>
-          <p:nvPr/>
-        </p:nvSpPr>
-        <p:spPr>
-          <a:xfrm xmlns:a="http://schemas.openxmlformats.org/drawingml/2006/main">
-            <a:off x="6619875" y="3086100"/>
-            <a:ext cx="0" cy="762000"/>
-          </a:xfrm>
-          <a:prstGeom xmlns:a="http://schemas.openxmlformats.org/drawingml/2006/main" prst="line">
-            <a:avLst/>
-          </a:prstGeom>
-          <a:noFill xmlns:a="http://schemas.openxmlformats.org/drawingml/2006/main"/>
-          <a:ln xmlns:a="http://schemas.openxmlformats.org/drawingml/2006/main" w="14288">
-            <a:solidFill>
-              <a:srgbClr val="CBD3DA"/>
-            </a:solidFill>
-            <a:prstDash val="solid"/>
-          </a:ln>
-        </p:spPr>
-      </p:sp>
-      <p:sp>
-        <p:nvSpPr>
-          <p:cNvPr id="78" name="step-151">
-            <a:extLst xmlns:a="http://schemas.openxmlformats.org/drawingml/2006/main">
-              <a:ext uri="{FF2B5EF4-FFF2-40B4-BE49-F238E27FC236}">
-                <a16:creationId xmlns:a16="http://schemas.microsoft.com/office/drawing/2014/main" id="{08BC1640-2637-4663-8D9E-54ED59F44F1B}"/>
-              </a:ext>
-            </a:extLst>
-          </p:cNvPr>
-          <p:cNvSpPr>
-            <a:spLocks xmlns:a="http://schemas.openxmlformats.org/drawingml/2006/main" noGrp="1"/>
-          </p:cNvSpPr>
-          <p:nvPr/>
-        </p:nvSpPr>
-        <p:spPr>
-          <a:xfrm xmlns:a="http://schemas.openxmlformats.org/drawingml/2006/main">
-            <a:off x="6477000" y="3905250"/>
-            <a:ext cx="285750" cy="285750"/>
-          </a:xfrm>
-          <a:prstGeom xmlns:a="http://schemas.openxmlformats.org/drawingml/2006/main" prst="ellipse">
-            <a:avLst/>
-          </a:prstGeom>
-          <a:solidFill xmlns:a="http://schemas.openxmlformats.org/drawingml/2006/main">
-            <a:srgbClr val="8C4966"/>
-          </a:solidFill>
-          <a:ln xmlns:a="http://schemas.openxmlformats.org/drawingml/2006/main" w="0">
-            <a:noFill/>
-          </a:ln>
-        </p:spPr>
-      </p:sp>
-      <p:sp>
-        <p:nvSpPr>
-          <p:cNvPr id="79" name="rev-152">
-            <a:extLst xmlns:a="http://schemas.openxmlformats.org/drawingml/2006/main">
-              <a:ext uri="{FF2B5EF4-FFF2-40B4-BE49-F238E27FC236}">
-                <a16:creationId xmlns:a16="http://schemas.microsoft.com/office/drawing/2014/main" id="{FBA5EEF5-D203-44BD-A991-1868435DE697}"/>
-              </a:ext>
-            </a:extLst>
-          </p:cNvPr>
-          <p:cNvSpPr>
-            <a:spLocks xmlns:a="http://schemas.openxmlformats.org/drawingml/2006/main" noGrp="1"/>
-          </p:cNvSpPr>
-          <p:nvPr/>
-        </p:nvSpPr>
-        <p:spPr>
-          <a:xfrm xmlns:a="http://schemas.openxmlformats.org/drawingml/2006/main">
-            <a:off x="6477000" y="3924300"/>
-            <a:ext cx="285750" cy="257175"/>
-          </a:xfrm>
-          <a:prstGeom xmlns:a="http://schemas.openxmlformats.org/drawingml/2006/main" prst="rect">
-            <a:avLst/>
-          </a:prstGeom>
-          <a:noFill xmlns:a="http://schemas.openxmlformats.org/drawingml/2006/main"/>
-          <a:ln xmlns:a="http://schemas.openxmlformats.org/drawingml/2006/main" w="0">
-            <a:noFill/>
-          </a:ln>
-        </p:spPr>
-        <p:txBody>
-          <a:bodyPr xmlns:a="http://schemas.openxmlformats.org/drawingml/2006/main" wrap="square" lIns="0" tIns="0" rIns="0" bIns="0" anchor="ctr">
-            <a:noAutofit/>
-          </a:bodyPr>
-          <a:lstStyle xmlns:a="http://schemas.openxmlformats.org/drawingml/2006/main"/>
-          <a:p xmlns:a="http://schemas.openxmlformats.org/drawingml/2006/main">
-            <a:pPr algn="ctr">
-              <a:defRPr sz="1350" b="1">
-                <a:solidFill>
-                  <a:srgbClr val="FFFFFF"/>
-                </a:solidFill>
-                <a:latin typeface="Calibri"/>
-                <a:ea typeface="Calibri"/>
-                <a:cs typeface="Calibri"/>
-              </a:defRPr>
-            </a:pPr>
-            <a:r>
-              <a:rPr sz="1350" b="1">
-                <a:solidFill>
-                  <a:srgbClr val="FFFFFF"/>
-                </a:solidFill>
-                <a:latin typeface="Calibri"/>
-                <a:ea typeface="Calibri"/>
-                <a:cs typeface="Calibri"/>
-              </a:rPr>
-              <a:t>3</a:t>
-            </a:r>
-          </a:p>
-        </p:txBody>
-      </p:sp>
-      <p:sp>
-        <p:nvSpPr>
-          <p:cNvPr id="80" name="rev-153">
-            <a:extLst xmlns:a="http://schemas.openxmlformats.org/drawingml/2006/main">
-              <a:ext uri="{FF2B5EF4-FFF2-40B4-BE49-F238E27FC236}">
-                <a16:creationId xmlns:a16="http://schemas.microsoft.com/office/drawing/2014/main" id="{87F6799C-4D06-4016-B251-7F871837CF42}"/>
-              </a:ext>
-            </a:extLst>
-          </p:cNvPr>
-          <p:cNvSpPr>
-            <a:spLocks xmlns:a="http://schemas.openxmlformats.org/drawingml/2006/main" noGrp="1"/>
-          </p:cNvSpPr>
-          <p:nvPr/>
-        </p:nvSpPr>
-        <p:spPr>
-          <a:xfrm xmlns:a="http://schemas.openxmlformats.org/drawingml/2006/main">
-            <a:off x="6896100" y="3914775"/>
-            <a:ext cx="4838700" cy="257175"/>
+              <a:defRPr sz="1725" b="1">
+                <a:solidFill>
+                  <a:srgbClr val="8C4966"/>
+                </a:solidFill>
+                <a:latin typeface="Calibri"/>
+                <a:ea typeface="Calibri"/>
+                <a:cs typeface="Calibri"/>
+              </a:defRPr>
+            </a:pPr>
+            <a:r>
+              <a:rPr sz="1725" b="1">
+                <a:solidFill>
+                  <a:srgbClr val="8C4966"/>
+                </a:solidFill>
+                <a:latin typeface="Calibri"/>
+                <a:ea typeface="Calibri"/>
+                <a:cs typeface="Calibri"/>
+              </a:rPr>
+              <a:t>YouTube walkthrough</a:t>
+            </a:r>
+          </a:p>
+        </p:txBody>
+      </p:sp>
+      <p:sp>
+        <p:nvSpPr>
+          <p:cNvPr id="72" name="rev-148">
+            <a:extLst xmlns:a="http://schemas.openxmlformats.org/drawingml/2006/main">
+              <a:ext uri="{FF2B5EF4-FFF2-40B4-BE49-F238E27FC236}">
+                <a16:creationId xmlns:a16="http://schemas.microsoft.com/office/drawing/2014/main" id="{B5B030CA-005B-4DC6-B05E-89D795457AD6}"/>
+              </a:ext>
+            </a:extLst>
+          </p:cNvPr>
+          <p:cNvSpPr>
+            <a:spLocks xmlns:a="http://schemas.openxmlformats.org/drawingml/2006/main" noGrp="1"/>
+          </p:cNvSpPr>
+          <p:nvPr/>
+        </p:nvSpPr>
+        <p:spPr>
+          <a:xfrm xmlns:a="http://schemas.openxmlformats.org/drawingml/2006/main">
+            <a:off x="6477000" y="3286125"/>
+            <a:ext cx="5257800" cy="266700"/>
           </a:xfrm>
           <a:prstGeom xmlns:a="http://schemas.openxmlformats.org/drawingml/2006/main" prst="rect">
             <a:avLst/>
@@ -12680,7 +12585,7 @@
           <a:lstStyle xmlns:a="http://schemas.openxmlformats.org/drawingml/2006/main"/>
           <a:p xmlns:a="http://schemas.openxmlformats.org/drawingml/2006/main">
             <a:pPr>
-              <a:defRPr sz="1650" b="1">
+              <a:defRPr sz="1500">
                 <a:solidFill>
                   <a:srgbClr val="8C4966"/>
                 </a:solidFill>
@@ -12690,37 +12595,38 @@
               </a:defRPr>
             </a:pPr>
             <a:r>
-              <a:rPr sz="1650" b="1">
+              <a:rPr sz="1500">
                 <a:solidFill>
                   <a:srgbClr val="8C4966"/>
                 </a:solidFill>
                 <a:latin typeface="Calibri"/>
                 <a:ea typeface="Calibri"/>
                 <a:cs typeface="Calibri"/>
-              </a:rPr>
-              <a:t>Next evidence</a:t>
-            </a:r>
-          </a:p>
-        </p:txBody>
-      </p:sp>
-      <p:sp>
-        <p:nvSpPr>
-          <p:cNvPr id="81" name="rev-154">
-            <a:extLst xmlns:a="http://schemas.openxmlformats.org/drawingml/2006/main">
-              <a:ext uri="{FF2B5EF4-FFF2-40B4-BE49-F238E27FC236}">
-                <a16:creationId xmlns:a16="http://schemas.microsoft.com/office/drawing/2014/main" id="{FDC42CB0-9A20-469B-AD48-B4AD9788C2C5}"/>
-              </a:ext>
-            </a:extLst>
-          </p:cNvPr>
-          <p:cNvSpPr>
-            <a:spLocks xmlns:a="http://schemas.openxmlformats.org/drawingml/2006/main" noGrp="1"/>
-          </p:cNvSpPr>
-          <p:nvPr/>
-        </p:nvSpPr>
-        <p:spPr>
-          <a:xfrm xmlns:a="http://schemas.openxmlformats.org/drawingml/2006/main">
-            <a:off x="6896100" y="4267200"/>
-            <a:ext cx="4714875" cy="533400"/>
+                <a:hlinkClick xmlns:r="http://schemas.openxmlformats.org/officeDocument/2006/relationships" r:id="R54d88c3503974d88"/>
+              </a:rPr>
+              <a:t>youtu.be/heZiO6_-ZtE</a:t>
+            </a:r>
+          </a:p>
+        </p:txBody>
+      </p:sp>
+      <p:sp>
+        <p:nvSpPr>
+          <p:cNvPr id="73" name="rev-149">
+            <a:extLst xmlns:a="http://schemas.openxmlformats.org/drawingml/2006/main">
+              <a:ext uri="{FF2B5EF4-FFF2-40B4-BE49-F238E27FC236}">
+                <a16:creationId xmlns:a16="http://schemas.microsoft.com/office/drawing/2014/main" id="{744B9D63-A345-4766-9DFA-73D5FB0C0AA2}"/>
+              </a:ext>
+            </a:extLst>
+          </p:cNvPr>
+          <p:cNvSpPr>
+            <a:spLocks xmlns:a="http://schemas.openxmlformats.org/drawingml/2006/main" noGrp="1"/>
+          </p:cNvSpPr>
+          <p:nvPr/>
+        </p:nvSpPr>
+        <p:spPr>
+          <a:xfrm xmlns:a="http://schemas.openxmlformats.org/drawingml/2006/main">
+            <a:off x="6477000" y="3819525"/>
+            <a:ext cx="5257800" cy="247650"/>
           </a:xfrm>
           <a:prstGeom xmlns:a="http://schemas.openxmlformats.org/drawingml/2006/main" prst="rect">
             <a:avLst/>
@@ -12737,6 +12643,63 @@
           <a:lstStyle xmlns:a="http://schemas.openxmlformats.org/drawingml/2006/main"/>
           <a:p xmlns:a="http://schemas.openxmlformats.org/drawingml/2006/main">
             <a:pPr>
+              <a:defRPr sz="1500" b="1">
+                <a:solidFill>
+                  <a:srgbClr val="8C4966"/>
+                </a:solidFill>
+                <a:latin typeface="Calibri"/>
+                <a:ea typeface="Calibri"/>
+                <a:cs typeface="Calibri"/>
+              </a:defRPr>
+            </a:pPr>
+            <a:r>
+              <a:rPr sz="1500" b="1">
+                <a:solidFill>
+                  <a:srgbClr val="8C4966"/>
+                </a:solidFill>
+                <a:latin typeface="Calibri"/>
+                <a:ea typeface="Calibri"/>
+                <a:cs typeface="Calibri"/>
+              </a:rPr>
+              <a:t>Prior work and our contribution</a:t>
+            </a:r>
+          </a:p>
+        </p:txBody>
+      </p:sp>
+      <p:sp>
+        <p:nvSpPr>
+          <p:cNvPr id="74" name="rev-150">
+            <a:extLst xmlns:a="http://schemas.openxmlformats.org/drawingml/2006/main">
+              <a:ext uri="{FF2B5EF4-FFF2-40B4-BE49-F238E27FC236}">
+                <a16:creationId xmlns:a16="http://schemas.microsoft.com/office/drawing/2014/main" id="{9F60BDD4-ACA1-4983-9BA7-D718361ECDDC}"/>
+              </a:ext>
+            </a:extLst>
+          </p:cNvPr>
+          <p:cNvSpPr>
+            <a:spLocks xmlns:a="http://schemas.openxmlformats.org/drawingml/2006/main" noGrp="1"/>
+          </p:cNvSpPr>
+          <p:nvPr/>
+        </p:nvSpPr>
+        <p:spPr>
+          <a:xfrm xmlns:a="http://schemas.openxmlformats.org/drawingml/2006/main">
+            <a:off x="6477000" y="4181475"/>
+            <a:ext cx="5257800" cy="733425"/>
+          </a:xfrm>
+          <a:prstGeom xmlns:a="http://schemas.openxmlformats.org/drawingml/2006/main" prst="rect">
+            <a:avLst/>
+          </a:prstGeom>
+          <a:noFill xmlns:a="http://schemas.openxmlformats.org/drawingml/2006/main"/>
+          <a:ln xmlns:a="http://schemas.openxmlformats.org/drawingml/2006/main" w="0">
+            <a:noFill/>
+          </a:ln>
+        </p:spPr>
+        <p:txBody>
+          <a:bodyPr xmlns:a="http://schemas.openxmlformats.org/drawingml/2006/main" wrap="square" lIns="0" tIns="0" rIns="0" bIns="0" anchor="t">
+            <a:noAutofit/>
+          </a:bodyPr>
+          <a:lstStyle xmlns:a="http://schemas.openxmlformats.org/drawingml/2006/main"/>
+          <a:p xmlns:a="http://schemas.openxmlformats.org/drawingml/2006/main">
+            <a:pPr>
               <a:defRPr sz="1425">
                 <a:solidFill>
                   <a:srgbClr val="202B36"/>
@@ -12755,28 +12718,74 @@
                 <a:ea typeface="Calibri"/>
                 <a:cs typeface="Calibri"/>
               </a:rPr>
-              <a:t>Measure the trained browser model and isolate the benefit of task-aware context.</a:t>
-            </a:r>
-          </a:p>
-        </p:txBody>
-      </p:sp>
-      <p:sp>
-        <p:nvSpPr>
-          <p:cNvPr id="82" name="rev-155">
-            <a:extLst xmlns:a="http://schemas.openxmlformats.org/drawingml/2006/main">
-              <a:ext uri="{FF2B5EF4-FFF2-40B4-BE49-F238E27FC236}">
-                <a16:creationId xmlns:a16="http://schemas.microsoft.com/office/drawing/2014/main" id="{A30FB011-AD69-4D90-96F1-833AB5F5CC94}"/>
-              </a:ext>
-            </a:extLst>
-          </p:cNvPr>
-          <p:cNvSpPr>
-            <a:spLocks xmlns:a="http://schemas.openxmlformats.org/drawingml/2006/main" noGrp="1"/>
-          </p:cNvSpPr>
-          <p:nvPr/>
-        </p:nvSpPr>
-        <p:spPr>
-          <a:xfrm xmlns:a="http://schemas.openxmlformats.org/drawingml/2006/main">
-            <a:off x="457200" y="5048250"/>
+              <a:t>Prior work already covers local privacy filtering.</a:t>
+            </a:r>
+          </a:p>
+          <a:p xmlns:a="http://schemas.openxmlformats.org/drawingml/2006/main">
+            <a:pPr>
+              <a:defRPr sz="1425">
+                <a:solidFill>
+                  <a:srgbClr val="202B36"/>
+                </a:solidFill>
+                <a:latin typeface="Calibri"/>
+                <a:ea typeface="Calibri"/>
+                <a:cs typeface="Calibri"/>
+              </a:defRPr>
+            </a:pPr>
+            <a:r>
+              <a:rPr sz="1425">
+                <a:solidFill>
+                  <a:srgbClr val="202B36"/>
+                </a:solidFill>
+                <a:latin typeface="Calibri"/>
+                <a:ea typeface="Calibri"/>
+                <a:cs typeface="Calibri"/>
+              </a:rPr>
+              <a:t>Our CPU study tests container rejection + selective OCR.</a:t>
+            </a:r>
+          </a:p>
+          <a:p xmlns:a="http://schemas.openxmlformats.org/drawingml/2006/main">
+            <a:pPr>
+              <a:defRPr sz="1425">
+                <a:solidFill>
+                  <a:srgbClr val="202B36"/>
+                </a:solidFill>
+                <a:latin typeface="Calibri"/>
+                <a:ea typeface="Calibri"/>
+                <a:cs typeface="Calibri"/>
+              </a:defRPr>
+            </a:pPr>
+            <a:r>
+              <a:rPr sz="1425">
+                <a:solidFill>
+                  <a:srgbClr val="202B36"/>
+                </a:solidFill>
+                <a:latin typeface="Calibri"/>
+                <a:ea typeface="Calibri"/>
+                <a:cs typeface="Calibri"/>
+              </a:rPr>
+              <a:t>Task-aware disclosure needs a separate ablation.</a:t>
+            </a:r>
+          </a:p>
+        </p:txBody>
+      </p:sp>
+      <p:sp>
+        <p:nvSpPr>
+          <p:cNvPr id="75" name="rev-151">
+            <a:extLst xmlns:a="http://schemas.openxmlformats.org/drawingml/2006/main">
+              <a:ext uri="{FF2B5EF4-FFF2-40B4-BE49-F238E27FC236}">
+                <a16:creationId xmlns:a16="http://schemas.microsoft.com/office/drawing/2014/main" id="{C3CB1278-6983-4CC4-A0D2-82DBDBA8C50F}"/>
+              </a:ext>
+            </a:extLst>
+          </p:cNvPr>
+          <p:cNvSpPr>
+            <a:spLocks xmlns:a="http://schemas.openxmlformats.org/drawingml/2006/main" noGrp="1"/>
+          </p:cNvSpPr>
+          <p:nvPr/>
+        </p:nvSpPr>
+        <p:spPr>
+          <a:xfrm xmlns:a="http://schemas.openxmlformats.org/drawingml/2006/main">
+            <a:off x="457200" y="5133975"/>
             <a:ext cx="11277600" cy="0"/>
           </a:xfrm>
           <a:prstGeom xmlns:a="http://schemas.openxmlformats.org/drawingml/2006/main" prst="line">
@@ -12792,21 +12801,21 @@
       </p:sp>
       <p:sp>
         <p:nvSpPr>
-          <p:cNvPr id="83" name="rev-156">
-            <a:extLst xmlns:a="http://schemas.openxmlformats.org/drawingml/2006/main">
-              <a:ext uri="{FF2B5EF4-FFF2-40B4-BE49-F238E27FC236}">
-                <a16:creationId xmlns:a16="http://schemas.microsoft.com/office/drawing/2014/main" id="{33660B43-8568-4FC3-BB52-51AEE61FFA36}"/>
-              </a:ext>
-            </a:extLst>
-          </p:cNvPr>
-          <p:cNvSpPr>
-            <a:spLocks xmlns:a="http://schemas.openxmlformats.org/drawingml/2006/main" noGrp="1"/>
-          </p:cNvSpPr>
-          <p:nvPr/>
-        </p:nvSpPr>
-        <p:spPr>
-          <a:xfrm xmlns:a="http://schemas.openxmlformats.org/drawingml/2006/main">
-            <a:off x="457200" y="5210175"/>
+          <p:cNvPr id="76" name="rev-152">
+            <a:extLst xmlns:a="http://schemas.openxmlformats.org/drawingml/2006/main">
+              <a:ext uri="{FF2B5EF4-FFF2-40B4-BE49-F238E27FC236}">
+                <a16:creationId xmlns:a16="http://schemas.microsoft.com/office/drawing/2014/main" id="{A3A144C8-CD52-49DF-9BDC-95C443855B60}"/>
+              </a:ext>
+            </a:extLst>
+          </p:cNvPr>
+          <p:cNvSpPr>
+            <a:spLocks xmlns:a="http://schemas.openxmlformats.org/drawingml/2006/main" noGrp="1"/>
+          </p:cNvSpPr>
+          <p:nvPr/>
+        </p:nvSpPr>
+        <p:spPr>
+          <a:xfrm xmlns:a="http://schemas.openxmlformats.org/drawingml/2006/main">
+            <a:off x="457200" y="5276850"/>
             <a:ext cx="11049000" cy="247650"/>
           </a:xfrm>
           <a:prstGeom xmlns:a="http://schemas.openxmlformats.org/drawingml/2006/main" prst="rect">
@@ -12849,22 +12858,22 @@
       </p:sp>
       <p:sp>
         <p:nvSpPr>
-          <p:cNvPr id="84" name="rev-157">
-            <a:extLst xmlns:a="http://schemas.openxmlformats.org/drawingml/2006/main">
-              <a:ext uri="{FF2B5EF4-FFF2-40B4-BE49-F238E27FC236}">
-                <a16:creationId xmlns:a16="http://schemas.microsoft.com/office/drawing/2014/main" id="{C13E4DA0-EA87-4FBD-A4C0-416009199D12}"/>
-              </a:ext>
-            </a:extLst>
-          </p:cNvPr>
-          <p:cNvSpPr>
-            <a:spLocks xmlns:a="http://schemas.openxmlformats.org/drawingml/2006/main" noGrp="1"/>
-          </p:cNvSpPr>
-          <p:nvPr/>
-        </p:nvSpPr>
-        <p:spPr>
-          <a:xfrm xmlns:a="http://schemas.openxmlformats.org/drawingml/2006/main">
-            <a:off x="457200" y="5600700"/>
-            <a:ext cx="3381375" cy="276225"/>
+          <p:cNvPr id="77" name="rev-153">
+            <a:extLst xmlns:a="http://schemas.openxmlformats.org/drawingml/2006/main">
+              <a:ext uri="{FF2B5EF4-FFF2-40B4-BE49-F238E27FC236}">
+                <a16:creationId xmlns:a16="http://schemas.microsoft.com/office/drawing/2014/main" id="{C1015CC3-3CD7-4AD8-B2B4-B66A7A8C475E}"/>
+              </a:ext>
+            </a:extLst>
+          </p:cNvPr>
+          <p:cNvSpPr>
+            <a:spLocks xmlns:a="http://schemas.openxmlformats.org/drawingml/2006/main" noGrp="1"/>
+          </p:cNvSpPr>
+          <p:nvPr/>
+        </p:nvSpPr>
+        <p:spPr>
+          <a:xfrm xmlns:a="http://schemas.openxmlformats.org/drawingml/2006/main">
+            <a:off x="457200" y="5657850"/>
+            <a:ext cx="3524250" cy="276225"/>
           </a:xfrm>
           <a:prstGeom xmlns:a="http://schemas.openxmlformats.org/drawingml/2006/main" prst="rect">
             <a:avLst/>
@@ -12899,29 +12908,29 @@
                 <a:ea typeface="Calibri"/>
                 <a:cs typeface="Calibri"/>
               </a:rPr>
-              <a:t>12 dev pages</a:t>
-            </a:r>
-          </a:p>
-        </p:txBody>
-      </p:sp>
-      <p:sp>
-        <p:nvSpPr>
-          <p:cNvPr id="85" name="rev-158">
-            <a:extLst xmlns:a="http://schemas.openxmlformats.org/drawingml/2006/main">
-              <a:ext uri="{FF2B5EF4-FFF2-40B4-BE49-F238E27FC236}">
-                <a16:creationId xmlns:a16="http://schemas.microsoft.com/office/drawing/2014/main" id="{94B78369-6444-47DE-9116-D7A99CC37E9B}"/>
-              </a:ext>
-            </a:extLst>
-          </p:cNvPr>
-          <p:cNvSpPr>
-            <a:spLocks xmlns:a="http://schemas.openxmlformats.org/drawingml/2006/main" noGrp="1"/>
-          </p:cNvSpPr>
-          <p:nvPr/>
-        </p:nvSpPr>
-        <p:spPr>
-          <a:xfrm xmlns:a="http://schemas.openxmlformats.org/drawingml/2006/main">
-            <a:off x="457200" y="5905500"/>
-            <a:ext cx="3514725" cy="276225"/>
+              <a:t>12 development pages</a:t>
+            </a:r>
+          </a:p>
+        </p:txBody>
+      </p:sp>
+      <p:sp>
+        <p:nvSpPr>
+          <p:cNvPr id="78" name="rev-154">
+            <a:extLst xmlns:a="http://schemas.openxmlformats.org/drawingml/2006/main">
+              <a:ext uri="{FF2B5EF4-FFF2-40B4-BE49-F238E27FC236}">
+                <a16:creationId xmlns:a16="http://schemas.microsoft.com/office/drawing/2014/main" id="{4D74C9B4-8DCE-45BA-BC7E-8954E3F3A805}"/>
+              </a:ext>
+            </a:extLst>
+          </p:cNvPr>
+          <p:cNvSpPr>
+            <a:spLocks xmlns:a="http://schemas.openxmlformats.org/drawingml/2006/main" noGrp="1"/>
+          </p:cNvSpPr>
+          <p:nvPr/>
+        </p:nvSpPr>
+        <p:spPr>
+          <a:xfrm xmlns:a="http://schemas.openxmlformats.org/drawingml/2006/main">
+            <a:off x="457200" y="5953125"/>
+            <a:ext cx="3524250" cy="247650"/>
           </a:xfrm>
           <a:prstGeom xmlns:a="http://schemas.openxmlformats.org/drawingml/2006/main" prst="rect">
             <a:avLst/>
@@ -12938,7 +12947,7 @@
           <a:lstStyle xmlns:a="http://schemas.openxmlformats.org/drawingml/2006/main"/>
           <a:p xmlns:a="http://schemas.openxmlformats.org/drawingml/2006/main">
             <a:pPr>
-              <a:defRPr sz="1350">
+              <a:defRPr sz="1275">
                 <a:solidFill>
                   <a:srgbClr val="202B36"/>
                 </a:solidFill>
@@ -12948,7 +12957,7 @@
               </a:defRPr>
             </a:pPr>
             <a:r>
-              <a:rPr sz="1350">
+              <a:rPr sz="1275">
                 <a:solidFill>
                   <a:srgbClr val="202B36"/>
                 </a:solidFill>
@@ -12963,52 +12972,22 @@
       </p:sp>
       <p:sp>
         <p:nvSpPr>
-          <p:cNvPr id="86" name="">
-            <a:extLst xmlns:a="http://schemas.openxmlformats.org/drawingml/2006/main">
-              <a:ext uri="{FF2B5EF4-FFF2-40B4-BE49-F238E27FC236}">
-                <a16:creationId xmlns:a16="http://schemas.microsoft.com/office/drawing/2014/main" id="{62B56DB5-5646-48BB-BAA8-C1960C2F0DA7}"/>
-              </a:ext>
-            </a:extLst>
-          </p:cNvPr>
-          <p:cNvSpPr>
-            <a:spLocks xmlns:a="http://schemas.openxmlformats.org/drawingml/2006/main" noGrp="1"/>
-          </p:cNvSpPr>
-          <p:nvPr/>
-        </p:nvSpPr>
-        <p:spPr>
-          <a:xfrm xmlns:a="http://schemas.openxmlformats.org/drawingml/2006/main">
-            <a:off x="4000500" y="5724525"/>
-            <a:ext cx="228600" cy="123825"/>
-          </a:xfrm>
-          <a:prstGeom xmlns:a="http://schemas.openxmlformats.org/drawingml/2006/main" prst="rightArrow">
-            <a:avLst/>
-          </a:prstGeom>
-          <a:solidFill xmlns:a="http://schemas.openxmlformats.org/drawingml/2006/main">
-            <a:srgbClr val="8C4966"/>
-          </a:solidFill>
-          <a:ln xmlns:a="http://schemas.openxmlformats.org/drawingml/2006/main" w="0">
-            <a:noFill/>
-          </a:ln>
-        </p:spPr>
-      </p:sp>
-      <p:sp>
-        <p:nvSpPr>
-          <p:cNvPr id="87" name="rev-159">
-            <a:extLst xmlns:a="http://schemas.openxmlformats.org/drawingml/2006/main">
-              <a:ext uri="{FF2B5EF4-FFF2-40B4-BE49-F238E27FC236}">
-                <a16:creationId xmlns:a16="http://schemas.microsoft.com/office/drawing/2014/main" id="{DE091205-814F-41A9-B424-F7768380CDEF}"/>
-              </a:ext>
-            </a:extLst>
-          </p:cNvPr>
-          <p:cNvSpPr>
-            <a:spLocks xmlns:a="http://schemas.openxmlformats.org/drawingml/2006/main" noGrp="1"/>
-          </p:cNvSpPr>
-          <p:nvPr/>
-        </p:nvSpPr>
-        <p:spPr>
-          <a:xfrm xmlns:a="http://schemas.openxmlformats.org/drawingml/2006/main">
-            <a:off x="4343400" y="5600700"/>
-            <a:ext cx="3381375" cy="276225"/>
+          <p:cNvPr id="79" name="rev-155">
+            <a:extLst xmlns:a="http://schemas.openxmlformats.org/drawingml/2006/main">
+              <a:ext uri="{FF2B5EF4-FFF2-40B4-BE49-F238E27FC236}">
+                <a16:creationId xmlns:a16="http://schemas.microsoft.com/office/drawing/2014/main" id="{856C6560-3FE7-4C18-9D29-FBE862D9D0C9}"/>
+              </a:ext>
+            </a:extLst>
+          </p:cNvPr>
+          <p:cNvSpPr>
+            <a:spLocks xmlns:a="http://schemas.openxmlformats.org/drawingml/2006/main" noGrp="1"/>
+          </p:cNvSpPr>
+          <p:nvPr/>
+        </p:nvSpPr>
+        <p:spPr>
+          <a:xfrm xmlns:a="http://schemas.openxmlformats.org/drawingml/2006/main">
+            <a:off x="4343400" y="5657850"/>
+            <a:ext cx="3524250" cy="276225"/>
           </a:xfrm>
           <a:prstGeom xmlns:a="http://schemas.openxmlformats.org/drawingml/2006/main" prst="rect">
             <a:avLst/>
@@ -13050,22 +13029,22 @@
       </p:sp>
       <p:sp>
         <p:nvSpPr>
-          <p:cNvPr id="88" name="rev-160">
-            <a:extLst xmlns:a="http://schemas.openxmlformats.org/drawingml/2006/main">
-              <a:ext uri="{FF2B5EF4-FFF2-40B4-BE49-F238E27FC236}">
-                <a16:creationId xmlns:a16="http://schemas.microsoft.com/office/drawing/2014/main" id="{C24A40F8-1E5F-4353-A3CA-6AC4ADDDADDE}"/>
-              </a:ext>
-            </a:extLst>
-          </p:cNvPr>
-          <p:cNvSpPr>
-            <a:spLocks xmlns:a="http://schemas.openxmlformats.org/drawingml/2006/main" noGrp="1"/>
-          </p:cNvSpPr>
-          <p:nvPr/>
-        </p:nvSpPr>
-        <p:spPr>
-          <a:xfrm xmlns:a="http://schemas.openxmlformats.org/drawingml/2006/main">
-            <a:off x="4343400" y="5905500"/>
-            <a:ext cx="3514725" cy="276225"/>
+          <p:cNvPr id="80" name="rev-156">
+            <a:extLst xmlns:a="http://schemas.openxmlformats.org/drawingml/2006/main">
+              <a:ext uri="{FF2B5EF4-FFF2-40B4-BE49-F238E27FC236}">
+                <a16:creationId xmlns:a16="http://schemas.microsoft.com/office/drawing/2014/main" id="{169719E1-1AEF-4B06-BBC1-95C39BB06200}"/>
+              </a:ext>
+            </a:extLst>
+          </p:cNvPr>
+          <p:cNvSpPr>
+            <a:spLocks xmlns:a="http://schemas.openxmlformats.org/drawingml/2006/main" noGrp="1"/>
+          </p:cNvSpPr>
+          <p:nvPr/>
+        </p:nvSpPr>
+        <p:spPr>
+          <a:xfrm xmlns:a="http://schemas.openxmlformats.org/drawingml/2006/main">
+            <a:off x="4343400" y="5953125"/>
+            <a:ext cx="3524250" cy="247650"/>
           </a:xfrm>
           <a:prstGeom xmlns:a="http://schemas.openxmlformats.org/drawingml/2006/main" prst="rect">
             <a:avLst/>
@@ -13082,7 +13061,7 @@
           <a:lstStyle xmlns:a="http://schemas.openxmlformats.org/drawingml/2006/main"/>
           <a:p xmlns:a="http://schemas.openxmlformats.org/drawingml/2006/main">
             <a:pPr>
-              <a:defRPr sz="1350">
+              <a:defRPr sz="1275">
                 <a:solidFill>
                   <a:srgbClr val="202B36"/>
                 </a:solidFill>
@@ -13092,7 +13071,7 @@
               </a:defRPr>
             </a:pPr>
             <a:r>
-              <a:rPr sz="1350">
+              <a:rPr sz="1275">
                 <a:solidFill>
                   <a:srgbClr val="202B36"/>
                 </a:solidFill>
@@ -13107,52 +13086,22 @@
       </p:sp>
       <p:sp>
         <p:nvSpPr>
-          <p:cNvPr id="89" name="">
-            <a:extLst xmlns:a="http://schemas.openxmlformats.org/drawingml/2006/main">
-              <a:ext uri="{FF2B5EF4-FFF2-40B4-BE49-F238E27FC236}">
-                <a16:creationId xmlns:a16="http://schemas.microsoft.com/office/drawing/2014/main" id="{50857E5E-42FB-4013-AACC-8B5DE09981E9}"/>
-              </a:ext>
-            </a:extLst>
-          </p:cNvPr>
-          <p:cNvSpPr>
-            <a:spLocks xmlns:a="http://schemas.openxmlformats.org/drawingml/2006/main" noGrp="1"/>
-          </p:cNvSpPr>
-          <p:nvPr/>
-        </p:nvSpPr>
-        <p:spPr>
-          <a:xfrm xmlns:a="http://schemas.openxmlformats.org/drawingml/2006/main">
-            <a:off x="7886700" y="5724525"/>
-            <a:ext cx="228600" cy="123825"/>
-          </a:xfrm>
-          <a:prstGeom xmlns:a="http://schemas.openxmlformats.org/drawingml/2006/main" prst="rightArrow">
-            <a:avLst/>
-          </a:prstGeom>
-          <a:solidFill xmlns:a="http://schemas.openxmlformats.org/drawingml/2006/main">
-            <a:srgbClr val="8C4966"/>
-          </a:solidFill>
-          <a:ln xmlns:a="http://schemas.openxmlformats.org/drawingml/2006/main" w="0">
-            <a:noFill/>
-          </a:ln>
-        </p:spPr>
-      </p:sp>
-      <p:sp>
-        <p:nvSpPr>
-          <p:cNvPr id="90" name="rev-161">
-            <a:extLst xmlns:a="http://schemas.openxmlformats.org/drawingml/2006/main">
-              <a:ext uri="{FF2B5EF4-FFF2-40B4-BE49-F238E27FC236}">
-                <a16:creationId xmlns:a16="http://schemas.microsoft.com/office/drawing/2014/main" id="{3C18ADFE-2CA9-44C3-8954-513D311DCEFB}"/>
-              </a:ext>
-            </a:extLst>
-          </p:cNvPr>
-          <p:cNvSpPr>
-            <a:spLocks xmlns:a="http://schemas.openxmlformats.org/drawingml/2006/main" noGrp="1"/>
-          </p:cNvSpPr>
-          <p:nvPr/>
-        </p:nvSpPr>
-        <p:spPr>
-          <a:xfrm xmlns:a="http://schemas.openxmlformats.org/drawingml/2006/main">
-            <a:off x="8229600" y="5600700"/>
-            <a:ext cx="3381375" cy="276225"/>
+          <p:cNvPr id="81" name="rev-157">
+            <a:extLst xmlns:a="http://schemas.openxmlformats.org/drawingml/2006/main">
+              <a:ext uri="{FF2B5EF4-FFF2-40B4-BE49-F238E27FC236}">
+                <a16:creationId xmlns:a16="http://schemas.microsoft.com/office/drawing/2014/main" id="{D6A59FB3-458F-4744-84EE-162EBE2991DD}"/>
+              </a:ext>
+            </a:extLst>
+          </p:cNvPr>
+          <p:cNvSpPr>
+            <a:spLocks xmlns:a="http://schemas.openxmlformats.org/drawingml/2006/main" noGrp="1"/>
+          </p:cNvSpPr>
+          <p:nvPr/>
+        </p:nvSpPr>
+        <p:spPr>
+          <a:xfrm xmlns:a="http://schemas.openxmlformats.org/drawingml/2006/main">
+            <a:off x="8229600" y="5657850"/>
+            <a:ext cx="3524250" cy="276225"/>
           </a:xfrm>
           <a:prstGeom xmlns:a="http://schemas.openxmlformats.org/drawingml/2006/main" prst="rect">
             <a:avLst/>
@@ -13187,29 +13136,29 @@
                 <a:ea typeface="Calibri"/>
                 <a:cs typeface="Calibri"/>
               </a:rPr>
-              <a:t>48 stress pages</a:t>
-            </a:r>
-          </a:p>
-        </p:txBody>
-      </p:sp>
-      <p:sp>
-        <p:nvSpPr>
-          <p:cNvPr id="91" name="rev-162">
-            <a:extLst xmlns:a="http://schemas.openxmlformats.org/drawingml/2006/main">
-              <a:ext uri="{FF2B5EF4-FFF2-40B4-BE49-F238E27FC236}">
-                <a16:creationId xmlns:a16="http://schemas.microsoft.com/office/drawing/2014/main" id="{E57294BD-AFA3-4F5A-A415-948303197613}"/>
-              </a:ext>
-            </a:extLst>
-          </p:cNvPr>
-          <p:cNvSpPr>
-            <a:spLocks xmlns:a="http://schemas.openxmlformats.org/drawingml/2006/main" noGrp="1"/>
-          </p:cNvSpPr>
-          <p:nvPr/>
-        </p:nvSpPr>
-        <p:spPr>
-          <a:xfrm xmlns:a="http://schemas.openxmlformats.org/drawingml/2006/main">
-            <a:off x="8229600" y="5905500"/>
-            <a:ext cx="3514725" cy="276225"/>
+              <a:t>48 DOM-blind variants</a:t>
+            </a:r>
+          </a:p>
+        </p:txBody>
+      </p:sp>
+      <p:sp>
+        <p:nvSpPr>
+          <p:cNvPr id="82" name="rev-158">
+            <a:extLst xmlns:a="http://schemas.openxmlformats.org/drawingml/2006/main">
+              <a:ext uri="{FF2B5EF4-FFF2-40B4-BE49-F238E27FC236}">
+                <a16:creationId xmlns:a16="http://schemas.microsoft.com/office/drawing/2014/main" id="{7ED285ED-5C0F-4285-9083-DD79D447E563}"/>
+              </a:ext>
+            </a:extLst>
+          </p:cNvPr>
+          <p:cNvSpPr>
+            <a:spLocks xmlns:a="http://schemas.openxmlformats.org/drawingml/2006/main" noGrp="1"/>
+          </p:cNvSpPr>
+          <p:nvPr/>
+        </p:nvSpPr>
+        <p:spPr>
+          <a:xfrm xmlns:a="http://schemas.openxmlformats.org/drawingml/2006/main">
+            <a:off x="8229600" y="5953125"/>
+            <a:ext cx="3524250" cy="247650"/>
           </a:xfrm>
           <a:prstGeom xmlns:a="http://schemas.openxmlformats.org/drawingml/2006/main" prst="rect">
             <a:avLst/>
@@ -13226,7 +13175,7 @@
           <a:lstStyle xmlns:a="http://schemas.openxmlformats.org/drawingml/2006/main"/>
           <a:p xmlns:a="http://schemas.openxmlformats.org/drawingml/2006/main">
             <a:pPr>
-              <a:defRPr sz="1350">
+              <a:defRPr sz="1275">
                 <a:solidFill>
                   <a:srgbClr val="202B36"/>
                 </a:solidFill>
@@ -13236,7 +13185,7 @@
               </a:defRPr>
             </a:pPr>
             <a:r>
-              <a:rPr sz="1350">
+              <a:rPr sz="1275">
                 <a:solidFill>
                   <a:srgbClr val="202B36"/>
                 </a:solidFill>
@@ -13244,29 +13193,29 @@
                 <a:ea typeface="Calibri"/>
                 <a:cs typeface="Calibri"/>
               </a:rPr>
-              <a:t>DOM text deliberately removed</a:t>
-            </a:r>
-          </a:p>
-        </p:txBody>
-      </p:sp>
-      <p:sp>
-        <p:nvSpPr>
-          <p:cNvPr id="92" name="rev-163">
-            <a:extLst xmlns:a="http://schemas.openxmlformats.org/drawingml/2006/main">
-              <a:ext uri="{FF2B5EF4-FFF2-40B4-BE49-F238E27FC236}">
-                <a16:creationId xmlns:a16="http://schemas.microsoft.com/office/drawing/2014/main" id="{4834C173-629E-4694-BE96-E0450ED5F733}"/>
-              </a:ext>
-            </a:extLst>
-          </p:cNvPr>
-          <p:cNvSpPr>
-            <a:spLocks xmlns:a="http://schemas.openxmlformats.org/drawingml/2006/main" noGrp="1"/>
-          </p:cNvSpPr>
-          <p:nvPr/>
-        </p:nvSpPr>
-        <p:spPr>
-          <a:xfrm xmlns:a="http://schemas.openxmlformats.org/drawingml/2006/main">
-            <a:off x="457200" y="6219825"/>
-            <a:ext cx="11277600" cy="180975"/>
+              <a:t>Reduced DOM on the same test pages</a:t>
+            </a:r>
+          </a:p>
+        </p:txBody>
+      </p:sp>
+      <p:sp>
+        <p:nvSpPr>
+          <p:cNvPr id="83" name="rev-159">
+            <a:extLst xmlns:a="http://schemas.openxmlformats.org/drawingml/2006/main">
+              <a:ext uri="{FF2B5EF4-FFF2-40B4-BE49-F238E27FC236}">
+                <a16:creationId xmlns:a16="http://schemas.microsoft.com/office/drawing/2014/main" id="{60ABE5E9-D83C-4943-840D-22ACE174BABD}"/>
+              </a:ext>
+            </a:extLst>
+          </p:cNvPr>
+          <p:cNvSpPr>
+            <a:spLocks xmlns:a="http://schemas.openxmlformats.org/drawingml/2006/main" noGrp="1"/>
+          </p:cNvSpPr>
+          <p:nvPr/>
+        </p:nvSpPr>
+        <p:spPr>
+          <a:xfrm xmlns:a="http://schemas.openxmlformats.org/drawingml/2006/main">
+            <a:off x="457200" y="6229350"/>
+            <a:ext cx="8477250" cy="180975"/>
           </a:xfrm>
           <a:prstGeom xmlns:a="http://schemas.openxmlformats.org/drawingml/2006/main" prst="rect">
             <a:avLst/>
@@ -13300,8 +13249,66 @@
                 <a:latin typeface="Calibri"/>
                 <a:ea typeface="Calibri"/>
                 <a:cs typeface="Calibri"/>
-              </a:rPr>
-              <a:t>Benchmark evidence: nexora_benchmark/SELECTIVE_RESULTS.md + stored JSON results. Ground truth is used only by the scorer.</a:t>
+                <a:hlinkClick xmlns:r="http://schemas.openxmlformats.org/officeDocument/2006/relationships" r:id="R1442e06fea764793"/>
+              </a:rPr>
+              <a:t>Benchmark report: nexora_benchmark/SELECTIVE_RESULTS.md</a:t>
+            </a:r>
+          </a:p>
+        </p:txBody>
+      </p:sp>
+      <p:sp>
+        <p:nvSpPr>
+          <p:cNvPr id="84" name="rev-160">
+            <a:extLst xmlns:a="http://schemas.openxmlformats.org/drawingml/2006/main">
+              <a:ext uri="{FF2B5EF4-FFF2-40B4-BE49-F238E27FC236}">
+                <a16:creationId xmlns:a16="http://schemas.microsoft.com/office/drawing/2014/main" id="{EFF85341-E1AD-42C2-B6CC-0F12CE8ADEDA}"/>
+              </a:ext>
+            </a:extLst>
+          </p:cNvPr>
+          <p:cNvSpPr>
+            <a:spLocks xmlns:a="http://schemas.openxmlformats.org/drawingml/2006/main" noGrp="1"/>
+          </p:cNvSpPr>
+          <p:nvPr/>
+        </p:nvSpPr>
+        <p:spPr>
+          <a:xfrm xmlns:a="http://schemas.openxmlformats.org/drawingml/2006/main">
+            <a:off x="9086850" y="6229350"/>
+            <a:ext cx="2647950" cy="180975"/>
+          </a:xfrm>
+          <a:prstGeom xmlns:a="http://schemas.openxmlformats.org/drawingml/2006/main" prst="rect">
+            <a:avLst/>
+          </a:prstGeom>
+          <a:noFill xmlns:a="http://schemas.openxmlformats.org/drawingml/2006/main"/>
+          <a:ln xmlns:a="http://schemas.openxmlformats.org/drawingml/2006/main" w="0">
+            <a:noFill/>
+          </a:ln>
+        </p:spPr>
+        <p:txBody>
+          <a:bodyPr xmlns:a="http://schemas.openxmlformats.org/drawingml/2006/main" wrap="square" lIns="0" tIns="0" rIns="0" bIns="0" anchor="t">
+            <a:noAutofit/>
+          </a:bodyPr>
+          <a:lstStyle xmlns:a="http://schemas.openxmlformats.org/drawingml/2006/main"/>
+          <a:p xmlns:a="http://schemas.openxmlformats.org/drawingml/2006/main">
+            <a:pPr algn="r">
+              <a:defRPr sz="975">
+                <a:solidFill>
+                  <a:srgbClr val="53616D"/>
+                </a:solidFill>
+                <a:latin typeface="Calibri"/>
+                <a:ea typeface="Calibri"/>
+                <a:cs typeface="Calibri"/>
+              </a:defRPr>
+            </a:pPr>
+            <a:r>
+              <a:rPr sz="975">
+                <a:solidFill>
+                  <a:srgbClr val="53616D"/>
+                </a:solidFill>
+                <a:latin typeface="Calibri"/>
+                <a:ea typeface="Calibri"/>
+                <a:cs typeface="Calibri"/>
+              </a:rPr>
+              <a:t>Ground truth: scorer only</a:t>
             </a:r>
           </a:p>
         </p:txBody>
@@ -13309,7 +13316,7 @@
     </p:spTree>
     <p:extLst>
       <p:ext uri="{BB962C8B-B14F-4D97-AF65-F5344CB8AC3E}">
-        <p14:creationId xmlns:p14="http://schemas.microsoft.com/office/powerpoint/2010/main" val="924959143"/>
+        <p14:creationId xmlns:p14="http://schemas.microsoft.com/office/powerpoint/2010/main" val="1679404959"/>
       </p:ext>
     </p:extLst>
   </p:cSld>

--- a/deck/NEXORA_AegisBrowse_Deck.pptx
+++ b/deck/NEXORA_AegisBrowse_Deck.pptx
@@ -2,18 +2,18 @@
 <file path=ppt/presentation.xml><?xml version="1.0" encoding="utf-8"?>
 <p:presentation xmlns:p="http://schemas.openxmlformats.org/presentationml/2006/main">
   <p:sldMasterIdLst>
-    <p:sldMasterId xmlns:r="http://schemas.openxmlformats.org/officeDocument/2006/relationships" id="2147483648" r:id="Rd56eb3909b964a2f"/>
+    <p:sldMasterId xmlns:r="http://schemas.openxmlformats.org/officeDocument/2006/relationships" id="2147483648" r:id="R87d688f93718466a"/>
   </p:sldMasterIdLst>
   <p:notesMasterIdLst>
-    <p:notesMasterId xmlns:r="http://schemas.openxmlformats.org/officeDocument/2006/relationships" r:id="Rd06329f897904502"/>
+    <p:notesMasterId xmlns:r="http://schemas.openxmlformats.org/officeDocument/2006/relationships" r:id="R4aa7ba8877fe4e27"/>
   </p:notesMasterIdLst>
   <p:sldIdLst>
-    <p:sldId xmlns:r="http://schemas.openxmlformats.org/officeDocument/2006/relationships" id="256" r:id="R030e6f89d0c54660"/>
-    <p:sldId xmlns:r="http://schemas.openxmlformats.org/officeDocument/2006/relationships" id="257" r:id="R5c35fb56d99a4ed8"/>
-    <p:sldId xmlns:r="http://schemas.openxmlformats.org/officeDocument/2006/relationships" id="258" r:id="R5032e7ef42c3434c"/>
-    <p:sldId xmlns:r="http://schemas.openxmlformats.org/officeDocument/2006/relationships" id="259" r:id="R6eb2dc8880fb4b2d"/>
-    <p:sldId xmlns:r="http://schemas.openxmlformats.org/officeDocument/2006/relationships" id="260" r:id="R330f7d6189614b5d"/>
-    <p:sldId xmlns:r="http://schemas.openxmlformats.org/officeDocument/2006/relationships" id="261" r:id="R1d1517b62c0e414d"/>
+    <p:sldId xmlns:r="http://schemas.openxmlformats.org/officeDocument/2006/relationships" id="256" r:id="R719764bf686e4ed9"/>
+    <p:sldId xmlns:r="http://schemas.openxmlformats.org/officeDocument/2006/relationships" id="257" r:id="Rcf70307bcd8e4c09"/>
+    <p:sldId xmlns:r="http://schemas.openxmlformats.org/officeDocument/2006/relationships" id="258" r:id="R36cfa31580d4485b"/>
+    <p:sldId xmlns:r="http://schemas.openxmlformats.org/officeDocument/2006/relationships" id="259" r:id="R130c5db3171748dd"/>
+    <p:sldId xmlns:r="http://schemas.openxmlformats.org/officeDocument/2006/relationships" id="260" r:id="R3bf120a30b764c51"/>
+    <p:sldId xmlns:r="http://schemas.openxmlformats.org/officeDocument/2006/relationships" id="261" r:id="R84146082a5c1421d"/>
   </p:sldIdLst>
   <p:sldSz cx="12192000" cy="6858000"/>
   <p:notesSz cx="6858000" cy="9144000"/>
@@ -771,7 +771,7 @@
           <a:lstStyle xmlns:a="http://schemas.openxmlformats.org/drawingml/2006/main"/>
           <a:p xmlns:a="http://schemas.openxmlformats.org/drawingml/2006/main">
             <a:r>
-              <a:t>Source: SELECTIVE_RESULTS.md and loop_results.json, fresh pages_v3 set only. 339.2/46.7=7.3 times sanitize-to-plan speedup. CPU reduction (52.1-25.7)/52.1=50.7%, rounded to 51%. Zero PII strings refers solely to metadata checks on 48 pages, not image privacy or a system guarantee. 48/48 is control-selection success, not end-to-end task completion. Browser click/verification flow is described in the supplied README; browser execution timing is still unmeasured. No energy or carbon saving is claimed.</a:t>
+              <a:t>Sources: nexora_benchmark/SELECTIVE_RESULTS.md and loop_results.json, fresh pages_v3. Exact median values 339.2 and 46.7 ms (rounded chart labels 339 and 47 ms) give a 7.3x ratio. CPU reduction (52.1-25.7)/52.1 is 50.7%, rounded to 51%; Python process only, excluding Tesseract child CPU. Zero PII strings refers to textual metadata, not image privacy or a universal guarantee. 48/48 means correct Download-target selection, not completed browser tasks. The left journey depicts the browser demo, with full-task latency pending. No energy/carbon saving is claimed.</a:t>
             </a:r>
             <a:endParaRPr/>
           </a:p>
@@ -916,7 +916,7 @@
   </p:cSld>
   <p:clrMap bg1="lt1" tx1="dk1" bg2="lt2" tx2="dk2" accent1="accent1" accent2="accent2" accent3="accent3" accent4="accent4" accent5="accent5" accent6="accent6" hlink="hlink" folHlink="folHlink"/>
   <p:sldLayoutIdLst>
-    <p:sldLayoutId xmlns:r="http://schemas.openxmlformats.org/officeDocument/2006/relationships" id="2147483649" r:id="R2f361ea7000e4712"/>
+    <p:sldLayoutId xmlns:r="http://schemas.openxmlformats.org/officeDocument/2006/relationships" id="2147483649" r:id="Redb12db322e447a9"/>
   </p:sldLayoutIdLst>
   <p:hf sldNum="0" hdr="0" ftr="0" dt="0"/>
   <p:txStyles>
@@ -1463,6 +1463,199 @@
 </a:theme>
 </file>
 
+<file path=ppt/slides/charts/chart1.xml><?xml version="1.0" encoding="utf-8"?>
+<c:chartSpace xmlns:c="http://schemas.openxmlformats.org/drawingml/2006/chart" xmlns:r="http://schemas.openxmlformats.org/officeDocument/2006/relationships">
+  <c:lang val="en-US"/>
+  <c:chart>
+    <c:plotArea>
+      <c:barChart>
+        <c:barDir val="bar"/>
+        <c:grouping val="clustered"/>
+        <c:varyColors val="0"/>
+        <c:ser>
+          <c:idx val="0"/>
+          <c:order val="0"/>
+          <c:tx>
+            <c:v>Median latency (ms)</c:v>
+          </c:tx>
+          <c:spPr>
+            <a:solidFill xmlns:a="http://schemas.openxmlformats.org/drawingml/2006/main">
+              <a:srgbClr val="E5BD6C"/>
+            </a:solidFill>
+          </c:spPr>
+          <c:dPt>
+            <c:idx val="0"/>
+            <c:invertIfNegative val="0"/>
+            <c:spPr>
+              <a:solidFill xmlns:a="http://schemas.openxmlformats.org/drawingml/2006/main">
+                <a:srgbClr val="E5BD6C"/>
+              </a:solidFill>
+            </c:spPr>
+          </c:dPt>
+          <c:dPt>
+            <c:idx val="1"/>
+            <c:invertIfNegative val="0"/>
+            <c:spPr>
+              <a:solidFill xmlns:a="http://schemas.openxmlformats.org/drawingml/2006/main">
+                <a:srgbClr val="8CA7A7"/>
+              </a:solidFill>
+            </c:spPr>
+          </c:dPt>
+          <c:cat>
+            <c:strRef>
+              <c:f>'Chart Data'!$A$2:$A$3</c:f>
+              <c:strCache>
+                <c:ptCount val="2"/>
+                <c:pt idx="0">
+                  <c:v>Selective</c:v>
+                </c:pt>
+                <c:pt idx="1">
+                  <c:v>Always-on</c:v>
+                </c:pt>
+              </c:strCache>
+            </c:strRef>
+          </c:cat>
+          <c:val>
+            <c:numRef>
+              <c:f>'Chart Data'!$B$2:$B$3</c:f>
+              <c:numCache>
+                <c:formatCode>0" ms"</c:formatCode>
+                <c:ptCount val="2"/>
+                <c:pt idx="0">
+                  <c:v>46.7</c:v>
+                </c:pt>
+                <c:pt idx="1">
+                  <c:v>339.2</c:v>
+                </c:pt>
+              </c:numCache>
+            </c:numRef>
+          </c:val>
+        </c:ser>
+        <c:dLbls>
+          <c:txPr>
+            <a:bodyPr xmlns:a="http://schemas.openxmlformats.org/drawingml/2006/main" anchorCtr="1"/>
+            <a:lstStyle xmlns:a="http://schemas.openxmlformats.org/drawingml/2006/main"/>
+            <a:p xmlns:a="http://schemas.openxmlformats.org/drawingml/2006/main">
+              <a:pPr>
+                <a:defRPr sz="1500" b="1">
+                  <a:solidFill>
+                    <a:srgbClr val="FFFFFF"/>
+                  </a:solidFill>
+                  <a:latin typeface="Calibri"/>
+                  <a:ea typeface="Calibri"/>
+                  <a:cs typeface="Calibri"/>
+                </a:defRPr>
+              </a:pPr>
+            </a:p>
+          </c:txPr>
+          <c:dLblPos val="outEnd"/>
+          <c:showLegendKey val="0"/>
+          <c:showVal val="1"/>
+          <c:showCatName val="0"/>
+          <c:showSerName val="0"/>
+          <c:showPercent val="0"/>
+          <c:showBubbleSize val="0"/>
+          <c:showLeaderLines val="0"/>
+        </c:dLbls>
+        <c:gapWidth val="95"/>
+        <c:axId val="48650112"/>
+        <c:axId val="48672768"/>
+      </c:barChart>
+      <c:catAx>
+        <c:axId val="48650112"/>
+        <c:scaling>
+          <c:orientation val="minMax"/>
+        </c:scaling>
+        <c:delete val="0"/>
+        <c:axPos val="l"/>
+        <c:numFmt formatCode="General"/>
+        <c:majorTickMark val="none"/>
+        <c:minorTickMark val="none"/>
+        <c:spPr>
+          <a:ln xmlns:a="http://schemas.openxmlformats.org/drawingml/2006/main" w="0">
+            <a:noFill/>
+          </a:ln>
+        </c:spPr>
+        <c:txPr>
+          <a:bodyPr xmlns:a="http://schemas.openxmlformats.org/drawingml/2006/main" anchorCtr="1"/>
+          <a:lstStyle xmlns:a="http://schemas.openxmlformats.org/drawingml/2006/main"/>
+          <a:p xmlns:a="http://schemas.openxmlformats.org/drawingml/2006/main">
+            <a:pPr>
+              <a:defRPr sz="1425">
+                <a:solidFill>
+                  <a:srgbClr val="FFFFFF"/>
+                </a:solidFill>
+                <a:latin typeface="Calibri"/>
+                <a:ea typeface="Calibri"/>
+                <a:cs typeface="Calibri"/>
+              </a:defRPr>
+            </a:pPr>
+          </a:p>
+        </c:txPr>
+        <c:crossAx val="48672768"/>
+      </c:catAx>
+      <c:valAx>
+        <c:axId val="48672768"/>
+        <c:scaling>
+          <c:orientation val="minMax"/>
+          <c:max val="400"/>
+          <c:min val="0"/>
+        </c:scaling>
+        <c:delete val="0"/>
+        <c:axPos val="b"/>
+        <c:numFmt formatCode="General"/>
+        <c:majorTickMark val="none"/>
+        <c:minorTickMark val="none"/>
+        <c:tickLblPos val="none"/>
+        <c:spPr>
+          <a:ln xmlns:a="http://schemas.openxmlformats.org/drawingml/2006/main" w="0">
+            <a:noFill/>
+          </a:ln>
+        </c:spPr>
+        <c:txPr>
+          <a:bodyPr xmlns:a="http://schemas.openxmlformats.org/drawingml/2006/main" anchorCtr="1"/>
+          <a:lstStyle xmlns:a="http://schemas.openxmlformats.org/drawingml/2006/main"/>
+          <a:p xmlns:a="http://schemas.openxmlformats.org/drawingml/2006/main">
+            <a:pPr>
+              <a:defRPr sz="1125">
+                <a:solidFill>
+                  <a:srgbClr val="FFFFFF"/>
+                </a:solidFill>
+                <a:latin typeface="Calibri"/>
+                <a:ea typeface="Calibri"/>
+                <a:cs typeface="Calibri"/>
+              </a:defRPr>
+            </a:pPr>
+          </a:p>
+        </c:txPr>
+        <c:crossAx val="48650112"/>
+        <c:crossBetween val="between"/>
+      </c:valAx>
+      <c:spPr>
+        <a:solidFill xmlns:a="http://schemas.openxmlformats.org/drawingml/2006/main">
+          <a:srgbClr val="173F43"/>
+        </a:solidFill>
+        <a:ln xmlns:a="http://schemas.openxmlformats.org/drawingml/2006/main" w="0">
+          <a:noFill/>
+        </a:ln>
+      </c:spPr>
+    </c:plotArea>
+    <c:plotVisOnly val="1"/>
+  </c:chart>
+  <c:spPr>
+    <a:solidFill xmlns:a="http://schemas.openxmlformats.org/drawingml/2006/main">
+      <a:srgbClr val="173F43"/>
+    </a:solidFill>
+    <a:ln xmlns:a="http://schemas.openxmlformats.org/drawingml/2006/main" w="0">
+      <a:noFill/>
+    </a:ln>
+  </c:spPr>
+  <c:externalData r:id="rIdChartSnapshot1">
+    <c:autoUpdate val="0"/>
+  </c:externalData>
+</c:chartSpace>
+</file>
+
 <file path=ppt/slides/slide1.xml><?xml version="1.0" encoding="utf-8"?>
 <p:sld xmlns:p="http://schemas.openxmlformats.org/presentationml/2006/main">
   <p:cSld>
@@ -1480,7 +1673,7 @@
           <p:cNvPr id="2" name="Text 0">
             <a:extLst xmlns:a="http://schemas.openxmlformats.org/drawingml/2006/main">
               <a:ext uri="{FF2B5EF4-FFF2-40B4-BE49-F238E27FC236}">
-                <a16:creationId xmlns:a16="http://schemas.microsoft.com/office/drawing/2014/main" id="{FFD96903-3B33-40C0-84E0-E000F661857D}"/>
+                <a16:creationId xmlns:a16="http://schemas.microsoft.com/office/drawing/2014/main" id="{C44881C0-CAC0-42D9-BC6A-CC9D0A4F15C8}"/>
               </a:ext>
             </a:extLst>
           </p:cNvPr>
@@ -1530,7 +1723,7 @@
           <p:nvPr/>
         </p:nvPicPr>
         <p:blipFill>
-          <a:blip xmlns:r="http://schemas.openxmlformats.org/officeDocument/2006/relationships" xmlns:a="http://schemas.openxmlformats.org/drawingml/2006/main" r:embed="R85a2e09477834353"/>
+          <a:blip xmlns:r="http://schemas.openxmlformats.org/officeDocument/2006/relationships" xmlns:a="http://schemas.openxmlformats.org/drawingml/2006/main" r:embed="R6fa2a78de69e46d0"/>
           <a:stretch xmlns:a="http://schemas.openxmlformats.org/drawingml/2006/main">
             <a:fillRect l="0" t="0" r="0" b="0"/>
           </a:stretch>
@@ -1554,7 +1747,7 @@
           <p:nvPr/>
         </p:nvPicPr>
         <p:blipFill>
-          <a:blip xmlns:r="http://schemas.openxmlformats.org/officeDocument/2006/relationships" xmlns:a="http://schemas.openxmlformats.org/drawingml/2006/main" r:embed="R826a6c7c45494d1b"/>
+          <a:blip xmlns:r="http://schemas.openxmlformats.org/officeDocument/2006/relationships" xmlns:a="http://schemas.openxmlformats.org/drawingml/2006/main" r:embed="R46ca3455ab264710"/>
           <a:stretch xmlns:a="http://schemas.openxmlformats.org/drawingml/2006/main">
             <a:fillRect l="0" t="0" r="0" b="0"/>
           </a:stretch>
@@ -1574,7 +1767,7 @@
           <p:cNvPr id="5" name="Text 1">
             <a:extLst xmlns:a="http://schemas.openxmlformats.org/drawingml/2006/main">
               <a:ext uri="{FF2B5EF4-FFF2-40B4-BE49-F238E27FC236}">
-                <a16:creationId xmlns:a16="http://schemas.microsoft.com/office/drawing/2014/main" id="{6882F92A-5C98-43F7-8543-92D1A570E899}"/>
+                <a16:creationId xmlns:a16="http://schemas.microsoft.com/office/drawing/2014/main" id="{EE028247-646A-41E8-96EA-0000D10A6C10}"/>
               </a:ext>
             </a:extLst>
           </p:cNvPr>
@@ -1620,7 +1813,7 @@
           <p:cNvPr id="6" name="Shape 2">
             <a:extLst xmlns:a="http://schemas.openxmlformats.org/drawingml/2006/main">
               <a:ext uri="{FF2B5EF4-FFF2-40B4-BE49-F238E27FC236}">
-                <a16:creationId xmlns:a16="http://schemas.microsoft.com/office/drawing/2014/main" id="{BEA4F131-CF7E-45C7-A9A0-45761361FB10}"/>
+                <a16:creationId xmlns:a16="http://schemas.microsoft.com/office/drawing/2014/main" id="{847F080F-C780-48DE-B610-68469A0F39C0}"/>
               </a:ext>
             </a:extLst>
           </p:cNvPr>
@@ -1647,7 +1840,7 @@
           <p:cNvPr id="7" name="Text 3">
             <a:extLst xmlns:a="http://schemas.openxmlformats.org/drawingml/2006/main">
               <a:ext uri="{FF2B5EF4-FFF2-40B4-BE49-F238E27FC236}">
-                <a16:creationId xmlns:a16="http://schemas.microsoft.com/office/drawing/2014/main" id="{B1BEA329-40C1-4B3A-85A9-0E2A78EAF34C}"/>
+                <a16:creationId xmlns:a16="http://schemas.microsoft.com/office/drawing/2014/main" id="{CFB48B80-350E-4FB7-8704-782A0E4C12C3}"/>
               </a:ext>
             </a:extLst>
           </p:cNvPr>
@@ -1707,7 +1900,7 @@
           <p:cNvPr id="8" name="Shape 4">
             <a:extLst xmlns:a="http://schemas.openxmlformats.org/drawingml/2006/main">
               <a:ext uri="{FF2B5EF4-FFF2-40B4-BE49-F238E27FC236}">
-                <a16:creationId xmlns:a16="http://schemas.microsoft.com/office/drawing/2014/main" id="{A5A1AC0F-37C6-4326-8BD0-A1C4A185F8BA}"/>
+                <a16:creationId xmlns:a16="http://schemas.microsoft.com/office/drawing/2014/main" id="{8E3DC4BC-2BDD-4AF5-9E56-21484A2739DC}"/>
               </a:ext>
             </a:extLst>
           </p:cNvPr>
@@ -1734,7 +1927,7 @@
           <p:cNvPr id="9" name="Text 5">
             <a:extLst xmlns:a="http://schemas.openxmlformats.org/drawingml/2006/main">
               <a:ext uri="{FF2B5EF4-FFF2-40B4-BE49-F238E27FC236}">
-                <a16:creationId xmlns:a16="http://schemas.microsoft.com/office/drawing/2014/main" id="{0F3D91A4-2ACF-462C-B5F4-6DFDE708C2F3}"/>
+                <a16:creationId xmlns:a16="http://schemas.microsoft.com/office/drawing/2014/main" id="{64F37607-5C17-40C3-876F-8FBFF607A77B}"/>
               </a:ext>
             </a:extLst>
           </p:cNvPr>
@@ -1794,7 +1987,7 @@
           <p:cNvPr id="10" name="Shape 6">
             <a:extLst xmlns:a="http://schemas.openxmlformats.org/drawingml/2006/main">
               <a:ext uri="{FF2B5EF4-FFF2-40B4-BE49-F238E27FC236}">
-                <a16:creationId xmlns:a16="http://schemas.microsoft.com/office/drawing/2014/main" id="{FD713E6A-82F6-4CC8-9B65-8DDEB11DE825}"/>
+                <a16:creationId xmlns:a16="http://schemas.microsoft.com/office/drawing/2014/main" id="{8147ADD0-516F-4B2A-A7DA-73569ED4940A}"/>
               </a:ext>
             </a:extLst>
           </p:cNvPr>
@@ -1821,7 +2014,7 @@
           <p:cNvPr id="11" name="Text 7">
             <a:extLst xmlns:a="http://schemas.openxmlformats.org/drawingml/2006/main">
               <a:ext uri="{FF2B5EF4-FFF2-40B4-BE49-F238E27FC236}">
-                <a16:creationId xmlns:a16="http://schemas.microsoft.com/office/drawing/2014/main" id="{FD014459-79A6-4F94-903F-F1DB5B697B56}"/>
+                <a16:creationId xmlns:a16="http://schemas.microsoft.com/office/drawing/2014/main" id="{B26318B7-8E37-43B7-94F0-5815D4C2871B}"/>
               </a:ext>
             </a:extLst>
           </p:cNvPr>
@@ -1881,7 +2074,7 @@
           <p:cNvPr id="12" name="Shape 8">
             <a:extLst xmlns:a="http://schemas.openxmlformats.org/drawingml/2006/main">
               <a:ext uri="{FF2B5EF4-FFF2-40B4-BE49-F238E27FC236}">
-                <a16:creationId xmlns:a16="http://schemas.microsoft.com/office/drawing/2014/main" id="{DADD8BEE-DE2B-4A74-90B6-7969821F6603}"/>
+                <a16:creationId xmlns:a16="http://schemas.microsoft.com/office/drawing/2014/main" id="{ECA44789-1EF7-47A9-B6EA-CBE3A5E891CE}"/>
               </a:ext>
             </a:extLst>
           </p:cNvPr>
@@ -1908,7 +2101,7 @@
           <p:cNvPr id="13" name="Text 9">
             <a:extLst xmlns:a="http://schemas.openxmlformats.org/drawingml/2006/main">
               <a:ext uri="{FF2B5EF4-FFF2-40B4-BE49-F238E27FC236}">
-                <a16:creationId xmlns:a16="http://schemas.microsoft.com/office/drawing/2014/main" id="{15237C38-81A4-4888-9B1D-EE14EC8CF494}"/>
+                <a16:creationId xmlns:a16="http://schemas.microsoft.com/office/drawing/2014/main" id="{CBD13546-B840-4C96-87F6-2A792449145A}"/>
               </a:ext>
             </a:extLst>
           </p:cNvPr>
@@ -1968,7 +2161,7 @@
           <p:cNvPr id="14" name="Shape 10">
             <a:extLst xmlns:a="http://schemas.openxmlformats.org/drawingml/2006/main">
               <a:ext uri="{FF2B5EF4-FFF2-40B4-BE49-F238E27FC236}">
-                <a16:creationId xmlns:a16="http://schemas.microsoft.com/office/drawing/2014/main" id="{655BF8D2-D967-4A32-9589-FB896AB668FD}"/>
+                <a16:creationId xmlns:a16="http://schemas.microsoft.com/office/drawing/2014/main" id="{30CB6BE4-BCFE-49B9-83CD-1C0155291931}"/>
               </a:ext>
             </a:extLst>
           </p:cNvPr>
@@ -1995,7 +2188,7 @@
           <p:cNvPr id="15" name="Text 11">
             <a:extLst xmlns:a="http://schemas.openxmlformats.org/drawingml/2006/main">
               <a:ext uri="{FF2B5EF4-FFF2-40B4-BE49-F238E27FC236}">
-                <a16:creationId xmlns:a16="http://schemas.microsoft.com/office/drawing/2014/main" id="{E60768D9-2C8C-4F56-A524-B1FB11AAD3BC}"/>
+                <a16:creationId xmlns:a16="http://schemas.microsoft.com/office/drawing/2014/main" id="{5F6DBAE3-E9C0-4109-A770-34615262FC3B}"/>
               </a:ext>
             </a:extLst>
           </p:cNvPr>
@@ -2055,7 +2248,7 @@
           <p:cNvPr id="16" name="Shape 12">
             <a:extLst xmlns:a="http://schemas.openxmlformats.org/drawingml/2006/main">
               <a:ext uri="{FF2B5EF4-FFF2-40B4-BE49-F238E27FC236}">
-                <a16:creationId xmlns:a16="http://schemas.microsoft.com/office/drawing/2014/main" id="{9A433F76-10E9-44BC-A9C1-F5D69A1171A4}"/>
+                <a16:creationId xmlns:a16="http://schemas.microsoft.com/office/drawing/2014/main" id="{3948FE71-64F1-4E6E-B9BC-BF8B131D8EAE}"/>
               </a:ext>
             </a:extLst>
           </p:cNvPr>
@@ -2082,7 +2275,7 @@
           <p:cNvPr id="17" name="Text 13">
             <a:extLst xmlns:a="http://schemas.openxmlformats.org/drawingml/2006/main">
               <a:ext uri="{FF2B5EF4-FFF2-40B4-BE49-F238E27FC236}">
-                <a16:creationId xmlns:a16="http://schemas.microsoft.com/office/drawing/2014/main" id="{48DEA7CB-533E-4427-8981-DA05DA9CBFCD}"/>
+                <a16:creationId xmlns:a16="http://schemas.microsoft.com/office/drawing/2014/main" id="{BBFFCB1D-7896-4671-BAFD-037DD57FEE67}"/>
               </a:ext>
             </a:extLst>
           </p:cNvPr>
@@ -2142,7 +2335,7 @@
           <p:cNvPr id="18" name="Shape 14">
             <a:extLst xmlns:a="http://schemas.openxmlformats.org/drawingml/2006/main">
               <a:ext uri="{FF2B5EF4-FFF2-40B4-BE49-F238E27FC236}">
-                <a16:creationId xmlns:a16="http://schemas.microsoft.com/office/drawing/2014/main" id="{C685F29D-D6FE-4F08-8555-4B87070FF703}"/>
+                <a16:creationId xmlns:a16="http://schemas.microsoft.com/office/drawing/2014/main" id="{576CF8C7-3BAC-4C35-A7C0-3412B05EB332}"/>
               </a:ext>
             </a:extLst>
           </p:cNvPr>
@@ -2181,7 +2374,7 @@
           <p:cNvPr id="19" name="Text 15">
             <a:extLst xmlns:a="http://schemas.openxmlformats.org/drawingml/2006/main">
               <a:ext uri="{FF2B5EF4-FFF2-40B4-BE49-F238E27FC236}">
-                <a16:creationId xmlns:a16="http://schemas.microsoft.com/office/drawing/2014/main" id="{5ADE9D82-F3E1-46D3-9D77-6B777B6B8304}"/>
+                <a16:creationId xmlns:a16="http://schemas.microsoft.com/office/drawing/2014/main" id="{F332433A-28C4-4E9C-83D5-E5E8604E25A9}"/>
               </a:ext>
             </a:extLst>
           </p:cNvPr>
@@ -2227,7 +2420,7 @@
           <p:cNvPr id="20" name="Text 16">
             <a:extLst xmlns:a="http://schemas.openxmlformats.org/drawingml/2006/main">
               <a:ext uri="{FF2B5EF4-FFF2-40B4-BE49-F238E27FC236}">
-                <a16:creationId xmlns:a16="http://schemas.microsoft.com/office/drawing/2014/main" id="{BF50739D-3094-440E-A5CA-F9566A0CA0E9}"/>
+                <a16:creationId xmlns:a16="http://schemas.microsoft.com/office/drawing/2014/main" id="{9A8BD49D-C002-4865-81F0-9FBFCF9B6CF7}"/>
               </a:ext>
             </a:extLst>
           </p:cNvPr>
@@ -2273,7 +2466,7 @@
           <p:cNvPr id="27" name="rev-1">
             <a:extLst xmlns:a="http://schemas.openxmlformats.org/drawingml/2006/main">
               <a:ext uri="{FF2B5EF4-FFF2-40B4-BE49-F238E27FC236}">
-                <a16:creationId xmlns:a16="http://schemas.microsoft.com/office/drawing/2014/main" id="{92D84F6D-2915-4576-AB37-596ACE1FD6CD}"/>
+                <a16:creationId xmlns:a16="http://schemas.microsoft.com/office/drawing/2014/main" id="{FA775562-9C4B-4961-9D84-A2739802D88B}"/>
               </a:ext>
             </a:extLst>
           </p:cNvPr>
@@ -2330,7 +2523,7 @@
                 <a:latin typeface="Calibri"/>
                 <a:ea typeface="Calibri"/>
                 <a:cs typeface="Calibri"/>
-                <a:hlinkClick xmlns:r="http://schemas.openxmlformats.org/officeDocument/2006/relationships" r:id="Ra09fafb56bd44bbb"/>
+                <a:hlinkClick xmlns:r="http://schemas.openxmlformats.org/officeDocument/2006/relationships" r:id="Rfebfca8bed464e75"/>
               </a:rPr>
               <a:t>youtu.be/heZiO6_-ZtE</a:t>
             </a:r>
@@ -2340,7 +2533,7 @@
     </p:spTree>
     <p:extLst>
       <p:ext uri="{BB962C8B-B14F-4D97-AF65-F5344CB8AC3E}">
-        <p14:creationId xmlns:p14="http://schemas.microsoft.com/office/powerpoint/2010/main" val="1866396931"/>
+        <p14:creationId xmlns:p14="http://schemas.microsoft.com/office/powerpoint/2010/main" val="1284452504"/>
       </p:ext>
     </p:extLst>
   </p:cSld>
@@ -2364,7 +2557,7 @@
           <p:cNvPr id="2" name="Shape 0">
             <a:extLst xmlns:a="http://schemas.openxmlformats.org/drawingml/2006/main">
               <a:ext uri="{FF2B5EF4-FFF2-40B4-BE49-F238E27FC236}">
-                <a16:creationId xmlns:a16="http://schemas.microsoft.com/office/drawing/2014/main" id="{D1BA0A19-7B77-47F5-8054-59569A607CD5}"/>
+                <a16:creationId xmlns:a16="http://schemas.microsoft.com/office/drawing/2014/main" id="{4EF26B36-C058-4AE5-B08F-9B9CBB5AFDD8}"/>
               </a:ext>
             </a:extLst>
           </p:cNvPr>
@@ -2404,7 +2597,7 @@
           <p:cNvPr id="3" name="Text 1">
             <a:extLst xmlns:a="http://schemas.openxmlformats.org/drawingml/2006/main">
               <a:ext uri="{FF2B5EF4-FFF2-40B4-BE49-F238E27FC236}">
-                <a16:creationId xmlns:a16="http://schemas.microsoft.com/office/drawing/2014/main" id="{E1512FF9-2204-43CE-A6BD-FC33D79FC29B}"/>
+                <a16:creationId xmlns:a16="http://schemas.microsoft.com/office/drawing/2014/main" id="{76E8030D-CB32-4530-AF8E-33550A04ECCC}"/>
               </a:ext>
             </a:extLst>
           </p:cNvPr>
@@ -2450,7 +2643,7 @@
           <p:cNvPr id="4" name="Text 2">
             <a:extLst xmlns:a="http://schemas.openxmlformats.org/drawingml/2006/main">
               <a:ext uri="{FF2B5EF4-FFF2-40B4-BE49-F238E27FC236}">
-                <a16:creationId xmlns:a16="http://schemas.microsoft.com/office/drawing/2014/main" id="{296A51F1-EC84-4938-BE4C-E64647EAF8A5}"/>
+                <a16:creationId xmlns:a16="http://schemas.microsoft.com/office/drawing/2014/main" id="{FF5F6AE7-EA03-4B5E-B337-5CADCB2CE180}"/>
               </a:ext>
             </a:extLst>
           </p:cNvPr>
@@ -2500,7 +2693,7 @@
           <p:nvPr/>
         </p:nvPicPr>
         <p:blipFill>
-          <a:blip xmlns:r="http://schemas.openxmlformats.org/officeDocument/2006/relationships" xmlns:a="http://schemas.openxmlformats.org/drawingml/2006/main" r:embed="R504176bb45764959"/>
+          <a:blip xmlns:r="http://schemas.openxmlformats.org/officeDocument/2006/relationships" xmlns:a="http://schemas.openxmlformats.org/drawingml/2006/main" r:embed="R88f37f3ad0d84a0f"/>
           <a:stretch xmlns:a="http://schemas.openxmlformats.org/drawingml/2006/main">
             <a:fillRect l="0" t="0" r="0" b="0"/>
           </a:stretch>
@@ -2527,7 +2720,7 @@
           <p:cNvPr id="7" name="Shape 4">
             <a:extLst xmlns:a="http://schemas.openxmlformats.org/drawingml/2006/main">
               <a:ext uri="{FF2B5EF4-FFF2-40B4-BE49-F238E27FC236}">
-                <a16:creationId xmlns:a16="http://schemas.microsoft.com/office/drawing/2014/main" id="{3AFB8C86-5B9D-4F33-9954-3909F3C7938F}"/>
+                <a16:creationId xmlns:a16="http://schemas.microsoft.com/office/drawing/2014/main" id="{33F70ACC-3C44-4117-957B-FFD34FADA863}"/>
               </a:ext>
             </a:extLst>
           </p:cNvPr>
@@ -2554,7 +2747,7 @@
           <p:cNvPr id="9" name="Text 6">
             <a:extLst xmlns:a="http://schemas.openxmlformats.org/drawingml/2006/main">
               <a:ext uri="{FF2B5EF4-FFF2-40B4-BE49-F238E27FC236}">
-                <a16:creationId xmlns:a16="http://schemas.microsoft.com/office/drawing/2014/main" id="{583EA1E5-0D19-486F-98F8-1A1FB9FDA7B4}"/>
+                <a16:creationId xmlns:a16="http://schemas.microsoft.com/office/drawing/2014/main" id="{8B32DB41-7F9D-47E7-99DB-D951BD2C4391}"/>
               </a:ext>
             </a:extLst>
           </p:cNvPr>
@@ -2600,7 +2793,7 @@
           <p:cNvPr id="54" name="rev-2">
             <a:extLst xmlns:a="http://schemas.openxmlformats.org/drawingml/2006/main">
               <a:ext uri="{FF2B5EF4-FFF2-40B4-BE49-F238E27FC236}">
-                <a16:creationId xmlns:a16="http://schemas.microsoft.com/office/drawing/2014/main" id="{97DDA08D-B8F3-4338-9C79-621D7F1D96B7}"/>
+                <a16:creationId xmlns:a16="http://schemas.microsoft.com/office/drawing/2014/main" id="{E8856EFD-1EAF-43DD-9075-5246DDBA6D30}"/>
               </a:ext>
             </a:extLst>
           </p:cNvPr>
@@ -2657,7 +2850,7 @@
           <p:cNvPr id="55" name="rev-3">
             <a:extLst xmlns:a="http://schemas.openxmlformats.org/drawingml/2006/main">
               <a:ext uri="{FF2B5EF4-FFF2-40B4-BE49-F238E27FC236}">
-                <a16:creationId xmlns:a16="http://schemas.microsoft.com/office/drawing/2014/main" id="{D64E63F1-98FA-44DD-9E27-9F0292406756}"/>
+                <a16:creationId xmlns:a16="http://schemas.microsoft.com/office/drawing/2014/main" id="{4657E71E-B8D9-4CA1-B65B-22AB6C5E3763}"/>
               </a:ext>
             </a:extLst>
           </p:cNvPr>
@@ -2714,7 +2907,7 @@
           <p:cNvPr id="56" name="step-4">
             <a:extLst xmlns:a="http://schemas.openxmlformats.org/drawingml/2006/main">
               <a:ext uri="{FF2B5EF4-FFF2-40B4-BE49-F238E27FC236}">
-                <a16:creationId xmlns:a16="http://schemas.microsoft.com/office/drawing/2014/main" id="{B3228DD0-7A0C-4838-8A61-9E52BD4406EE}"/>
+                <a16:creationId xmlns:a16="http://schemas.microsoft.com/office/drawing/2014/main" id="{353E5CBC-2BD9-447D-855A-5F3F85116EE6}"/>
               </a:ext>
             </a:extLst>
           </p:cNvPr>
@@ -2744,7 +2937,7 @@
           <p:cNvPr id="57" name="rev-5">
             <a:extLst xmlns:a="http://schemas.openxmlformats.org/drawingml/2006/main">
               <a:ext uri="{FF2B5EF4-FFF2-40B4-BE49-F238E27FC236}">
-                <a16:creationId xmlns:a16="http://schemas.microsoft.com/office/drawing/2014/main" id="{A0999AB7-0AD5-4384-8C24-FB4FF979F011}"/>
+                <a16:creationId xmlns:a16="http://schemas.microsoft.com/office/drawing/2014/main" id="{DB4494DB-8D3B-463C-BEF8-96AA36A1DB7F}"/>
               </a:ext>
             </a:extLst>
           </p:cNvPr>
@@ -2801,7 +2994,7 @@
           <p:cNvPr id="58" name="rev-6">
             <a:extLst xmlns:a="http://schemas.openxmlformats.org/drawingml/2006/main">
               <a:ext uri="{FF2B5EF4-FFF2-40B4-BE49-F238E27FC236}">
-                <a16:creationId xmlns:a16="http://schemas.microsoft.com/office/drawing/2014/main" id="{464C1964-07DA-4FC1-918F-4713879133AB}"/>
+                <a16:creationId xmlns:a16="http://schemas.microsoft.com/office/drawing/2014/main" id="{9B1DADD8-DE0F-403F-834B-E2C2689AF0D5}"/>
               </a:ext>
             </a:extLst>
           </p:cNvPr>
@@ -2858,7 +3051,7 @@
           <p:cNvPr id="59" name="rev-7">
             <a:extLst xmlns:a="http://schemas.openxmlformats.org/drawingml/2006/main">
               <a:ext uri="{FF2B5EF4-FFF2-40B4-BE49-F238E27FC236}">
-                <a16:creationId xmlns:a16="http://schemas.microsoft.com/office/drawing/2014/main" id="{C3217C92-76A1-48F9-9312-4B359800E5AD}"/>
+                <a16:creationId xmlns:a16="http://schemas.microsoft.com/office/drawing/2014/main" id="{4139FC3A-0987-48FC-ABAF-15CAE6B4A69C}"/>
               </a:ext>
             </a:extLst>
           </p:cNvPr>
@@ -2915,7 +3108,7 @@
           <p:cNvPr id="60" name="rev-8">
             <a:extLst xmlns:a="http://schemas.openxmlformats.org/drawingml/2006/main">
               <a:ext uri="{FF2B5EF4-FFF2-40B4-BE49-F238E27FC236}">
-                <a16:creationId xmlns:a16="http://schemas.microsoft.com/office/drawing/2014/main" id="{D4702119-4F6B-4AAD-84BB-FA026A7DEBB2}"/>
+                <a16:creationId xmlns:a16="http://schemas.microsoft.com/office/drawing/2014/main" id="{999FB7F4-C8B0-4AE4-A6FE-A2CEC85EBDE6}"/>
               </a:ext>
             </a:extLst>
           </p:cNvPr>
@@ -2951,7 +3144,7 @@
           <p:nvPr/>
         </p:nvPicPr>
         <p:blipFill>
-          <a:blip xmlns:r="http://schemas.openxmlformats.org/officeDocument/2006/relationships" xmlns:a="http://schemas.openxmlformats.org/drawingml/2006/main" r:embed="R0a5c541cd4ae4c2c"/>
+          <a:blip xmlns:r="http://schemas.openxmlformats.org/officeDocument/2006/relationships" xmlns:a="http://schemas.openxmlformats.org/drawingml/2006/main" r:embed="R7418b15b1b01438c"/>
           <a:stretch xmlns:a="http://schemas.openxmlformats.org/drawingml/2006/main"/>
         </p:blipFill>
         <p:spPr>
@@ -2969,7 +3162,7 @@
           <p:cNvPr id="62" name="step-9">
             <a:extLst xmlns:a="http://schemas.openxmlformats.org/drawingml/2006/main">
               <a:ext uri="{FF2B5EF4-FFF2-40B4-BE49-F238E27FC236}">
-                <a16:creationId xmlns:a16="http://schemas.microsoft.com/office/drawing/2014/main" id="{F7C94E70-98C9-46EE-AD4A-45543AD6B5CB}"/>
+                <a16:creationId xmlns:a16="http://schemas.microsoft.com/office/drawing/2014/main" id="{A58A6A40-3BC4-40EF-9BBB-52E8C548F05B}"/>
               </a:ext>
             </a:extLst>
           </p:cNvPr>
@@ -2999,7 +3192,7 @@
           <p:cNvPr id="63" name="rev-10">
             <a:extLst xmlns:a="http://schemas.openxmlformats.org/drawingml/2006/main">
               <a:ext uri="{FF2B5EF4-FFF2-40B4-BE49-F238E27FC236}">
-                <a16:creationId xmlns:a16="http://schemas.microsoft.com/office/drawing/2014/main" id="{B103DFE5-43D3-4A3B-AB0F-91E572F945FA}"/>
+                <a16:creationId xmlns:a16="http://schemas.microsoft.com/office/drawing/2014/main" id="{7AA1A093-FE82-42DB-9B6C-85705C0BDE54}"/>
               </a:ext>
             </a:extLst>
           </p:cNvPr>
@@ -3056,7 +3249,7 @@
           <p:cNvPr id="64" name="rev-11">
             <a:extLst xmlns:a="http://schemas.openxmlformats.org/drawingml/2006/main">
               <a:ext uri="{FF2B5EF4-FFF2-40B4-BE49-F238E27FC236}">
-                <a16:creationId xmlns:a16="http://schemas.microsoft.com/office/drawing/2014/main" id="{6F750DB9-FBF5-4E5E-8B30-6C566E45EC4A}"/>
+                <a16:creationId xmlns:a16="http://schemas.microsoft.com/office/drawing/2014/main" id="{32BBA256-F979-4F0C-9BE3-A0C8954098AC}"/>
               </a:ext>
             </a:extLst>
           </p:cNvPr>
@@ -3113,7 +3306,7 @@
           <p:cNvPr id="65" name="rev-12">
             <a:extLst xmlns:a="http://schemas.openxmlformats.org/drawingml/2006/main">
               <a:ext uri="{FF2B5EF4-FFF2-40B4-BE49-F238E27FC236}">
-                <a16:creationId xmlns:a16="http://schemas.microsoft.com/office/drawing/2014/main" id="{0D79CB9E-1EDE-4B8C-A19F-C8EE245E3ACE}"/>
+                <a16:creationId xmlns:a16="http://schemas.microsoft.com/office/drawing/2014/main" id="{B1063768-35A2-4B1A-BF99-C9B8B7C7B21B}"/>
               </a:ext>
             </a:extLst>
           </p:cNvPr>
@@ -3170,7 +3363,7 @@
           <p:cNvPr id="66" name="rev-13">
             <a:extLst xmlns:a="http://schemas.openxmlformats.org/drawingml/2006/main">
               <a:ext uri="{FF2B5EF4-FFF2-40B4-BE49-F238E27FC236}">
-                <a16:creationId xmlns:a16="http://schemas.microsoft.com/office/drawing/2014/main" id="{98B4CC6E-70F4-4BDC-BE99-39A15A44EC83}"/>
+                <a16:creationId xmlns:a16="http://schemas.microsoft.com/office/drawing/2014/main" id="{111C6D0F-5C27-4E68-BDE3-BB8E01BF0732}"/>
               </a:ext>
             </a:extLst>
           </p:cNvPr>
@@ -3206,7 +3399,7 @@
           <p:nvPr/>
         </p:nvPicPr>
         <p:blipFill>
-          <a:blip xmlns:r="http://schemas.openxmlformats.org/officeDocument/2006/relationships" xmlns:a="http://schemas.openxmlformats.org/drawingml/2006/main" r:embed="Rc3be5115fbd74190"/>
+          <a:blip xmlns:r="http://schemas.openxmlformats.org/officeDocument/2006/relationships" xmlns:a="http://schemas.openxmlformats.org/drawingml/2006/main" r:embed="R410781b3fb744e4b"/>
           <a:stretch xmlns:a="http://schemas.openxmlformats.org/drawingml/2006/main"/>
         </p:blipFill>
         <p:spPr>
@@ -3224,7 +3417,7 @@
           <p:cNvPr id="68" name="step-14">
             <a:extLst xmlns:a="http://schemas.openxmlformats.org/drawingml/2006/main">
               <a:ext uri="{FF2B5EF4-FFF2-40B4-BE49-F238E27FC236}">
-                <a16:creationId xmlns:a16="http://schemas.microsoft.com/office/drawing/2014/main" id="{E888FCF9-8025-4AD2-9F19-AE05990405C1}"/>
+                <a16:creationId xmlns:a16="http://schemas.microsoft.com/office/drawing/2014/main" id="{5A9583C3-6576-4169-A1DC-CB16B05A83A0}"/>
               </a:ext>
             </a:extLst>
           </p:cNvPr>
@@ -3254,7 +3447,7 @@
           <p:cNvPr id="69" name="rev-15">
             <a:extLst xmlns:a="http://schemas.openxmlformats.org/drawingml/2006/main">
               <a:ext uri="{FF2B5EF4-FFF2-40B4-BE49-F238E27FC236}">
-                <a16:creationId xmlns:a16="http://schemas.microsoft.com/office/drawing/2014/main" id="{8DE6C329-B023-466B-8C0E-4A49BB84CCB4}"/>
+                <a16:creationId xmlns:a16="http://schemas.microsoft.com/office/drawing/2014/main" id="{E3A39180-77E8-427F-9E83-B66D869080DB}"/>
               </a:ext>
             </a:extLst>
           </p:cNvPr>
@@ -3311,7 +3504,7 @@
           <p:cNvPr id="70" name="rev-16">
             <a:extLst xmlns:a="http://schemas.openxmlformats.org/drawingml/2006/main">
               <a:ext uri="{FF2B5EF4-FFF2-40B4-BE49-F238E27FC236}">
-                <a16:creationId xmlns:a16="http://schemas.microsoft.com/office/drawing/2014/main" id="{FD11856B-4359-4F78-9D23-BBB4CBDF5CE3}"/>
+                <a16:creationId xmlns:a16="http://schemas.microsoft.com/office/drawing/2014/main" id="{570A7D05-BB3A-449D-951E-B68F44EAE597}"/>
               </a:ext>
             </a:extLst>
           </p:cNvPr>
@@ -3368,7 +3561,7 @@
           <p:cNvPr id="71" name="rev-17">
             <a:extLst xmlns:a="http://schemas.openxmlformats.org/drawingml/2006/main">
               <a:ext uri="{FF2B5EF4-FFF2-40B4-BE49-F238E27FC236}">
-                <a16:creationId xmlns:a16="http://schemas.microsoft.com/office/drawing/2014/main" id="{310927BD-D740-44C1-B56D-8E825D63DF41}"/>
+                <a16:creationId xmlns:a16="http://schemas.microsoft.com/office/drawing/2014/main" id="{56E81D2A-4A31-4F38-A8AF-9D6D338A1EC0}"/>
               </a:ext>
             </a:extLst>
           </p:cNvPr>
@@ -3425,7 +3618,7 @@
           <p:cNvPr id="72" name="rev-18">
             <a:extLst xmlns:a="http://schemas.openxmlformats.org/drawingml/2006/main">
               <a:ext uri="{FF2B5EF4-FFF2-40B4-BE49-F238E27FC236}">
-                <a16:creationId xmlns:a16="http://schemas.microsoft.com/office/drawing/2014/main" id="{956C7A6B-C00C-4327-A9FA-02CD3D2A6C13}"/>
+                <a16:creationId xmlns:a16="http://schemas.microsoft.com/office/drawing/2014/main" id="{0DD7DCE4-222B-4640-BD75-D5328A759C7F}"/>
               </a:ext>
             </a:extLst>
           </p:cNvPr>
@@ -3461,7 +3654,7 @@
           <p:nvPr/>
         </p:nvPicPr>
         <p:blipFill>
-          <a:blip xmlns:r="http://schemas.openxmlformats.org/officeDocument/2006/relationships" xmlns:a="http://schemas.openxmlformats.org/drawingml/2006/main" r:embed="R57b40524e5cd4523"/>
+          <a:blip xmlns:r="http://schemas.openxmlformats.org/officeDocument/2006/relationships" xmlns:a="http://schemas.openxmlformats.org/drawingml/2006/main" r:embed="R421076eda34b4f2c"/>
           <a:stretch xmlns:a="http://schemas.openxmlformats.org/drawingml/2006/main"/>
         </p:blipFill>
         <p:spPr>
@@ -3479,7 +3672,7 @@
           <p:cNvPr id="74" name="rev-19">
             <a:extLst xmlns:a="http://schemas.openxmlformats.org/drawingml/2006/main">
               <a:ext uri="{FF2B5EF4-FFF2-40B4-BE49-F238E27FC236}">
-                <a16:creationId xmlns:a16="http://schemas.microsoft.com/office/drawing/2014/main" id="{76D62C0D-E0D4-4CD1-8FF8-DDD54B08EDB5}"/>
+                <a16:creationId xmlns:a16="http://schemas.microsoft.com/office/drawing/2014/main" id="{E8A3321A-F2CD-414D-86F9-508C20517102}"/>
               </a:ext>
             </a:extLst>
           </p:cNvPr>
@@ -3536,7 +3729,7 @@
           <p:cNvPr id="75" name="">
             <a:extLst xmlns:a="http://schemas.openxmlformats.org/drawingml/2006/main">
               <a:ext uri="{FF2B5EF4-FFF2-40B4-BE49-F238E27FC236}">
-                <a16:creationId xmlns:a16="http://schemas.microsoft.com/office/drawing/2014/main" id="{53817546-492A-438D-8A58-04F7B5401C27}"/>
+                <a16:creationId xmlns:a16="http://schemas.microsoft.com/office/drawing/2014/main" id="{840534E0-84C9-4763-8965-85A0429AC789}"/>
               </a:ext>
             </a:extLst>
           </p:cNvPr>
@@ -3566,7 +3759,7 @@
           <p:cNvPr id="76" name="">
             <a:extLst xmlns:a="http://schemas.openxmlformats.org/drawingml/2006/main">
               <a:ext uri="{FF2B5EF4-FFF2-40B4-BE49-F238E27FC236}">
-                <a16:creationId xmlns:a16="http://schemas.microsoft.com/office/drawing/2014/main" id="{2FCFBAE3-263A-4920-984D-4C02EA6E0C53}"/>
+                <a16:creationId xmlns:a16="http://schemas.microsoft.com/office/drawing/2014/main" id="{619B664A-3CAF-4F7E-97FC-DCA12C62A60F}"/>
               </a:ext>
             </a:extLst>
           </p:cNvPr>
@@ -3596,7 +3789,7 @@
           <p:cNvPr id="77" name="rev-20">
             <a:extLst xmlns:a="http://schemas.openxmlformats.org/drawingml/2006/main">
               <a:ext uri="{FF2B5EF4-FFF2-40B4-BE49-F238E27FC236}">
-                <a16:creationId xmlns:a16="http://schemas.microsoft.com/office/drawing/2014/main" id="{F9A8D6BD-61F4-4627-B8E6-254850ABE45B}"/>
+                <a16:creationId xmlns:a16="http://schemas.microsoft.com/office/drawing/2014/main" id="{584FEB99-4FAD-4309-9166-8D611C217B43}"/>
               </a:ext>
             </a:extLst>
           </p:cNvPr>
@@ -3653,7 +3846,7 @@
           <p:cNvPr id="78" name="rev-21">
             <a:extLst xmlns:a="http://schemas.openxmlformats.org/drawingml/2006/main">
               <a:ext uri="{FF2B5EF4-FFF2-40B4-BE49-F238E27FC236}">
-                <a16:creationId xmlns:a16="http://schemas.microsoft.com/office/drawing/2014/main" id="{AC476EBB-9D18-4557-A8F5-FB3BA0FD381E}"/>
+                <a16:creationId xmlns:a16="http://schemas.microsoft.com/office/drawing/2014/main" id="{3452C0AE-EB32-4109-9C5C-BD5BBCE96B46}"/>
               </a:ext>
             </a:extLst>
           </p:cNvPr>
@@ -3710,7 +3903,7 @@
           <p:cNvPr id="79" name="path-22">
             <a:extLst xmlns:a="http://schemas.openxmlformats.org/drawingml/2006/main">
               <a:ext uri="{FF2B5EF4-FFF2-40B4-BE49-F238E27FC236}">
-                <a16:creationId xmlns:a16="http://schemas.microsoft.com/office/drawing/2014/main" id="{97E46718-9372-43DE-863B-8C4DCBB1BE2A}"/>
+                <a16:creationId xmlns:a16="http://schemas.microsoft.com/office/drawing/2014/main" id="{E8FD2AE5-E61D-4149-A486-ECB0F15E5F82}"/>
               </a:ext>
             </a:extLst>
           </p:cNvPr>
@@ -3741,7 +3934,7 @@
           <p:cNvPr id="80" name="rev-23">
             <a:extLst xmlns:a="http://schemas.openxmlformats.org/drawingml/2006/main">
               <a:ext uri="{FF2B5EF4-FFF2-40B4-BE49-F238E27FC236}">
-                <a16:creationId xmlns:a16="http://schemas.microsoft.com/office/drawing/2014/main" id="{3374697C-6E8A-498F-BC85-3E764933F051}"/>
+                <a16:creationId xmlns:a16="http://schemas.microsoft.com/office/drawing/2014/main" id="{D10D9FFE-1880-410B-9158-835AED847FC0}"/>
               </a:ext>
             </a:extLst>
           </p:cNvPr>
@@ -3798,7 +3991,7 @@
           <p:cNvPr id="81" name="rev-24">
             <a:extLst xmlns:a="http://schemas.openxmlformats.org/drawingml/2006/main">
               <a:ext uri="{FF2B5EF4-FFF2-40B4-BE49-F238E27FC236}">
-                <a16:creationId xmlns:a16="http://schemas.microsoft.com/office/drawing/2014/main" id="{998D7038-BB7F-48EC-AC82-DC95121C07A6}"/>
+                <a16:creationId xmlns:a16="http://schemas.microsoft.com/office/drawing/2014/main" id="{53200773-7A0E-4E59-9A91-4CF75E01CCBC}"/>
               </a:ext>
             </a:extLst>
           </p:cNvPr>
@@ -3855,7 +4048,7 @@
           <p:cNvPr id="82" name="rev-25">
             <a:extLst xmlns:a="http://schemas.openxmlformats.org/drawingml/2006/main">
               <a:ext uri="{FF2B5EF4-FFF2-40B4-BE49-F238E27FC236}">
-                <a16:creationId xmlns:a16="http://schemas.microsoft.com/office/drawing/2014/main" id="{08F93DCD-95BA-44E2-B39B-69D7569E7AAF}"/>
+                <a16:creationId xmlns:a16="http://schemas.microsoft.com/office/drawing/2014/main" id="{2842DAC1-8C9A-44D2-B0FC-E093D34A59C2}"/>
               </a:ext>
             </a:extLst>
           </p:cNvPr>
@@ -3912,7 +4105,7 @@
           <p:cNvPr id="83" name="rev-26">
             <a:extLst xmlns:a="http://schemas.openxmlformats.org/drawingml/2006/main">
               <a:ext uri="{FF2B5EF4-FFF2-40B4-BE49-F238E27FC236}">
-                <a16:creationId xmlns:a16="http://schemas.microsoft.com/office/drawing/2014/main" id="{D6F50D66-56C4-471E-9ADD-6A1FB2B1C582}"/>
+                <a16:creationId xmlns:a16="http://schemas.microsoft.com/office/drawing/2014/main" id="{50B22E30-E909-4C2C-B114-CFC83899E397}"/>
               </a:ext>
             </a:extLst>
           </p:cNvPr>
@@ -3969,7 +4162,7 @@
           <p:cNvPr id="84" name="rev-27">
             <a:extLst xmlns:a="http://schemas.openxmlformats.org/drawingml/2006/main">
               <a:ext uri="{FF2B5EF4-FFF2-40B4-BE49-F238E27FC236}">
-                <a16:creationId xmlns:a16="http://schemas.microsoft.com/office/drawing/2014/main" id="{7981BBCD-C64B-45B5-A73B-AFBDCB169A9C}"/>
+                <a16:creationId xmlns:a16="http://schemas.microsoft.com/office/drawing/2014/main" id="{9F644D33-1C85-4AF9-B77F-B7F08743710B}"/>
               </a:ext>
             </a:extLst>
           </p:cNvPr>
@@ -4026,7 +4219,7 @@
           <p:cNvPr id="85" name="rev-28">
             <a:extLst xmlns:a="http://schemas.openxmlformats.org/drawingml/2006/main">
               <a:ext uri="{FF2B5EF4-FFF2-40B4-BE49-F238E27FC236}">
-                <a16:creationId xmlns:a16="http://schemas.microsoft.com/office/drawing/2014/main" id="{DDD4D30E-D629-4C7E-A06F-BF445EE66DA2}"/>
+                <a16:creationId xmlns:a16="http://schemas.microsoft.com/office/drawing/2014/main" id="{979AD441-7B9F-48F1-B5B5-F75F65A581FE}"/>
               </a:ext>
             </a:extLst>
           </p:cNvPr>
@@ -4083,7 +4276,7 @@
           <p:cNvPr id="86" name="rev-29">
             <a:extLst xmlns:a="http://schemas.openxmlformats.org/drawingml/2006/main">
               <a:ext uri="{FF2B5EF4-FFF2-40B4-BE49-F238E27FC236}">
-                <a16:creationId xmlns:a16="http://schemas.microsoft.com/office/drawing/2014/main" id="{CEE1BCB1-6FA6-465E-91C2-DE24BA10628C}"/>
+                <a16:creationId xmlns:a16="http://schemas.microsoft.com/office/drawing/2014/main" id="{5EC411E7-F15C-4119-88C3-7DDA4D462FE8}"/>
               </a:ext>
             </a:extLst>
           </p:cNvPr>
@@ -4138,7 +4331,7 @@
     </p:spTree>
     <p:extLst>
       <p:ext uri="{BB962C8B-B14F-4D97-AF65-F5344CB8AC3E}">
-        <p14:creationId xmlns:p14="http://schemas.microsoft.com/office/powerpoint/2010/main" val="463174166"/>
+        <p14:creationId xmlns:p14="http://schemas.microsoft.com/office/powerpoint/2010/main" val="807166138"/>
       </p:ext>
     </p:extLst>
   </p:cSld>
@@ -4162,7 +4355,7 @@
           <p:cNvPr id="2" name="Shape 0">
             <a:extLst xmlns:a="http://schemas.openxmlformats.org/drawingml/2006/main">
               <a:ext uri="{FF2B5EF4-FFF2-40B4-BE49-F238E27FC236}">
-                <a16:creationId xmlns:a16="http://schemas.microsoft.com/office/drawing/2014/main" id="{FE724757-1BAA-4E15-8C69-6C7EF02090F1}"/>
+                <a16:creationId xmlns:a16="http://schemas.microsoft.com/office/drawing/2014/main" id="{DEB11653-1295-4920-BB07-BC513162D5D2}"/>
               </a:ext>
             </a:extLst>
           </p:cNvPr>
@@ -4202,7 +4395,7 @@
           <p:cNvPr id="3" name="Text 1">
             <a:extLst xmlns:a="http://schemas.openxmlformats.org/drawingml/2006/main">
               <a:ext uri="{FF2B5EF4-FFF2-40B4-BE49-F238E27FC236}">
-                <a16:creationId xmlns:a16="http://schemas.microsoft.com/office/drawing/2014/main" id="{BB5BF03E-E1F7-4CEA-B8C6-38D83EDB03EA}"/>
+                <a16:creationId xmlns:a16="http://schemas.microsoft.com/office/drawing/2014/main" id="{F2AF2D9D-DE6C-4B76-A4FC-398C0169A478}"/>
               </a:ext>
             </a:extLst>
           </p:cNvPr>
@@ -4248,7 +4441,7 @@
           <p:cNvPr id="4" name="Text 2">
             <a:extLst xmlns:a="http://schemas.openxmlformats.org/drawingml/2006/main">
               <a:ext uri="{FF2B5EF4-FFF2-40B4-BE49-F238E27FC236}">
-                <a16:creationId xmlns:a16="http://schemas.microsoft.com/office/drawing/2014/main" id="{D35AE9D8-4D34-41C7-AD1C-60F62009145E}"/>
+                <a16:creationId xmlns:a16="http://schemas.microsoft.com/office/drawing/2014/main" id="{3F7E6C58-3E72-4B21-9697-022503951AF0}"/>
               </a:ext>
             </a:extLst>
           </p:cNvPr>
@@ -4298,7 +4491,7 @@
           <p:nvPr/>
         </p:nvPicPr>
         <p:blipFill>
-          <a:blip xmlns:r="http://schemas.openxmlformats.org/officeDocument/2006/relationships" xmlns:a="http://schemas.openxmlformats.org/drawingml/2006/main" r:embed="Rbb2c54bab4d6416c"/>
+          <a:blip xmlns:r="http://schemas.openxmlformats.org/officeDocument/2006/relationships" xmlns:a="http://schemas.openxmlformats.org/drawingml/2006/main" r:embed="Rc4100863a1204e4c"/>
           <a:stretch xmlns:a="http://schemas.openxmlformats.org/drawingml/2006/main">
             <a:fillRect l="0" t="0" r="0" b="0"/>
           </a:stretch>
@@ -4325,7 +4518,7 @@
           <p:cNvPr id="7" name="Shape 4">
             <a:extLst xmlns:a="http://schemas.openxmlformats.org/drawingml/2006/main">
               <a:ext uri="{FF2B5EF4-FFF2-40B4-BE49-F238E27FC236}">
-                <a16:creationId xmlns:a16="http://schemas.microsoft.com/office/drawing/2014/main" id="{F17DFBD7-5647-4708-8E81-C0ABBCD27F8F}"/>
+                <a16:creationId xmlns:a16="http://schemas.microsoft.com/office/drawing/2014/main" id="{D3EDCBC2-FC95-45C8-921A-7EF883DB1345}"/>
               </a:ext>
             </a:extLst>
           </p:cNvPr>
@@ -4352,7 +4545,7 @@
           <p:cNvPr id="9" name="Text 6">
             <a:extLst xmlns:a="http://schemas.openxmlformats.org/drawingml/2006/main">
               <a:ext uri="{FF2B5EF4-FFF2-40B4-BE49-F238E27FC236}">
-                <a16:creationId xmlns:a16="http://schemas.microsoft.com/office/drawing/2014/main" id="{64C6C344-2278-47B0-A3D5-9F7B48D686AC}"/>
+                <a16:creationId xmlns:a16="http://schemas.microsoft.com/office/drawing/2014/main" id="{DE176DF3-4539-44BD-90DA-1CD699E35E26}"/>
               </a:ext>
             </a:extLst>
           </p:cNvPr>
@@ -4398,7 +4591,7 @@
           <p:cNvPr id="92" name="rev-30">
             <a:extLst xmlns:a="http://schemas.openxmlformats.org/drawingml/2006/main">
               <a:ext uri="{FF2B5EF4-FFF2-40B4-BE49-F238E27FC236}">
-                <a16:creationId xmlns:a16="http://schemas.microsoft.com/office/drawing/2014/main" id="{9FB2B01D-C42F-4F1B-92B4-31D51964C289}"/>
+                <a16:creationId xmlns:a16="http://schemas.microsoft.com/office/drawing/2014/main" id="{5FD6DE35-7D11-4E8D-9D6D-C52B9AFB206E}"/>
               </a:ext>
             </a:extLst>
           </p:cNvPr>
@@ -4455,7 +4648,7 @@
           <p:cNvPr id="93" name="rev-31">
             <a:extLst xmlns:a="http://schemas.openxmlformats.org/drawingml/2006/main">
               <a:ext uri="{FF2B5EF4-FFF2-40B4-BE49-F238E27FC236}">
-                <a16:creationId xmlns:a16="http://schemas.microsoft.com/office/drawing/2014/main" id="{7B441A04-0760-4CF9-8F40-D4FE41CD1824}"/>
+                <a16:creationId xmlns:a16="http://schemas.microsoft.com/office/drawing/2014/main" id="{E17FEFCE-5426-4B10-96EE-045D5F783E46}"/>
               </a:ext>
             </a:extLst>
           </p:cNvPr>
@@ -4512,7 +4705,7 @@
           <p:cNvPr id="94" name="rev-32">
             <a:extLst xmlns:a="http://schemas.openxmlformats.org/drawingml/2006/main">
               <a:ext uri="{FF2B5EF4-FFF2-40B4-BE49-F238E27FC236}">
-                <a16:creationId xmlns:a16="http://schemas.microsoft.com/office/drawing/2014/main" id="{EB453FE5-518F-449F-ACC0-AF1BF4AB6C08}"/>
+                <a16:creationId xmlns:a16="http://schemas.microsoft.com/office/drawing/2014/main" id="{3557D788-50DA-455C-9F49-51FAFF446758}"/>
               </a:ext>
             </a:extLst>
           </p:cNvPr>
@@ -4544,7 +4737,7 @@
           <p:cNvPr id="95" name="rev-33">
             <a:extLst xmlns:a="http://schemas.openxmlformats.org/drawingml/2006/main">
               <a:ext uri="{FF2B5EF4-FFF2-40B4-BE49-F238E27FC236}">
-                <a16:creationId xmlns:a16="http://schemas.microsoft.com/office/drawing/2014/main" id="{50815575-2640-497E-9472-1149C90EDEF5}"/>
+                <a16:creationId xmlns:a16="http://schemas.microsoft.com/office/drawing/2014/main" id="{5CA84F3D-9BDD-434A-A712-8A7A0F5E619F}"/>
               </a:ext>
             </a:extLst>
           </p:cNvPr>
@@ -4601,7 +4794,7 @@
           <p:cNvPr id="96" name="rev-34">
             <a:extLst xmlns:a="http://schemas.openxmlformats.org/drawingml/2006/main">
               <a:ext uri="{FF2B5EF4-FFF2-40B4-BE49-F238E27FC236}">
-                <a16:creationId xmlns:a16="http://schemas.microsoft.com/office/drawing/2014/main" id="{03431F45-DE0A-43CA-B75C-9B2F916801F7}"/>
+                <a16:creationId xmlns:a16="http://schemas.microsoft.com/office/drawing/2014/main" id="{2F2FFF15-C38A-4D7F-A132-8D22E2F2474B}"/>
               </a:ext>
             </a:extLst>
           </p:cNvPr>
@@ -4658,7 +4851,7 @@
           <p:cNvPr id="97" name="rev-35">
             <a:extLst xmlns:a="http://schemas.openxmlformats.org/drawingml/2006/main">
               <a:ext uri="{FF2B5EF4-FFF2-40B4-BE49-F238E27FC236}">
-                <a16:creationId xmlns:a16="http://schemas.microsoft.com/office/drawing/2014/main" id="{F0EC485B-1445-497F-BC5B-109283883D12}"/>
+                <a16:creationId xmlns:a16="http://schemas.microsoft.com/office/drawing/2014/main" id="{A58AA0D2-10A9-4224-9EBB-564DB4847EC2}"/>
               </a:ext>
             </a:extLst>
           </p:cNvPr>
@@ -4690,7 +4883,7 @@
           <p:cNvPr id="98" name="rev-36">
             <a:extLst xmlns:a="http://schemas.openxmlformats.org/drawingml/2006/main">
               <a:ext uri="{FF2B5EF4-FFF2-40B4-BE49-F238E27FC236}">
-                <a16:creationId xmlns:a16="http://schemas.microsoft.com/office/drawing/2014/main" id="{501CBCFE-310C-4BC6-B622-34822A4F1EF5}"/>
+                <a16:creationId xmlns:a16="http://schemas.microsoft.com/office/drawing/2014/main" id="{21B80320-E297-445A-BB53-8DA85C9B3CBC}"/>
               </a:ext>
             </a:extLst>
           </p:cNvPr>
@@ -4747,7 +4940,7 @@
           <p:cNvPr id="99" name="rev-37">
             <a:extLst xmlns:a="http://schemas.openxmlformats.org/drawingml/2006/main">
               <a:ext uri="{FF2B5EF4-FFF2-40B4-BE49-F238E27FC236}">
-                <a16:creationId xmlns:a16="http://schemas.microsoft.com/office/drawing/2014/main" id="{2151AC68-7DD9-45E6-91D8-7884349B96E6}"/>
+                <a16:creationId xmlns:a16="http://schemas.microsoft.com/office/drawing/2014/main" id="{A7D84C5A-8B8D-4951-8D01-37DEE5978E12}"/>
               </a:ext>
             </a:extLst>
           </p:cNvPr>
@@ -4827,7 +5020,7 @@
           <p:cNvPr id="100" name="rev-38">
             <a:extLst xmlns:a="http://schemas.openxmlformats.org/drawingml/2006/main">
               <a:ext uri="{FF2B5EF4-FFF2-40B4-BE49-F238E27FC236}">
-                <a16:creationId xmlns:a16="http://schemas.microsoft.com/office/drawing/2014/main" id="{5C205B9A-DA79-45F3-B4B1-2812EBEDB805}"/>
+                <a16:creationId xmlns:a16="http://schemas.microsoft.com/office/drawing/2014/main" id="{DAE37BD9-D852-4E9C-B6DD-203C18F78AF8}"/>
               </a:ext>
             </a:extLst>
           </p:cNvPr>
@@ -4859,7 +5052,7 @@
           <p:cNvPr id="101" name="rev-39">
             <a:extLst xmlns:a="http://schemas.openxmlformats.org/drawingml/2006/main">
               <a:ext uri="{FF2B5EF4-FFF2-40B4-BE49-F238E27FC236}">
-                <a16:creationId xmlns:a16="http://schemas.microsoft.com/office/drawing/2014/main" id="{85D904F5-6424-440C-B4D9-637C24D7B759}"/>
+                <a16:creationId xmlns:a16="http://schemas.microsoft.com/office/drawing/2014/main" id="{98214F77-3090-461F-86C4-B22E80B6C191}"/>
               </a:ext>
             </a:extLst>
           </p:cNvPr>
@@ -4916,7 +5109,7 @@
           <p:cNvPr id="102" name="rev-40">
             <a:extLst xmlns:a="http://schemas.openxmlformats.org/drawingml/2006/main">
               <a:ext uri="{FF2B5EF4-FFF2-40B4-BE49-F238E27FC236}">
-                <a16:creationId xmlns:a16="http://schemas.microsoft.com/office/drawing/2014/main" id="{25CADEE2-7995-4A9E-8843-B593BB5B0AC7}"/>
+                <a16:creationId xmlns:a16="http://schemas.microsoft.com/office/drawing/2014/main" id="{A53B9425-4BE2-4747-B446-AF8EA93F8860}"/>
               </a:ext>
             </a:extLst>
           </p:cNvPr>
@@ -4996,7 +5189,7 @@
           <p:cNvPr id="103" name="rev-41">
             <a:extLst xmlns:a="http://schemas.openxmlformats.org/drawingml/2006/main">
               <a:ext uri="{FF2B5EF4-FFF2-40B4-BE49-F238E27FC236}">
-                <a16:creationId xmlns:a16="http://schemas.microsoft.com/office/drawing/2014/main" id="{12015DE3-A5DA-44DC-809B-8824CDB95322}"/>
+                <a16:creationId xmlns:a16="http://schemas.microsoft.com/office/drawing/2014/main" id="{F8E0C35B-F4A4-4456-AD5B-5ED7E17EBEAF}"/>
               </a:ext>
             </a:extLst>
           </p:cNvPr>
@@ -5028,7 +5221,7 @@
           <p:cNvPr id="104" name="rev-42">
             <a:extLst xmlns:a="http://schemas.openxmlformats.org/drawingml/2006/main">
               <a:ext uri="{FF2B5EF4-FFF2-40B4-BE49-F238E27FC236}">
-                <a16:creationId xmlns:a16="http://schemas.microsoft.com/office/drawing/2014/main" id="{DA493822-AA45-4054-9E04-7D9EDB291375}"/>
+                <a16:creationId xmlns:a16="http://schemas.microsoft.com/office/drawing/2014/main" id="{C8BF955A-BECD-40FC-BA62-C76D01FAD395}"/>
               </a:ext>
             </a:extLst>
           </p:cNvPr>
@@ -5085,7 +5278,7 @@
           <p:cNvPr id="105" name="rev-43">
             <a:extLst xmlns:a="http://schemas.openxmlformats.org/drawingml/2006/main">
               <a:ext uri="{FF2B5EF4-FFF2-40B4-BE49-F238E27FC236}">
-                <a16:creationId xmlns:a16="http://schemas.microsoft.com/office/drawing/2014/main" id="{F4393019-3704-4F8D-96D7-DB516A6955C8}"/>
+                <a16:creationId xmlns:a16="http://schemas.microsoft.com/office/drawing/2014/main" id="{540E2705-47E5-491A-A241-E9F4AE1DE546}"/>
               </a:ext>
             </a:extLst>
           </p:cNvPr>
@@ -5165,7 +5358,7 @@
           <p:cNvPr id="106" name="rev-44">
             <a:extLst xmlns:a="http://schemas.openxmlformats.org/drawingml/2006/main">
               <a:ext uri="{FF2B5EF4-FFF2-40B4-BE49-F238E27FC236}">
-                <a16:creationId xmlns:a16="http://schemas.microsoft.com/office/drawing/2014/main" id="{0B7F0D81-8459-4E91-B337-89DEA8D4292E}"/>
+                <a16:creationId xmlns:a16="http://schemas.microsoft.com/office/drawing/2014/main" id="{A3088248-BD21-443D-84FB-6A318F1CA23E}"/>
               </a:ext>
             </a:extLst>
           </p:cNvPr>
@@ -5197,7 +5390,7 @@
           <p:cNvPr id="107" name="rev-45">
             <a:extLst xmlns:a="http://schemas.openxmlformats.org/drawingml/2006/main">
               <a:ext uri="{FF2B5EF4-FFF2-40B4-BE49-F238E27FC236}">
-                <a16:creationId xmlns:a16="http://schemas.microsoft.com/office/drawing/2014/main" id="{880974FC-43AF-41E9-BB13-B7366486F493}"/>
+                <a16:creationId xmlns:a16="http://schemas.microsoft.com/office/drawing/2014/main" id="{CB209C15-87BA-4336-94C8-B5C48F1F2002}"/>
               </a:ext>
             </a:extLst>
           </p:cNvPr>
@@ -5254,7 +5447,7 @@
           <p:cNvPr id="108" name="rev-46">
             <a:extLst xmlns:a="http://schemas.openxmlformats.org/drawingml/2006/main">
               <a:ext uri="{FF2B5EF4-FFF2-40B4-BE49-F238E27FC236}">
-                <a16:creationId xmlns:a16="http://schemas.microsoft.com/office/drawing/2014/main" id="{1787E023-205B-426E-844A-D2C91A3CB69C}"/>
+                <a16:creationId xmlns:a16="http://schemas.microsoft.com/office/drawing/2014/main" id="{18CA547C-DC42-432E-8F07-CB1B7FB68035}"/>
               </a:ext>
             </a:extLst>
           </p:cNvPr>
@@ -5384,7 +5577,7 @@
           <p:cNvPr id="111" name="path-47">
             <a:extLst xmlns:a="http://schemas.openxmlformats.org/drawingml/2006/main">
               <a:ext uri="{FF2B5EF4-FFF2-40B4-BE49-F238E27FC236}">
-                <a16:creationId xmlns:a16="http://schemas.microsoft.com/office/drawing/2014/main" id="{DE16B43E-1B2F-44CD-97DC-18B7B9716522}"/>
+                <a16:creationId xmlns:a16="http://schemas.microsoft.com/office/drawing/2014/main" id="{260BC265-0470-4E8E-906A-BC944589D975}"/>
               </a:ext>
             </a:extLst>
           </p:cNvPr>
@@ -5415,7 +5608,7 @@
           <p:cNvPr id="112" name="rev-48">
             <a:extLst xmlns:a="http://schemas.openxmlformats.org/drawingml/2006/main">
               <a:ext uri="{FF2B5EF4-FFF2-40B4-BE49-F238E27FC236}">
-                <a16:creationId xmlns:a16="http://schemas.microsoft.com/office/drawing/2014/main" id="{E93BA72E-7A44-43A2-88E8-00970CA08485}"/>
+                <a16:creationId xmlns:a16="http://schemas.microsoft.com/office/drawing/2014/main" id="{CF1F9174-C6C8-460F-A59F-8C75B7E46A2A}"/>
               </a:ext>
             </a:extLst>
           </p:cNvPr>
@@ -5520,7 +5713,7 @@
           <p:cNvPr id="114" name="rev-49">
             <a:extLst xmlns:a="http://schemas.openxmlformats.org/drawingml/2006/main">
               <a:ext uri="{FF2B5EF4-FFF2-40B4-BE49-F238E27FC236}">
-                <a16:creationId xmlns:a16="http://schemas.microsoft.com/office/drawing/2014/main" id="{944EC878-1579-4441-89A7-DCFB999D1FA1}"/>
+                <a16:creationId xmlns:a16="http://schemas.microsoft.com/office/drawing/2014/main" id="{9D9F27E7-4BFC-4067-A8B9-98241BE1B910}"/>
               </a:ext>
             </a:extLst>
           </p:cNvPr>
@@ -5600,7 +5793,7 @@
           <p:cNvPr id="115" name="local-action-gate">
             <a:extLst xmlns:a="http://schemas.openxmlformats.org/drawingml/2006/main">
               <a:ext uri="{FF2B5EF4-FFF2-40B4-BE49-F238E27FC236}">
-                <a16:creationId xmlns:a16="http://schemas.microsoft.com/office/drawing/2014/main" id="{348E2863-AFF6-40D6-89B8-965710379C55}"/>
+                <a16:creationId xmlns:a16="http://schemas.microsoft.com/office/drawing/2014/main" id="{4D2B3085-EDE0-4BE3-9590-AA0104CD429B}"/>
               </a:ext>
             </a:extLst>
           </p:cNvPr>
@@ -5632,7 +5825,7 @@
           <p:cNvPr id="116" name="rev-50">
             <a:extLst xmlns:a="http://schemas.openxmlformats.org/drawingml/2006/main">
               <a:ext uri="{FF2B5EF4-FFF2-40B4-BE49-F238E27FC236}">
-                <a16:creationId xmlns:a16="http://schemas.microsoft.com/office/drawing/2014/main" id="{D89AEC68-2EB8-4AD8-9AA1-2467E62AE135}"/>
+                <a16:creationId xmlns:a16="http://schemas.microsoft.com/office/drawing/2014/main" id="{6F761C19-C808-402D-9D7A-DE6D4774ED70}"/>
               </a:ext>
             </a:extLst>
           </p:cNvPr>
@@ -5689,7 +5882,7 @@
           <p:cNvPr id="117" name="rev-51">
             <a:extLst xmlns:a="http://schemas.openxmlformats.org/drawingml/2006/main">
               <a:ext uri="{FF2B5EF4-FFF2-40B4-BE49-F238E27FC236}">
-                <a16:creationId xmlns:a16="http://schemas.microsoft.com/office/drawing/2014/main" id="{83EDE391-366B-44BC-8DF6-7F5542E16057}"/>
+                <a16:creationId xmlns:a16="http://schemas.microsoft.com/office/drawing/2014/main" id="{D023212C-2E82-407B-8137-B245C7BC3B76}"/>
               </a:ext>
             </a:extLst>
           </p:cNvPr>
@@ -5746,7 +5939,7 @@
           <p:cNvPr id="118" name="rev-52">
             <a:extLst xmlns:a="http://schemas.openxmlformats.org/drawingml/2006/main">
               <a:ext uri="{FF2B5EF4-FFF2-40B4-BE49-F238E27FC236}">
-                <a16:creationId xmlns:a16="http://schemas.microsoft.com/office/drawing/2014/main" id="{D09B3CD3-25F8-427E-AF72-64C6F0F0EFD0}"/>
+                <a16:creationId xmlns:a16="http://schemas.microsoft.com/office/drawing/2014/main" id="{E1C3C7DC-17E5-4289-9F3C-36D9A895AE5A}"/>
               </a:ext>
             </a:extLst>
           </p:cNvPr>
@@ -5778,7 +5971,7 @@
           <p:cNvPr id="119" name="rev-53">
             <a:extLst xmlns:a="http://schemas.openxmlformats.org/drawingml/2006/main">
               <a:ext uri="{FF2B5EF4-FFF2-40B4-BE49-F238E27FC236}">
-                <a16:creationId xmlns:a16="http://schemas.microsoft.com/office/drawing/2014/main" id="{CEBF90E3-939D-4F85-8A43-E26D3DF4C575}"/>
+                <a16:creationId xmlns:a16="http://schemas.microsoft.com/office/drawing/2014/main" id="{DB256374-28FB-4D3F-A73C-D552084C49AB}"/>
               </a:ext>
             </a:extLst>
           </p:cNvPr>
@@ -5835,7 +6028,7 @@
           <p:cNvPr id="120" name="rev-54">
             <a:extLst xmlns:a="http://schemas.openxmlformats.org/drawingml/2006/main">
               <a:ext uri="{FF2B5EF4-FFF2-40B4-BE49-F238E27FC236}">
-                <a16:creationId xmlns:a16="http://schemas.microsoft.com/office/drawing/2014/main" id="{4E3F7C06-097D-477F-B0FB-3903101F2EFB}"/>
+                <a16:creationId xmlns:a16="http://schemas.microsoft.com/office/drawing/2014/main" id="{E7C857CD-0111-4AC1-9F77-0AFC5E10786B}"/>
               </a:ext>
             </a:extLst>
           </p:cNvPr>
@@ -5915,7 +6108,7 @@
           <p:cNvPr id="121" name="rev-55">
             <a:extLst xmlns:a="http://schemas.openxmlformats.org/drawingml/2006/main">
               <a:ext uri="{FF2B5EF4-FFF2-40B4-BE49-F238E27FC236}">
-                <a16:creationId xmlns:a16="http://schemas.microsoft.com/office/drawing/2014/main" id="{CEF6CCB7-151E-420B-9BA7-C3DBFC7A100E}"/>
+                <a16:creationId xmlns:a16="http://schemas.microsoft.com/office/drawing/2014/main" id="{D7F93FBB-F104-4338-A273-B15AE8175EA4}"/>
               </a:ext>
             </a:extLst>
           </p:cNvPr>
@@ -5947,7 +6140,7 @@
           <p:cNvPr id="122" name="rev-56">
             <a:extLst xmlns:a="http://schemas.openxmlformats.org/drawingml/2006/main">
               <a:ext uri="{FF2B5EF4-FFF2-40B4-BE49-F238E27FC236}">
-                <a16:creationId xmlns:a16="http://schemas.microsoft.com/office/drawing/2014/main" id="{29A58C71-AA95-4A54-A9CB-AC8A9F1735B0}"/>
+                <a16:creationId xmlns:a16="http://schemas.microsoft.com/office/drawing/2014/main" id="{4A87E916-968B-49F5-802F-B265BBA9F76E}"/>
               </a:ext>
             </a:extLst>
           </p:cNvPr>
@@ -6004,7 +6197,7 @@
           <p:cNvPr id="123" name="rev-57">
             <a:extLst xmlns:a="http://schemas.openxmlformats.org/drawingml/2006/main">
               <a:ext uri="{FF2B5EF4-FFF2-40B4-BE49-F238E27FC236}">
-                <a16:creationId xmlns:a16="http://schemas.microsoft.com/office/drawing/2014/main" id="{D2C235E7-6410-4604-8A8A-7A30F36DA649}"/>
+                <a16:creationId xmlns:a16="http://schemas.microsoft.com/office/drawing/2014/main" id="{949AFE18-8EBD-4DFC-81DF-0FD5E1F8EAB5}"/>
               </a:ext>
             </a:extLst>
           </p:cNvPr>
@@ -6134,7 +6327,7 @@
           <p:cNvPr id="126" name="rev-58">
             <a:extLst xmlns:a="http://schemas.openxmlformats.org/drawingml/2006/main">
               <a:ext uri="{FF2B5EF4-FFF2-40B4-BE49-F238E27FC236}">
-                <a16:creationId xmlns:a16="http://schemas.microsoft.com/office/drawing/2014/main" id="{DEF92435-72ED-434A-8009-655FC72931EE}"/>
+                <a16:creationId xmlns:a16="http://schemas.microsoft.com/office/drawing/2014/main" id="{F867E582-22E1-491E-8278-43517948CB24}"/>
               </a:ext>
             </a:extLst>
           </p:cNvPr>
@@ -6191,7 +6384,7 @@
           <p:cNvPr id="127" name="path-59">
             <a:extLst xmlns:a="http://schemas.openxmlformats.org/drawingml/2006/main">
               <a:ext uri="{FF2B5EF4-FFF2-40B4-BE49-F238E27FC236}">
-                <a16:creationId xmlns:a16="http://schemas.microsoft.com/office/drawing/2014/main" id="{417597D3-B7D9-4439-95EB-E944FD35C8F7}"/>
+                <a16:creationId xmlns:a16="http://schemas.microsoft.com/office/drawing/2014/main" id="{C7561EC5-620E-46D3-B482-B87281D0222B}"/>
               </a:ext>
             </a:extLst>
           </p:cNvPr>
@@ -6222,7 +6415,7 @@
           <p:cNvPr id="128" name="path-60">
             <a:extLst xmlns:a="http://schemas.openxmlformats.org/drawingml/2006/main">
               <a:ext uri="{FF2B5EF4-FFF2-40B4-BE49-F238E27FC236}">
-                <a16:creationId xmlns:a16="http://schemas.microsoft.com/office/drawing/2014/main" id="{76322C6B-9B1D-49AD-921E-80D555FDC9C6}"/>
+                <a16:creationId xmlns:a16="http://schemas.microsoft.com/office/drawing/2014/main" id="{4FD18AAE-9607-435D-B72C-17A397ADE214}"/>
               </a:ext>
             </a:extLst>
           </p:cNvPr>
@@ -6253,7 +6446,7 @@
           <p:cNvPr id="129" name="">
             <a:extLst xmlns:a="http://schemas.openxmlformats.org/drawingml/2006/main">
               <a:ext uri="{FF2B5EF4-FFF2-40B4-BE49-F238E27FC236}">
-                <a16:creationId xmlns:a16="http://schemas.microsoft.com/office/drawing/2014/main" id="{7F7AECAF-F406-45BF-89F7-9CA9F29250B7}"/>
+                <a16:creationId xmlns:a16="http://schemas.microsoft.com/office/drawing/2014/main" id="{AEAC63F4-D432-43A9-9238-2EB628E57B74}"/>
               </a:ext>
             </a:extLst>
           </p:cNvPr>
@@ -6283,7 +6476,7 @@
           <p:cNvPr id="130" name="rev-61">
             <a:extLst xmlns:a="http://schemas.openxmlformats.org/drawingml/2006/main">
               <a:ext uri="{FF2B5EF4-FFF2-40B4-BE49-F238E27FC236}">
-                <a16:creationId xmlns:a16="http://schemas.microsoft.com/office/drawing/2014/main" id="{9A850307-AA70-4F2C-8DA2-6B32C71F00E1}"/>
+                <a16:creationId xmlns:a16="http://schemas.microsoft.com/office/drawing/2014/main" id="{FA4F83B2-43A8-49A0-AA2C-A7C4A3CA1056}"/>
               </a:ext>
             </a:extLst>
           </p:cNvPr>
@@ -6340,7 +6533,7 @@
           <p:cNvPr id="131" name="rev-62">
             <a:extLst xmlns:a="http://schemas.openxmlformats.org/drawingml/2006/main">
               <a:ext uri="{FF2B5EF4-FFF2-40B4-BE49-F238E27FC236}">
-                <a16:creationId xmlns:a16="http://schemas.microsoft.com/office/drawing/2014/main" id="{3211EA1D-7A66-4710-B1BB-07A85D7CC67E}"/>
+                <a16:creationId xmlns:a16="http://schemas.microsoft.com/office/drawing/2014/main" id="{B4094287-47FE-47C9-967C-D20FD304B45A}"/>
               </a:ext>
             </a:extLst>
           </p:cNvPr>
@@ -6397,7 +6590,7 @@
           <p:cNvPr id="132" name="rev-63">
             <a:extLst xmlns:a="http://schemas.openxmlformats.org/drawingml/2006/main">
               <a:ext uri="{FF2B5EF4-FFF2-40B4-BE49-F238E27FC236}">
-                <a16:creationId xmlns:a16="http://schemas.microsoft.com/office/drawing/2014/main" id="{9057863F-6FE6-4D7D-8FE5-FE84823D06BC}"/>
+                <a16:creationId xmlns:a16="http://schemas.microsoft.com/office/drawing/2014/main" id="{91540520-284A-41A6-A379-84C489716F3E}"/>
               </a:ext>
             </a:extLst>
           </p:cNvPr>
@@ -6454,7 +6647,7 @@
           <p:cNvPr id="133" name="rev-64">
             <a:extLst xmlns:a="http://schemas.openxmlformats.org/drawingml/2006/main">
               <a:ext uri="{FF2B5EF4-FFF2-40B4-BE49-F238E27FC236}">
-                <a16:creationId xmlns:a16="http://schemas.microsoft.com/office/drawing/2014/main" id="{7885DD9F-F4F0-4265-ACA5-AA57A1925A41}"/>
+                <a16:creationId xmlns:a16="http://schemas.microsoft.com/office/drawing/2014/main" id="{60FE23C6-899D-4D84-A03D-C044A70BC554}"/>
               </a:ext>
             </a:extLst>
           </p:cNvPr>
@@ -6511,7 +6704,7 @@
           <p:cNvPr id="134" name="rev-65">
             <a:extLst xmlns:a="http://schemas.openxmlformats.org/drawingml/2006/main">
               <a:ext uri="{FF2B5EF4-FFF2-40B4-BE49-F238E27FC236}">
-                <a16:creationId xmlns:a16="http://schemas.microsoft.com/office/drawing/2014/main" id="{96085A5A-AD8B-4A1A-AA84-49227667179E}"/>
+                <a16:creationId xmlns:a16="http://schemas.microsoft.com/office/drawing/2014/main" id="{F95EE7CF-8628-4B32-A87E-4A073E0E6523}"/>
               </a:ext>
             </a:extLst>
           </p:cNvPr>
@@ -6568,7 +6761,7 @@
           <p:cNvPr id="135" name="rev-66">
             <a:extLst xmlns:a="http://schemas.openxmlformats.org/drawingml/2006/main">
               <a:ext uri="{FF2B5EF4-FFF2-40B4-BE49-F238E27FC236}">
-                <a16:creationId xmlns:a16="http://schemas.microsoft.com/office/drawing/2014/main" id="{3B7E2DB5-BCFE-43CC-A39C-153D0D92D7CB}"/>
+                <a16:creationId xmlns:a16="http://schemas.microsoft.com/office/drawing/2014/main" id="{DA86AD0F-478A-4C3A-909C-B3C9F30BD6F5}"/>
               </a:ext>
             </a:extLst>
           </p:cNvPr>
@@ -6648,7 +6841,7 @@
           <p:cNvPr id="136" name="rev-67">
             <a:extLst xmlns:a="http://schemas.openxmlformats.org/drawingml/2006/main">
               <a:ext uri="{FF2B5EF4-FFF2-40B4-BE49-F238E27FC236}">
-                <a16:creationId xmlns:a16="http://schemas.microsoft.com/office/drawing/2014/main" id="{8FED531C-4156-43EF-9A70-CB020A0530B7}"/>
+                <a16:creationId xmlns:a16="http://schemas.microsoft.com/office/drawing/2014/main" id="{EBEF305A-A6A7-41B5-93FB-FFB320CFA485}"/>
               </a:ext>
             </a:extLst>
           </p:cNvPr>
@@ -6705,7 +6898,7 @@
           <p:cNvPr id="137" name="rev-68">
             <a:extLst xmlns:a="http://schemas.openxmlformats.org/drawingml/2006/main">
               <a:ext uri="{FF2B5EF4-FFF2-40B4-BE49-F238E27FC236}">
-                <a16:creationId xmlns:a16="http://schemas.microsoft.com/office/drawing/2014/main" id="{60672CB8-77FD-446F-BACC-E50D11FDA3F4}"/>
+                <a16:creationId xmlns:a16="http://schemas.microsoft.com/office/drawing/2014/main" id="{B77EDAB3-E5BF-45CA-BE5E-84928E5D83AF}"/>
               </a:ext>
             </a:extLst>
           </p:cNvPr>
@@ -6785,7 +6978,7 @@
           <p:cNvPr id="138" name="rev-69">
             <a:extLst xmlns:a="http://schemas.openxmlformats.org/drawingml/2006/main">
               <a:ext uri="{FF2B5EF4-FFF2-40B4-BE49-F238E27FC236}">
-                <a16:creationId xmlns:a16="http://schemas.microsoft.com/office/drawing/2014/main" id="{FF02A56C-21FC-4289-A72A-6BAD78747772}"/>
+                <a16:creationId xmlns:a16="http://schemas.microsoft.com/office/drawing/2014/main" id="{6B2FAA6B-6E25-48D5-9646-AE372A93C05B}"/>
               </a:ext>
             </a:extLst>
           </p:cNvPr>
@@ -6840,7 +7033,7 @@
     </p:spTree>
     <p:extLst>
       <p:ext uri="{BB962C8B-B14F-4D97-AF65-F5344CB8AC3E}">
-        <p14:creationId xmlns:p14="http://schemas.microsoft.com/office/powerpoint/2010/main" val="1496366426"/>
+        <p14:creationId xmlns:p14="http://schemas.microsoft.com/office/powerpoint/2010/main" val="447130316"/>
       </p:ext>
     </p:extLst>
   </p:cSld>
@@ -6864,7 +7057,7 @@
           <p:cNvPr id="2" name="Shape 0">
             <a:extLst xmlns:a="http://schemas.openxmlformats.org/drawingml/2006/main">
               <a:ext uri="{FF2B5EF4-FFF2-40B4-BE49-F238E27FC236}">
-                <a16:creationId xmlns:a16="http://schemas.microsoft.com/office/drawing/2014/main" id="{E948E927-D752-4F09-B9B1-372C73BD1FA4}"/>
+                <a16:creationId xmlns:a16="http://schemas.microsoft.com/office/drawing/2014/main" id="{15485AF2-C967-4763-AD56-B1F510F69610}"/>
               </a:ext>
             </a:extLst>
           </p:cNvPr>
@@ -6904,7 +7097,7 @@
           <p:cNvPr id="3" name="Text 1">
             <a:extLst xmlns:a="http://schemas.openxmlformats.org/drawingml/2006/main">
               <a:ext uri="{FF2B5EF4-FFF2-40B4-BE49-F238E27FC236}">
-                <a16:creationId xmlns:a16="http://schemas.microsoft.com/office/drawing/2014/main" id="{FB986ADB-69BB-4FC2-BA42-F09E3775F52D}"/>
+                <a16:creationId xmlns:a16="http://schemas.microsoft.com/office/drawing/2014/main" id="{7DF70B48-9EAC-4E63-A546-35353A817395}"/>
               </a:ext>
             </a:extLst>
           </p:cNvPr>
@@ -6950,7 +7143,7 @@
           <p:cNvPr id="4" name="Text 2">
             <a:extLst xmlns:a="http://schemas.openxmlformats.org/drawingml/2006/main">
               <a:ext uri="{FF2B5EF4-FFF2-40B4-BE49-F238E27FC236}">
-                <a16:creationId xmlns:a16="http://schemas.microsoft.com/office/drawing/2014/main" id="{4AFE63F5-1941-49F5-BCF0-19A200FDBD2C}"/>
+                <a16:creationId xmlns:a16="http://schemas.microsoft.com/office/drawing/2014/main" id="{3BDF9D4C-392C-41B6-A256-716EE6C82B62}"/>
               </a:ext>
             </a:extLst>
           </p:cNvPr>
@@ -7000,7 +7193,7 @@
           <p:nvPr/>
         </p:nvPicPr>
         <p:blipFill>
-          <a:blip xmlns:r="http://schemas.openxmlformats.org/officeDocument/2006/relationships" xmlns:a="http://schemas.openxmlformats.org/drawingml/2006/main" r:embed="R4299a0c252894dd2"/>
+          <a:blip xmlns:r="http://schemas.openxmlformats.org/officeDocument/2006/relationships" xmlns:a="http://schemas.openxmlformats.org/drawingml/2006/main" r:embed="R2bc631168a604855"/>
           <a:stretch xmlns:a="http://schemas.openxmlformats.org/drawingml/2006/main">
             <a:fillRect l="0" t="0" r="0" b="0"/>
           </a:stretch>
@@ -7027,7 +7220,7 @@
           <p:cNvPr id="7" name="Shape 4">
             <a:extLst xmlns:a="http://schemas.openxmlformats.org/drawingml/2006/main">
               <a:ext uri="{FF2B5EF4-FFF2-40B4-BE49-F238E27FC236}">
-                <a16:creationId xmlns:a16="http://schemas.microsoft.com/office/drawing/2014/main" id="{169F2EC0-C456-42E4-9377-CCE555ECA369}"/>
+                <a16:creationId xmlns:a16="http://schemas.microsoft.com/office/drawing/2014/main" id="{2898BC3C-568C-49AE-9E77-792B25D3E9F5}"/>
               </a:ext>
             </a:extLst>
           </p:cNvPr>
@@ -7054,7 +7247,7 @@
           <p:cNvPr id="9" name="Text 6">
             <a:extLst xmlns:a="http://schemas.openxmlformats.org/drawingml/2006/main">
               <a:ext uri="{FF2B5EF4-FFF2-40B4-BE49-F238E27FC236}">
-                <a16:creationId xmlns:a16="http://schemas.microsoft.com/office/drawing/2014/main" id="{D6F065A1-7CF6-4134-9D2C-46A02C654709}"/>
+                <a16:creationId xmlns:a16="http://schemas.microsoft.com/office/drawing/2014/main" id="{B031C861-FD67-47E8-AB4A-66A32A195EEC}"/>
               </a:ext>
             </a:extLst>
           </p:cNvPr>
@@ -7100,7 +7293,7 @@
           <p:cNvPr id="98" name="rev-70">
             <a:extLst xmlns:a="http://schemas.openxmlformats.org/drawingml/2006/main">
               <a:ext uri="{FF2B5EF4-FFF2-40B4-BE49-F238E27FC236}">
-                <a16:creationId xmlns:a16="http://schemas.microsoft.com/office/drawing/2014/main" id="{3954B6F9-FF04-4DD2-9F00-9F4D0DD2BF03}"/>
+                <a16:creationId xmlns:a16="http://schemas.microsoft.com/office/drawing/2014/main" id="{1173B667-E07B-4713-B1BE-42BC38C75137}"/>
               </a:ext>
             </a:extLst>
           </p:cNvPr>
@@ -7157,7 +7350,7 @@
           <p:cNvPr id="99" name="rev-71">
             <a:extLst xmlns:a="http://schemas.openxmlformats.org/drawingml/2006/main">
               <a:ext uri="{FF2B5EF4-FFF2-40B4-BE49-F238E27FC236}">
-                <a16:creationId xmlns:a16="http://schemas.microsoft.com/office/drawing/2014/main" id="{321D6175-A2D5-4A05-AF93-6B89CFDAF6DA}"/>
+                <a16:creationId xmlns:a16="http://schemas.microsoft.com/office/drawing/2014/main" id="{1F5D92D7-0113-469B-8A65-C402E11E0D65}"/>
               </a:ext>
             </a:extLst>
           </p:cNvPr>
@@ -7735,7 +7928,7 @@
           <p:cNvPr id="101" name="rev-72">
             <a:extLst xmlns:a="http://schemas.openxmlformats.org/drawingml/2006/main">
               <a:ext uri="{FF2B5EF4-FFF2-40B4-BE49-F238E27FC236}">
-                <a16:creationId xmlns:a16="http://schemas.microsoft.com/office/drawing/2014/main" id="{E4A49F45-B239-4CE5-BA2D-D3644EAF0DB4}"/>
+                <a16:creationId xmlns:a16="http://schemas.microsoft.com/office/drawing/2014/main" id="{4A88916A-3FF3-4DEA-BD8C-3CBA0AFF13F5}"/>
               </a:ext>
             </a:extLst>
           </p:cNvPr>
@@ -7792,7 +7985,7 @@
           <p:cNvPr id="102" name="rev-73">
             <a:extLst xmlns:a="http://schemas.openxmlformats.org/drawingml/2006/main">
               <a:ext uri="{FF2B5EF4-FFF2-40B4-BE49-F238E27FC236}">
-                <a16:creationId xmlns:a16="http://schemas.microsoft.com/office/drawing/2014/main" id="{D3B2B3C6-99F6-4AA4-994A-1BB1892D1B5F}"/>
+                <a16:creationId xmlns:a16="http://schemas.microsoft.com/office/drawing/2014/main" id="{01B07E9F-76B6-44BC-9EB1-1FECBF3C9AE7}"/>
               </a:ext>
             </a:extLst>
           </p:cNvPr>
@@ -7849,7 +8042,7 @@
           <p:cNvPr id="103" name="rev-74">
             <a:extLst xmlns:a="http://schemas.openxmlformats.org/drawingml/2006/main">
               <a:ext uri="{FF2B5EF4-FFF2-40B4-BE49-F238E27FC236}">
-                <a16:creationId xmlns:a16="http://schemas.microsoft.com/office/drawing/2014/main" id="{A50E234F-0208-45FA-8692-1C8DE1A19AA8}"/>
+                <a16:creationId xmlns:a16="http://schemas.microsoft.com/office/drawing/2014/main" id="{139C9D61-E4A6-4E30-AD9C-1A4CFF3B4C48}"/>
               </a:ext>
             </a:extLst>
           </p:cNvPr>
@@ -7906,7 +8099,7 @@
           <p:cNvPr id="104" name="rev-75">
             <a:extLst xmlns:a="http://schemas.openxmlformats.org/drawingml/2006/main">
               <a:ext uri="{FF2B5EF4-FFF2-40B4-BE49-F238E27FC236}">
-                <a16:creationId xmlns:a16="http://schemas.microsoft.com/office/drawing/2014/main" id="{2D238F3F-936D-48E2-8A1C-D294B85FD082}"/>
+                <a16:creationId xmlns:a16="http://schemas.microsoft.com/office/drawing/2014/main" id="{A3C092FE-3B71-4A00-ACCE-3D7EB84C2BB1}"/>
               </a:ext>
             </a:extLst>
           </p:cNvPr>
@@ -7963,7 +8156,7 @@
           <p:cNvPr id="105" name="rev-76">
             <a:extLst xmlns:a="http://schemas.openxmlformats.org/drawingml/2006/main">
               <a:ext uri="{FF2B5EF4-FFF2-40B4-BE49-F238E27FC236}">
-                <a16:creationId xmlns:a16="http://schemas.microsoft.com/office/drawing/2014/main" id="{E830935B-8FC6-4AA0-AB18-63761A7CD4D2}"/>
+                <a16:creationId xmlns:a16="http://schemas.microsoft.com/office/drawing/2014/main" id="{3CD8EB67-CCEA-40BF-BB0F-244FF26BA18F}"/>
               </a:ext>
             </a:extLst>
           </p:cNvPr>
@@ -8020,7 +8213,7 @@
           <p:cNvPr id="106" name="step-77">
             <a:extLst xmlns:a="http://schemas.openxmlformats.org/drawingml/2006/main">
               <a:ext uri="{FF2B5EF4-FFF2-40B4-BE49-F238E27FC236}">
-                <a16:creationId xmlns:a16="http://schemas.microsoft.com/office/drawing/2014/main" id="{23447DE5-DCC5-4A46-BD71-2FB552CC8E7E}"/>
+                <a16:creationId xmlns:a16="http://schemas.microsoft.com/office/drawing/2014/main" id="{AC1D3C9D-4120-4079-9513-414D127ED6D1}"/>
               </a:ext>
             </a:extLst>
           </p:cNvPr>
@@ -8050,7 +8243,7 @@
           <p:cNvPr id="107" name="rev-78">
             <a:extLst xmlns:a="http://schemas.openxmlformats.org/drawingml/2006/main">
               <a:ext uri="{FF2B5EF4-FFF2-40B4-BE49-F238E27FC236}">
-                <a16:creationId xmlns:a16="http://schemas.microsoft.com/office/drawing/2014/main" id="{B29718D0-B31C-404E-B3D2-194203CD2E21}"/>
+                <a16:creationId xmlns:a16="http://schemas.microsoft.com/office/drawing/2014/main" id="{22992FEF-1E76-415C-9275-403671080AD2}"/>
               </a:ext>
             </a:extLst>
           </p:cNvPr>
@@ -8107,7 +8300,7 @@
           <p:cNvPr id="108" name="rev-79">
             <a:extLst xmlns:a="http://schemas.openxmlformats.org/drawingml/2006/main">
               <a:ext uri="{FF2B5EF4-FFF2-40B4-BE49-F238E27FC236}">
-                <a16:creationId xmlns:a16="http://schemas.microsoft.com/office/drawing/2014/main" id="{D76AFFCB-192D-4E9C-8B3D-A3C1B3302405}"/>
+                <a16:creationId xmlns:a16="http://schemas.microsoft.com/office/drawing/2014/main" id="{10AC86C6-89E2-4635-8451-C69A82EF220C}"/>
               </a:ext>
             </a:extLst>
           </p:cNvPr>
@@ -8164,7 +8357,7 @@
           <p:cNvPr id="109" name="rev-80">
             <a:extLst xmlns:a="http://schemas.openxmlformats.org/drawingml/2006/main">
               <a:ext uri="{FF2B5EF4-FFF2-40B4-BE49-F238E27FC236}">
-                <a16:creationId xmlns:a16="http://schemas.microsoft.com/office/drawing/2014/main" id="{5D20AE8A-3797-4D22-80F5-F5CF711F821C}"/>
+                <a16:creationId xmlns:a16="http://schemas.microsoft.com/office/drawing/2014/main" id="{F0496383-9490-4B1B-9796-7094977A2ECB}"/>
               </a:ext>
             </a:extLst>
           </p:cNvPr>
@@ -8221,7 +8414,7 @@
           <p:cNvPr id="110" name="step-81">
             <a:extLst xmlns:a="http://schemas.openxmlformats.org/drawingml/2006/main">
               <a:ext uri="{FF2B5EF4-FFF2-40B4-BE49-F238E27FC236}">
-                <a16:creationId xmlns:a16="http://schemas.microsoft.com/office/drawing/2014/main" id="{0EE94A36-492E-4931-8878-B4F95AE7E171}"/>
+                <a16:creationId xmlns:a16="http://schemas.microsoft.com/office/drawing/2014/main" id="{D283D3DF-C246-492C-A215-ED7A8A7269A0}"/>
               </a:ext>
             </a:extLst>
           </p:cNvPr>
@@ -8251,7 +8444,7 @@
           <p:cNvPr id="111" name="rev-82">
             <a:extLst xmlns:a="http://schemas.openxmlformats.org/drawingml/2006/main">
               <a:ext uri="{FF2B5EF4-FFF2-40B4-BE49-F238E27FC236}">
-                <a16:creationId xmlns:a16="http://schemas.microsoft.com/office/drawing/2014/main" id="{A2788331-DBF3-4513-9CCD-19A43839AC59}"/>
+                <a16:creationId xmlns:a16="http://schemas.microsoft.com/office/drawing/2014/main" id="{1EE2EA31-3898-4035-8A4D-E2491A2A2CAF}"/>
               </a:ext>
             </a:extLst>
           </p:cNvPr>
@@ -8308,7 +8501,7 @@
           <p:cNvPr id="112" name="rev-83">
             <a:extLst xmlns:a="http://schemas.openxmlformats.org/drawingml/2006/main">
               <a:ext uri="{FF2B5EF4-FFF2-40B4-BE49-F238E27FC236}">
-                <a16:creationId xmlns:a16="http://schemas.microsoft.com/office/drawing/2014/main" id="{0F32349A-9672-4E8A-894C-758C5824ACB4}"/>
+                <a16:creationId xmlns:a16="http://schemas.microsoft.com/office/drawing/2014/main" id="{79123A75-83AA-48AE-AE58-A15BD4B480E4}"/>
               </a:ext>
             </a:extLst>
           </p:cNvPr>
@@ -8365,7 +8558,7 @@
           <p:cNvPr id="113" name="rev-84">
             <a:extLst xmlns:a="http://schemas.openxmlformats.org/drawingml/2006/main">
               <a:ext uri="{FF2B5EF4-FFF2-40B4-BE49-F238E27FC236}">
-                <a16:creationId xmlns:a16="http://schemas.microsoft.com/office/drawing/2014/main" id="{6C6DB5D8-3350-4972-93FC-59C0D6072286}"/>
+                <a16:creationId xmlns:a16="http://schemas.microsoft.com/office/drawing/2014/main" id="{92A14D62-0F16-4B58-95AD-4D5A6811F446}"/>
               </a:ext>
             </a:extLst>
           </p:cNvPr>
@@ -8422,7 +8615,7 @@
           <p:cNvPr id="114" name="step-85">
             <a:extLst xmlns:a="http://schemas.openxmlformats.org/drawingml/2006/main">
               <a:ext uri="{FF2B5EF4-FFF2-40B4-BE49-F238E27FC236}">
-                <a16:creationId xmlns:a16="http://schemas.microsoft.com/office/drawing/2014/main" id="{F02ACD20-E526-443D-866B-71A66E9FA4BD}"/>
+                <a16:creationId xmlns:a16="http://schemas.microsoft.com/office/drawing/2014/main" id="{64DBEF05-8EC7-4D0E-8643-9058E14B4CE6}"/>
               </a:ext>
             </a:extLst>
           </p:cNvPr>
@@ -8452,7 +8645,7 @@
           <p:cNvPr id="115" name="rev-86">
             <a:extLst xmlns:a="http://schemas.openxmlformats.org/drawingml/2006/main">
               <a:ext uri="{FF2B5EF4-FFF2-40B4-BE49-F238E27FC236}">
-                <a16:creationId xmlns:a16="http://schemas.microsoft.com/office/drawing/2014/main" id="{643860C8-CCCD-4457-A485-7E334B721BF1}"/>
+                <a16:creationId xmlns:a16="http://schemas.microsoft.com/office/drawing/2014/main" id="{37B88CF5-EE5A-4FE1-8AF5-40BB0C5915F2}"/>
               </a:ext>
             </a:extLst>
           </p:cNvPr>
@@ -8509,7 +8702,7 @@
           <p:cNvPr id="116" name="rev-87">
             <a:extLst xmlns:a="http://schemas.openxmlformats.org/drawingml/2006/main">
               <a:ext uri="{FF2B5EF4-FFF2-40B4-BE49-F238E27FC236}">
-                <a16:creationId xmlns:a16="http://schemas.microsoft.com/office/drawing/2014/main" id="{9469513C-889A-439F-9495-0388F111BFDB}"/>
+                <a16:creationId xmlns:a16="http://schemas.microsoft.com/office/drawing/2014/main" id="{A5ECF237-A129-464E-B31B-9805F684BDCB}"/>
               </a:ext>
             </a:extLst>
           </p:cNvPr>
@@ -8566,7 +8759,7 @@
           <p:cNvPr id="117" name="rev-88">
             <a:extLst xmlns:a="http://schemas.openxmlformats.org/drawingml/2006/main">
               <a:ext uri="{FF2B5EF4-FFF2-40B4-BE49-F238E27FC236}">
-                <a16:creationId xmlns:a16="http://schemas.microsoft.com/office/drawing/2014/main" id="{9F0F8AD2-5AC9-40D6-ACB0-03C3780B928A}"/>
+                <a16:creationId xmlns:a16="http://schemas.microsoft.com/office/drawing/2014/main" id="{2FB95A07-DCA6-4ED4-9D95-03E0F73A5425}"/>
               </a:ext>
             </a:extLst>
           </p:cNvPr>
@@ -8621,7 +8814,7 @@
     </p:spTree>
     <p:extLst>
       <p:ext uri="{BB962C8B-B14F-4D97-AF65-F5344CB8AC3E}">
-        <p14:creationId xmlns:p14="http://schemas.microsoft.com/office/powerpoint/2010/main" val="1399969059"/>
+        <p14:creationId xmlns:p14="http://schemas.microsoft.com/office/powerpoint/2010/main" val="507239016"/>
       </p:ext>
     </p:extLst>
   </p:cSld>
@@ -8645,7 +8838,7 @@
           <p:cNvPr id="2" name="Shape 0">
             <a:extLst xmlns:a="http://schemas.openxmlformats.org/drawingml/2006/main">
               <a:ext uri="{FF2B5EF4-FFF2-40B4-BE49-F238E27FC236}">
-                <a16:creationId xmlns:a16="http://schemas.microsoft.com/office/drawing/2014/main" id="{FCF51B21-30AA-49FA-8D89-BF33DCFEBAE5}"/>
+                <a16:creationId xmlns:a16="http://schemas.microsoft.com/office/drawing/2014/main" id="{3F2BEA7D-251F-4794-942F-66E7C0F1B844}"/>
               </a:ext>
             </a:extLst>
           </p:cNvPr>
@@ -8685,7 +8878,7 @@
           <p:cNvPr id="3" name="Text 1">
             <a:extLst xmlns:a="http://schemas.openxmlformats.org/drawingml/2006/main">
               <a:ext uri="{FF2B5EF4-FFF2-40B4-BE49-F238E27FC236}">
-                <a16:creationId xmlns:a16="http://schemas.microsoft.com/office/drawing/2014/main" id="{E25A6B43-97A1-426C-BE97-262E8A504593}"/>
+                <a16:creationId xmlns:a16="http://schemas.microsoft.com/office/drawing/2014/main" id="{1B5BACE8-B827-49FF-92CC-7B891ED766EB}"/>
               </a:ext>
             </a:extLst>
           </p:cNvPr>
@@ -8731,7 +8924,7 @@
           <p:cNvPr id="4" name="Text 2">
             <a:extLst xmlns:a="http://schemas.openxmlformats.org/drawingml/2006/main">
               <a:ext uri="{FF2B5EF4-FFF2-40B4-BE49-F238E27FC236}">
-                <a16:creationId xmlns:a16="http://schemas.microsoft.com/office/drawing/2014/main" id="{544C295D-A093-41CA-8ADF-39FEA7D5A937}"/>
+                <a16:creationId xmlns:a16="http://schemas.microsoft.com/office/drawing/2014/main" id="{94B17672-4A06-4F7C-A021-82E129BDBD6A}"/>
               </a:ext>
             </a:extLst>
           </p:cNvPr>
@@ -8774,14 +8967,14 @@
       </p:sp>
       <p:pic>
         <p:nvPicPr>
-          <p:cNvPr id="110" name="Image 0"/>
+          <p:cNvPr id="99" name="Image 0"/>
           <p:cNvPicPr>
             <a:picLocks xmlns:a="http://schemas.openxmlformats.org/drawingml/2006/main" noChangeAspect="1"/>
           </p:cNvPicPr>
           <p:nvPr/>
         </p:nvPicPr>
         <p:blipFill>
-          <a:blip xmlns:r="http://schemas.openxmlformats.org/officeDocument/2006/relationships" xmlns:a="http://schemas.openxmlformats.org/drawingml/2006/main" r:embed="R89c4bca2056844c5"/>
+          <a:blip xmlns:r="http://schemas.openxmlformats.org/officeDocument/2006/relationships" xmlns:a="http://schemas.openxmlformats.org/drawingml/2006/main" r:embed="Rd4b751726cca478a"/>
           <a:stretch xmlns:a="http://schemas.openxmlformats.org/drawingml/2006/main">
             <a:fillRect l="0" t="0" r="0" b="0"/>
           </a:stretch>
@@ -8808,7 +9001,7 @@
           <p:cNvPr id="7" name="Shape 4">
             <a:extLst xmlns:a="http://schemas.openxmlformats.org/drawingml/2006/main">
               <a:ext uri="{FF2B5EF4-FFF2-40B4-BE49-F238E27FC236}">
-                <a16:creationId xmlns:a16="http://schemas.microsoft.com/office/drawing/2014/main" id="{550C2030-2162-4359-A507-ED53EAB85406}"/>
+                <a16:creationId xmlns:a16="http://schemas.microsoft.com/office/drawing/2014/main" id="{31F97637-2B4F-4A8E-930A-72A4054A032D}"/>
               </a:ext>
             </a:extLst>
           </p:cNvPr>
@@ -8835,7 +9028,7 @@
           <p:cNvPr id="9" name="Text 6">
             <a:extLst xmlns:a="http://schemas.openxmlformats.org/drawingml/2006/main">
               <a:ext uri="{FF2B5EF4-FFF2-40B4-BE49-F238E27FC236}">
-                <a16:creationId xmlns:a16="http://schemas.microsoft.com/office/drawing/2014/main" id="{9387D32B-91CD-4335-BF12-05D9633B7B7B}"/>
+                <a16:creationId xmlns:a16="http://schemas.microsoft.com/office/drawing/2014/main" id="{E06DA0F0-19AB-488A-AD03-E9768CB7F29C}"/>
               </a:ext>
             </a:extLst>
           </p:cNvPr>
@@ -8881,7 +9074,7 @@
           <p:cNvPr id="64" name="rev-89">
             <a:extLst xmlns:a="http://schemas.openxmlformats.org/drawingml/2006/main">
               <a:ext uri="{FF2B5EF4-FFF2-40B4-BE49-F238E27FC236}">
-                <a16:creationId xmlns:a16="http://schemas.microsoft.com/office/drawing/2014/main" id="{F48BE0D0-70C8-4887-9ABE-D7238B235A6E}"/>
+                <a16:creationId xmlns:a16="http://schemas.microsoft.com/office/drawing/2014/main" id="{86C44F70-9AC6-452F-8014-ACF158BC0FA4}"/>
               </a:ext>
             </a:extLst>
           </p:cNvPr>
@@ -8938,7 +9131,7 @@
           <p:cNvPr id="65" name="rev-90">
             <a:extLst xmlns:a="http://schemas.openxmlformats.org/drawingml/2006/main">
               <a:ext uri="{FF2B5EF4-FFF2-40B4-BE49-F238E27FC236}">
-                <a16:creationId xmlns:a16="http://schemas.microsoft.com/office/drawing/2014/main" id="{73E34827-C578-4696-9BD4-6CEA665C1665}"/>
+                <a16:creationId xmlns:a16="http://schemas.microsoft.com/office/drawing/2014/main" id="{BC623DB3-2C5A-4B76-A562-058A6D0EE432}"/>
               </a:ext>
             </a:extLst>
           </p:cNvPr>
@@ -8995,19 +9188,19 @@
           <p:cNvPr id="66" name="rev-91">
             <a:extLst xmlns:a="http://schemas.openxmlformats.org/drawingml/2006/main">
               <a:ext uri="{FF2B5EF4-FFF2-40B4-BE49-F238E27FC236}">
-                <a16:creationId xmlns:a16="http://schemas.microsoft.com/office/drawing/2014/main" id="{F0E5F9CF-17E3-4FBB-BB28-EEBC5124506D}"/>
-              </a:ext>
-            </a:extLst>
-          </p:cNvPr>
-          <p:cNvSpPr>
-            <a:spLocks xmlns:a="http://schemas.openxmlformats.org/drawingml/2006/main" noGrp="1"/>
-          </p:cNvSpPr>
-          <p:nvPr/>
-        </p:nvSpPr>
-        <p:spPr>
-          <a:xfrm xmlns:a="http://schemas.openxmlformats.org/drawingml/2006/main">
-            <a:off x="457200" y="1733550"/>
-            <a:ext cx="11277600" cy="276225"/>
+                <a16:creationId xmlns:a16="http://schemas.microsoft.com/office/drawing/2014/main" id="{BDE7D8AE-46DA-4284-A54E-37F0B3ED953E}"/>
+              </a:ext>
+            </a:extLst>
+          </p:cNvPr>
+          <p:cNvSpPr>
+            <a:spLocks xmlns:a="http://schemas.openxmlformats.org/drawingml/2006/main" noGrp="1"/>
+          </p:cNvSpPr>
+          <p:nvPr/>
+        </p:nvSpPr>
+        <p:spPr>
+          <a:xfrm xmlns:a="http://schemas.openxmlformats.org/drawingml/2006/main">
+            <a:off x="457200" y="1743075"/>
+            <a:ext cx="11277600" cy="266700"/>
           </a:xfrm>
           <a:prstGeom xmlns:a="http://schemas.openxmlformats.org/drawingml/2006/main" prst="rect">
             <a:avLst/>
@@ -9052,19 +9245,19 @@
           <p:cNvPr id="67" name="rev-92">
             <a:extLst xmlns:a="http://schemas.openxmlformats.org/drawingml/2006/main">
               <a:ext uri="{FF2B5EF4-FFF2-40B4-BE49-F238E27FC236}">
-                <a16:creationId xmlns:a16="http://schemas.microsoft.com/office/drawing/2014/main" id="{6CC7137E-F64D-4EA8-8A6C-6F2EBB805D21}"/>
-              </a:ext>
-            </a:extLst>
-          </p:cNvPr>
-          <p:cNvSpPr>
-            <a:spLocks xmlns:a="http://schemas.openxmlformats.org/drawingml/2006/main" noGrp="1"/>
-          </p:cNvSpPr>
-          <p:nvPr/>
-        </p:nvSpPr>
-        <p:spPr>
-          <a:xfrm xmlns:a="http://schemas.openxmlformats.org/drawingml/2006/main">
-            <a:off x="457200" y="2200275"/>
-            <a:ext cx="11277600" cy="247650"/>
+                <a16:creationId xmlns:a16="http://schemas.microsoft.com/office/drawing/2014/main" id="{26218D4D-7680-48E4-B497-9041644198FB}"/>
+              </a:ext>
+            </a:extLst>
+          </p:cNvPr>
+          <p:cNvSpPr>
+            <a:spLocks xmlns:a="http://schemas.openxmlformats.org/drawingml/2006/main" noGrp="1"/>
+          </p:cNvSpPr>
+          <p:nvPr/>
+        </p:nvSpPr>
+        <p:spPr>
+          <a:xfrm xmlns:a="http://schemas.openxmlformats.org/drawingml/2006/main">
+            <a:off x="457200" y="2257425"/>
+            <a:ext cx="3733800" cy="247650"/>
           </a:xfrm>
           <a:prstGeom xmlns:a="http://schemas.openxmlformats.org/drawingml/2006/main" prst="rect">
             <a:avLst/>
@@ -9099,29 +9292,147 @@
                 <a:ea typeface="Calibri"/>
                 <a:cs typeface="Calibri"/>
               </a:rPr>
-              <a:t>Example: download a certificate or report</a:t>
-            </a:r>
-          </a:p>
-        </p:txBody>
-      </p:sp>
-      <p:sp>
-        <p:nvSpPr>
-          <p:cNvPr id="68" name="rev-93">
-            <a:extLst xmlns:a="http://schemas.openxmlformats.org/drawingml/2006/main">
-              <a:ext uri="{FF2B5EF4-FFF2-40B4-BE49-F238E27FC236}">
-                <a16:creationId xmlns:a16="http://schemas.microsoft.com/office/drawing/2014/main" id="{F3521BDE-88B1-4C82-967A-AF6787B6B23F}"/>
-              </a:ext>
-            </a:extLst>
-          </p:cNvPr>
-          <p:cNvSpPr>
-            <a:spLocks xmlns:a="http://schemas.openxmlformats.org/drawingml/2006/main" noGrp="1"/>
-          </p:cNvSpPr>
-          <p:nvPr/>
-        </p:nvSpPr>
-        <p:spPr>
-          <a:xfrm xmlns:a="http://schemas.openxmlformats.org/drawingml/2006/main">
-            <a:off x="457200" y="2647950"/>
-            <a:ext cx="581025" cy="447675"/>
+              <a:t>Example: get a certificate</a:t>
+            </a:r>
+          </a:p>
+        </p:txBody>
+      </p:sp>
+      <p:sp>
+        <p:nvSpPr>
+          <p:cNvPr id="68" name="path-93">
+            <a:extLst xmlns:a="http://schemas.openxmlformats.org/drawingml/2006/main">
+              <a:ext uri="{FF2B5EF4-FFF2-40B4-BE49-F238E27FC236}">
+                <a16:creationId xmlns:a16="http://schemas.microsoft.com/office/drawing/2014/main" id="{44D052DC-B268-49D7-AEDD-22D72142447E}"/>
+              </a:ext>
+            </a:extLst>
+          </p:cNvPr>
+          <p:cNvSpPr>
+            <a:spLocks xmlns:a="http://schemas.openxmlformats.org/drawingml/2006/main" noGrp="1"/>
+          </p:cNvSpPr>
+          <p:nvPr/>
+        </p:nvSpPr>
+        <p:spPr>
+          <a:xfrm xmlns:a="http://schemas.openxmlformats.org/drawingml/2006/main">
+            <a:off x="619125" y="2867025"/>
+            <a:ext cx="0" cy="1504950"/>
+          </a:xfrm>
+          <a:prstGeom xmlns:a="http://schemas.openxmlformats.org/drawingml/2006/main" prst="line">
+            <a:avLst/>
+          </a:prstGeom>
+          <a:noFill xmlns:a="http://schemas.openxmlformats.org/drawingml/2006/main"/>
+          <a:ln xmlns:a="http://schemas.openxmlformats.org/drawingml/2006/main" w="14288">
+            <a:solidFill>
+              <a:srgbClr val="AFC5C5"/>
+            </a:solidFill>
+            <a:prstDash val="solid"/>
+          </a:ln>
+        </p:spPr>
+      </p:sp>
+      <p:sp>
+        <p:nvSpPr>
+          <p:cNvPr id="69" name="step-94">
+            <a:extLst xmlns:a="http://schemas.openxmlformats.org/drawingml/2006/main">
+              <a:ext uri="{FF2B5EF4-FFF2-40B4-BE49-F238E27FC236}">
+                <a16:creationId xmlns:a16="http://schemas.microsoft.com/office/drawing/2014/main" id="{02A3C9B8-A8CC-46DB-AEAC-53DA876C2003}"/>
+              </a:ext>
+            </a:extLst>
+          </p:cNvPr>
+          <p:cNvSpPr>
+            <a:spLocks xmlns:a="http://schemas.openxmlformats.org/drawingml/2006/main" noGrp="1"/>
+          </p:cNvSpPr>
+          <p:nvPr/>
+        </p:nvSpPr>
+        <p:spPr>
+          <a:xfrm xmlns:a="http://schemas.openxmlformats.org/drawingml/2006/main">
+            <a:off x="457200" y="2686050"/>
+            <a:ext cx="333375" cy="333375"/>
+          </a:xfrm>
+          <a:prstGeom xmlns:a="http://schemas.openxmlformats.org/drawingml/2006/main" prst="ellipse">
+            <a:avLst/>
+          </a:prstGeom>
+          <a:solidFill xmlns:a="http://schemas.openxmlformats.org/drawingml/2006/main">
+            <a:srgbClr val="266466"/>
+          </a:solidFill>
+          <a:ln xmlns:a="http://schemas.openxmlformats.org/drawingml/2006/main" w="0">
+            <a:noFill/>
+          </a:ln>
+        </p:spPr>
+      </p:sp>
+      <p:sp>
+        <p:nvSpPr>
+          <p:cNvPr id="70" name="rev-95">
+            <a:extLst xmlns:a="http://schemas.openxmlformats.org/drawingml/2006/main">
+              <a:ext uri="{FF2B5EF4-FFF2-40B4-BE49-F238E27FC236}">
+                <a16:creationId xmlns:a16="http://schemas.microsoft.com/office/drawing/2014/main" id="{3C88471F-78C4-41B5-92C7-26BF2D8EDDC7}"/>
+              </a:ext>
+            </a:extLst>
+          </p:cNvPr>
+          <p:cNvSpPr>
+            <a:spLocks xmlns:a="http://schemas.openxmlformats.org/drawingml/2006/main" noGrp="1"/>
+          </p:cNvSpPr>
+          <p:nvPr/>
+        </p:nvSpPr>
+        <p:spPr>
+          <a:xfrm xmlns:a="http://schemas.openxmlformats.org/drawingml/2006/main">
+            <a:off x="457200" y="2705100"/>
+            <a:ext cx="333375" cy="304800"/>
+          </a:xfrm>
+          <a:prstGeom xmlns:a="http://schemas.openxmlformats.org/drawingml/2006/main" prst="rect">
+            <a:avLst/>
+          </a:prstGeom>
+          <a:noFill xmlns:a="http://schemas.openxmlformats.org/drawingml/2006/main"/>
+          <a:ln xmlns:a="http://schemas.openxmlformats.org/drawingml/2006/main" w="0">
+            <a:noFill/>
+          </a:ln>
+        </p:spPr>
+        <p:txBody>
+          <a:bodyPr xmlns:a="http://schemas.openxmlformats.org/drawingml/2006/main" wrap="square" lIns="0" tIns="0" rIns="0" bIns="0" anchor="ctr">
+            <a:noAutofit/>
+          </a:bodyPr>
+          <a:lstStyle xmlns:a="http://schemas.openxmlformats.org/drawingml/2006/main"/>
+          <a:p xmlns:a="http://schemas.openxmlformats.org/drawingml/2006/main">
+            <a:pPr algn="ctr">
+              <a:defRPr sz="1350" b="1">
+                <a:solidFill>
+                  <a:srgbClr val="FFFFFF"/>
+                </a:solidFill>
+                <a:latin typeface="Calibri"/>
+                <a:ea typeface="Calibri"/>
+                <a:cs typeface="Calibri"/>
+              </a:defRPr>
+            </a:pPr>
+            <a:r>
+              <a:rPr sz="1350" b="1">
+                <a:solidFill>
+                  <a:srgbClr val="FFFFFF"/>
+                </a:solidFill>
+                <a:latin typeface="Calibri"/>
+                <a:ea typeface="Calibri"/>
+                <a:cs typeface="Calibri"/>
+              </a:rPr>
+              <a:t>1</a:t>
+            </a:r>
+          </a:p>
+        </p:txBody>
+      </p:sp>
+      <p:sp>
+        <p:nvSpPr>
+          <p:cNvPr id="71" name="rev-96">
+            <a:extLst xmlns:a="http://schemas.openxmlformats.org/drawingml/2006/main">
+              <a:ext uri="{FF2B5EF4-FFF2-40B4-BE49-F238E27FC236}">
+                <a16:creationId xmlns:a16="http://schemas.microsoft.com/office/drawing/2014/main" id="{F81C18F7-7941-474A-8244-FF757B5F8FA7}"/>
+              </a:ext>
+            </a:extLst>
+          </p:cNvPr>
+          <p:cNvSpPr>
+            <a:spLocks xmlns:a="http://schemas.openxmlformats.org/drawingml/2006/main" noGrp="1"/>
+          </p:cNvSpPr>
+          <p:nvPr/>
+        </p:nvSpPr>
+        <p:spPr>
+          <a:xfrm xmlns:a="http://schemas.openxmlformats.org/drawingml/2006/main">
+            <a:off x="962025" y="2686050"/>
+            <a:ext cx="3219450" cy="285750"/>
           </a:xfrm>
           <a:prstGeom xmlns:a="http://schemas.openxmlformats.org/drawingml/2006/main" prst="rect">
             <a:avLst/>
@@ -9138,7 +9449,7 @@
           <a:lstStyle xmlns:a="http://schemas.openxmlformats.org/drawingml/2006/main"/>
           <a:p xmlns:a="http://schemas.openxmlformats.org/drawingml/2006/main">
             <a:pPr>
-              <a:defRPr sz="2550" b="1">
+              <a:defRPr sz="1725" b="1">
                 <a:solidFill>
                   <a:srgbClr val="266466"/>
                 </a:solidFill>
@@ -9148,7 +9459,7 @@
               </a:defRPr>
             </a:pPr>
             <a:r>
-              <a:rPr sz="2550" b="1">
+              <a:rPr sz="1725" b="1">
                 <a:solidFill>
                   <a:srgbClr val="266466"/>
                 </a:solidFill>
@@ -9156,29 +9467,29 @@
                 <a:ea typeface="Calibri"/>
                 <a:cs typeface="Calibri"/>
               </a:rPr>
-              <a:t>01</a:t>
-            </a:r>
-          </a:p>
-        </p:txBody>
-      </p:sp>
-      <p:sp>
-        <p:nvSpPr>
-          <p:cNvPr id="69" name="rev-94">
-            <a:extLst xmlns:a="http://schemas.openxmlformats.org/drawingml/2006/main">
-              <a:ext uri="{FF2B5EF4-FFF2-40B4-BE49-F238E27FC236}">
-                <a16:creationId xmlns:a16="http://schemas.microsoft.com/office/drawing/2014/main" id="{85901FE8-9A1C-4C67-B540-006EEEF43AEC}"/>
-              </a:ext>
-            </a:extLst>
-          </p:cNvPr>
-          <p:cNvSpPr>
-            <a:spLocks xmlns:a="http://schemas.openxmlformats.org/drawingml/2006/main" noGrp="1"/>
-          </p:cNvSpPr>
-          <p:nvPr/>
-        </p:nvSpPr>
-        <p:spPr>
-          <a:xfrm xmlns:a="http://schemas.openxmlformats.org/drawingml/2006/main">
-            <a:off x="1085850" y="2695575"/>
-            <a:ext cx="2876550" cy="304800"/>
+              <a:t>Protect on the device</a:t>
+            </a:r>
+          </a:p>
+        </p:txBody>
+      </p:sp>
+      <p:sp>
+        <p:nvSpPr>
+          <p:cNvPr id="72" name="rev-97">
+            <a:extLst xmlns:a="http://schemas.openxmlformats.org/drawingml/2006/main">
+              <a:ext uri="{FF2B5EF4-FFF2-40B4-BE49-F238E27FC236}">
+                <a16:creationId xmlns:a16="http://schemas.microsoft.com/office/drawing/2014/main" id="{49A5A299-B792-424A-A7DD-560FE772989E}"/>
+              </a:ext>
+            </a:extLst>
+          </p:cNvPr>
+          <p:cNvSpPr>
+            <a:spLocks xmlns:a="http://schemas.openxmlformats.org/drawingml/2006/main" noGrp="1"/>
+          </p:cNvSpPr>
+          <p:nvPr/>
+        </p:nvSpPr>
+        <p:spPr>
+          <a:xfrm xmlns:a="http://schemas.openxmlformats.org/drawingml/2006/main">
+            <a:off x="962025" y="3028950"/>
+            <a:ext cx="3219450" cy="409575"/>
           </a:xfrm>
           <a:prstGeom xmlns:a="http://schemas.openxmlformats.org/drawingml/2006/main" prst="rect">
             <a:avLst/>
@@ -9195,6 +9506,150 @@
           <a:lstStyle xmlns:a="http://schemas.openxmlformats.org/drawingml/2006/main"/>
           <a:p xmlns:a="http://schemas.openxmlformats.org/drawingml/2006/main">
             <a:pPr>
+              <a:defRPr sz="1350">
+                <a:solidFill>
+                  <a:srgbClr val="53616D"/>
+                </a:solidFill>
+                <a:latin typeface="Calibri"/>
+                <a:ea typeface="Calibri"/>
+                <a:cs typeface="Calibri"/>
+              </a:defRPr>
+            </a:pPr>
+            <a:r>
+              <a:rPr sz="1350">
+                <a:solidFill>
+                  <a:srgbClr val="53616D"/>
+                </a:solidFill>
+                <a:latin typeface="Calibri"/>
+                <a:ea typeface="Calibri"/>
+                <a:cs typeface="Calibri"/>
+              </a:rPr>
+              <a:t>Observe the screen; mask recognized PII</a:t>
+            </a:r>
+          </a:p>
+        </p:txBody>
+      </p:sp>
+      <p:sp>
+        <p:nvSpPr>
+          <p:cNvPr id="73" name="step-98">
+            <a:extLst xmlns:a="http://schemas.openxmlformats.org/drawingml/2006/main">
+              <a:ext uri="{FF2B5EF4-FFF2-40B4-BE49-F238E27FC236}">
+                <a16:creationId xmlns:a16="http://schemas.microsoft.com/office/drawing/2014/main" id="{62094D73-1346-4878-A31C-FB04AC199732}"/>
+              </a:ext>
+            </a:extLst>
+          </p:cNvPr>
+          <p:cNvSpPr>
+            <a:spLocks xmlns:a="http://schemas.openxmlformats.org/drawingml/2006/main" noGrp="1"/>
+          </p:cNvSpPr>
+          <p:nvPr/>
+        </p:nvSpPr>
+        <p:spPr>
+          <a:xfrm xmlns:a="http://schemas.openxmlformats.org/drawingml/2006/main">
+            <a:off x="457200" y="3457575"/>
+            <a:ext cx="333375" cy="333375"/>
+          </a:xfrm>
+          <a:prstGeom xmlns:a="http://schemas.openxmlformats.org/drawingml/2006/main" prst="ellipse">
+            <a:avLst/>
+          </a:prstGeom>
+          <a:solidFill xmlns:a="http://schemas.openxmlformats.org/drawingml/2006/main">
+            <a:srgbClr val="266466"/>
+          </a:solidFill>
+          <a:ln xmlns:a="http://schemas.openxmlformats.org/drawingml/2006/main" w="0">
+            <a:noFill/>
+          </a:ln>
+        </p:spPr>
+      </p:sp>
+      <p:sp>
+        <p:nvSpPr>
+          <p:cNvPr id="74" name="rev-99">
+            <a:extLst xmlns:a="http://schemas.openxmlformats.org/drawingml/2006/main">
+              <a:ext uri="{FF2B5EF4-FFF2-40B4-BE49-F238E27FC236}">
+                <a16:creationId xmlns:a16="http://schemas.microsoft.com/office/drawing/2014/main" id="{8837587A-6CD7-4541-8264-EBD6FDF895E6}"/>
+              </a:ext>
+            </a:extLst>
+          </p:cNvPr>
+          <p:cNvSpPr>
+            <a:spLocks xmlns:a="http://schemas.openxmlformats.org/drawingml/2006/main" noGrp="1"/>
+          </p:cNvSpPr>
+          <p:nvPr/>
+        </p:nvSpPr>
+        <p:spPr>
+          <a:xfrm xmlns:a="http://schemas.openxmlformats.org/drawingml/2006/main">
+            <a:off x="457200" y="3476625"/>
+            <a:ext cx="333375" cy="304800"/>
+          </a:xfrm>
+          <a:prstGeom xmlns:a="http://schemas.openxmlformats.org/drawingml/2006/main" prst="rect">
+            <a:avLst/>
+          </a:prstGeom>
+          <a:noFill xmlns:a="http://schemas.openxmlformats.org/drawingml/2006/main"/>
+          <a:ln xmlns:a="http://schemas.openxmlformats.org/drawingml/2006/main" w="0">
+            <a:noFill/>
+          </a:ln>
+        </p:spPr>
+        <p:txBody>
+          <a:bodyPr xmlns:a="http://schemas.openxmlformats.org/drawingml/2006/main" wrap="square" lIns="0" tIns="0" rIns="0" bIns="0" anchor="ctr">
+            <a:noAutofit/>
+          </a:bodyPr>
+          <a:lstStyle xmlns:a="http://schemas.openxmlformats.org/drawingml/2006/main"/>
+          <a:p xmlns:a="http://schemas.openxmlformats.org/drawingml/2006/main">
+            <a:pPr algn="ctr">
+              <a:defRPr sz="1350" b="1">
+                <a:solidFill>
+                  <a:srgbClr val="FFFFFF"/>
+                </a:solidFill>
+                <a:latin typeface="Calibri"/>
+                <a:ea typeface="Calibri"/>
+                <a:cs typeface="Calibri"/>
+              </a:defRPr>
+            </a:pPr>
+            <a:r>
+              <a:rPr sz="1350" b="1">
+                <a:solidFill>
+                  <a:srgbClr val="FFFFFF"/>
+                </a:solidFill>
+                <a:latin typeface="Calibri"/>
+                <a:ea typeface="Calibri"/>
+                <a:cs typeface="Calibri"/>
+              </a:rPr>
+              <a:t>2</a:t>
+            </a:r>
+          </a:p>
+        </p:txBody>
+      </p:sp>
+      <p:sp>
+        <p:nvSpPr>
+          <p:cNvPr id="75" name="rev-100">
+            <a:extLst xmlns:a="http://schemas.openxmlformats.org/drawingml/2006/main">
+              <a:ext uri="{FF2B5EF4-FFF2-40B4-BE49-F238E27FC236}">
+                <a16:creationId xmlns:a16="http://schemas.microsoft.com/office/drawing/2014/main" id="{9222AC28-C82A-46D2-B458-BC953AA32F52}"/>
+              </a:ext>
+            </a:extLst>
+          </p:cNvPr>
+          <p:cNvSpPr>
+            <a:spLocks xmlns:a="http://schemas.openxmlformats.org/drawingml/2006/main" noGrp="1"/>
+          </p:cNvSpPr>
+          <p:nvPr/>
+        </p:nvSpPr>
+        <p:spPr>
+          <a:xfrm xmlns:a="http://schemas.openxmlformats.org/drawingml/2006/main">
+            <a:off x="962025" y="3457575"/>
+            <a:ext cx="3219450" cy="285750"/>
+          </a:xfrm>
+          <a:prstGeom xmlns:a="http://schemas.openxmlformats.org/drawingml/2006/main" prst="rect">
+            <a:avLst/>
+          </a:prstGeom>
+          <a:noFill xmlns:a="http://schemas.openxmlformats.org/drawingml/2006/main"/>
+          <a:ln xmlns:a="http://schemas.openxmlformats.org/drawingml/2006/main" w="0">
+            <a:noFill/>
+          </a:ln>
+        </p:spPr>
+        <p:txBody>
+          <a:bodyPr xmlns:a="http://schemas.openxmlformats.org/drawingml/2006/main" wrap="square" lIns="0" tIns="0" rIns="0" bIns="0" anchor="t">
+            <a:noAutofit/>
+          </a:bodyPr>
+          <a:lstStyle xmlns:a="http://schemas.openxmlformats.org/drawingml/2006/main"/>
+          <a:p xmlns:a="http://schemas.openxmlformats.org/drawingml/2006/main">
+            <a:pPr>
               <a:defRPr sz="1725" b="1">
                 <a:solidFill>
                   <a:srgbClr val="266466"/>
@@ -9213,61 +9668,376 @@
                 <a:ea typeface="Calibri"/>
                 <a:cs typeface="Calibri"/>
               </a:rPr>
-              <a:t>Protect on the device</a:t>
-            </a:r>
-          </a:p>
-        </p:txBody>
-      </p:sp>
-      <p:sp>
-        <p:nvSpPr>
-          <p:cNvPr id="70" name="rev-95">
-            <a:extLst xmlns:a="http://schemas.openxmlformats.org/drawingml/2006/main">
-              <a:ext uri="{FF2B5EF4-FFF2-40B4-BE49-F238E27FC236}">
-                <a16:creationId xmlns:a16="http://schemas.microsoft.com/office/drawing/2014/main" id="{7F7B8651-669F-427C-AF3F-C7439EE4B260}"/>
-              </a:ext>
-            </a:extLst>
-          </p:cNvPr>
-          <p:cNvSpPr>
-            <a:spLocks xmlns:a="http://schemas.openxmlformats.org/drawingml/2006/main" noGrp="1"/>
-          </p:cNvSpPr>
-          <p:nvPr/>
-        </p:nvSpPr>
-        <p:spPr>
-          <a:xfrm xmlns:a="http://schemas.openxmlformats.org/drawingml/2006/main">
-            <a:off x="457200" y="3152775"/>
-            <a:ext cx="3486150" cy="609600"/>
-          </a:xfrm>
-          <a:prstGeom xmlns:a="http://schemas.openxmlformats.org/drawingml/2006/main" prst="rect">
+              <a:t>Plan from filtered context</a:t>
+            </a:r>
+          </a:p>
+        </p:txBody>
+      </p:sp>
+      <p:sp>
+        <p:nvSpPr>
+          <p:cNvPr id="76" name="rev-101">
+            <a:extLst xmlns:a="http://schemas.openxmlformats.org/drawingml/2006/main">
+              <a:ext uri="{FF2B5EF4-FFF2-40B4-BE49-F238E27FC236}">
+                <a16:creationId xmlns:a16="http://schemas.microsoft.com/office/drawing/2014/main" id="{FF864DDC-9EB0-49EE-9B71-0F505A16472B}"/>
+              </a:ext>
+            </a:extLst>
+          </p:cNvPr>
+          <p:cNvSpPr>
+            <a:spLocks xmlns:a="http://schemas.openxmlformats.org/drawingml/2006/main" noGrp="1"/>
+          </p:cNvSpPr>
+          <p:nvPr/>
+        </p:nvSpPr>
+        <p:spPr>
+          <a:xfrm xmlns:a="http://schemas.openxmlformats.org/drawingml/2006/main">
+            <a:off x="962025" y="3800475"/>
+            <a:ext cx="3219450" cy="409575"/>
+          </a:xfrm>
+          <a:prstGeom xmlns:a="http://schemas.openxmlformats.org/drawingml/2006/main" prst="rect">
+            <a:avLst/>
+          </a:prstGeom>
+          <a:noFill xmlns:a="http://schemas.openxmlformats.org/drawingml/2006/main"/>
+          <a:ln xmlns:a="http://schemas.openxmlformats.org/drawingml/2006/main" w="0">
+            <a:noFill/>
+          </a:ln>
+        </p:spPr>
+        <p:txBody>
+          <a:bodyPr xmlns:a="http://schemas.openxmlformats.org/drawingml/2006/main" wrap="square" lIns="0" tIns="0" rIns="0" bIns="0" anchor="t">
+            <a:noAutofit/>
+          </a:bodyPr>
+          <a:lstStyle xmlns:a="http://schemas.openxmlformats.org/drawingml/2006/main"/>
+          <a:p xmlns:a="http://schemas.openxmlformats.org/drawingml/2006/main">
+            <a:pPr>
+              <a:defRPr sz="1350">
+                <a:solidFill>
+                  <a:srgbClr val="53616D"/>
+                </a:solidFill>
+                <a:latin typeface="Calibri"/>
+                <a:ea typeface="Calibri"/>
+                <a:cs typeface="Calibri"/>
+              </a:defRPr>
+            </a:pPr>
+            <a:r>
+              <a:rPr sz="1350">
+                <a:solidFill>
+                  <a:srgbClr val="53616D"/>
+                </a:solidFill>
+                <a:latin typeface="Calibri"/>
+                <a:ea typeface="Calibri"/>
+                <a:cs typeface="Calibri"/>
+              </a:rPr>
+              <a:t>Send the task crop; choose Download</a:t>
+            </a:r>
+          </a:p>
+        </p:txBody>
+      </p:sp>
+      <p:sp>
+        <p:nvSpPr>
+          <p:cNvPr id="77" name="step-102">
+            <a:extLst xmlns:a="http://schemas.openxmlformats.org/drawingml/2006/main">
+              <a:ext uri="{FF2B5EF4-FFF2-40B4-BE49-F238E27FC236}">
+                <a16:creationId xmlns:a16="http://schemas.microsoft.com/office/drawing/2014/main" id="{C6C7C1E1-B470-4929-B5FC-7EC45E0A9FCB}"/>
+              </a:ext>
+            </a:extLst>
+          </p:cNvPr>
+          <p:cNvSpPr>
+            <a:spLocks xmlns:a="http://schemas.openxmlformats.org/drawingml/2006/main" noGrp="1"/>
+          </p:cNvSpPr>
+          <p:nvPr/>
+        </p:nvSpPr>
+        <p:spPr>
+          <a:xfrm xmlns:a="http://schemas.openxmlformats.org/drawingml/2006/main">
+            <a:off x="457200" y="4229100"/>
+            <a:ext cx="333375" cy="333375"/>
+          </a:xfrm>
+          <a:prstGeom xmlns:a="http://schemas.openxmlformats.org/drawingml/2006/main" prst="ellipse">
             <a:avLst/>
           </a:prstGeom>
           <a:solidFill xmlns:a="http://schemas.openxmlformats.org/drawingml/2006/main">
-            <a:srgbClr val="EAF3F3"/>
+            <a:srgbClr val="266466"/>
+          </a:solidFill>
+          <a:ln xmlns:a="http://schemas.openxmlformats.org/drawingml/2006/main" w="0">
+            <a:noFill/>
+          </a:ln>
+        </p:spPr>
+      </p:sp>
+      <p:sp>
+        <p:nvSpPr>
+          <p:cNvPr id="78" name="rev-103">
+            <a:extLst xmlns:a="http://schemas.openxmlformats.org/drawingml/2006/main">
+              <a:ext uri="{FF2B5EF4-FFF2-40B4-BE49-F238E27FC236}">
+                <a16:creationId xmlns:a16="http://schemas.microsoft.com/office/drawing/2014/main" id="{A016252F-C08B-4DCF-9C5D-042EDDE3C6F3}"/>
+              </a:ext>
+            </a:extLst>
+          </p:cNvPr>
+          <p:cNvSpPr>
+            <a:spLocks xmlns:a="http://schemas.openxmlformats.org/drawingml/2006/main" noGrp="1"/>
+          </p:cNvSpPr>
+          <p:nvPr/>
+        </p:nvSpPr>
+        <p:spPr>
+          <a:xfrm xmlns:a="http://schemas.openxmlformats.org/drawingml/2006/main">
+            <a:off x="457200" y="4248150"/>
+            <a:ext cx="333375" cy="304800"/>
+          </a:xfrm>
+          <a:prstGeom xmlns:a="http://schemas.openxmlformats.org/drawingml/2006/main" prst="rect">
+            <a:avLst/>
+          </a:prstGeom>
+          <a:noFill xmlns:a="http://schemas.openxmlformats.org/drawingml/2006/main"/>
+          <a:ln xmlns:a="http://schemas.openxmlformats.org/drawingml/2006/main" w="0">
+            <a:noFill/>
+          </a:ln>
+        </p:spPr>
+        <p:txBody>
+          <a:bodyPr xmlns:a="http://schemas.openxmlformats.org/drawingml/2006/main" wrap="square" lIns="0" tIns="0" rIns="0" bIns="0" anchor="ctr">
+            <a:noAutofit/>
+          </a:bodyPr>
+          <a:lstStyle xmlns:a="http://schemas.openxmlformats.org/drawingml/2006/main"/>
+          <a:p xmlns:a="http://schemas.openxmlformats.org/drawingml/2006/main">
+            <a:pPr algn="ctr">
+              <a:defRPr sz="1350" b="1">
+                <a:solidFill>
+                  <a:srgbClr val="FFFFFF"/>
+                </a:solidFill>
+                <a:latin typeface="Calibri"/>
+                <a:ea typeface="Calibri"/>
+                <a:cs typeface="Calibri"/>
+              </a:defRPr>
+            </a:pPr>
+            <a:r>
+              <a:rPr sz="1350" b="1">
+                <a:solidFill>
+                  <a:srgbClr val="FFFFFF"/>
+                </a:solidFill>
+                <a:latin typeface="Calibri"/>
+                <a:ea typeface="Calibri"/>
+                <a:cs typeface="Calibri"/>
+              </a:rPr>
+              <a:t>3</a:t>
+            </a:r>
+          </a:p>
+        </p:txBody>
+      </p:sp>
+      <p:sp>
+        <p:nvSpPr>
+          <p:cNvPr id="79" name="rev-104">
+            <a:extLst xmlns:a="http://schemas.openxmlformats.org/drawingml/2006/main">
+              <a:ext uri="{FF2B5EF4-FFF2-40B4-BE49-F238E27FC236}">
+                <a16:creationId xmlns:a16="http://schemas.microsoft.com/office/drawing/2014/main" id="{F0E3898E-F304-4EC9-ABF5-C4C273203052}"/>
+              </a:ext>
+            </a:extLst>
+          </p:cNvPr>
+          <p:cNvSpPr>
+            <a:spLocks xmlns:a="http://schemas.openxmlformats.org/drawingml/2006/main" noGrp="1"/>
+          </p:cNvSpPr>
+          <p:nvPr/>
+        </p:nvSpPr>
+        <p:spPr>
+          <a:xfrm xmlns:a="http://schemas.openxmlformats.org/drawingml/2006/main">
+            <a:off x="962025" y="4229100"/>
+            <a:ext cx="3219450" cy="285750"/>
+          </a:xfrm>
+          <a:prstGeom xmlns:a="http://schemas.openxmlformats.org/drawingml/2006/main" prst="rect">
+            <a:avLst/>
+          </a:prstGeom>
+          <a:noFill xmlns:a="http://schemas.openxmlformats.org/drawingml/2006/main"/>
+          <a:ln xmlns:a="http://schemas.openxmlformats.org/drawingml/2006/main" w="0">
+            <a:noFill/>
+          </a:ln>
+        </p:spPr>
+        <p:txBody>
+          <a:bodyPr xmlns:a="http://schemas.openxmlformats.org/drawingml/2006/main" wrap="square" lIns="0" tIns="0" rIns="0" bIns="0" anchor="t">
+            <a:noAutofit/>
+          </a:bodyPr>
+          <a:lstStyle xmlns:a="http://schemas.openxmlformats.org/drawingml/2006/main"/>
+          <a:p xmlns:a="http://schemas.openxmlformats.org/drawingml/2006/main">
+            <a:pPr>
+              <a:defRPr sz="1725" b="1">
+                <a:solidFill>
+                  <a:srgbClr val="266466"/>
+                </a:solidFill>
+                <a:latin typeface="Calibri"/>
+                <a:ea typeface="Calibri"/>
+                <a:cs typeface="Calibri"/>
+              </a:defRPr>
+            </a:pPr>
+            <a:r>
+              <a:rPr sz="1725" b="1">
+                <a:solidFill>
+                  <a:srgbClr val="266466"/>
+                </a:solidFill>
+                <a:latin typeface="Calibri"/>
+                <a:ea typeface="Calibri"/>
+                <a:cs typeface="Calibri"/>
+              </a:rPr>
+              <a:t>Act and confirm</a:t>
+            </a:r>
+          </a:p>
+        </p:txBody>
+      </p:sp>
+      <p:sp>
+        <p:nvSpPr>
+          <p:cNvPr id="80" name="rev-105">
+            <a:extLst xmlns:a="http://schemas.openxmlformats.org/drawingml/2006/main">
+              <a:ext uri="{FF2B5EF4-FFF2-40B4-BE49-F238E27FC236}">
+                <a16:creationId xmlns:a16="http://schemas.microsoft.com/office/drawing/2014/main" id="{9453BF34-2465-4D58-8B27-1EF50B841BB4}"/>
+              </a:ext>
+            </a:extLst>
+          </p:cNvPr>
+          <p:cNvSpPr>
+            <a:spLocks xmlns:a="http://schemas.openxmlformats.org/drawingml/2006/main" noGrp="1"/>
+          </p:cNvSpPr>
+          <p:nvPr/>
+        </p:nvSpPr>
+        <p:spPr>
+          <a:xfrm xmlns:a="http://schemas.openxmlformats.org/drawingml/2006/main">
+            <a:off x="962025" y="4572000"/>
+            <a:ext cx="3219450" cy="409575"/>
+          </a:xfrm>
+          <a:prstGeom xmlns:a="http://schemas.openxmlformats.org/drawingml/2006/main" prst="rect">
+            <a:avLst/>
+          </a:prstGeom>
+          <a:noFill xmlns:a="http://schemas.openxmlformats.org/drawingml/2006/main"/>
+          <a:ln xmlns:a="http://schemas.openxmlformats.org/drawingml/2006/main" w="0">
+            <a:noFill/>
+          </a:ln>
+        </p:spPr>
+        <p:txBody>
+          <a:bodyPr xmlns:a="http://schemas.openxmlformats.org/drawingml/2006/main" wrap="square" lIns="0" tIns="0" rIns="0" bIns="0" anchor="t">
+            <a:noAutofit/>
+          </a:bodyPr>
+          <a:lstStyle xmlns:a="http://schemas.openxmlformats.org/drawingml/2006/main"/>
+          <a:p xmlns:a="http://schemas.openxmlformats.org/drawingml/2006/main">
+            <a:pPr>
+              <a:defRPr sz="1350">
+                <a:solidFill>
+                  <a:srgbClr val="53616D"/>
+                </a:solidFill>
+                <a:latin typeface="Calibri"/>
+                <a:ea typeface="Calibri"/>
+                <a:cs typeface="Calibri"/>
+              </a:defRPr>
+            </a:pPr>
+            <a:r>
+              <a:rPr sz="1350">
+                <a:solidFill>
+                  <a:srgbClr val="53616D"/>
+                </a:solidFill>
+                <a:latin typeface="Calibri"/>
+                <a:ea typeface="Calibri"/>
+                <a:cs typeface="Calibri"/>
+              </a:rPr>
+              <a:t>Guard the click; check the download</a:t>
+            </a:r>
+          </a:p>
+        </p:txBody>
+      </p:sp>
+      <p:sp>
+        <p:nvSpPr>
+          <p:cNvPr id="81" name="rev-106">
+            <a:extLst xmlns:a="http://schemas.openxmlformats.org/drawingml/2006/main">
+              <a:ext uri="{FF2B5EF4-FFF2-40B4-BE49-F238E27FC236}">
+                <a16:creationId xmlns:a16="http://schemas.microsoft.com/office/drawing/2014/main" id="{4F2FC73D-4DD0-4CEA-BF69-B02280B29995}"/>
+              </a:ext>
+            </a:extLst>
+          </p:cNvPr>
+          <p:cNvSpPr>
+            <a:spLocks xmlns:a="http://schemas.openxmlformats.org/drawingml/2006/main" noGrp="1"/>
+          </p:cNvSpPr>
+          <p:nvPr/>
+        </p:nvSpPr>
+        <p:spPr>
+          <a:xfrm xmlns:a="http://schemas.openxmlformats.org/drawingml/2006/main">
+            <a:off x="457200" y="4953000"/>
+            <a:ext cx="3752850" cy="361950"/>
+          </a:xfrm>
+          <a:prstGeom xmlns:a="http://schemas.openxmlformats.org/drawingml/2006/main" prst="rect">
+            <a:avLst/>
+          </a:prstGeom>
+          <a:noFill xmlns:a="http://schemas.openxmlformats.org/drawingml/2006/main"/>
+          <a:ln xmlns:a="http://schemas.openxmlformats.org/drawingml/2006/main" w="0">
+            <a:noFill/>
+          </a:ln>
+        </p:spPr>
+        <p:txBody>
+          <a:bodyPr xmlns:a="http://schemas.openxmlformats.org/drawingml/2006/main" wrap="square" lIns="0" tIns="0" rIns="0" bIns="0" anchor="t">
+            <a:noAutofit/>
+          </a:bodyPr>
+          <a:lstStyle xmlns:a="http://schemas.openxmlformats.org/drawingml/2006/main"/>
+          <a:p xmlns:a="http://schemas.openxmlformats.org/drawingml/2006/main">
+            <a:pPr>
+              <a:defRPr sz="1200">
+                <a:solidFill>
+                  <a:srgbClr val="53616D"/>
+                </a:solidFill>
+                <a:latin typeface="Calibri"/>
+                <a:ea typeface="Calibri"/>
+                <a:cs typeface="Calibri"/>
+              </a:defRPr>
+            </a:pPr>
+            <a:r>
+              <a:rPr sz="1200">
+                <a:solidFill>
+                  <a:srgbClr val="53616D"/>
+                </a:solidFill>
+                <a:latin typeface="Calibri"/>
+                <a:ea typeface="Calibri"/>
+                <a:cs typeface="Calibri"/>
+              </a:rPr>
+              <a:t>Browser demo flow. Full-task timing is pending.</a:t>
+            </a:r>
+          </a:p>
+        </p:txBody>
+      </p:sp>
+      <p:sp>
+        <p:nvSpPr>
+          <p:cNvPr id="82" name="rev-107">
+            <a:extLst xmlns:a="http://schemas.openxmlformats.org/drawingml/2006/main">
+              <a:ext uri="{FF2B5EF4-FFF2-40B4-BE49-F238E27FC236}">
+                <a16:creationId xmlns:a16="http://schemas.microsoft.com/office/drawing/2014/main" id="{59BFFF9A-055C-44CC-AB6D-6AD28E1EE40E}"/>
+              </a:ext>
+            </a:extLst>
+          </p:cNvPr>
+          <p:cNvSpPr>
+            <a:spLocks xmlns:a="http://schemas.openxmlformats.org/drawingml/2006/main" noGrp="1"/>
+          </p:cNvSpPr>
+          <p:nvPr/>
+        </p:nvSpPr>
+        <p:spPr>
+          <a:xfrm xmlns:a="http://schemas.openxmlformats.org/drawingml/2006/main">
+            <a:off x="4514850" y="2247900"/>
+            <a:ext cx="7219950" cy="2895600"/>
+          </a:xfrm>
+          <a:prstGeom xmlns:a="http://schemas.openxmlformats.org/drawingml/2006/main" prst="rect">
+            <a:avLst/>
+          </a:prstGeom>
+          <a:solidFill xmlns:a="http://schemas.openxmlformats.org/drawingml/2006/main">
+            <a:srgbClr val="173F43"/>
           </a:solidFill>
           <a:ln xmlns:a="http://schemas.openxmlformats.org/drawingml/2006/main" w="9525">
             <a:solidFill>
-              <a:srgbClr val="EAF3F3"/>
+              <a:srgbClr val="173F43"/>
             </a:solidFill>
           </a:ln>
         </p:spPr>
       </p:sp>
       <p:sp>
         <p:nvSpPr>
-          <p:cNvPr id="71" name="rev-96">
-            <a:extLst xmlns:a="http://schemas.openxmlformats.org/drawingml/2006/main">
-              <a:ext uri="{FF2B5EF4-FFF2-40B4-BE49-F238E27FC236}">
-                <a16:creationId xmlns:a16="http://schemas.microsoft.com/office/drawing/2014/main" id="{3CAA44C9-B78E-4DFE-8BF8-2DCD0060A346}"/>
-              </a:ext>
-            </a:extLst>
-          </p:cNvPr>
-          <p:cNvSpPr>
-            <a:spLocks xmlns:a="http://schemas.openxmlformats.org/drawingml/2006/main" noGrp="1"/>
-          </p:cNvSpPr>
-          <p:nvPr/>
-        </p:nvSpPr>
-        <p:spPr>
-          <a:xfrm xmlns:a="http://schemas.openxmlformats.org/drawingml/2006/main">
-            <a:off x="628650" y="3333750"/>
-            <a:ext cx="1314450" cy="276225"/>
+          <p:cNvPr id="83" name="rev-108">
+            <a:extLst xmlns:a="http://schemas.openxmlformats.org/drawingml/2006/main">
+              <a:ext uri="{FF2B5EF4-FFF2-40B4-BE49-F238E27FC236}">
+                <a16:creationId xmlns:a16="http://schemas.microsoft.com/office/drawing/2014/main" id="{B3C1AA87-01DE-4590-8DC5-83D10BFBF483}"/>
+              </a:ext>
+            </a:extLst>
+          </p:cNvPr>
+          <p:cNvSpPr>
+            <a:spLocks xmlns:a="http://schemas.openxmlformats.org/drawingml/2006/main" noGrp="1"/>
+          </p:cNvSpPr>
+          <p:nvPr/>
+        </p:nvSpPr>
+        <p:spPr>
+          <a:xfrm xmlns:a="http://schemas.openxmlformats.org/drawingml/2006/main">
+            <a:off x="4781550" y="2447925"/>
+            <a:ext cx="6667500" cy="228600"/>
           </a:xfrm>
           <a:prstGeom xmlns:a="http://schemas.openxmlformats.org/drawingml/2006/main" prst="rect">
             <a:avLst/>
@@ -9284,47 +10054,47 @@
           <a:lstStyle xmlns:a="http://schemas.openxmlformats.org/drawingml/2006/main"/>
           <a:p xmlns:a="http://schemas.openxmlformats.org/drawingml/2006/main">
             <a:pPr>
-              <a:defRPr sz="1650" b="1">
-                <a:solidFill>
-                  <a:srgbClr val="202B36"/>
-                </a:solidFill>
-                <a:latin typeface="Calibri"/>
-                <a:ea typeface="Calibri"/>
-                <a:cs typeface="Calibri"/>
-              </a:defRPr>
-            </a:pPr>
-            <a:r>
-              <a:rPr sz="1650" b="1">
-                <a:solidFill>
-                  <a:srgbClr val="202B36"/>
-                </a:solidFill>
-                <a:latin typeface="Calibri"/>
-                <a:ea typeface="Calibri"/>
-                <a:cs typeface="Calibri"/>
-              </a:rPr>
-              <a:t>Observe</a:t>
-            </a:r>
-          </a:p>
-        </p:txBody>
-      </p:sp>
-      <p:sp>
-        <p:nvSpPr>
-          <p:cNvPr id="72" name="rev-97">
-            <a:extLst xmlns:a="http://schemas.openxmlformats.org/drawingml/2006/main">
-              <a:ext uri="{FF2B5EF4-FFF2-40B4-BE49-F238E27FC236}">
-                <a16:creationId xmlns:a16="http://schemas.microsoft.com/office/drawing/2014/main" id="{CEEF7720-20E9-48A1-996E-DB5A4178DF76}"/>
-              </a:ext>
-            </a:extLst>
-          </p:cNvPr>
-          <p:cNvSpPr>
-            <a:spLocks xmlns:a="http://schemas.openxmlformats.org/drawingml/2006/main" noGrp="1"/>
-          </p:cNvSpPr>
-          <p:nvPr/>
-        </p:nvSpPr>
-        <p:spPr>
-          <a:xfrm xmlns:a="http://schemas.openxmlformats.org/drawingml/2006/main">
-            <a:off x="2590800" y="3333750"/>
-            <a:ext cx="1266825" cy="276225"/>
+              <a:defRPr sz="1125" b="1">
+                <a:solidFill>
+                  <a:srgbClr val="C8DBD9"/>
+                </a:solidFill>
+                <a:latin typeface="Calibri"/>
+                <a:ea typeface="Calibri"/>
+                <a:cs typeface="Calibri"/>
+              </a:defRPr>
+            </a:pPr>
+            <a:r>
+              <a:rPr sz="1125" b="1">
+                <a:solidFill>
+                  <a:srgbClr val="C8DBD9"/>
+                </a:solidFill>
+                <a:latin typeface="Calibri"/>
+                <a:ea typeface="Calibri"/>
+                <a:cs typeface="Calibri"/>
+              </a:rPr>
+              <a:t>BENEFITS OF THE SOLUTION</a:t>
+            </a:r>
+          </a:p>
+        </p:txBody>
+      </p:sp>
+      <p:sp>
+        <p:nvSpPr>
+          <p:cNvPr id="84" name="rev-109">
+            <a:extLst xmlns:a="http://schemas.openxmlformats.org/drawingml/2006/main">
+              <a:ext uri="{FF2B5EF4-FFF2-40B4-BE49-F238E27FC236}">
+                <a16:creationId xmlns:a16="http://schemas.microsoft.com/office/drawing/2014/main" id="{106B1821-6A09-4F54-A141-33C115C8C3F3}"/>
+              </a:ext>
+            </a:extLst>
+          </p:cNvPr>
+          <p:cNvSpPr>
+            <a:spLocks xmlns:a="http://schemas.openxmlformats.org/drawingml/2006/main" noGrp="1"/>
+          </p:cNvSpPr>
+          <p:nvPr/>
+        </p:nvSpPr>
+        <p:spPr>
+          <a:xfrm xmlns:a="http://schemas.openxmlformats.org/drawingml/2006/main">
+            <a:off x="4762500" y="2790825"/>
+            <a:ext cx="1752600" cy="790575"/>
           </a:xfrm>
           <a:prstGeom xmlns:a="http://schemas.openxmlformats.org/drawingml/2006/main" prst="rect">
             <a:avLst/>
@@ -9341,77 +10111,47 @@
           <a:lstStyle xmlns:a="http://schemas.openxmlformats.org/drawingml/2006/main"/>
           <a:p xmlns:a="http://schemas.openxmlformats.org/drawingml/2006/main">
             <a:pPr>
-              <a:defRPr sz="1650" b="1">
-                <a:solidFill>
-                  <a:srgbClr val="202B36"/>
-                </a:solidFill>
-                <a:latin typeface="Calibri"/>
-                <a:ea typeface="Calibri"/>
-                <a:cs typeface="Calibri"/>
-              </a:defRPr>
-            </a:pPr>
-            <a:r>
-              <a:rPr sz="1650" b="1">
-                <a:solidFill>
-                  <a:srgbClr val="202B36"/>
-                </a:solidFill>
-                <a:latin typeface="Calibri"/>
-                <a:ea typeface="Calibri"/>
-                <a:cs typeface="Calibri"/>
-              </a:rPr>
-              <a:t>Sanitize</a:t>
-            </a:r>
-          </a:p>
-        </p:txBody>
-      </p:sp>
-      <p:sp>
-        <p:nvSpPr>
-          <p:cNvPr id="73" name="">
-            <a:extLst xmlns:a="http://schemas.openxmlformats.org/drawingml/2006/main">
-              <a:ext uri="{FF2B5EF4-FFF2-40B4-BE49-F238E27FC236}">
-                <a16:creationId xmlns:a16="http://schemas.microsoft.com/office/drawing/2014/main" id="{CA0577FC-EA2F-4088-B041-7A80F1FD0F56}"/>
-              </a:ext>
-            </a:extLst>
-          </p:cNvPr>
-          <p:cNvSpPr>
-            <a:spLocks xmlns:a="http://schemas.openxmlformats.org/drawingml/2006/main" noGrp="1"/>
-          </p:cNvSpPr>
-          <p:nvPr/>
-        </p:nvSpPr>
-        <p:spPr>
-          <a:xfrm xmlns:a="http://schemas.openxmlformats.org/drawingml/2006/main">
-            <a:off x="2076450" y="3419475"/>
-            <a:ext cx="323850" cy="133350"/>
-          </a:xfrm>
-          <a:prstGeom xmlns:a="http://schemas.openxmlformats.org/drawingml/2006/main" prst="rightArrow">
-            <a:avLst/>
-          </a:prstGeom>
-          <a:solidFill xmlns:a="http://schemas.openxmlformats.org/drawingml/2006/main">
-            <a:srgbClr val="266466"/>
-          </a:solidFill>
-          <a:ln xmlns:a="http://schemas.openxmlformats.org/drawingml/2006/main" w="0">
-            <a:noFill/>
-          </a:ln>
-        </p:spPr>
-      </p:sp>
-      <p:sp>
-        <p:nvSpPr>
-          <p:cNvPr id="74" name="rev-98">
-            <a:extLst xmlns:a="http://schemas.openxmlformats.org/drawingml/2006/main">
-              <a:ext uri="{FF2B5EF4-FFF2-40B4-BE49-F238E27FC236}">
-                <a16:creationId xmlns:a16="http://schemas.microsoft.com/office/drawing/2014/main" id="{0830E4A0-FCE6-479E-B052-7F53D4CC8AEB}"/>
-              </a:ext>
-            </a:extLst>
-          </p:cNvPr>
-          <p:cNvSpPr>
-            <a:spLocks xmlns:a="http://schemas.openxmlformats.org/drawingml/2006/main" noGrp="1"/>
-          </p:cNvSpPr>
-          <p:nvPr/>
-        </p:nvSpPr>
-        <p:spPr>
-          <a:xfrm xmlns:a="http://schemas.openxmlformats.org/drawingml/2006/main">
-            <a:off x="457200" y="3867150"/>
-            <a:ext cx="3486150" cy="457200"/>
+              <a:defRPr sz="5250" b="1">
+                <a:solidFill>
+                  <a:srgbClr val="E5BD6C"/>
+                </a:solidFill>
+                <a:latin typeface="Calibri"/>
+                <a:ea typeface="Calibri"/>
+                <a:cs typeface="Calibri"/>
+              </a:defRPr>
+            </a:pPr>
+            <a:r>
+              <a:rPr sz="5250" b="1">
+                <a:solidFill>
+                  <a:srgbClr val="E5BD6C"/>
+                </a:solidFill>
+                <a:latin typeface="Calibri"/>
+                <a:ea typeface="Calibri"/>
+                <a:cs typeface="Calibri"/>
+              </a:rPr>
+              <a:t>7.3×</a:t>
+            </a:r>
+          </a:p>
+        </p:txBody>
+      </p:sp>
+      <p:sp>
+        <p:nvSpPr>
+          <p:cNvPr id="85" name="rev-110">
+            <a:extLst xmlns:a="http://schemas.openxmlformats.org/drawingml/2006/main">
+              <a:ext uri="{FF2B5EF4-FFF2-40B4-BE49-F238E27FC236}">
+                <a16:creationId xmlns:a16="http://schemas.microsoft.com/office/drawing/2014/main" id="{F0F2ECB0-851B-4ECB-8045-48B6ACDFBAEC}"/>
+              </a:ext>
+            </a:extLst>
+          </p:cNvPr>
+          <p:cNvSpPr>
+            <a:spLocks xmlns:a="http://schemas.openxmlformats.org/drawingml/2006/main" noGrp="1"/>
+          </p:cNvSpPr>
+          <p:nvPr/>
+        </p:nvSpPr>
+        <p:spPr>
+          <a:xfrm xmlns:a="http://schemas.openxmlformats.org/drawingml/2006/main">
+            <a:off x="6705600" y="2876550"/>
+            <a:ext cx="4695825" cy="323850"/>
           </a:xfrm>
           <a:prstGeom xmlns:a="http://schemas.openxmlformats.org/drawingml/2006/main" prst="rect">
             <a:avLst/>
@@ -9428,77 +10168,47 @@
           <a:lstStyle xmlns:a="http://schemas.openxmlformats.org/drawingml/2006/main"/>
           <a:p xmlns:a="http://schemas.openxmlformats.org/drawingml/2006/main">
             <a:pPr>
-              <a:defRPr sz="1350">
-                <a:solidFill>
-                  <a:srgbClr val="53616D"/>
-                </a:solidFill>
-                <a:latin typeface="Calibri"/>
-                <a:ea typeface="Calibri"/>
-                <a:cs typeface="Calibri"/>
-              </a:defRPr>
-            </a:pPr>
-            <a:r>
-              <a:rPr sz="1350">
-                <a:solidFill>
-                  <a:srgbClr val="53616D"/>
-                </a:solidFill>
-                <a:latin typeface="Calibri"/>
-                <a:ea typeface="Calibri"/>
-                <a:cs typeface="Calibri"/>
-              </a:rPr>
-              <a:t>Screen + DOM; local privacy filter</a:t>
-            </a:r>
-          </a:p>
-        </p:txBody>
-      </p:sp>
-      <p:sp>
-        <p:nvSpPr>
-          <p:cNvPr id="75" name="">
-            <a:extLst xmlns:a="http://schemas.openxmlformats.org/drawingml/2006/main">
-              <a:ext uri="{FF2B5EF4-FFF2-40B4-BE49-F238E27FC236}">
-                <a16:creationId xmlns:a16="http://schemas.microsoft.com/office/drawing/2014/main" id="{B7910F0D-199F-46C8-A37E-D1A7002B67F5}"/>
-              </a:ext>
-            </a:extLst>
-          </p:cNvPr>
-          <p:cNvSpPr>
-            <a:spLocks xmlns:a="http://schemas.openxmlformats.org/drawingml/2006/main" noGrp="1"/>
-          </p:cNvSpPr>
-          <p:nvPr/>
-        </p:nvSpPr>
-        <p:spPr>
-          <a:xfrm xmlns:a="http://schemas.openxmlformats.org/drawingml/2006/main">
-            <a:off x="4057650" y="3324225"/>
-            <a:ext cx="171450" cy="257175"/>
-          </a:xfrm>
-          <a:prstGeom xmlns:a="http://schemas.openxmlformats.org/drawingml/2006/main" prst="chevron">
-            <a:avLst/>
-          </a:prstGeom>
-          <a:solidFill xmlns:a="http://schemas.openxmlformats.org/drawingml/2006/main">
-            <a:srgbClr val="266466"/>
-          </a:solidFill>
-          <a:ln xmlns:a="http://schemas.openxmlformats.org/drawingml/2006/main" w="0">
-            <a:noFill/>
-          </a:ln>
-        </p:spPr>
-      </p:sp>
-      <p:sp>
-        <p:nvSpPr>
-          <p:cNvPr id="76" name="rev-99">
-            <a:extLst xmlns:a="http://schemas.openxmlformats.org/drawingml/2006/main">
-              <a:ext uri="{FF2B5EF4-FFF2-40B4-BE49-F238E27FC236}">
-                <a16:creationId xmlns:a16="http://schemas.microsoft.com/office/drawing/2014/main" id="{19506F70-4F13-4055-B018-A6682851EB56}"/>
-              </a:ext>
-            </a:extLst>
-          </p:cNvPr>
-          <p:cNvSpPr>
-            <a:spLocks xmlns:a="http://schemas.openxmlformats.org/drawingml/2006/main" noGrp="1"/>
-          </p:cNvSpPr>
-          <p:nvPr/>
-        </p:nvSpPr>
-        <p:spPr>
-          <a:xfrm xmlns:a="http://schemas.openxmlformats.org/drawingml/2006/main">
-            <a:off x="4343400" y="2647950"/>
-            <a:ext cx="581025" cy="447675"/>
+              <a:defRPr sz="1950" b="1">
+                <a:solidFill>
+                  <a:srgbClr val="FFFFFF"/>
+                </a:solidFill>
+                <a:latin typeface="Calibri"/>
+                <a:ea typeface="Calibri"/>
+                <a:cs typeface="Calibri"/>
+              </a:defRPr>
+            </a:pPr>
+            <a:r>
+              <a:rPr sz="1950" b="1">
+                <a:solidFill>
+                  <a:srgbClr val="FFFFFF"/>
+                </a:solidFill>
+                <a:latin typeface="Calibri"/>
+                <a:ea typeface="Calibri"/>
+                <a:cs typeface="Calibri"/>
+              </a:rPr>
+              <a:t>Faster sanitize-to-plan median</a:t>
+            </a:r>
+          </a:p>
+        </p:txBody>
+      </p:sp>
+      <p:sp>
+        <p:nvSpPr>
+          <p:cNvPr id="86" name="rev-111">
+            <a:extLst xmlns:a="http://schemas.openxmlformats.org/drawingml/2006/main">
+              <a:ext uri="{FF2B5EF4-FFF2-40B4-BE49-F238E27FC236}">
+                <a16:creationId xmlns:a16="http://schemas.microsoft.com/office/drawing/2014/main" id="{E2F7940C-20F7-418B-B5A9-FB07BE6D48CE}"/>
+              </a:ext>
+            </a:extLst>
+          </p:cNvPr>
+          <p:cNvSpPr>
+            <a:spLocks xmlns:a="http://schemas.openxmlformats.org/drawingml/2006/main" noGrp="1"/>
+          </p:cNvSpPr>
+          <p:nvPr/>
+        </p:nvSpPr>
+        <p:spPr>
+          <a:xfrm xmlns:a="http://schemas.openxmlformats.org/drawingml/2006/main">
+            <a:off x="6705600" y="3276600"/>
+            <a:ext cx="4695825" cy="257175"/>
           </a:xfrm>
           <a:prstGeom xmlns:a="http://schemas.openxmlformats.org/drawingml/2006/main" prst="rect">
             <a:avLst/>
@@ -9515,47 +10225,63 @@
           <a:lstStyle xmlns:a="http://schemas.openxmlformats.org/drawingml/2006/main"/>
           <a:p xmlns:a="http://schemas.openxmlformats.org/drawingml/2006/main">
             <a:pPr>
-              <a:defRPr sz="2550" b="1">
-                <a:solidFill>
-                  <a:srgbClr val="266466"/>
-                </a:solidFill>
-                <a:latin typeface="Calibri"/>
-                <a:ea typeface="Calibri"/>
-                <a:cs typeface="Calibri"/>
-              </a:defRPr>
-            </a:pPr>
-            <a:r>
-              <a:rPr sz="2550" b="1">
-                <a:solidFill>
-                  <a:srgbClr val="266466"/>
-                </a:solidFill>
-                <a:latin typeface="Calibri"/>
-                <a:ea typeface="Calibri"/>
-                <a:cs typeface="Calibri"/>
-              </a:rPr>
-              <a:t>02</a:t>
-            </a:r>
-          </a:p>
-        </p:txBody>
-      </p:sp>
-      <p:sp>
-        <p:nvSpPr>
-          <p:cNvPr id="77" name="rev-100">
-            <a:extLst xmlns:a="http://schemas.openxmlformats.org/drawingml/2006/main">
-              <a:ext uri="{FF2B5EF4-FFF2-40B4-BE49-F238E27FC236}">
-                <a16:creationId xmlns:a16="http://schemas.microsoft.com/office/drawing/2014/main" id="{5FB05DD9-3CCD-4033-A813-6FE971A5E2F0}"/>
-              </a:ext>
-            </a:extLst>
-          </p:cNvPr>
-          <p:cNvSpPr>
-            <a:spLocks xmlns:a="http://schemas.openxmlformats.org/drawingml/2006/main" noGrp="1"/>
-          </p:cNvSpPr>
-          <p:nvPr/>
-        </p:nvSpPr>
-        <p:spPr>
-          <a:xfrm xmlns:a="http://schemas.openxmlformats.org/drawingml/2006/main">
-            <a:off x="4972050" y="2695575"/>
-            <a:ext cx="2876550" cy="304800"/>
+              <a:defRPr sz="1425">
+                <a:solidFill>
+                  <a:srgbClr val="C8DBD9"/>
+                </a:solidFill>
+                <a:latin typeface="Calibri"/>
+                <a:ea typeface="Calibri"/>
+                <a:cs typeface="Calibri"/>
+              </a:defRPr>
+            </a:pPr>
+            <a:r>
+              <a:rPr sz="1425">
+                <a:solidFill>
+                  <a:srgbClr val="C8DBD9"/>
+                </a:solidFill>
+                <a:latin typeface="Calibri"/>
+                <a:ea typeface="Calibri"/>
+                <a:cs typeface="Calibri"/>
+              </a:rPr>
+              <a:t>Selective vs always-on processing</a:t>
+            </a:r>
+          </a:p>
+        </p:txBody>
+      </p:sp>
+      <p:graphicFrame>
+        <p:nvGraphicFramePr>
+          <p:cNvPr id="125" name="Chart"/>
+          <p:cNvGraphicFramePr/>
+          <p:nvPr/>
+        </p:nvGraphicFramePr>
+        <p:xfrm>
+          <a:off xmlns:a="http://schemas.openxmlformats.org/drawingml/2006/main" x="4733925" y="3657600"/>
+          <a:ext xmlns:a="http://schemas.openxmlformats.org/drawingml/2006/main" cx="6715125" cy="1285875"/>
+        </p:xfrm>
+        <a:graphic xmlns:a="http://schemas.openxmlformats.org/drawingml/2006/main">
+          <a:graphicData uri="http://schemas.openxmlformats.org/drawingml/2006/chart">
+            <c:chart xmlns:r="http://schemas.openxmlformats.org/officeDocument/2006/relationships" xmlns:c="http://schemas.openxmlformats.org/drawingml/2006/chart" r:id="Rc505711c564a47db"/>
+          </a:graphicData>
+        </a:graphic>
+      </p:graphicFrame>
+      <p:sp>
+        <p:nvSpPr>
+          <p:cNvPr id="88" name="rev-112">
+            <a:extLst xmlns:a="http://schemas.openxmlformats.org/drawingml/2006/main">
+              <a:ext uri="{FF2B5EF4-FFF2-40B4-BE49-F238E27FC236}">
+                <a16:creationId xmlns:a16="http://schemas.microsoft.com/office/drawing/2014/main" id="{153A6E24-4403-45A8-87A2-99F15F3FABEE}"/>
+              </a:ext>
+            </a:extLst>
+          </p:cNvPr>
+          <p:cNvSpPr>
+            <a:spLocks xmlns:a="http://schemas.openxmlformats.org/drawingml/2006/main" noGrp="1"/>
+          </p:cNvSpPr>
+          <p:nvPr/>
+        </p:nvSpPr>
+        <p:spPr>
+          <a:xfrm xmlns:a="http://schemas.openxmlformats.org/drawingml/2006/main">
+            <a:off x="457200" y="5362575"/>
+            <a:ext cx="11277600" cy="247650"/>
           </a:xfrm>
           <a:prstGeom xmlns:a="http://schemas.openxmlformats.org/drawingml/2006/main" prst="rect">
             <a:avLst/>
@@ -9572,7 +10298,7 @@
           <a:lstStyle xmlns:a="http://schemas.openxmlformats.org/drawingml/2006/main"/>
           <a:p xmlns:a="http://schemas.openxmlformats.org/drawingml/2006/main">
             <a:pPr>
-              <a:defRPr sz="1725" b="1">
+              <a:defRPr sz="1350" b="1">
                 <a:solidFill>
                   <a:srgbClr val="266466"/>
                 </a:solidFill>
@@ -9582,7 +10308,7 @@
               </a:defRPr>
             </a:pPr>
             <a:r>
-              <a:rPr sz="1725" b="1">
+              <a:rPr sz="1350" b="1">
                 <a:solidFill>
                   <a:srgbClr val="266466"/>
                 </a:solidFill>
@@ -9590,61 +10316,29 @@
                 <a:ea typeface="Calibri"/>
                 <a:cs typeface="Calibri"/>
               </a:rPr>
-              <a:t>Plan from safe context</a:t>
-            </a:r>
-          </a:p>
-        </p:txBody>
-      </p:sp>
-      <p:sp>
-        <p:nvSpPr>
-          <p:cNvPr id="78" name="rev-101">
-            <a:extLst xmlns:a="http://schemas.openxmlformats.org/drawingml/2006/main">
-              <a:ext uri="{FF2B5EF4-FFF2-40B4-BE49-F238E27FC236}">
-                <a16:creationId xmlns:a16="http://schemas.microsoft.com/office/drawing/2014/main" id="{3F65EE96-18E7-4648-A26D-55D7FA870B07}"/>
-              </a:ext>
-            </a:extLst>
-          </p:cNvPr>
-          <p:cNvSpPr>
-            <a:spLocks xmlns:a="http://schemas.openxmlformats.org/drawingml/2006/main" noGrp="1"/>
-          </p:cNvSpPr>
-          <p:nvPr/>
-        </p:nvSpPr>
-        <p:spPr>
-          <a:xfrm xmlns:a="http://schemas.openxmlformats.org/drawingml/2006/main">
-            <a:off x="4343400" y="3152775"/>
-            <a:ext cx="3486150" cy="609600"/>
-          </a:xfrm>
-          <a:prstGeom xmlns:a="http://schemas.openxmlformats.org/drawingml/2006/main" prst="rect">
-            <a:avLst/>
-          </a:prstGeom>
-          <a:solidFill xmlns:a="http://schemas.openxmlformats.org/drawingml/2006/main">
-            <a:srgbClr val="EAF3F3"/>
-          </a:solidFill>
-          <a:ln xmlns:a="http://schemas.openxmlformats.org/drawingml/2006/main" w="9525">
-            <a:solidFill>
-              <a:srgbClr val="EAF3F3"/>
-            </a:solidFill>
-          </a:ln>
-        </p:spPr>
-      </p:sp>
-      <p:sp>
-        <p:nvSpPr>
-          <p:cNvPr id="79" name="rev-102">
-            <a:extLst xmlns:a="http://schemas.openxmlformats.org/drawingml/2006/main">
-              <a:ext uri="{FF2B5EF4-FFF2-40B4-BE49-F238E27FC236}">
-                <a16:creationId xmlns:a16="http://schemas.microsoft.com/office/drawing/2014/main" id="{BF593927-9867-4857-BE2C-CE6B2564B4F9}"/>
-              </a:ext>
-            </a:extLst>
-          </p:cNvPr>
-          <p:cNvSpPr>
-            <a:spLocks xmlns:a="http://schemas.openxmlformats.org/drawingml/2006/main" noGrp="1"/>
-          </p:cNvSpPr>
-          <p:nvPr/>
-        </p:nvSpPr>
-        <p:spPr>
-          <a:xfrm xmlns:a="http://schemas.openxmlformats.org/drawingml/2006/main">
-            <a:off x="4514850" y="3333750"/>
-            <a:ext cx="1314450" cy="276225"/>
+              <a:t>On 48 fresh synthetic pages in the CPU reference harness</a:t>
+            </a:r>
+          </a:p>
+        </p:txBody>
+      </p:sp>
+      <p:sp>
+        <p:nvSpPr>
+          <p:cNvPr id="89" name="rev-113">
+            <a:extLst xmlns:a="http://schemas.openxmlformats.org/drawingml/2006/main">
+              <a:ext uri="{FF2B5EF4-FFF2-40B4-BE49-F238E27FC236}">
+                <a16:creationId xmlns:a16="http://schemas.microsoft.com/office/drawing/2014/main" id="{8495E396-5BAF-4921-9828-35A8C8D15DDB}"/>
+              </a:ext>
+            </a:extLst>
+          </p:cNvPr>
+          <p:cNvSpPr>
+            <a:spLocks xmlns:a="http://schemas.openxmlformats.org/drawingml/2006/main" noGrp="1"/>
+          </p:cNvSpPr>
+          <p:nvPr/>
+        </p:nvSpPr>
+        <p:spPr>
+          <a:xfrm xmlns:a="http://schemas.openxmlformats.org/drawingml/2006/main">
+            <a:off x="457200" y="5695950"/>
+            <a:ext cx="809625" cy="533400"/>
           </a:xfrm>
           <a:prstGeom xmlns:a="http://schemas.openxmlformats.org/drawingml/2006/main" prst="rect">
             <a:avLst/>
@@ -9661,47 +10355,47 @@
           <a:lstStyle xmlns:a="http://schemas.openxmlformats.org/drawingml/2006/main"/>
           <a:p xmlns:a="http://schemas.openxmlformats.org/drawingml/2006/main">
             <a:pPr>
-              <a:defRPr sz="1650" b="1">
-                <a:solidFill>
-                  <a:srgbClr val="202B36"/>
-                </a:solidFill>
-                <a:latin typeface="Calibri"/>
-                <a:ea typeface="Calibri"/>
-                <a:cs typeface="Calibri"/>
-              </a:defRPr>
-            </a:pPr>
-            <a:r>
-              <a:rPr sz="1650" b="1">
-                <a:solidFill>
-                  <a:srgbClr val="202B36"/>
-                </a:solidFill>
-                <a:latin typeface="Calibri"/>
-                <a:ea typeface="Calibri"/>
-                <a:cs typeface="Calibri"/>
-              </a:rPr>
-              <a:t>Send</a:t>
-            </a:r>
-          </a:p>
-        </p:txBody>
-      </p:sp>
-      <p:sp>
-        <p:nvSpPr>
-          <p:cNvPr id="80" name="rev-103">
-            <a:extLst xmlns:a="http://schemas.openxmlformats.org/drawingml/2006/main">
-              <a:ext uri="{FF2B5EF4-FFF2-40B4-BE49-F238E27FC236}">
-                <a16:creationId xmlns:a16="http://schemas.microsoft.com/office/drawing/2014/main" id="{03FF3DDF-8574-4B1A-A399-2194E83AA3CD}"/>
-              </a:ext>
-            </a:extLst>
-          </p:cNvPr>
-          <p:cNvSpPr>
-            <a:spLocks xmlns:a="http://schemas.openxmlformats.org/drawingml/2006/main" noGrp="1"/>
-          </p:cNvSpPr>
-          <p:nvPr/>
-        </p:nvSpPr>
-        <p:spPr>
-          <a:xfrm xmlns:a="http://schemas.openxmlformats.org/drawingml/2006/main">
-            <a:off x="6477000" y="3333750"/>
-            <a:ext cx="1266825" cy="276225"/>
+              <a:defRPr sz="3525" b="1">
+                <a:solidFill>
+                  <a:srgbClr val="266466"/>
+                </a:solidFill>
+                <a:latin typeface="Calibri"/>
+                <a:ea typeface="Calibri"/>
+                <a:cs typeface="Calibri"/>
+              </a:defRPr>
+            </a:pPr>
+            <a:r>
+              <a:rPr sz="3525" b="1">
+                <a:solidFill>
+                  <a:srgbClr val="266466"/>
+                </a:solidFill>
+                <a:latin typeface="Calibri"/>
+                <a:ea typeface="Calibri"/>
+                <a:cs typeface="Calibri"/>
+              </a:rPr>
+              <a:t>0</a:t>
+            </a:r>
+          </a:p>
+        </p:txBody>
+      </p:sp>
+      <p:sp>
+        <p:nvSpPr>
+          <p:cNvPr id="90" name="rev-114">
+            <a:extLst xmlns:a="http://schemas.openxmlformats.org/drawingml/2006/main">
+              <a:ext uri="{FF2B5EF4-FFF2-40B4-BE49-F238E27FC236}">
+                <a16:creationId xmlns:a16="http://schemas.microsoft.com/office/drawing/2014/main" id="{FE3C6C7D-51C3-4737-B26A-494550FF1D8F}"/>
+              </a:ext>
+            </a:extLst>
+          </p:cNvPr>
+          <p:cNvSpPr>
+            <a:spLocks xmlns:a="http://schemas.openxmlformats.org/drawingml/2006/main" noGrp="1"/>
+          </p:cNvSpPr>
+          <p:nvPr/>
+        </p:nvSpPr>
+        <p:spPr>
+          <a:xfrm xmlns:a="http://schemas.openxmlformats.org/drawingml/2006/main">
+            <a:off x="1247775" y="5781675"/>
+            <a:ext cx="2695575" cy="466725"/>
           </a:xfrm>
           <a:prstGeom xmlns:a="http://schemas.openxmlformats.org/drawingml/2006/main" prst="rect">
             <a:avLst/>
@@ -9718,7 +10412,7 @@
           <a:lstStyle xmlns:a="http://schemas.openxmlformats.org/drawingml/2006/main"/>
           <a:p xmlns:a="http://schemas.openxmlformats.org/drawingml/2006/main">
             <a:pPr>
-              <a:defRPr sz="1650" b="1">
+              <a:defRPr sz="1500">
                 <a:solidFill>
                   <a:srgbClr val="202B36"/>
                 </a:solidFill>
@@ -9728,7 +10422,7 @@
               </a:defRPr>
             </a:pPr>
             <a:r>
-              <a:rPr sz="1650" b="1">
+              <a:rPr sz="1500">
                 <a:solidFill>
                   <a:srgbClr val="202B36"/>
                 </a:solidFill>
@@ -9736,59 +10430,52 @@
                 <a:ea typeface="Calibri"/>
                 <a:cs typeface="Calibri"/>
               </a:rPr>
-              <a:t>Plan</a:t>
-            </a:r>
-          </a:p>
-        </p:txBody>
-      </p:sp>
-      <p:sp>
-        <p:nvSpPr>
-          <p:cNvPr id="81" name="">
-            <a:extLst xmlns:a="http://schemas.openxmlformats.org/drawingml/2006/main">
-              <a:ext uri="{FF2B5EF4-FFF2-40B4-BE49-F238E27FC236}">
-                <a16:creationId xmlns:a16="http://schemas.microsoft.com/office/drawing/2014/main" id="{FF5D8D8B-3710-4E67-9B52-AE8B8AC44AC8}"/>
-              </a:ext>
-            </a:extLst>
-          </p:cNvPr>
-          <p:cNvSpPr>
-            <a:spLocks xmlns:a="http://schemas.openxmlformats.org/drawingml/2006/main" noGrp="1"/>
-          </p:cNvSpPr>
-          <p:nvPr/>
-        </p:nvSpPr>
-        <p:spPr>
-          <a:xfrm xmlns:a="http://schemas.openxmlformats.org/drawingml/2006/main">
-            <a:off x="5962650" y="3419475"/>
-            <a:ext cx="323850" cy="133350"/>
-          </a:xfrm>
-          <a:prstGeom xmlns:a="http://schemas.openxmlformats.org/drawingml/2006/main" prst="rightArrow">
-            <a:avLst/>
-          </a:prstGeom>
-          <a:solidFill xmlns:a="http://schemas.openxmlformats.org/drawingml/2006/main">
-            <a:srgbClr val="266466"/>
-          </a:solidFill>
-          <a:ln xmlns:a="http://schemas.openxmlformats.org/drawingml/2006/main" w="0">
-            <a:noFill/>
-          </a:ln>
-        </p:spPr>
-      </p:sp>
-      <p:sp>
-        <p:nvSpPr>
-          <p:cNvPr id="82" name="rev-104">
-            <a:extLst xmlns:a="http://schemas.openxmlformats.org/drawingml/2006/main">
-              <a:ext uri="{FF2B5EF4-FFF2-40B4-BE49-F238E27FC236}">
-                <a16:creationId xmlns:a16="http://schemas.microsoft.com/office/drawing/2014/main" id="{DB6EB0F8-0FF7-4165-952F-6DB77C87C1A6}"/>
-              </a:ext>
-            </a:extLst>
-          </p:cNvPr>
-          <p:cNvSpPr>
-            <a:spLocks xmlns:a="http://schemas.openxmlformats.org/drawingml/2006/main" noGrp="1"/>
-          </p:cNvSpPr>
-          <p:nvPr/>
-        </p:nvSpPr>
-        <p:spPr>
-          <a:xfrm xmlns:a="http://schemas.openxmlformats.org/drawingml/2006/main">
-            <a:off x="4343400" y="3867150"/>
-            <a:ext cx="3486150" cy="457200"/>
+              <a:t>PII strings in</a:t>
+            </a:r>
+          </a:p>
+          <a:p xmlns:a="http://schemas.openxmlformats.org/drawingml/2006/main">
+            <a:pPr>
+              <a:defRPr sz="1500">
+                <a:solidFill>
+                  <a:srgbClr val="202B36"/>
+                </a:solidFill>
+                <a:latin typeface="Calibri"/>
+                <a:ea typeface="Calibri"/>
+                <a:cs typeface="Calibri"/>
+              </a:defRPr>
+            </a:pPr>
+            <a:r>
+              <a:rPr sz="1500">
+                <a:solidFill>
+                  <a:srgbClr val="202B36"/>
+                </a:solidFill>
+                <a:latin typeface="Calibri"/>
+                <a:ea typeface="Calibri"/>
+                <a:cs typeface="Calibri"/>
+              </a:rPr>
+              <a:t>sent metadata</a:t>
+            </a:r>
+          </a:p>
+        </p:txBody>
+      </p:sp>
+      <p:sp>
+        <p:nvSpPr>
+          <p:cNvPr id="91" name="rev-115">
+            <a:extLst xmlns:a="http://schemas.openxmlformats.org/drawingml/2006/main">
+              <a:ext uri="{FF2B5EF4-FFF2-40B4-BE49-F238E27FC236}">
+                <a16:creationId xmlns:a16="http://schemas.microsoft.com/office/drawing/2014/main" id="{AC0790FD-A7AE-4E3C-9397-86506FF11F21}"/>
+              </a:ext>
+            </a:extLst>
+          </p:cNvPr>
+          <p:cNvSpPr>
+            <a:spLocks xmlns:a="http://schemas.openxmlformats.org/drawingml/2006/main" noGrp="1"/>
+          </p:cNvSpPr>
+          <p:nvPr/>
+        </p:nvSpPr>
+        <p:spPr>
+          <a:xfrm xmlns:a="http://schemas.openxmlformats.org/drawingml/2006/main">
+            <a:off x="4343400" y="5695950"/>
+            <a:ext cx="1428750" cy="533400"/>
           </a:xfrm>
           <a:prstGeom xmlns:a="http://schemas.openxmlformats.org/drawingml/2006/main" prst="rect">
             <a:avLst/>
@@ -9805,77 +10492,47 @@
           <a:lstStyle xmlns:a="http://schemas.openxmlformats.org/drawingml/2006/main"/>
           <a:p xmlns:a="http://schemas.openxmlformats.org/drawingml/2006/main">
             <a:pPr>
-              <a:defRPr sz="1350">
-                <a:solidFill>
-                  <a:srgbClr val="53616D"/>
-                </a:solidFill>
-                <a:latin typeface="Calibri"/>
-                <a:ea typeface="Calibri"/>
-                <a:cs typeface="Calibri"/>
-              </a:defRPr>
-            </a:pPr>
-            <a:r>
-              <a:rPr sz="1350">
-                <a:solidFill>
-                  <a:srgbClr val="53616D"/>
-                </a:solidFill>
-                <a:latin typeface="Calibri"/>
-                <a:ea typeface="Calibri"/>
-                <a:cs typeface="Calibri"/>
-              </a:rPr>
-              <a:t>Filtered request; choose Download</a:t>
-            </a:r>
-          </a:p>
-        </p:txBody>
-      </p:sp>
-      <p:sp>
-        <p:nvSpPr>
-          <p:cNvPr id="83" name="">
-            <a:extLst xmlns:a="http://schemas.openxmlformats.org/drawingml/2006/main">
-              <a:ext uri="{FF2B5EF4-FFF2-40B4-BE49-F238E27FC236}">
-                <a16:creationId xmlns:a16="http://schemas.microsoft.com/office/drawing/2014/main" id="{9FD0D890-BE77-4DB0-9376-17326D932E5A}"/>
-              </a:ext>
-            </a:extLst>
-          </p:cNvPr>
-          <p:cNvSpPr>
-            <a:spLocks xmlns:a="http://schemas.openxmlformats.org/drawingml/2006/main" noGrp="1"/>
-          </p:cNvSpPr>
-          <p:nvPr/>
-        </p:nvSpPr>
-        <p:spPr>
-          <a:xfrm xmlns:a="http://schemas.openxmlformats.org/drawingml/2006/main">
-            <a:off x="7943850" y="3324225"/>
-            <a:ext cx="171450" cy="257175"/>
-          </a:xfrm>
-          <a:prstGeom xmlns:a="http://schemas.openxmlformats.org/drawingml/2006/main" prst="chevron">
-            <a:avLst/>
-          </a:prstGeom>
-          <a:solidFill xmlns:a="http://schemas.openxmlformats.org/drawingml/2006/main">
-            <a:srgbClr val="266466"/>
-          </a:solidFill>
-          <a:ln xmlns:a="http://schemas.openxmlformats.org/drawingml/2006/main" w="0">
-            <a:noFill/>
-          </a:ln>
-        </p:spPr>
-      </p:sp>
-      <p:sp>
-        <p:nvSpPr>
-          <p:cNvPr id="84" name="rev-105">
-            <a:extLst xmlns:a="http://schemas.openxmlformats.org/drawingml/2006/main">
-              <a:ext uri="{FF2B5EF4-FFF2-40B4-BE49-F238E27FC236}">
-                <a16:creationId xmlns:a16="http://schemas.microsoft.com/office/drawing/2014/main" id="{8AB6CB25-829B-4035-85AF-C0F7CBDF3009}"/>
-              </a:ext>
-            </a:extLst>
-          </p:cNvPr>
-          <p:cNvSpPr>
-            <a:spLocks xmlns:a="http://schemas.openxmlformats.org/drawingml/2006/main" noGrp="1"/>
-          </p:cNvSpPr>
-          <p:nvPr/>
-        </p:nvSpPr>
-        <p:spPr>
-          <a:xfrm xmlns:a="http://schemas.openxmlformats.org/drawingml/2006/main">
-            <a:off x="8229600" y="2647950"/>
-            <a:ext cx="581025" cy="447675"/>
+              <a:defRPr sz="3525" b="1">
+                <a:solidFill>
+                  <a:srgbClr val="266466"/>
+                </a:solidFill>
+                <a:latin typeface="Calibri"/>
+                <a:ea typeface="Calibri"/>
+                <a:cs typeface="Calibri"/>
+              </a:defRPr>
+            </a:pPr>
+            <a:r>
+              <a:rPr sz="3525" b="1">
+                <a:solidFill>
+                  <a:srgbClr val="266466"/>
+                </a:solidFill>
+                <a:latin typeface="Calibri"/>
+                <a:ea typeface="Calibri"/>
+                <a:cs typeface="Calibri"/>
+              </a:rPr>
+              <a:t>48/48</a:t>
+            </a:r>
+          </a:p>
+        </p:txBody>
+      </p:sp>
+      <p:sp>
+        <p:nvSpPr>
+          <p:cNvPr id="92" name="rev-116">
+            <a:extLst xmlns:a="http://schemas.openxmlformats.org/drawingml/2006/main">
+              <a:ext uri="{FF2B5EF4-FFF2-40B4-BE49-F238E27FC236}">
+                <a16:creationId xmlns:a16="http://schemas.microsoft.com/office/drawing/2014/main" id="{E9D4D63E-13D4-44D2-A261-F0FE3AC82D56}"/>
+              </a:ext>
+            </a:extLst>
+          </p:cNvPr>
+          <p:cNvSpPr>
+            <a:spLocks xmlns:a="http://schemas.openxmlformats.org/drawingml/2006/main" noGrp="1"/>
+          </p:cNvSpPr>
+          <p:nvPr/>
+        </p:nvSpPr>
+        <p:spPr>
+          <a:xfrm xmlns:a="http://schemas.openxmlformats.org/drawingml/2006/main">
+            <a:off x="6038850" y="5781675"/>
+            <a:ext cx="1952625" cy="466725"/>
           </a:xfrm>
           <a:prstGeom xmlns:a="http://schemas.openxmlformats.org/drawingml/2006/main" prst="rect">
             <a:avLst/>
@@ -9892,47 +10549,70 @@
           <a:lstStyle xmlns:a="http://schemas.openxmlformats.org/drawingml/2006/main"/>
           <a:p xmlns:a="http://schemas.openxmlformats.org/drawingml/2006/main">
             <a:pPr>
-              <a:defRPr sz="2550" b="1">
-                <a:solidFill>
-                  <a:srgbClr val="266466"/>
-                </a:solidFill>
-                <a:latin typeface="Calibri"/>
-                <a:ea typeface="Calibri"/>
-                <a:cs typeface="Calibri"/>
-              </a:defRPr>
-            </a:pPr>
-            <a:r>
-              <a:rPr sz="2550" b="1">
-                <a:solidFill>
-                  <a:srgbClr val="266466"/>
-                </a:solidFill>
-                <a:latin typeface="Calibri"/>
-                <a:ea typeface="Calibri"/>
-                <a:cs typeface="Calibri"/>
-              </a:rPr>
-              <a:t>03</a:t>
-            </a:r>
-          </a:p>
-        </p:txBody>
-      </p:sp>
-      <p:sp>
-        <p:nvSpPr>
-          <p:cNvPr id="85" name="rev-106">
-            <a:extLst xmlns:a="http://schemas.openxmlformats.org/drawingml/2006/main">
-              <a:ext uri="{FF2B5EF4-FFF2-40B4-BE49-F238E27FC236}">
-                <a16:creationId xmlns:a16="http://schemas.microsoft.com/office/drawing/2014/main" id="{B55BDB1D-82E6-4EB5-BE62-1A868E9D2121}"/>
-              </a:ext>
-            </a:extLst>
-          </p:cNvPr>
-          <p:cNvSpPr>
-            <a:spLocks xmlns:a="http://schemas.openxmlformats.org/drawingml/2006/main" noGrp="1"/>
-          </p:cNvSpPr>
-          <p:nvPr/>
-        </p:nvSpPr>
-        <p:spPr>
-          <a:xfrm xmlns:a="http://schemas.openxmlformats.org/drawingml/2006/main">
-            <a:off x="8858250" y="2695575"/>
-            <a:ext cx="2876550" cy="304800"/>
+              <a:defRPr sz="1500">
+                <a:solidFill>
+                  <a:srgbClr val="202B36"/>
+                </a:solidFill>
+                <a:latin typeface="Calibri"/>
+                <a:ea typeface="Calibri"/>
+                <a:cs typeface="Calibri"/>
+              </a:defRPr>
+            </a:pPr>
+            <a:r>
+              <a:rPr sz="1500">
+                <a:solidFill>
+                  <a:srgbClr val="202B36"/>
+                </a:solidFill>
+                <a:latin typeface="Calibri"/>
+                <a:ea typeface="Calibri"/>
+                <a:cs typeface="Calibri"/>
+              </a:rPr>
+              <a:t>Correct Download</a:t>
+            </a:r>
+          </a:p>
+          <a:p xmlns:a="http://schemas.openxmlformats.org/drawingml/2006/main">
+            <a:pPr>
+              <a:defRPr sz="1500">
+                <a:solidFill>
+                  <a:srgbClr val="202B36"/>
+                </a:solidFill>
+                <a:latin typeface="Calibri"/>
+                <a:ea typeface="Calibri"/>
+                <a:cs typeface="Calibri"/>
+              </a:defRPr>
+            </a:pPr>
+            <a:r>
+              <a:rPr sz="1500">
+                <a:solidFill>
+                  <a:srgbClr val="202B36"/>
+                </a:solidFill>
+                <a:latin typeface="Calibri"/>
+                <a:ea typeface="Calibri"/>
+                <a:cs typeface="Calibri"/>
+              </a:rPr>
+              <a:t>targets selected</a:t>
+            </a:r>
+          </a:p>
+        </p:txBody>
+      </p:sp>
+      <p:sp>
+        <p:nvSpPr>
+          <p:cNvPr id="93" name="rev-117">
+            <a:extLst xmlns:a="http://schemas.openxmlformats.org/drawingml/2006/main">
+              <a:ext uri="{FF2B5EF4-FFF2-40B4-BE49-F238E27FC236}">
+                <a16:creationId xmlns:a16="http://schemas.microsoft.com/office/drawing/2014/main" id="{74C50FF4-FB3F-4E9A-87BD-F9C854116D69}"/>
+              </a:ext>
+            </a:extLst>
+          </p:cNvPr>
+          <p:cNvSpPr>
+            <a:spLocks xmlns:a="http://schemas.openxmlformats.org/drawingml/2006/main" noGrp="1"/>
+          </p:cNvSpPr>
+          <p:nvPr/>
+        </p:nvSpPr>
+        <p:spPr>
+          <a:xfrm xmlns:a="http://schemas.openxmlformats.org/drawingml/2006/main">
+            <a:off x="8401050" y="5695950"/>
+            <a:ext cx="1209675" cy="533400"/>
           </a:xfrm>
           <a:prstGeom xmlns:a="http://schemas.openxmlformats.org/drawingml/2006/main" prst="rect">
             <a:avLst/>
@@ -9949,7 +10629,7 @@
           <a:lstStyle xmlns:a="http://schemas.openxmlformats.org/drawingml/2006/main"/>
           <a:p xmlns:a="http://schemas.openxmlformats.org/drawingml/2006/main">
             <a:pPr>
-              <a:defRPr sz="1725" b="1">
+              <a:defRPr sz="3525" b="1">
                 <a:solidFill>
                   <a:srgbClr val="266466"/>
                 </a:solidFill>
@@ -9959,7 +10639,7 @@
               </a:defRPr>
             </a:pPr>
             <a:r>
-              <a:rPr sz="1725" b="1">
+              <a:rPr sz="3525" b="1">
                 <a:solidFill>
                   <a:srgbClr val="266466"/>
                 </a:solidFill>
@@ -9967,61 +10647,29 @@
                 <a:ea typeface="Calibri"/>
                 <a:cs typeface="Calibri"/>
               </a:rPr>
-              <a:t>Act and confirm</a:t>
-            </a:r>
-          </a:p>
-        </p:txBody>
-      </p:sp>
-      <p:sp>
-        <p:nvSpPr>
-          <p:cNvPr id="86" name="rev-107">
-            <a:extLst xmlns:a="http://schemas.openxmlformats.org/drawingml/2006/main">
-              <a:ext uri="{FF2B5EF4-FFF2-40B4-BE49-F238E27FC236}">
-                <a16:creationId xmlns:a16="http://schemas.microsoft.com/office/drawing/2014/main" id="{E046A72D-EFE3-42E6-AFB7-171F5D2943A3}"/>
-              </a:ext>
-            </a:extLst>
-          </p:cNvPr>
-          <p:cNvSpPr>
-            <a:spLocks xmlns:a="http://schemas.openxmlformats.org/drawingml/2006/main" noGrp="1"/>
-          </p:cNvSpPr>
-          <p:nvPr/>
-        </p:nvSpPr>
-        <p:spPr>
-          <a:xfrm xmlns:a="http://schemas.openxmlformats.org/drawingml/2006/main">
-            <a:off x="8229600" y="3152775"/>
-            <a:ext cx="3486150" cy="609600"/>
-          </a:xfrm>
-          <a:prstGeom xmlns:a="http://schemas.openxmlformats.org/drawingml/2006/main" prst="rect">
-            <a:avLst/>
-          </a:prstGeom>
-          <a:solidFill xmlns:a="http://schemas.openxmlformats.org/drawingml/2006/main">
-            <a:srgbClr val="EAF3F3"/>
-          </a:solidFill>
-          <a:ln xmlns:a="http://schemas.openxmlformats.org/drawingml/2006/main" w="9525">
-            <a:solidFill>
-              <a:srgbClr val="EAF3F3"/>
-            </a:solidFill>
-          </a:ln>
-        </p:spPr>
-      </p:sp>
-      <p:sp>
-        <p:nvSpPr>
-          <p:cNvPr id="87" name="rev-108">
-            <a:extLst xmlns:a="http://schemas.openxmlformats.org/drawingml/2006/main">
-              <a:ext uri="{FF2B5EF4-FFF2-40B4-BE49-F238E27FC236}">
-                <a16:creationId xmlns:a16="http://schemas.microsoft.com/office/drawing/2014/main" id="{AC535D08-F35A-4B25-B7C3-CAD438D863C6}"/>
-              </a:ext>
-            </a:extLst>
-          </p:cNvPr>
-          <p:cNvSpPr>
-            <a:spLocks xmlns:a="http://schemas.openxmlformats.org/drawingml/2006/main" noGrp="1"/>
-          </p:cNvSpPr>
-          <p:nvPr/>
-        </p:nvSpPr>
-        <p:spPr>
-          <a:xfrm xmlns:a="http://schemas.openxmlformats.org/drawingml/2006/main">
-            <a:off x="8401050" y="3333750"/>
-            <a:ext cx="1314450" cy="276225"/>
+              <a:t>51%</a:t>
+            </a:r>
+          </a:p>
+        </p:txBody>
+      </p:sp>
+      <p:sp>
+        <p:nvSpPr>
+          <p:cNvPr id="94" name="rev-118">
+            <a:extLst xmlns:a="http://schemas.openxmlformats.org/drawingml/2006/main">
+              <a:ext uri="{FF2B5EF4-FFF2-40B4-BE49-F238E27FC236}">
+                <a16:creationId xmlns:a16="http://schemas.microsoft.com/office/drawing/2014/main" id="{33A9FD6B-7C7D-4D5E-859D-61F2A0934105}"/>
+              </a:ext>
+            </a:extLst>
+          </p:cNvPr>
+          <p:cNvSpPr>
+            <a:spLocks xmlns:a="http://schemas.openxmlformats.org/drawingml/2006/main" noGrp="1"/>
+          </p:cNvSpPr>
+          <p:nvPr/>
+        </p:nvSpPr>
+        <p:spPr>
+          <a:xfrm xmlns:a="http://schemas.openxmlformats.org/drawingml/2006/main">
+            <a:off x="9820275" y="5781675"/>
+            <a:ext cx="1914525" cy="466725"/>
           </a:xfrm>
           <a:prstGeom xmlns:a="http://schemas.openxmlformats.org/drawingml/2006/main" prst="rect">
             <a:avLst/>
@@ -10038,7 +10686,7 @@
           <a:lstStyle xmlns:a="http://schemas.openxmlformats.org/drawingml/2006/main"/>
           <a:p xmlns:a="http://schemas.openxmlformats.org/drawingml/2006/main">
             <a:pPr>
-              <a:defRPr sz="1650" b="1">
+              <a:defRPr sz="1500">
                 <a:solidFill>
                   <a:srgbClr val="202B36"/>
                 </a:solidFill>
@@ -10048,7 +10696,7 @@
               </a:defRPr>
             </a:pPr>
             <a:r>
-              <a:rPr sz="1650" b="1">
+              <a:rPr sz="1500">
                 <a:solidFill>
                   <a:srgbClr val="202B36"/>
                 </a:solidFill>
@@ -10056,29 +10704,52 @@
                 <a:ea typeface="Calibri"/>
                 <a:cs typeface="Calibri"/>
               </a:rPr>
-              <a:t>Execute</a:t>
-            </a:r>
-          </a:p>
-        </p:txBody>
-      </p:sp>
-      <p:sp>
-        <p:nvSpPr>
-          <p:cNvPr id="88" name="rev-109">
-            <a:extLst xmlns:a="http://schemas.openxmlformats.org/drawingml/2006/main">
-              <a:ext uri="{FF2B5EF4-FFF2-40B4-BE49-F238E27FC236}">
-                <a16:creationId xmlns:a16="http://schemas.microsoft.com/office/drawing/2014/main" id="{F733BFC4-2F83-4C60-9170-33F0D85ABC61}"/>
-              </a:ext>
-            </a:extLst>
-          </p:cNvPr>
-          <p:cNvSpPr>
-            <a:spLocks xmlns:a="http://schemas.openxmlformats.org/drawingml/2006/main" noGrp="1"/>
-          </p:cNvSpPr>
-          <p:nvPr/>
-        </p:nvSpPr>
-        <p:spPr>
-          <a:xfrm xmlns:a="http://schemas.openxmlformats.org/drawingml/2006/main">
-            <a:off x="10363200" y="3333750"/>
-            <a:ext cx="1266825" cy="276225"/>
+              <a:t>Lower Python CPU</a:t>
+            </a:r>
+          </a:p>
+          <a:p xmlns:a="http://schemas.openxmlformats.org/drawingml/2006/main">
+            <a:pPr>
+              <a:defRPr sz="1500">
+                <a:solidFill>
+                  <a:srgbClr val="202B36"/>
+                </a:solidFill>
+                <a:latin typeface="Calibri"/>
+                <a:ea typeface="Calibri"/>
+                <a:cs typeface="Calibri"/>
+              </a:defRPr>
+            </a:pPr>
+            <a:r>
+              <a:rPr sz="1500">
+                <a:solidFill>
+                  <a:srgbClr val="202B36"/>
+                </a:solidFill>
+                <a:latin typeface="Calibri"/>
+                <a:ea typeface="Calibri"/>
+                <a:cs typeface="Calibri"/>
+              </a:rPr>
+              <a:t>time per page</a:t>
+            </a:r>
+          </a:p>
+        </p:txBody>
+      </p:sp>
+      <p:sp>
+        <p:nvSpPr>
+          <p:cNvPr id="95" name="rev-119">
+            <a:extLst xmlns:a="http://schemas.openxmlformats.org/drawingml/2006/main">
+              <a:ext uri="{FF2B5EF4-FFF2-40B4-BE49-F238E27FC236}">
+                <a16:creationId xmlns:a16="http://schemas.microsoft.com/office/drawing/2014/main" id="{BDCCBF1A-4A16-49B8-8A5A-865BACFAFC9E}"/>
+              </a:ext>
+            </a:extLst>
+          </p:cNvPr>
+          <p:cNvSpPr>
+            <a:spLocks xmlns:a="http://schemas.openxmlformats.org/drawingml/2006/main" noGrp="1"/>
+          </p:cNvSpPr>
+          <p:nvPr/>
+        </p:nvSpPr>
+        <p:spPr>
+          <a:xfrm xmlns:a="http://schemas.openxmlformats.org/drawingml/2006/main">
+            <a:off x="457200" y="6286500"/>
+            <a:ext cx="11277600" cy="161925"/>
           </a:xfrm>
           <a:prstGeom xmlns:a="http://schemas.openxmlformats.org/drawingml/2006/main" prst="rect">
             <a:avLst/>
@@ -10095,94 +10766,7 @@
           <a:lstStyle xmlns:a="http://schemas.openxmlformats.org/drawingml/2006/main"/>
           <a:p xmlns:a="http://schemas.openxmlformats.org/drawingml/2006/main">
             <a:pPr>
-              <a:defRPr sz="1650" b="1">
-                <a:solidFill>
-                  <a:srgbClr val="202B36"/>
-                </a:solidFill>
-                <a:latin typeface="Calibri"/>
-                <a:ea typeface="Calibri"/>
-                <a:cs typeface="Calibri"/>
-              </a:defRPr>
-            </a:pPr>
-            <a:r>
-              <a:rPr sz="1650" b="1">
-                <a:solidFill>
-                  <a:srgbClr val="202B36"/>
-                </a:solidFill>
-                <a:latin typeface="Calibri"/>
-                <a:ea typeface="Calibri"/>
-                <a:cs typeface="Calibri"/>
-              </a:rPr>
-              <a:t>Verify</a:t>
-            </a:r>
-          </a:p>
-        </p:txBody>
-      </p:sp>
-      <p:sp>
-        <p:nvSpPr>
-          <p:cNvPr id="89" name="">
-            <a:extLst xmlns:a="http://schemas.openxmlformats.org/drawingml/2006/main">
-              <a:ext uri="{FF2B5EF4-FFF2-40B4-BE49-F238E27FC236}">
-                <a16:creationId xmlns:a16="http://schemas.microsoft.com/office/drawing/2014/main" id="{5E3A92B1-65DA-4B0E-9735-509197086B11}"/>
-              </a:ext>
-            </a:extLst>
-          </p:cNvPr>
-          <p:cNvSpPr>
-            <a:spLocks xmlns:a="http://schemas.openxmlformats.org/drawingml/2006/main" noGrp="1"/>
-          </p:cNvSpPr>
-          <p:nvPr/>
-        </p:nvSpPr>
-        <p:spPr>
-          <a:xfrm xmlns:a="http://schemas.openxmlformats.org/drawingml/2006/main">
-            <a:off x="9848850" y="3419475"/>
-            <a:ext cx="323850" cy="133350"/>
-          </a:xfrm>
-          <a:prstGeom xmlns:a="http://schemas.openxmlformats.org/drawingml/2006/main" prst="rightArrow">
-            <a:avLst/>
-          </a:prstGeom>
-          <a:solidFill xmlns:a="http://schemas.openxmlformats.org/drawingml/2006/main">
-            <a:srgbClr val="266466"/>
-          </a:solidFill>
-          <a:ln xmlns:a="http://schemas.openxmlformats.org/drawingml/2006/main" w="0">
-            <a:noFill/>
-          </a:ln>
-        </p:spPr>
-      </p:sp>
-      <p:sp>
-        <p:nvSpPr>
-          <p:cNvPr id="90" name="rev-110">
-            <a:extLst xmlns:a="http://schemas.openxmlformats.org/drawingml/2006/main">
-              <a:ext uri="{FF2B5EF4-FFF2-40B4-BE49-F238E27FC236}">
-                <a16:creationId xmlns:a16="http://schemas.microsoft.com/office/drawing/2014/main" id="{D8B879C5-5044-4AF0-A04E-7BA760625B2A}"/>
-              </a:ext>
-            </a:extLst>
-          </p:cNvPr>
-          <p:cNvSpPr>
-            <a:spLocks xmlns:a="http://schemas.openxmlformats.org/drawingml/2006/main" noGrp="1"/>
-          </p:cNvSpPr>
-          <p:nvPr/>
-        </p:nvSpPr>
-        <p:spPr>
-          <a:xfrm xmlns:a="http://schemas.openxmlformats.org/drawingml/2006/main">
-            <a:off x="8229600" y="3867150"/>
-            <a:ext cx="3486150" cy="457200"/>
-          </a:xfrm>
-          <a:prstGeom xmlns:a="http://schemas.openxmlformats.org/drawingml/2006/main" prst="rect">
-            <a:avLst/>
-          </a:prstGeom>
-          <a:noFill xmlns:a="http://schemas.openxmlformats.org/drawingml/2006/main"/>
-          <a:ln xmlns:a="http://schemas.openxmlformats.org/drawingml/2006/main" w="0">
-            <a:noFill/>
-          </a:ln>
-        </p:spPr>
-        <p:txBody>
-          <a:bodyPr xmlns:a="http://schemas.openxmlformats.org/drawingml/2006/main" wrap="square" lIns="0" tIns="0" rIns="0" bIns="0" anchor="t">
-            <a:noAutofit/>
-          </a:bodyPr>
-          <a:lstStyle xmlns:a="http://schemas.openxmlformats.org/drawingml/2006/main"/>
-          <a:p xmlns:a="http://schemas.openxmlformats.org/drawingml/2006/main">
-            <a:pPr>
-              <a:defRPr sz="1350">
+              <a:defRPr sz="938">
                 <a:solidFill>
                   <a:srgbClr val="53616D"/>
                 </a:solidFill>
@@ -10192,7 +10776,7 @@
               </a:defRPr>
             </a:pPr>
             <a:r>
-              <a:rPr sz="1350">
+              <a:rPr sz="938">
                 <a:solidFill>
                   <a:srgbClr val="53616D"/>
                 </a:solidFill>
@@ -10200,892 +10784,7 @@
                 <a:ea typeface="Calibri"/>
                 <a:cs typeface="Calibri"/>
               </a:rPr>
-              <a:t>Guarded click; confirm download</a:t>
-            </a:r>
-          </a:p>
-        </p:txBody>
-      </p:sp>
-      <p:sp>
-        <p:nvSpPr>
-          <p:cNvPr id="91" name="rev-111">
-            <a:extLst xmlns:a="http://schemas.openxmlformats.org/drawingml/2006/main">
-              <a:ext uri="{FF2B5EF4-FFF2-40B4-BE49-F238E27FC236}">
-                <a16:creationId xmlns:a16="http://schemas.microsoft.com/office/drawing/2014/main" id="{22B3D8C1-31EB-4ACB-A655-2405561557AE}"/>
-              </a:ext>
-            </a:extLst>
-          </p:cNvPr>
-          <p:cNvSpPr>
-            <a:spLocks xmlns:a="http://schemas.openxmlformats.org/drawingml/2006/main" noGrp="1"/>
-          </p:cNvSpPr>
-          <p:nvPr/>
-        </p:nvSpPr>
-        <p:spPr>
-          <a:xfrm xmlns:a="http://schemas.openxmlformats.org/drawingml/2006/main">
-            <a:off x="457200" y="4419600"/>
-            <a:ext cx="7334250" cy="257175"/>
-          </a:xfrm>
-          <a:prstGeom xmlns:a="http://schemas.openxmlformats.org/drawingml/2006/main" prst="rect">
-            <a:avLst/>
-          </a:prstGeom>
-          <a:noFill xmlns:a="http://schemas.openxmlformats.org/drawingml/2006/main"/>
-          <a:ln xmlns:a="http://schemas.openxmlformats.org/drawingml/2006/main" w="0">
-            <a:noFill/>
-          </a:ln>
-        </p:spPr>
-        <p:txBody>
-          <a:bodyPr xmlns:a="http://schemas.openxmlformats.org/drawingml/2006/main" wrap="square" lIns="0" tIns="0" rIns="0" bIns="0" anchor="t">
-            <a:noAutofit/>
-          </a:bodyPr>
-          <a:lstStyle xmlns:a="http://schemas.openxmlformats.org/drawingml/2006/main"/>
-          <a:p xmlns:a="http://schemas.openxmlformats.org/drawingml/2006/main">
-            <a:pPr>
-              <a:defRPr sz="1275" b="1">
-                <a:solidFill>
-                  <a:srgbClr val="266466"/>
-                </a:solidFill>
-                <a:latin typeface="Calibri"/>
-                <a:ea typeface="Calibri"/>
-                <a:cs typeface="Calibri"/>
-              </a:defRPr>
-            </a:pPr>
-            <a:r>
-              <a:rPr sz="1275" b="1">
-                <a:solidFill>
-                  <a:srgbClr val="266466"/>
-                </a:solidFill>
-                <a:latin typeface="Calibri"/>
-                <a:ea typeface="Calibri"/>
-                <a:cs typeface="Calibri"/>
-              </a:rPr>
-              <a:t>CPU harness: 48 pages, sanitized context sent and target selected</a:t>
-            </a:r>
-          </a:p>
-        </p:txBody>
-      </p:sp>
-      <p:sp>
-        <p:nvSpPr>
-          <p:cNvPr id="92" name="rev-112">
-            <a:extLst xmlns:a="http://schemas.openxmlformats.org/drawingml/2006/main">
-              <a:ext uri="{FF2B5EF4-FFF2-40B4-BE49-F238E27FC236}">
-                <a16:creationId xmlns:a16="http://schemas.microsoft.com/office/drawing/2014/main" id="{F0E9C594-8CCA-45EE-A608-C85F42EA8850}"/>
-              </a:ext>
-            </a:extLst>
-          </p:cNvPr>
-          <p:cNvSpPr>
-            <a:spLocks xmlns:a="http://schemas.openxmlformats.org/drawingml/2006/main" noGrp="1"/>
-          </p:cNvSpPr>
-          <p:nvPr/>
-        </p:nvSpPr>
-        <p:spPr>
-          <a:xfrm xmlns:a="http://schemas.openxmlformats.org/drawingml/2006/main">
-            <a:off x="8229600" y="4419600"/>
-            <a:ext cx="3505200" cy="257175"/>
-          </a:xfrm>
-          <a:prstGeom xmlns:a="http://schemas.openxmlformats.org/drawingml/2006/main" prst="rect">
-            <a:avLst/>
-          </a:prstGeom>
-          <a:noFill xmlns:a="http://schemas.openxmlformats.org/drawingml/2006/main"/>
-          <a:ln xmlns:a="http://schemas.openxmlformats.org/drawingml/2006/main" w="0">
-            <a:noFill/>
-          </a:ln>
-        </p:spPr>
-        <p:txBody>
-          <a:bodyPr xmlns:a="http://schemas.openxmlformats.org/drawingml/2006/main" wrap="square" lIns="0" tIns="0" rIns="0" bIns="0" anchor="t">
-            <a:noAutofit/>
-          </a:bodyPr>
-          <a:lstStyle xmlns:a="http://schemas.openxmlformats.org/drawingml/2006/main"/>
-          <a:p xmlns:a="http://schemas.openxmlformats.org/drawingml/2006/main">
-            <a:pPr>
-              <a:defRPr sz="1275" b="1">
-                <a:solidFill>
-                  <a:srgbClr val="266466"/>
-                </a:solidFill>
-                <a:latin typeface="Calibri"/>
-                <a:ea typeface="Calibri"/>
-                <a:cs typeface="Calibri"/>
-              </a:defRPr>
-            </a:pPr>
-            <a:r>
-              <a:rPr sz="1275" b="1">
-                <a:solidFill>
-                  <a:srgbClr val="266466"/>
-                </a:solidFill>
-                <a:latin typeface="Calibri"/>
-                <a:ea typeface="Calibri"/>
-                <a:cs typeface="Calibri"/>
-              </a:rPr>
-              <a:t>Demo flow; completion timing pending</a:t>
-            </a:r>
-          </a:p>
-        </p:txBody>
-      </p:sp>
-      <p:sp>
-        <p:nvSpPr>
-          <p:cNvPr id="93" name="rev-113">
-            <a:extLst xmlns:a="http://schemas.openxmlformats.org/drawingml/2006/main">
-              <a:ext uri="{FF2B5EF4-FFF2-40B4-BE49-F238E27FC236}">
-                <a16:creationId xmlns:a16="http://schemas.microsoft.com/office/drawing/2014/main" id="{C06FF758-F807-4041-915C-4C7D13EA9888}"/>
-              </a:ext>
-            </a:extLst>
-          </p:cNvPr>
-          <p:cNvSpPr>
-            <a:spLocks xmlns:a="http://schemas.openxmlformats.org/drawingml/2006/main" noGrp="1"/>
-          </p:cNvSpPr>
-          <p:nvPr/>
-        </p:nvSpPr>
-        <p:spPr>
-          <a:xfrm xmlns:a="http://schemas.openxmlformats.org/drawingml/2006/main">
-            <a:off x="457200" y="4810125"/>
-            <a:ext cx="11277600" cy="0"/>
-          </a:xfrm>
-          <a:prstGeom xmlns:a="http://schemas.openxmlformats.org/drawingml/2006/main" prst="line">
-            <a:avLst/>
-          </a:prstGeom>
-          <a:noFill xmlns:a="http://schemas.openxmlformats.org/drawingml/2006/main"/>
-          <a:ln xmlns:a="http://schemas.openxmlformats.org/drawingml/2006/main" w="9525">
-            <a:solidFill>
-              <a:srgbClr val="CBD3DA"/>
-            </a:solidFill>
-          </a:ln>
-        </p:spPr>
-      </p:sp>
-      <p:sp>
-        <p:nvSpPr>
-          <p:cNvPr id="94" name="rev-114">
-            <a:extLst xmlns:a="http://schemas.openxmlformats.org/drawingml/2006/main">
-              <a:ext uri="{FF2B5EF4-FFF2-40B4-BE49-F238E27FC236}">
-                <a16:creationId xmlns:a16="http://schemas.microsoft.com/office/drawing/2014/main" id="{1CF3CF65-5FFD-4C94-889F-BF9820809E66}"/>
-              </a:ext>
-            </a:extLst>
-          </p:cNvPr>
-          <p:cNvSpPr>
-            <a:spLocks xmlns:a="http://schemas.openxmlformats.org/drawingml/2006/main" noGrp="1"/>
-          </p:cNvSpPr>
-          <p:nvPr/>
-        </p:nvSpPr>
-        <p:spPr>
-          <a:xfrm xmlns:a="http://schemas.openxmlformats.org/drawingml/2006/main">
-            <a:off x="457200" y="4991100"/>
-            <a:ext cx="11049000" cy="247650"/>
-          </a:xfrm>
-          <a:prstGeom xmlns:a="http://schemas.openxmlformats.org/drawingml/2006/main" prst="rect">
-            <a:avLst/>
-          </a:prstGeom>
-          <a:noFill xmlns:a="http://schemas.openxmlformats.org/drawingml/2006/main"/>
-          <a:ln xmlns:a="http://schemas.openxmlformats.org/drawingml/2006/main" w="0">
-            <a:noFill/>
-          </a:ln>
-        </p:spPr>
-        <p:txBody>
-          <a:bodyPr xmlns:a="http://schemas.openxmlformats.org/drawingml/2006/main" wrap="square" lIns="0" tIns="0" rIns="0" bIns="0" anchor="t">
-            <a:noAutofit/>
-          </a:bodyPr>
-          <a:lstStyle xmlns:a="http://schemas.openxmlformats.org/drawingml/2006/main"/>
-          <a:p xmlns:a="http://schemas.openxmlformats.org/drawingml/2006/main">
-            <a:pPr>
-              <a:defRPr sz="1500" b="1">
-                <a:solidFill>
-                  <a:srgbClr val="266466"/>
-                </a:solidFill>
-                <a:latin typeface="Calibri"/>
-                <a:ea typeface="Calibri"/>
-                <a:cs typeface="Calibri"/>
-              </a:defRPr>
-            </a:pPr>
-            <a:r>
-              <a:rPr sz="1500" b="1">
-                <a:solidFill>
-                  <a:srgbClr val="266466"/>
-                </a:solidFill>
-                <a:latin typeface="Calibri"/>
-                <a:ea typeface="Calibri"/>
-                <a:cs typeface="Calibri"/>
-              </a:rPr>
-              <a:t>Benefits of the solution</a:t>
-            </a:r>
-          </a:p>
-        </p:txBody>
-      </p:sp>
-      <p:sp>
-        <p:nvSpPr>
-          <p:cNvPr id="95" name="rev-115">
-            <a:extLst xmlns:a="http://schemas.openxmlformats.org/drawingml/2006/main">
-              <a:ext uri="{FF2B5EF4-FFF2-40B4-BE49-F238E27FC236}">
-                <a16:creationId xmlns:a16="http://schemas.microsoft.com/office/drawing/2014/main" id="{A42FCA48-51ED-4F9A-820D-031C04B6659B}"/>
-              </a:ext>
-            </a:extLst>
-          </p:cNvPr>
-          <p:cNvSpPr>
-            <a:spLocks xmlns:a="http://schemas.openxmlformats.org/drawingml/2006/main" noGrp="1"/>
-          </p:cNvSpPr>
-          <p:nvPr/>
-        </p:nvSpPr>
-        <p:spPr>
-          <a:xfrm xmlns:a="http://schemas.openxmlformats.org/drawingml/2006/main">
-            <a:off x="457200" y="5400675"/>
-            <a:ext cx="2600325" cy="209550"/>
-          </a:xfrm>
-          <a:prstGeom xmlns:a="http://schemas.openxmlformats.org/drawingml/2006/main" prst="rect">
-            <a:avLst/>
-          </a:prstGeom>
-          <a:noFill xmlns:a="http://schemas.openxmlformats.org/drawingml/2006/main"/>
-          <a:ln xmlns:a="http://schemas.openxmlformats.org/drawingml/2006/main" w="0">
-            <a:noFill/>
-          </a:ln>
-        </p:spPr>
-        <p:txBody>
-          <a:bodyPr xmlns:a="http://schemas.openxmlformats.org/drawingml/2006/main" wrap="square" lIns="0" tIns="0" rIns="0" bIns="0" anchor="t">
-            <a:noAutofit/>
-          </a:bodyPr>
-          <a:lstStyle xmlns:a="http://schemas.openxmlformats.org/drawingml/2006/main"/>
-          <a:p xmlns:a="http://schemas.openxmlformats.org/drawingml/2006/main">
-            <a:pPr>
-              <a:defRPr sz="1200" b="1">
-                <a:solidFill>
-                  <a:srgbClr val="53616D"/>
-                </a:solidFill>
-                <a:latin typeface="Calibri"/>
-                <a:ea typeface="Calibri"/>
-                <a:cs typeface="Calibri"/>
-              </a:defRPr>
-            </a:pPr>
-            <a:r>
-              <a:rPr sz="1200" b="1">
-                <a:solidFill>
-                  <a:srgbClr val="53616D"/>
-                </a:solidFill>
-                <a:latin typeface="Calibri"/>
-                <a:ea typeface="Calibri"/>
-                <a:cs typeface="Calibri"/>
-              </a:rPr>
-              <a:t>PRIVACY</a:t>
-            </a:r>
-          </a:p>
-        </p:txBody>
-      </p:sp>
-      <p:sp>
-        <p:nvSpPr>
-          <p:cNvPr id="96" name="rev-116">
-            <a:extLst xmlns:a="http://schemas.openxmlformats.org/drawingml/2006/main">
-              <a:ext uri="{FF2B5EF4-FFF2-40B4-BE49-F238E27FC236}">
-                <a16:creationId xmlns:a16="http://schemas.microsoft.com/office/drawing/2014/main" id="{45B27709-6EE8-496F-B510-71CD8BD232CB}"/>
-              </a:ext>
-            </a:extLst>
-          </p:cNvPr>
-          <p:cNvSpPr>
-            <a:spLocks xmlns:a="http://schemas.openxmlformats.org/drawingml/2006/main" noGrp="1"/>
-          </p:cNvSpPr>
-          <p:nvPr/>
-        </p:nvSpPr>
-        <p:spPr>
-          <a:xfrm xmlns:a="http://schemas.openxmlformats.org/drawingml/2006/main">
-            <a:off x="457200" y="5648325"/>
-            <a:ext cx="2600325" cy="400050"/>
-          </a:xfrm>
-          <a:prstGeom xmlns:a="http://schemas.openxmlformats.org/drawingml/2006/main" prst="rect">
-            <a:avLst/>
-          </a:prstGeom>
-          <a:noFill xmlns:a="http://schemas.openxmlformats.org/drawingml/2006/main"/>
-          <a:ln xmlns:a="http://schemas.openxmlformats.org/drawingml/2006/main" w="0">
-            <a:noFill/>
-          </a:ln>
-        </p:spPr>
-        <p:txBody>
-          <a:bodyPr xmlns:a="http://schemas.openxmlformats.org/drawingml/2006/main" wrap="square" lIns="0" tIns="0" rIns="0" bIns="0" anchor="t">
-            <a:noAutofit/>
-          </a:bodyPr>
-          <a:lstStyle xmlns:a="http://schemas.openxmlformats.org/drawingml/2006/main"/>
-          <a:p xmlns:a="http://schemas.openxmlformats.org/drawingml/2006/main">
-            <a:pPr>
-              <a:defRPr sz="2550" b="1">
-                <a:solidFill>
-                  <a:srgbClr val="266466"/>
-                </a:solidFill>
-                <a:latin typeface="Calibri"/>
-                <a:ea typeface="Calibri"/>
-                <a:cs typeface="Calibri"/>
-              </a:defRPr>
-            </a:pPr>
-            <a:r>
-              <a:rPr sz="2550" b="1">
-                <a:solidFill>
-                  <a:srgbClr val="266466"/>
-                </a:solidFill>
-                <a:latin typeface="Calibri"/>
-                <a:ea typeface="Calibri"/>
-                <a:cs typeface="Calibri"/>
-              </a:rPr>
-              <a:t>0</a:t>
-            </a:r>
-          </a:p>
-        </p:txBody>
-      </p:sp>
-      <p:sp>
-        <p:nvSpPr>
-          <p:cNvPr id="97" name="rev-117">
-            <a:extLst xmlns:a="http://schemas.openxmlformats.org/drawingml/2006/main">
-              <a:ext uri="{FF2B5EF4-FFF2-40B4-BE49-F238E27FC236}">
-                <a16:creationId xmlns:a16="http://schemas.microsoft.com/office/drawing/2014/main" id="{962C3718-6CA0-4DEC-8A35-8057C259396D}"/>
-              </a:ext>
-            </a:extLst>
-          </p:cNvPr>
-          <p:cNvSpPr>
-            <a:spLocks xmlns:a="http://schemas.openxmlformats.org/drawingml/2006/main" noGrp="1"/>
-          </p:cNvSpPr>
-          <p:nvPr/>
-        </p:nvSpPr>
-        <p:spPr>
-          <a:xfrm xmlns:a="http://schemas.openxmlformats.org/drawingml/2006/main">
-            <a:off x="457200" y="6067425"/>
-            <a:ext cx="2667000" cy="219075"/>
-          </a:xfrm>
-          <a:prstGeom xmlns:a="http://schemas.openxmlformats.org/drawingml/2006/main" prst="rect">
-            <a:avLst/>
-          </a:prstGeom>
-          <a:noFill xmlns:a="http://schemas.openxmlformats.org/drawingml/2006/main"/>
-          <a:ln xmlns:a="http://schemas.openxmlformats.org/drawingml/2006/main" w="0">
-            <a:noFill/>
-          </a:ln>
-        </p:spPr>
-        <p:txBody>
-          <a:bodyPr xmlns:a="http://schemas.openxmlformats.org/drawingml/2006/main" wrap="square" lIns="0" tIns="0" rIns="0" bIns="0" anchor="t">
-            <a:noAutofit/>
-          </a:bodyPr>
-          <a:lstStyle xmlns:a="http://schemas.openxmlformats.org/drawingml/2006/main"/>
-          <a:p xmlns:a="http://schemas.openxmlformats.org/drawingml/2006/main">
-            <a:pPr>
-              <a:defRPr sz="1275">
-                <a:solidFill>
-                  <a:srgbClr val="202B36"/>
-                </a:solidFill>
-                <a:latin typeface="Calibri"/>
-                <a:ea typeface="Calibri"/>
-                <a:cs typeface="Calibri"/>
-              </a:defRPr>
-            </a:pPr>
-            <a:r>
-              <a:rPr sz="1275">
-                <a:solidFill>
-                  <a:srgbClr val="202B36"/>
-                </a:solidFill>
-                <a:latin typeface="Calibri"/>
-                <a:ea typeface="Calibri"/>
-                <a:cs typeface="Calibri"/>
-              </a:rPr>
-              <a:t>PII strings in sent metadata</a:t>
-            </a:r>
-          </a:p>
-        </p:txBody>
-      </p:sp>
-      <p:sp>
-        <p:nvSpPr>
-          <p:cNvPr id="98" name="rev-118">
-            <a:extLst xmlns:a="http://schemas.openxmlformats.org/drawingml/2006/main">
-              <a:ext uri="{FF2B5EF4-FFF2-40B4-BE49-F238E27FC236}">
-                <a16:creationId xmlns:a16="http://schemas.microsoft.com/office/drawing/2014/main" id="{812DE7C5-3E4C-470D-BECC-BE0E96177BF3}"/>
-              </a:ext>
-            </a:extLst>
-          </p:cNvPr>
-          <p:cNvSpPr>
-            <a:spLocks xmlns:a="http://schemas.openxmlformats.org/drawingml/2006/main" noGrp="1"/>
-          </p:cNvSpPr>
-          <p:nvPr/>
-        </p:nvSpPr>
-        <p:spPr>
-          <a:xfrm xmlns:a="http://schemas.openxmlformats.org/drawingml/2006/main">
-            <a:off x="3333750" y="5400675"/>
-            <a:ext cx="2600325" cy="209550"/>
-          </a:xfrm>
-          <a:prstGeom xmlns:a="http://schemas.openxmlformats.org/drawingml/2006/main" prst="rect">
-            <a:avLst/>
-          </a:prstGeom>
-          <a:noFill xmlns:a="http://schemas.openxmlformats.org/drawingml/2006/main"/>
-          <a:ln xmlns:a="http://schemas.openxmlformats.org/drawingml/2006/main" w="0">
-            <a:noFill/>
-          </a:ln>
-        </p:spPr>
-        <p:txBody>
-          <a:bodyPr xmlns:a="http://schemas.openxmlformats.org/drawingml/2006/main" wrap="square" lIns="0" tIns="0" rIns="0" bIns="0" anchor="t">
-            <a:noAutofit/>
-          </a:bodyPr>
-          <a:lstStyle xmlns:a="http://schemas.openxmlformats.org/drawingml/2006/main"/>
-          <a:p xmlns:a="http://schemas.openxmlformats.org/drawingml/2006/main">
-            <a:pPr>
-              <a:defRPr sz="1200" b="1">
-                <a:solidFill>
-                  <a:srgbClr val="53616D"/>
-                </a:solidFill>
-                <a:latin typeface="Calibri"/>
-                <a:ea typeface="Calibri"/>
-                <a:cs typeface="Calibri"/>
-              </a:defRPr>
-            </a:pPr>
-            <a:r>
-              <a:rPr sz="1200" b="1">
-                <a:solidFill>
-                  <a:srgbClr val="53616D"/>
-                </a:solidFill>
-                <a:latin typeface="Calibri"/>
-                <a:ea typeface="Calibri"/>
-                <a:cs typeface="Calibri"/>
-              </a:rPr>
-              <a:t>SPEED</a:t>
-            </a:r>
-          </a:p>
-        </p:txBody>
-      </p:sp>
-      <p:sp>
-        <p:nvSpPr>
-          <p:cNvPr id="99" name="rev-119">
-            <a:extLst xmlns:a="http://schemas.openxmlformats.org/drawingml/2006/main">
-              <a:ext uri="{FF2B5EF4-FFF2-40B4-BE49-F238E27FC236}">
-                <a16:creationId xmlns:a16="http://schemas.microsoft.com/office/drawing/2014/main" id="{DABF5BE9-622A-4FC6-87DB-545255A7AE7A}"/>
-              </a:ext>
-            </a:extLst>
-          </p:cNvPr>
-          <p:cNvSpPr>
-            <a:spLocks xmlns:a="http://schemas.openxmlformats.org/drawingml/2006/main" noGrp="1"/>
-          </p:cNvSpPr>
-          <p:nvPr/>
-        </p:nvSpPr>
-        <p:spPr>
-          <a:xfrm xmlns:a="http://schemas.openxmlformats.org/drawingml/2006/main">
-            <a:off x="3333750" y="5648325"/>
-            <a:ext cx="2600325" cy="400050"/>
-          </a:xfrm>
-          <a:prstGeom xmlns:a="http://schemas.openxmlformats.org/drawingml/2006/main" prst="rect">
-            <a:avLst/>
-          </a:prstGeom>
-          <a:noFill xmlns:a="http://schemas.openxmlformats.org/drawingml/2006/main"/>
-          <a:ln xmlns:a="http://schemas.openxmlformats.org/drawingml/2006/main" w="0">
-            <a:noFill/>
-          </a:ln>
-        </p:spPr>
-        <p:txBody>
-          <a:bodyPr xmlns:a="http://schemas.openxmlformats.org/drawingml/2006/main" wrap="square" lIns="0" tIns="0" rIns="0" bIns="0" anchor="t">
-            <a:noAutofit/>
-          </a:bodyPr>
-          <a:lstStyle xmlns:a="http://schemas.openxmlformats.org/drawingml/2006/main"/>
-          <a:p xmlns:a="http://schemas.openxmlformats.org/drawingml/2006/main">
-            <a:pPr>
-              <a:defRPr sz="2550" b="1">
-                <a:solidFill>
-                  <a:srgbClr val="266466"/>
-                </a:solidFill>
-                <a:latin typeface="Calibri"/>
-                <a:ea typeface="Calibri"/>
-                <a:cs typeface="Calibri"/>
-              </a:defRPr>
-            </a:pPr>
-            <a:r>
-              <a:rPr sz="2550" b="1">
-                <a:solidFill>
-                  <a:srgbClr val="266466"/>
-                </a:solidFill>
-                <a:latin typeface="Calibri"/>
-                <a:ea typeface="Calibri"/>
-                <a:cs typeface="Calibri"/>
-              </a:rPr>
-              <a:t>7.3×</a:t>
-            </a:r>
-          </a:p>
-        </p:txBody>
-      </p:sp>
-      <p:sp>
-        <p:nvSpPr>
-          <p:cNvPr id="100" name="rev-120">
-            <a:extLst xmlns:a="http://schemas.openxmlformats.org/drawingml/2006/main">
-              <a:ext uri="{FF2B5EF4-FFF2-40B4-BE49-F238E27FC236}">
-                <a16:creationId xmlns:a16="http://schemas.microsoft.com/office/drawing/2014/main" id="{0813AE2F-7B8A-4FD3-9049-6D41019303B8}"/>
-              </a:ext>
-            </a:extLst>
-          </p:cNvPr>
-          <p:cNvSpPr>
-            <a:spLocks xmlns:a="http://schemas.openxmlformats.org/drawingml/2006/main" noGrp="1"/>
-          </p:cNvSpPr>
-          <p:nvPr/>
-        </p:nvSpPr>
-        <p:spPr>
-          <a:xfrm xmlns:a="http://schemas.openxmlformats.org/drawingml/2006/main">
-            <a:off x="3333750" y="6067425"/>
-            <a:ext cx="2667000" cy="219075"/>
-          </a:xfrm>
-          <a:prstGeom xmlns:a="http://schemas.openxmlformats.org/drawingml/2006/main" prst="rect">
-            <a:avLst/>
-          </a:prstGeom>
-          <a:noFill xmlns:a="http://schemas.openxmlformats.org/drawingml/2006/main"/>
-          <a:ln xmlns:a="http://schemas.openxmlformats.org/drawingml/2006/main" w="0">
-            <a:noFill/>
-          </a:ln>
-        </p:spPr>
-        <p:txBody>
-          <a:bodyPr xmlns:a="http://schemas.openxmlformats.org/drawingml/2006/main" wrap="square" lIns="0" tIns="0" rIns="0" bIns="0" anchor="t">
-            <a:noAutofit/>
-          </a:bodyPr>
-          <a:lstStyle xmlns:a="http://schemas.openxmlformats.org/drawingml/2006/main"/>
-          <a:p xmlns:a="http://schemas.openxmlformats.org/drawingml/2006/main">
-            <a:pPr>
-              <a:defRPr sz="1275">
-                <a:solidFill>
-                  <a:srgbClr val="202B36"/>
-                </a:solidFill>
-                <a:latin typeface="Calibri"/>
-                <a:ea typeface="Calibri"/>
-                <a:cs typeface="Calibri"/>
-              </a:defRPr>
-            </a:pPr>
-            <a:r>
-              <a:rPr sz="1275">
-                <a:solidFill>
-                  <a:srgbClr val="202B36"/>
-                </a:solidFill>
-                <a:latin typeface="Calibri"/>
-                <a:ea typeface="Calibri"/>
-                <a:cs typeface="Calibri"/>
-              </a:rPr>
-              <a:t>Faster sanitize-to-plan median</a:t>
-            </a:r>
-          </a:p>
-        </p:txBody>
-      </p:sp>
-      <p:sp>
-        <p:nvSpPr>
-          <p:cNvPr id="101" name="rev-121">
-            <a:extLst xmlns:a="http://schemas.openxmlformats.org/drawingml/2006/main">
-              <a:ext uri="{FF2B5EF4-FFF2-40B4-BE49-F238E27FC236}">
-                <a16:creationId xmlns:a16="http://schemas.microsoft.com/office/drawing/2014/main" id="{3E424DB8-3CD5-4FAF-AD52-44C3785BE1FD}"/>
-              </a:ext>
-            </a:extLst>
-          </p:cNvPr>
-          <p:cNvSpPr>
-            <a:spLocks xmlns:a="http://schemas.openxmlformats.org/drawingml/2006/main" noGrp="1"/>
-          </p:cNvSpPr>
-          <p:nvPr/>
-        </p:nvSpPr>
-        <p:spPr>
-          <a:xfrm xmlns:a="http://schemas.openxmlformats.org/drawingml/2006/main">
-            <a:off x="6210300" y="5400675"/>
-            <a:ext cx="2600325" cy="209550"/>
-          </a:xfrm>
-          <a:prstGeom xmlns:a="http://schemas.openxmlformats.org/drawingml/2006/main" prst="rect">
-            <a:avLst/>
-          </a:prstGeom>
-          <a:noFill xmlns:a="http://schemas.openxmlformats.org/drawingml/2006/main"/>
-          <a:ln xmlns:a="http://schemas.openxmlformats.org/drawingml/2006/main" w="0">
-            <a:noFill/>
-          </a:ln>
-        </p:spPr>
-        <p:txBody>
-          <a:bodyPr xmlns:a="http://schemas.openxmlformats.org/drawingml/2006/main" wrap="square" lIns="0" tIns="0" rIns="0" bIns="0" anchor="t">
-            <a:noAutofit/>
-          </a:bodyPr>
-          <a:lstStyle xmlns:a="http://schemas.openxmlformats.org/drawingml/2006/main"/>
-          <a:p xmlns:a="http://schemas.openxmlformats.org/drawingml/2006/main">
-            <a:pPr>
-              <a:defRPr sz="1200" b="1">
-                <a:solidFill>
-                  <a:srgbClr val="53616D"/>
-                </a:solidFill>
-                <a:latin typeface="Calibri"/>
-                <a:ea typeface="Calibri"/>
-                <a:cs typeface="Calibri"/>
-              </a:defRPr>
-            </a:pPr>
-            <a:r>
-              <a:rPr sz="1200" b="1">
-                <a:solidFill>
-                  <a:srgbClr val="53616D"/>
-                </a:solidFill>
-                <a:latin typeface="Calibri"/>
-                <a:ea typeface="Calibri"/>
-                <a:cs typeface="Calibri"/>
-              </a:rPr>
-              <a:t>COMPUTE</a:t>
-            </a:r>
-          </a:p>
-        </p:txBody>
-      </p:sp>
-      <p:sp>
-        <p:nvSpPr>
-          <p:cNvPr id="102" name="rev-122">
-            <a:extLst xmlns:a="http://schemas.openxmlformats.org/drawingml/2006/main">
-              <a:ext uri="{FF2B5EF4-FFF2-40B4-BE49-F238E27FC236}">
-                <a16:creationId xmlns:a16="http://schemas.microsoft.com/office/drawing/2014/main" id="{43D4FDE6-40FB-443F-878A-D2733F67E860}"/>
-              </a:ext>
-            </a:extLst>
-          </p:cNvPr>
-          <p:cNvSpPr>
-            <a:spLocks xmlns:a="http://schemas.openxmlformats.org/drawingml/2006/main" noGrp="1"/>
-          </p:cNvSpPr>
-          <p:nvPr/>
-        </p:nvSpPr>
-        <p:spPr>
-          <a:xfrm xmlns:a="http://schemas.openxmlformats.org/drawingml/2006/main">
-            <a:off x="6210300" y="5648325"/>
-            <a:ext cx="2600325" cy="400050"/>
-          </a:xfrm>
-          <a:prstGeom xmlns:a="http://schemas.openxmlformats.org/drawingml/2006/main" prst="rect">
-            <a:avLst/>
-          </a:prstGeom>
-          <a:noFill xmlns:a="http://schemas.openxmlformats.org/drawingml/2006/main"/>
-          <a:ln xmlns:a="http://schemas.openxmlformats.org/drawingml/2006/main" w="0">
-            <a:noFill/>
-          </a:ln>
-        </p:spPr>
-        <p:txBody>
-          <a:bodyPr xmlns:a="http://schemas.openxmlformats.org/drawingml/2006/main" wrap="square" lIns="0" tIns="0" rIns="0" bIns="0" anchor="t">
-            <a:noAutofit/>
-          </a:bodyPr>
-          <a:lstStyle xmlns:a="http://schemas.openxmlformats.org/drawingml/2006/main"/>
-          <a:p xmlns:a="http://schemas.openxmlformats.org/drawingml/2006/main">
-            <a:pPr>
-              <a:defRPr sz="2550" b="1">
-                <a:solidFill>
-                  <a:srgbClr val="266466"/>
-                </a:solidFill>
-                <a:latin typeface="Calibri"/>
-                <a:ea typeface="Calibri"/>
-                <a:cs typeface="Calibri"/>
-              </a:defRPr>
-            </a:pPr>
-            <a:r>
-              <a:rPr sz="2550" b="1">
-                <a:solidFill>
-                  <a:srgbClr val="266466"/>
-                </a:solidFill>
-                <a:latin typeface="Calibri"/>
-                <a:ea typeface="Calibri"/>
-                <a:cs typeface="Calibri"/>
-              </a:rPr>
-              <a:t>51%</a:t>
-            </a:r>
-          </a:p>
-        </p:txBody>
-      </p:sp>
-      <p:sp>
-        <p:nvSpPr>
-          <p:cNvPr id="103" name="rev-123">
-            <a:extLst xmlns:a="http://schemas.openxmlformats.org/drawingml/2006/main">
-              <a:ext uri="{FF2B5EF4-FFF2-40B4-BE49-F238E27FC236}">
-                <a16:creationId xmlns:a16="http://schemas.microsoft.com/office/drawing/2014/main" id="{A12D893B-01B5-412C-A11A-45D6D8B6E64F}"/>
-              </a:ext>
-            </a:extLst>
-          </p:cNvPr>
-          <p:cNvSpPr>
-            <a:spLocks xmlns:a="http://schemas.openxmlformats.org/drawingml/2006/main" noGrp="1"/>
-          </p:cNvSpPr>
-          <p:nvPr/>
-        </p:nvSpPr>
-        <p:spPr>
-          <a:xfrm xmlns:a="http://schemas.openxmlformats.org/drawingml/2006/main">
-            <a:off x="6210300" y="6067425"/>
-            <a:ext cx="2667000" cy="219075"/>
-          </a:xfrm>
-          <a:prstGeom xmlns:a="http://schemas.openxmlformats.org/drawingml/2006/main" prst="rect">
-            <a:avLst/>
-          </a:prstGeom>
-          <a:noFill xmlns:a="http://schemas.openxmlformats.org/drawingml/2006/main"/>
-          <a:ln xmlns:a="http://schemas.openxmlformats.org/drawingml/2006/main" w="0">
-            <a:noFill/>
-          </a:ln>
-        </p:spPr>
-        <p:txBody>
-          <a:bodyPr xmlns:a="http://schemas.openxmlformats.org/drawingml/2006/main" wrap="square" lIns="0" tIns="0" rIns="0" bIns="0" anchor="t">
-            <a:noAutofit/>
-          </a:bodyPr>
-          <a:lstStyle xmlns:a="http://schemas.openxmlformats.org/drawingml/2006/main"/>
-          <a:p xmlns:a="http://schemas.openxmlformats.org/drawingml/2006/main">
-            <a:pPr>
-              <a:defRPr sz="1275">
-                <a:solidFill>
-                  <a:srgbClr val="202B36"/>
-                </a:solidFill>
-                <a:latin typeface="Calibri"/>
-                <a:ea typeface="Calibri"/>
-                <a:cs typeface="Calibri"/>
-              </a:defRPr>
-            </a:pPr>
-            <a:r>
-              <a:rPr sz="1275">
-                <a:solidFill>
-                  <a:srgbClr val="202B36"/>
-                </a:solidFill>
-                <a:latin typeface="Calibri"/>
-                <a:ea typeface="Calibri"/>
-                <a:cs typeface="Calibri"/>
-              </a:rPr>
-              <a:t>Lower Python-process CPU / page</a:t>
-            </a:r>
-          </a:p>
-        </p:txBody>
-      </p:sp>
-      <p:sp>
-        <p:nvSpPr>
-          <p:cNvPr id="104" name="rev-124">
-            <a:extLst xmlns:a="http://schemas.openxmlformats.org/drawingml/2006/main">
-              <a:ext uri="{FF2B5EF4-FFF2-40B4-BE49-F238E27FC236}">
-                <a16:creationId xmlns:a16="http://schemas.microsoft.com/office/drawing/2014/main" id="{DCE3932E-08B1-4FC7-88EC-A190238757D5}"/>
-              </a:ext>
-            </a:extLst>
-          </p:cNvPr>
-          <p:cNvSpPr>
-            <a:spLocks xmlns:a="http://schemas.openxmlformats.org/drawingml/2006/main" noGrp="1"/>
-          </p:cNvSpPr>
-          <p:nvPr/>
-        </p:nvSpPr>
-        <p:spPr>
-          <a:xfrm xmlns:a="http://schemas.openxmlformats.org/drawingml/2006/main">
-            <a:off x="9086850" y="5400675"/>
-            <a:ext cx="2600325" cy="209550"/>
-          </a:xfrm>
-          <a:prstGeom xmlns:a="http://schemas.openxmlformats.org/drawingml/2006/main" prst="rect">
-            <a:avLst/>
-          </a:prstGeom>
-          <a:noFill xmlns:a="http://schemas.openxmlformats.org/drawingml/2006/main"/>
-          <a:ln xmlns:a="http://schemas.openxmlformats.org/drawingml/2006/main" w="0">
-            <a:noFill/>
-          </a:ln>
-        </p:spPr>
-        <p:txBody>
-          <a:bodyPr xmlns:a="http://schemas.openxmlformats.org/drawingml/2006/main" wrap="square" lIns="0" tIns="0" rIns="0" bIns="0" anchor="t">
-            <a:noAutofit/>
-          </a:bodyPr>
-          <a:lstStyle xmlns:a="http://schemas.openxmlformats.org/drawingml/2006/main"/>
-          <a:p xmlns:a="http://schemas.openxmlformats.org/drawingml/2006/main">
-            <a:pPr>
-              <a:defRPr sz="1200" b="1">
-                <a:solidFill>
-                  <a:srgbClr val="53616D"/>
-                </a:solidFill>
-                <a:latin typeface="Calibri"/>
-                <a:ea typeface="Calibri"/>
-                <a:cs typeface="Calibri"/>
-              </a:defRPr>
-            </a:pPr>
-            <a:r>
-              <a:rPr sz="1200" b="1">
-                <a:solidFill>
-                  <a:srgbClr val="53616D"/>
-                </a:solidFill>
-                <a:latin typeface="Calibri"/>
-                <a:ea typeface="Calibri"/>
-                <a:cs typeface="Calibri"/>
-              </a:rPr>
-              <a:t>PLANNING</a:t>
-            </a:r>
-          </a:p>
-        </p:txBody>
-      </p:sp>
-      <p:sp>
-        <p:nvSpPr>
-          <p:cNvPr id="105" name="rev-125">
-            <a:extLst xmlns:a="http://schemas.openxmlformats.org/drawingml/2006/main">
-              <a:ext uri="{FF2B5EF4-FFF2-40B4-BE49-F238E27FC236}">
-                <a16:creationId xmlns:a16="http://schemas.microsoft.com/office/drawing/2014/main" id="{AC08CF92-8D19-4F35-97B2-1EF6D616C162}"/>
-              </a:ext>
-            </a:extLst>
-          </p:cNvPr>
-          <p:cNvSpPr>
-            <a:spLocks xmlns:a="http://schemas.openxmlformats.org/drawingml/2006/main" noGrp="1"/>
-          </p:cNvSpPr>
-          <p:nvPr/>
-        </p:nvSpPr>
-        <p:spPr>
-          <a:xfrm xmlns:a="http://schemas.openxmlformats.org/drawingml/2006/main">
-            <a:off x="9086850" y="5648325"/>
-            <a:ext cx="2600325" cy="400050"/>
-          </a:xfrm>
-          <a:prstGeom xmlns:a="http://schemas.openxmlformats.org/drawingml/2006/main" prst="rect">
-            <a:avLst/>
-          </a:prstGeom>
-          <a:noFill xmlns:a="http://schemas.openxmlformats.org/drawingml/2006/main"/>
-          <a:ln xmlns:a="http://schemas.openxmlformats.org/drawingml/2006/main" w="0">
-            <a:noFill/>
-          </a:ln>
-        </p:spPr>
-        <p:txBody>
-          <a:bodyPr xmlns:a="http://schemas.openxmlformats.org/drawingml/2006/main" wrap="square" lIns="0" tIns="0" rIns="0" bIns="0" anchor="t">
-            <a:noAutofit/>
-          </a:bodyPr>
-          <a:lstStyle xmlns:a="http://schemas.openxmlformats.org/drawingml/2006/main"/>
-          <a:p xmlns:a="http://schemas.openxmlformats.org/drawingml/2006/main">
-            <a:pPr>
-              <a:defRPr sz="2550" b="1">
-                <a:solidFill>
-                  <a:srgbClr val="266466"/>
-                </a:solidFill>
-                <a:latin typeface="Calibri"/>
-                <a:ea typeface="Calibri"/>
-                <a:cs typeface="Calibri"/>
-              </a:defRPr>
-            </a:pPr>
-            <a:r>
-              <a:rPr sz="2550" b="1">
-                <a:solidFill>
-                  <a:srgbClr val="266466"/>
-                </a:solidFill>
-                <a:latin typeface="Calibri"/>
-                <a:ea typeface="Calibri"/>
-                <a:cs typeface="Calibri"/>
-              </a:rPr>
-              <a:t>48/48</a:t>
-            </a:r>
-          </a:p>
-        </p:txBody>
-      </p:sp>
-      <p:sp>
-        <p:nvSpPr>
-          <p:cNvPr id="106" name="rev-126">
-            <a:extLst xmlns:a="http://schemas.openxmlformats.org/drawingml/2006/main">
-              <a:ext uri="{FF2B5EF4-FFF2-40B4-BE49-F238E27FC236}">
-                <a16:creationId xmlns:a16="http://schemas.microsoft.com/office/drawing/2014/main" id="{1AF13BD4-FAA8-4C51-80AB-30F6D13D8E3F}"/>
-              </a:ext>
-            </a:extLst>
-          </p:cNvPr>
-          <p:cNvSpPr>
-            <a:spLocks xmlns:a="http://schemas.openxmlformats.org/drawingml/2006/main" noGrp="1"/>
-          </p:cNvSpPr>
-          <p:nvPr/>
-        </p:nvSpPr>
-        <p:spPr>
-          <a:xfrm xmlns:a="http://schemas.openxmlformats.org/drawingml/2006/main">
-            <a:off x="9086850" y="6067425"/>
-            <a:ext cx="2667000" cy="219075"/>
-          </a:xfrm>
-          <a:prstGeom xmlns:a="http://schemas.openxmlformats.org/drawingml/2006/main" prst="rect">
-            <a:avLst/>
-          </a:prstGeom>
-          <a:noFill xmlns:a="http://schemas.openxmlformats.org/drawingml/2006/main"/>
-          <a:ln xmlns:a="http://schemas.openxmlformats.org/drawingml/2006/main" w="0">
-            <a:noFill/>
-          </a:ln>
-        </p:spPr>
-        <p:txBody>
-          <a:bodyPr xmlns:a="http://schemas.openxmlformats.org/drawingml/2006/main" wrap="square" lIns="0" tIns="0" rIns="0" bIns="0" anchor="t">
-            <a:noAutofit/>
-          </a:bodyPr>
-          <a:lstStyle xmlns:a="http://schemas.openxmlformats.org/drawingml/2006/main"/>
-          <a:p xmlns:a="http://schemas.openxmlformats.org/drawingml/2006/main">
-            <a:pPr>
-              <a:defRPr sz="1275">
-                <a:solidFill>
-                  <a:srgbClr val="202B36"/>
-                </a:solidFill>
-                <a:latin typeface="Calibri"/>
-                <a:ea typeface="Calibri"/>
-                <a:cs typeface="Calibri"/>
-              </a:defRPr>
-            </a:pPr>
-            <a:r>
-              <a:rPr sz="1275">
-                <a:solidFill>
-                  <a:srgbClr val="202B36"/>
-                </a:solidFill>
-                <a:latin typeface="Calibri"/>
-                <a:ea typeface="Calibri"/>
-                <a:cs typeface="Calibri"/>
-              </a:rPr>
-              <a:t>Correct Download target chosen</a:t>
+              <a:t>Metadata-only privacy check; target selection is not task completion. CPU excludes Tesseract. Browser/VLM timing remains unmeasured.</a:t>
             </a:r>
           </a:p>
         </p:txBody>
@@ -11093,7 +10792,7 @@
     </p:spTree>
     <p:extLst>
       <p:ext uri="{BB962C8B-B14F-4D97-AF65-F5344CB8AC3E}">
-        <p14:creationId xmlns:p14="http://schemas.microsoft.com/office/powerpoint/2010/main" val="2023219172"/>
+        <p14:creationId xmlns:p14="http://schemas.microsoft.com/office/powerpoint/2010/main" val="671232856"/>
       </p:ext>
     </p:extLst>
   </p:cSld>
@@ -11117,7 +10816,7 @@
           <p:cNvPr id="2" name="Shape 0">
             <a:extLst xmlns:a="http://schemas.openxmlformats.org/drawingml/2006/main">
               <a:ext uri="{FF2B5EF4-FFF2-40B4-BE49-F238E27FC236}">
-                <a16:creationId xmlns:a16="http://schemas.microsoft.com/office/drawing/2014/main" id="{7E7B6E14-F629-4718-95A2-4F95D0D8E001}"/>
+                <a16:creationId xmlns:a16="http://schemas.microsoft.com/office/drawing/2014/main" id="{819F7B47-1DE2-4F18-AC3A-6451DFEA19C4}"/>
               </a:ext>
             </a:extLst>
           </p:cNvPr>
@@ -11157,7 +10856,7 @@
           <p:cNvPr id="3" name="Text 1">
             <a:extLst xmlns:a="http://schemas.openxmlformats.org/drawingml/2006/main">
               <a:ext uri="{FF2B5EF4-FFF2-40B4-BE49-F238E27FC236}">
-                <a16:creationId xmlns:a16="http://schemas.microsoft.com/office/drawing/2014/main" id="{F2C2BA5C-4A6A-468A-A8BA-CCF634EB85AA}"/>
+                <a16:creationId xmlns:a16="http://schemas.microsoft.com/office/drawing/2014/main" id="{A2E49EAF-1736-4AE8-B560-C8C13AA23DA3}"/>
               </a:ext>
             </a:extLst>
           </p:cNvPr>
@@ -11203,7 +10902,7 @@
           <p:cNvPr id="4" name="Text 2">
             <a:extLst xmlns:a="http://schemas.openxmlformats.org/drawingml/2006/main">
               <a:ext uri="{FF2B5EF4-FFF2-40B4-BE49-F238E27FC236}">
-                <a16:creationId xmlns:a16="http://schemas.microsoft.com/office/drawing/2014/main" id="{AAF3797E-C9AC-40EE-A4E6-82B9FCCAD72B}"/>
+                <a16:creationId xmlns:a16="http://schemas.microsoft.com/office/drawing/2014/main" id="{D47A3C3D-DE49-4064-81F8-F79EE80F0874}"/>
               </a:ext>
             </a:extLst>
           </p:cNvPr>
@@ -11253,7 +10952,7 @@
           <p:nvPr/>
         </p:nvPicPr>
         <p:blipFill>
-          <a:blip xmlns:r="http://schemas.openxmlformats.org/officeDocument/2006/relationships" xmlns:a="http://schemas.openxmlformats.org/drawingml/2006/main" r:embed="Rb0aeaba2cb564904"/>
+          <a:blip xmlns:r="http://schemas.openxmlformats.org/officeDocument/2006/relationships" xmlns:a="http://schemas.openxmlformats.org/drawingml/2006/main" r:embed="R2a969f0d7e7b4703"/>
           <a:stretch xmlns:a="http://schemas.openxmlformats.org/drawingml/2006/main">
             <a:fillRect l="0" t="0" r="0" b="0"/>
           </a:stretch>
@@ -11280,7 +10979,7 @@
           <p:cNvPr id="7" name="Shape 4">
             <a:extLst xmlns:a="http://schemas.openxmlformats.org/drawingml/2006/main">
               <a:ext uri="{FF2B5EF4-FFF2-40B4-BE49-F238E27FC236}">
-                <a16:creationId xmlns:a16="http://schemas.microsoft.com/office/drawing/2014/main" id="{E7F2EDCA-AAD3-457B-BA8A-E32A7D87D231}"/>
+                <a16:creationId xmlns:a16="http://schemas.microsoft.com/office/drawing/2014/main" id="{D2C658FD-DAEA-457F-911E-2905FD511053}"/>
               </a:ext>
             </a:extLst>
           </p:cNvPr>
@@ -11307,7 +11006,7 @@
           <p:cNvPr id="9" name="Text 6">
             <a:extLst xmlns:a="http://schemas.openxmlformats.org/drawingml/2006/main">
               <a:ext uri="{FF2B5EF4-FFF2-40B4-BE49-F238E27FC236}">
-                <a16:creationId xmlns:a16="http://schemas.microsoft.com/office/drawing/2014/main" id="{EE0E83E8-9378-4B10-AD9F-1B472498476D}"/>
+                <a16:creationId xmlns:a16="http://schemas.microsoft.com/office/drawing/2014/main" id="{A5C705BA-CB04-4C56-8ADE-638FFBF24D71}"/>
               </a:ext>
             </a:extLst>
           </p:cNvPr>
@@ -11350,10 +11049,10 @@
       </p:sp>
       <p:sp>
         <p:nvSpPr>
-          <p:cNvPr id="51" name="rev-127">
-            <a:extLst xmlns:a="http://schemas.openxmlformats.org/drawingml/2006/main">
-              <a:ext uri="{FF2B5EF4-FFF2-40B4-BE49-F238E27FC236}">
-                <a16:creationId xmlns:a16="http://schemas.microsoft.com/office/drawing/2014/main" id="{2AD56AB7-CA3D-41AE-B30E-CC56A9D78491}"/>
+          <p:cNvPr id="51" name="rev-120">
+            <a:extLst xmlns:a="http://schemas.openxmlformats.org/drawingml/2006/main">
+              <a:ext uri="{FF2B5EF4-FFF2-40B4-BE49-F238E27FC236}">
+                <a16:creationId xmlns:a16="http://schemas.microsoft.com/office/drawing/2014/main" id="{CF1E3452-30C2-448F-B66A-CF8CA1451B36}"/>
               </a:ext>
             </a:extLst>
           </p:cNvPr>
@@ -11407,10 +11106,10 @@
       </p:sp>
       <p:sp>
         <p:nvSpPr>
-          <p:cNvPr id="52" name="rev-128">
-            <a:extLst xmlns:a="http://schemas.openxmlformats.org/drawingml/2006/main">
-              <a:ext uri="{FF2B5EF4-FFF2-40B4-BE49-F238E27FC236}">
-                <a16:creationId xmlns:a16="http://schemas.microsoft.com/office/drawing/2014/main" id="{ADFE56B2-2509-4DEB-8E98-0D892B375793}"/>
+          <p:cNvPr id="52" name="rev-121">
+            <a:extLst xmlns:a="http://schemas.openxmlformats.org/drawingml/2006/main">
+              <a:ext uri="{FF2B5EF4-FFF2-40B4-BE49-F238E27FC236}">
+                <a16:creationId xmlns:a16="http://schemas.microsoft.com/office/drawing/2014/main" id="{C5C9F934-E866-411E-BBE1-D03EFEF3A885}"/>
               </a:ext>
             </a:extLst>
           </p:cNvPr>
@@ -11464,10 +11163,10 @@
       </p:sp>
       <p:sp>
         <p:nvSpPr>
-          <p:cNvPr id="53" name="rev-129">
-            <a:extLst xmlns:a="http://schemas.openxmlformats.org/drawingml/2006/main">
-              <a:ext uri="{FF2B5EF4-FFF2-40B4-BE49-F238E27FC236}">
-                <a16:creationId xmlns:a16="http://schemas.microsoft.com/office/drawing/2014/main" id="{52501D60-7AE3-4A0D-8355-F1B2A1CF709A}"/>
+          <p:cNvPr id="53" name="rev-122">
+            <a:extLst xmlns:a="http://schemas.openxmlformats.org/drawingml/2006/main">
+              <a:ext uri="{FF2B5EF4-FFF2-40B4-BE49-F238E27FC236}">
+                <a16:creationId xmlns:a16="http://schemas.microsoft.com/office/drawing/2014/main" id="{F6BA3471-0AF7-42D3-A677-0D290E2A9519}"/>
               </a:ext>
             </a:extLst>
           </p:cNvPr>
@@ -11521,10 +11220,10 @@
       </p:sp>
       <p:sp>
         <p:nvSpPr>
-          <p:cNvPr id="54" name="rev-130">
-            <a:extLst xmlns:a="http://schemas.openxmlformats.org/drawingml/2006/main">
-              <a:ext uri="{FF2B5EF4-FFF2-40B4-BE49-F238E27FC236}">
-                <a16:creationId xmlns:a16="http://schemas.microsoft.com/office/drawing/2014/main" id="{AC74AF72-CB2D-4A19-939F-EB975DB23123}"/>
+          <p:cNvPr id="54" name="rev-123">
+            <a:extLst xmlns:a="http://schemas.openxmlformats.org/drawingml/2006/main">
+              <a:ext uri="{FF2B5EF4-FFF2-40B4-BE49-F238E27FC236}">
+                <a16:creationId xmlns:a16="http://schemas.microsoft.com/office/drawing/2014/main" id="{5B3ECBDE-D39F-43B0-80D8-2B909617DF3B}"/>
               </a:ext>
             </a:extLst>
           </p:cNvPr>
@@ -11570,7 +11269,7 @@
                 <a:latin typeface="Calibri"/>
                 <a:ea typeface="Calibri"/>
                 <a:cs typeface="Calibri"/>
-                <a:hlinkClick xmlns:r="http://schemas.openxmlformats.org/officeDocument/2006/relationships" r:id="R172ebeb170d44efd"/>
+                <a:hlinkClick xmlns:r="http://schemas.openxmlformats.org/officeDocument/2006/relationships" r:id="Rd745dcbfe1a1424c"/>
               </a:rPr>
               <a:t>arxiv.org/abs/2306.06070</a:t>
             </a:r>
@@ -11579,10 +11278,10 @@
       </p:sp>
       <p:sp>
         <p:nvSpPr>
-          <p:cNvPr id="55" name="rev-131">
-            <a:extLst xmlns:a="http://schemas.openxmlformats.org/drawingml/2006/main">
-              <a:ext uri="{FF2B5EF4-FFF2-40B4-BE49-F238E27FC236}">
-                <a16:creationId xmlns:a16="http://schemas.microsoft.com/office/drawing/2014/main" id="{2BA3F126-EA7A-4014-809D-3261A1BA4E23}"/>
+          <p:cNvPr id="55" name="rev-124">
+            <a:extLst xmlns:a="http://schemas.openxmlformats.org/drawingml/2006/main">
+              <a:ext uri="{FF2B5EF4-FFF2-40B4-BE49-F238E27FC236}">
+                <a16:creationId xmlns:a16="http://schemas.microsoft.com/office/drawing/2014/main" id="{A1B04696-DD7D-45AC-958E-ACF1FE8FAF8C}"/>
               </a:ext>
             </a:extLst>
           </p:cNvPr>
@@ -11636,10 +11335,10 @@
       </p:sp>
       <p:sp>
         <p:nvSpPr>
-          <p:cNvPr id="56" name="rev-132">
-            <a:extLst xmlns:a="http://schemas.openxmlformats.org/drawingml/2006/main">
-              <a:ext uri="{FF2B5EF4-FFF2-40B4-BE49-F238E27FC236}">
-                <a16:creationId xmlns:a16="http://schemas.microsoft.com/office/drawing/2014/main" id="{55AA49F6-25DF-4FCB-8AD8-817086FFE91A}"/>
+          <p:cNvPr id="56" name="rev-125">
+            <a:extLst xmlns:a="http://schemas.openxmlformats.org/drawingml/2006/main">
+              <a:ext uri="{FF2B5EF4-FFF2-40B4-BE49-F238E27FC236}">
+                <a16:creationId xmlns:a16="http://schemas.microsoft.com/office/drawing/2014/main" id="{C8C6B300-0B05-44FE-BD01-A76D7147A932}"/>
               </a:ext>
             </a:extLst>
           </p:cNvPr>
@@ -11693,10 +11392,10 @@
       </p:sp>
       <p:sp>
         <p:nvSpPr>
-          <p:cNvPr id="57" name="rev-133">
-            <a:extLst xmlns:a="http://schemas.openxmlformats.org/drawingml/2006/main">
-              <a:ext uri="{FF2B5EF4-FFF2-40B4-BE49-F238E27FC236}">
-                <a16:creationId xmlns:a16="http://schemas.microsoft.com/office/drawing/2014/main" id="{0F787A49-3809-4C87-88A5-3B53BB7E0E13}"/>
+          <p:cNvPr id="57" name="rev-126">
+            <a:extLst xmlns:a="http://schemas.openxmlformats.org/drawingml/2006/main">
+              <a:ext uri="{FF2B5EF4-FFF2-40B4-BE49-F238E27FC236}">
+                <a16:creationId xmlns:a16="http://schemas.microsoft.com/office/drawing/2014/main" id="{6DC1529E-9AB2-491B-BCFB-F3099E8E345B}"/>
               </a:ext>
             </a:extLst>
           </p:cNvPr>
@@ -11742,7 +11441,7 @@
                 <a:latin typeface="Calibri"/>
                 <a:ea typeface="Calibri"/>
                 <a:cs typeface="Calibri"/>
-                <a:hlinkClick xmlns:r="http://schemas.openxmlformats.org/officeDocument/2006/relationships" r:id="R03b02278e725400d"/>
+                <a:hlinkClick xmlns:r="http://schemas.openxmlformats.org/officeDocument/2006/relationships" r:id="Rb4966f914f814cda"/>
               </a:rPr>
               <a:t>arxiv.org/abs/2401.01614</a:t>
             </a:r>
@@ -11751,10 +11450,10 @@
       </p:sp>
       <p:sp>
         <p:nvSpPr>
-          <p:cNvPr id="58" name="rev-134">
-            <a:extLst xmlns:a="http://schemas.openxmlformats.org/drawingml/2006/main">
-              <a:ext uri="{FF2B5EF4-FFF2-40B4-BE49-F238E27FC236}">
-                <a16:creationId xmlns:a16="http://schemas.microsoft.com/office/drawing/2014/main" id="{0715AF52-248D-4ECD-B378-8F7AA5AF2508}"/>
+          <p:cNvPr id="58" name="rev-127">
+            <a:extLst xmlns:a="http://schemas.openxmlformats.org/drawingml/2006/main">
+              <a:ext uri="{FF2B5EF4-FFF2-40B4-BE49-F238E27FC236}">
+                <a16:creationId xmlns:a16="http://schemas.microsoft.com/office/drawing/2014/main" id="{BE4FCB82-B1A0-4513-BF03-588D5A088101}"/>
               </a:ext>
             </a:extLst>
           </p:cNvPr>
@@ -11808,10 +11507,10 @@
       </p:sp>
       <p:sp>
         <p:nvSpPr>
-          <p:cNvPr id="59" name="rev-135">
-            <a:extLst xmlns:a="http://schemas.openxmlformats.org/drawingml/2006/main">
-              <a:ext uri="{FF2B5EF4-FFF2-40B4-BE49-F238E27FC236}">
-                <a16:creationId xmlns:a16="http://schemas.microsoft.com/office/drawing/2014/main" id="{F09A9137-3630-4109-AA88-A646D12E5242}"/>
+          <p:cNvPr id="59" name="rev-128">
+            <a:extLst xmlns:a="http://schemas.openxmlformats.org/drawingml/2006/main">
+              <a:ext uri="{FF2B5EF4-FFF2-40B4-BE49-F238E27FC236}">
+                <a16:creationId xmlns:a16="http://schemas.microsoft.com/office/drawing/2014/main" id="{33B98D1E-218F-4426-91E8-639A2EF081A5}"/>
               </a:ext>
             </a:extLst>
           </p:cNvPr>
@@ -11865,10 +11564,10 @@
       </p:sp>
       <p:sp>
         <p:nvSpPr>
-          <p:cNvPr id="60" name="rev-136">
-            <a:extLst xmlns:a="http://schemas.openxmlformats.org/drawingml/2006/main">
-              <a:ext uri="{FF2B5EF4-FFF2-40B4-BE49-F238E27FC236}">
-                <a16:creationId xmlns:a16="http://schemas.microsoft.com/office/drawing/2014/main" id="{29FA69EA-3EFF-4B5C-93C9-1D506CB53680}"/>
+          <p:cNvPr id="60" name="rev-129">
+            <a:extLst xmlns:a="http://schemas.openxmlformats.org/drawingml/2006/main">
+              <a:ext uri="{FF2B5EF4-FFF2-40B4-BE49-F238E27FC236}">
+                <a16:creationId xmlns:a16="http://schemas.microsoft.com/office/drawing/2014/main" id="{8D375BC2-5217-4E94-8C1C-C737A3C478ED}"/>
               </a:ext>
             </a:extLst>
           </p:cNvPr>
@@ -11914,7 +11613,7 @@
                 <a:latin typeface="Calibri"/>
                 <a:ea typeface="Calibri"/>
                 <a:cs typeface="Calibri"/>
-                <a:hlinkClick xmlns:r="http://schemas.openxmlformats.org/officeDocument/2006/relationships" r:id="Rd82c1273f93c40ba"/>
+                <a:hlinkClick xmlns:r="http://schemas.openxmlformats.org/officeDocument/2006/relationships" r:id="R63bd50d824a94fa6"/>
               </a:rPr>
               <a:t>arxiv.org/abs/2408.00203</a:t>
             </a:r>
@@ -11923,10 +11622,10 @@
       </p:sp>
       <p:sp>
         <p:nvSpPr>
-          <p:cNvPr id="61" name="rev-137">
-            <a:extLst xmlns:a="http://schemas.openxmlformats.org/drawingml/2006/main">
-              <a:ext uri="{FF2B5EF4-FFF2-40B4-BE49-F238E27FC236}">
-                <a16:creationId xmlns:a16="http://schemas.microsoft.com/office/drawing/2014/main" id="{156BC2CB-D80B-44C7-BEEE-E6A5F9E6005B}"/>
+          <p:cNvPr id="61" name="rev-130">
+            <a:extLst xmlns:a="http://schemas.openxmlformats.org/drawingml/2006/main">
+              <a:ext uri="{FF2B5EF4-FFF2-40B4-BE49-F238E27FC236}">
+                <a16:creationId xmlns:a16="http://schemas.microsoft.com/office/drawing/2014/main" id="{5FB9AB23-E57B-4087-9A7B-14505EFBA0EF}"/>
               </a:ext>
             </a:extLst>
           </p:cNvPr>
@@ -11980,10 +11679,10 @@
       </p:sp>
       <p:sp>
         <p:nvSpPr>
-          <p:cNvPr id="62" name="rev-138">
-            <a:extLst xmlns:a="http://schemas.openxmlformats.org/drawingml/2006/main">
-              <a:ext uri="{FF2B5EF4-FFF2-40B4-BE49-F238E27FC236}">
-                <a16:creationId xmlns:a16="http://schemas.microsoft.com/office/drawing/2014/main" id="{5090DF9E-2698-4BDC-9AB9-B280FBE96315}"/>
+          <p:cNvPr id="62" name="rev-131">
+            <a:extLst xmlns:a="http://schemas.openxmlformats.org/drawingml/2006/main">
+              <a:ext uri="{FF2B5EF4-FFF2-40B4-BE49-F238E27FC236}">
+                <a16:creationId xmlns:a16="http://schemas.microsoft.com/office/drawing/2014/main" id="{C73A175D-AAB3-49C4-A1BB-6724332194B7}"/>
               </a:ext>
             </a:extLst>
           </p:cNvPr>
@@ -12037,10 +11736,10 @@
       </p:sp>
       <p:sp>
         <p:nvSpPr>
-          <p:cNvPr id="63" name="rev-139">
-            <a:extLst xmlns:a="http://schemas.openxmlformats.org/drawingml/2006/main">
-              <a:ext uri="{FF2B5EF4-FFF2-40B4-BE49-F238E27FC236}">
-                <a16:creationId xmlns:a16="http://schemas.microsoft.com/office/drawing/2014/main" id="{B21F8CA1-5D86-4DEF-9B09-36B1EE9D847B}"/>
+          <p:cNvPr id="63" name="rev-132">
+            <a:extLst xmlns:a="http://schemas.openxmlformats.org/drawingml/2006/main">
+              <a:ext uri="{FF2B5EF4-FFF2-40B4-BE49-F238E27FC236}">
+                <a16:creationId xmlns:a16="http://schemas.microsoft.com/office/drawing/2014/main" id="{53FDBE6F-F87C-4919-843C-71465AE71B06}"/>
               </a:ext>
             </a:extLst>
           </p:cNvPr>
@@ -12086,7 +11785,7 @@
                 <a:latin typeface="Calibri"/>
                 <a:ea typeface="Calibri"/>
                 <a:cs typeface="Calibri"/>
-                <a:hlinkClick xmlns:r="http://schemas.openxmlformats.org/officeDocument/2006/relationships" r:id="Ref4521fcb89a4f49"/>
+                <a:hlinkClick xmlns:r="http://schemas.openxmlformats.org/officeDocument/2006/relationships" r:id="R5cde89a7923e433e"/>
               </a:rPr>
               <a:t>arxiv.org/abs/2509.11939</a:t>
             </a:r>
@@ -12095,10 +11794,10 @@
       </p:sp>
       <p:sp>
         <p:nvSpPr>
-          <p:cNvPr id="64" name="rev-140">
-            <a:extLst xmlns:a="http://schemas.openxmlformats.org/drawingml/2006/main">
-              <a:ext uri="{FF2B5EF4-FFF2-40B4-BE49-F238E27FC236}">
-                <a16:creationId xmlns:a16="http://schemas.microsoft.com/office/drawing/2014/main" id="{F8231961-E5F1-4D8F-A60B-92B54A134E22}"/>
+          <p:cNvPr id="64" name="rev-133">
+            <a:extLst xmlns:a="http://schemas.openxmlformats.org/drawingml/2006/main">
+              <a:ext uri="{FF2B5EF4-FFF2-40B4-BE49-F238E27FC236}">
+                <a16:creationId xmlns:a16="http://schemas.microsoft.com/office/drawing/2014/main" id="{DCE21367-39F9-4FE0-821E-C2004A7C41B4}"/>
               </a:ext>
             </a:extLst>
           </p:cNvPr>
@@ -12152,10 +11851,10 @@
       </p:sp>
       <p:sp>
         <p:nvSpPr>
-          <p:cNvPr id="65" name="rev-141">
-            <a:extLst xmlns:a="http://schemas.openxmlformats.org/drawingml/2006/main">
-              <a:ext uri="{FF2B5EF4-FFF2-40B4-BE49-F238E27FC236}">
-                <a16:creationId xmlns:a16="http://schemas.microsoft.com/office/drawing/2014/main" id="{6722EB09-E746-4A1C-8BF8-00AAA2DF5FC0}"/>
+          <p:cNvPr id="65" name="rev-134">
+            <a:extLst xmlns:a="http://schemas.openxmlformats.org/drawingml/2006/main">
+              <a:ext uri="{FF2B5EF4-FFF2-40B4-BE49-F238E27FC236}">
+                <a16:creationId xmlns:a16="http://schemas.microsoft.com/office/drawing/2014/main" id="{C9D96133-F1B5-4D7E-9FF5-524CD0DD5F69}"/>
               </a:ext>
             </a:extLst>
           </p:cNvPr>
@@ -12209,10 +11908,10 @@
       </p:sp>
       <p:sp>
         <p:nvSpPr>
-          <p:cNvPr id="66" name="rev-142">
-            <a:extLst xmlns:a="http://schemas.openxmlformats.org/drawingml/2006/main">
-              <a:ext uri="{FF2B5EF4-FFF2-40B4-BE49-F238E27FC236}">
-                <a16:creationId xmlns:a16="http://schemas.microsoft.com/office/drawing/2014/main" id="{80A3D3C9-9FF8-4B6F-A82C-341F587D2473}"/>
+          <p:cNvPr id="66" name="rev-135">
+            <a:extLst xmlns:a="http://schemas.openxmlformats.org/drawingml/2006/main">
+              <a:ext uri="{FF2B5EF4-FFF2-40B4-BE49-F238E27FC236}">
+                <a16:creationId xmlns:a16="http://schemas.microsoft.com/office/drawing/2014/main" id="{8137AFC3-E6BF-4304-9075-2B88627F5BCC}"/>
               </a:ext>
             </a:extLst>
           </p:cNvPr>
@@ -12258,7 +11957,7 @@
                 <a:latin typeface="Calibri"/>
                 <a:ea typeface="Calibri"/>
                 <a:cs typeface="Calibri"/>
-                <a:hlinkClick xmlns:r="http://schemas.openxmlformats.org/officeDocument/2006/relationships" r:id="R6c2a1de204ab4dab"/>
+                <a:hlinkClick xmlns:r="http://schemas.openxmlformats.org/officeDocument/2006/relationships" r:id="R695533303ea74f33"/>
               </a:rPr>
               <a:t>arxiv.org/abs/2603.17357</a:t>
             </a:r>
@@ -12267,10 +11966,10 @@
       </p:sp>
       <p:sp>
         <p:nvSpPr>
-          <p:cNvPr id="67" name="rev-143">
-            <a:extLst xmlns:a="http://schemas.openxmlformats.org/drawingml/2006/main">
-              <a:ext uri="{FF2B5EF4-FFF2-40B4-BE49-F238E27FC236}">
-                <a16:creationId xmlns:a16="http://schemas.microsoft.com/office/drawing/2014/main" id="{D1273BDA-E41E-4720-B821-B48CCDA1C8EF}"/>
+          <p:cNvPr id="67" name="rev-136">
+            <a:extLst xmlns:a="http://schemas.openxmlformats.org/drawingml/2006/main">
+              <a:ext uri="{FF2B5EF4-FFF2-40B4-BE49-F238E27FC236}">
+                <a16:creationId xmlns:a16="http://schemas.microsoft.com/office/drawing/2014/main" id="{85ACD29C-C671-41DD-A990-C29E793AC42A}"/>
               </a:ext>
             </a:extLst>
           </p:cNvPr>
@@ -12324,10 +12023,10 @@
       </p:sp>
       <p:sp>
         <p:nvSpPr>
-          <p:cNvPr id="68" name="rev-144">
-            <a:extLst xmlns:a="http://schemas.openxmlformats.org/drawingml/2006/main">
-              <a:ext uri="{FF2B5EF4-FFF2-40B4-BE49-F238E27FC236}">
-                <a16:creationId xmlns:a16="http://schemas.microsoft.com/office/drawing/2014/main" id="{3B4CAC34-F095-4D64-A0D8-D0870A8D7489}"/>
+          <p:cNvPr id="68" name="rev-137">
+            <a:extLst xmlns:a="http://schemas.openxmlformats.org/drawingml/2006/main">
+              <a:ext uri="{FF2B5EF4-FFF2-40B4-BE49-F238E27FC236}">
+                <a16:creationId xmlns:a16="http://schemas.microsoft.com/office/drawing/2014/main" id="{33697749-0D2E-464F-BBF9-07D4BE48B506}"/>
               </a:ext>
             </a:extLst>
           </p:cNvPr>
@@ -12381,10 +12080,10 @@
       </p:sp>
       <p:sp>
         <p:nvSpPr>
-          <p:cNvPr id="69" name="rev-145">
-            <a:extLst xmlns:a="http://schemas.openxmlformats.org/drawingml/2006/main">
-              <a:ext uri="{FF2B5EF4-FFF2-40B4-BE49-F238E27FC236}">
-                <a16:creationId xmlns:a16="http://schemas.microsoft.com/office/drawing/2014/main" id="{FC50383F-BBFC-462E-A4ED-0546E974AD3D}"/>
+          <p:cNvPr id="69" name="rev-138">
+            <a:extLst xmlns:a="http://schemas.openxmlformats.org/drawingml/2006/main">
+              <a:ext uri="{FF2B5EF4-FFF2-40B4-BE49-F238E27FC236}">
+                <a16:creationId xmlns:a16="http://schemas.microsoft.com/office/drawing/2014/main" id="{AF75EF31-76F9-4D0F-950F-43FCF70083DE}"/>
               </a:ext>
             </a:extLst>
           </p:cNvPr>
@@ -12430,7 +12129,7 @@
                 <a:latin typeface="Calibri"/>
                 <a:ea typeface="Calibri"/>
                 <a:cs typeface="Calibri"/>
-                <a:hlinkClick xmlns:r="http://schemas.openxmlformats.org/officeDocument/2006/relationships" r:id="R387f54d874f74fda"/>
+                <a:hlinkClick xmlns:r="http://schemas.openxmlformats.org/officeDocument/2006/relationships" r:id="R479b8596de1c458a"/>
               </a:rPr>
               <a:t>github.com/mynameisizhan-coder/AegisBrowse</a:t>
             </a:r>
@@ -12439,10 +12138,10 @@
       </p:sp>
       <p:sp>
         <p:nvSpPr>
-          <p:cNvPr id="70" name="rev-146">
-            <a:extLst xmlns:a="http://schemas.openxmlformats.org/drawingml/2006/main">
-              <a:ext uri="{FF2B5EF4-FFF2-40B4-BE49-F238E27FC236}">
-                <a16:creationId xmlns:a16="http://schemas.microsoft.com/office/drawing/2014/main" id="{F35BB0A1-E807-4F92-ABA2-19D5A93688D5}"/>
+          <p:cNvPr id="70" name="rev-139">
+            <a:extLst xmlns:a="http://schemas.openxmlformats.org/drawingml/2006/main">
+              <a:ext uri="{FF2B5EF4-FFF2-40B4-BE49-F238E27FC236}">
+                <a16:creationId xmlns:a16="http://schemas.microsoft.com/office/drawing/2014/main" id="{F8BA63A3-64A9-4B00-840E-ED6DC1C7A936}"/>
               </a:ext>
             </a:extLst>
           </p:cNvPr>
@@ -12496,10 +12195,10 @@
       </p:sp>
       <p:sp>
         <p:nvSpPr>
-          <p:cNvPr id="71" name="rev-147">
-            <a:extLst xmlns:a="http://schemas.openxmlformats.org/drawingml/2006/main">
-              <a:ext uri="{FF2B5EF4-FFF2-40B4-BE49-F238E27FC236}">
-                <a16:creationId xmlns:a16="http://schemas.microsoft.com/office/drawing/2014/main" id="{13C73787-2AF7-40BD-BF3E-EDD7F1920AD1}"/>
+          <p:cNvPr id="71" name="rev-140">
+            <a:extLst xmlns:a="http://schemas.openxmlformats.org/drawingml/2006/main">
+              <a:ext uri="{FF2B5EF4-FFF2-40B4-BE49-F238E27FC236}">
+                <a16:creationId xmlns:a16="http://schemas.microsoft.com/office/drawing/2014/main" id="{6FFE209E-8653-4B6B-A54C-2C790264C504}"/>
               </a:ext>
             </a:extLst>
           </p:cNvPr>
@@ -12553,10 +12252,10 @@
       </p:sp>
       <p:sp>
         <p:nvSpPr>
-          <p:cNvPr id="72" name="rev-148">
-            <a:extLst xmlns:a="http://schemas.openxmlformats.org/drawingml/2006/main">
-              <a:ext uri="{FF2B5EF4-FFF2-40B4-BE49-F238E27FC236}">
-                <a16:creationId xmlns:a16="http://schemas.microsoft.com/office/drawing/2014/main" id="{B5B030CA-005B-4DC6-B05E-89D795457AD6}"/>
+          <p:cNvPr id="72" name="rev-141">
+            <a:extLst xmlns:a="http://schemas.openxmlformats.org/drawingml/2006/main">
+              <a:ext uri="{FF2B5EF4-FFF2-40B4-BE49-F238E27FC236}">
+                <a16:creationId xmlns:a16="http://schemas.microsoft.com/office/drawing/2014/main" id="{BB04A8C7-A8F2-4CF9-8B1C-9890D69BD6E0}"/>
               </a:ext>
             </a:extLst>
           </p:cNvPr>
@@ -12602,7 +12301,7 @@
                 <a:latin typeface="Calibri"/>
                 <a:ea typeface="Calibri"/>
                 <a:cs typeface="Calibri"/>
-                <a:hlinkClick xmlns:r="http://schemas.openxmlformats.org/officeDocument/2006/relationships" r:id="R54d88c3503974d88"/>
+                <a:hlinkClick xmlns:r="http://schemas.openxmlformats.org/officeDocument/2006/relationships" r:id="R54b38a43c67d4081"/>
               </a:rPr>
               <a:t>youtu.be/heZiO6_-ZtE</a:t>
             </a:r>
@@ -12611,10 +12310,10 @@
       </p:sp>
       <p:sp>
         <p:nvSpPr>
-          <p:cNvPr id="73" name="rev-149">
-            <a:extLst xmlns:a="http://schemas.openxmlformats.org/drawingml/2006/main">
-              <a:ext uri="{FF2B5EF4-FFF2-40B4-BE49-F238E27FC236}">
-                <a16:creationId xmlns:a16="http://schemas.microsoft.com/office/drawing/2014/main" id="{744B9D63-A345-4766-9DFA-73D5FB0C0AA2}"/>
+          <p:cNvPr id="73" name="rev-142">
+            <a:extLst xmlns:a="http://schemas.openxmlformats.org/drawingml/2006/main">
+              <a:ext uri="{FF2B5EF4-FFF2-40B4-BE49-F238E27FC236}">
+                <a16:creationId xmlns:a16="http://schemas.microsoft.com/office/drawing/2014/main" id="{7805A34D-7637-49E5-BAC8-FEB5BD0A1EE1}"/>
               </a:ext>
             </a:extLst>
           </p:cNvPr>
@@ -12668,10 +12367,10 @@
       </p:sp>
       <p:sp>
         <p:nvSpPr>
-          <p:cNvPr id="74" name="rev-150">
-            <a:extLst xmlns:a="http://schemas.openxmlformats.org/drawingml/2006/main">
-              <a:ext uri="{FF2B5EF4-FFF2-40B4-BE49-F238E27FC236}">
-                <a16:creationId xmlns:a16="http://schemas.microsoft.com/office/drawing/2014/main" id="{9F60BDD4-ACA1-4983-9BA7-D718361ECDDC}"/>
+          <p:cNvPr id="74" name="rev-143">
+            <a:extLst xmlns:a="http://schemas.openxmlformats.org/drawingml/2006/main">
+              <a:ext uri="{FF2B5EF4-FFF2-40B4-BE49-F238E27FC236}">
+                <a16:creationId xmlns:a16="http://schemas.microsoft.com/office/drawing/2014/main" id="{C5883807-3567-4BF8-A4C8-6934FAF89066}"/>
               </a:ext>
             </a:extLst>
           </p:cNvPr>
@@ -12771,10 +12470,10 @@
       </p:sp>
       <p:sp>
         <p:nvSpPr>
-          <p:cNvPr id="75" name="rev-151">
-            <a:extLst xmlns:a="http://schemas.openxmlformats.org/drawingml/2006/main">
-              <a:ext uri="{FF2B5EF4-FFF2-40B4-BE49-F238E27FC236}">
-                <a16:creationId xmlns:a16="http://schemas.microsoft.com/office/drawing/2014/main" id="{C3CB1278-6983-4CC4-A0D2-82DBDBA8C50F}"/>
+          <p:cNvPr id="75" name="rev-144">
+            <a:extLst xmlns:a="http://schemas.openxmlformats.org/drawingml/2006/main">
+              <a:ext uri="{FF2B5EF4-FFF2-40B4-BE49-F238E27FC236}">
+                <a16:creationId xmlns:a16="http://schemas.microsoft.com/office/drawing/2014/main" id="{F9FBB27C-24AC-4BAE-9174-46155C484FF6}"/>
               </a:ext>
             </a:extLst>
           </p:cNvPr>
@@ -12801,10 +12500,10 @@
       </p:sp>
       <p:sp>
         <p:nvSpPr>
-          <p:cNvPr id="76" name="rev-152">
-            <a:extLst xmlns:a="http://schemas.openxmlformats.org/drawingml/2006/main">
-              <a:ext uri="{FF2B5EF4-FFF2-40B4-BE49-F238E27FC236}">
-                <a16:creationId xmlns:a16="http://schemas.microsoft.com/office/drawing/2014/main" id="{A3A144C8-CD52-49DF-9BDC-95C443855B60}"/>
+          <p:cNvPr id="76" name="rev-145">
+            <a:extLst xmlns:a="http://schemas.openxmlformats.org/drawingml/2006/main">
+              <a:ext uri="{FF2B5EF4-FFF2-40B4-BE49-F238E27FC236}">
+                <a16:creationId xmlns:a16="http://schemas.microsoft.com/office/drawing/2014/main" id="{C82EABC0-0036-4FB5-81F3-18D8EFCB4034}"/>
               </a:ext>
             </a:extLst>
           </p:cNvPr>
@@ -12858,10 +12557,10 @@
       </p:sp>
       <p:sp>
         <p:nvSpPr>
-          <p:cNvPr id="77" name="rev-153">
-            <a:extLst xmlns:a="http://schemas.openxmlformats.org/drawingml/2006/main">
-              <a:ext uri="{FF2B5EF4-FFF2-40B4-BE49-F238E27FC236}">
-                <a16:creationId xmlns:a16="http://schemas.microsoft.com/office/drawing/2014/main" id="{C1015CC3-3CD7-4AD8-B2B4-B66A7A8C475E}"/>
+          <p:cNvPr id="77" name="rev-146">
+            <a:extLst xmlns:a="http://schemas.openxmlformats.org/drawingml/2006/main">
+              <a:ext uri="{FF2B5EF4-FFF2-40B4-BE49-F238E27FC236}">
+                <a16:creationId xmlns:a16="http://schemas.microsoft.com/office/drawing/2014/main" id="{BF30803D-B393-421B-869A-7188AEA022A2}"/>
               </a:ext>
             </a:extLst>
           </p:cNvPr>
@@ -12915,10 +12614,10 @@
       </p:sp>
       <p:sp>
         <p:nvSpPr>
-          <p:cNvPr id="78" name="rev-154">
-            <a:extLst xmlns:a="http://schemas.openxmlformats.org/drawingml/2006/main">
-              <a:ext uri="{FF2B5EF4-FFF2-40B4-BE49-F238E27FC236}">
-                <a16:creationId xmlns:a16="http://schemas.microsoft.com/office/drawing/2014/main" id="{4D74C9B4-8DCE-45BA-BC7E-8954E3F3A805}"/>
+          <p:cNvPr id="78" name="rev-147">
+            <a:extLst xmlns:a="http://schemas.openxmlformats.org/drawingml/2006/main">
+              <a:ext uri="{FF2B5EF4-FFF2-40B4-BE49-F238E27FC236}">
+                <a16:creationId xmlns:a16="http://schemas.microsoft.com/office/drawing/2014/main" id="{03334C59-C3F2-4CD6-847E-E4AF1F186EEB}"/>
               </a:ext>
             </a:extLst>
           </p:cNvPr>
@@ -12972,10 +12671,10 @@
       </p:sp>
       <p:sp>
         <p:nvSpPr>
-          <p:cNvPr id="79" name="rev-155">
-            <a:extLst xmlns:a="http://schemas.openxmlformats.org/drawingml/2006/main">
-              <a:ext uri="{FF2B5EF4-FFF2-40B4-BE49-F238E27FC236}">
-                <a16:creationId xmlns:a16="http://schemas.microsoft.com/office/drawing/2014/main" id="{856C6560-3FE7-4C18-9D29-FBE862D9D0C9}"/>
+          <p:cNvPr id="79" name="rev-148">
+            <a:extLst xmlns:a="http://schemas.openxmlformats.org/drawingml/2006/main">
+              <a:ext uri="{FF2B5EF4-FFF2-40B4-BE49-F238E27FC236}">
+                <a16:creationId xmlns:a16="http://schemas.microsoft.com/office/drawing/2014/main" id="{BE3A8D5E-A388-418C-835C-5D130D2184A4}"/>
               </a:ext>
             </a:extLst>
           </p:cNvPr>
@@ -13029,10 +12728,10 @@
       </p:sp>
       <p:sp>
         <p:nvSpPr>
-          <p:cNvPr id="80" name="rev-156">
-            <a:extLst xmlns:a="http://schemas.openxmlformats.org/drawingml/2006/main">
-              <a:ext uri="{FF2B5EF4-FFF2-40B4-BE49-F238E27FC236}">
-                <a16:creationId xmlns:a16="http://schemas.microsoft.com/office/drawing/2014/main" id="{169719E1-1AEF-4B06-BBC1-95C39BB06200}"/>
+          <p:cNvPr id="80" name="rev-149">
+            <a:extLst xmlns:a="http://schemas.openxmlformats.org/drawingml/2006/main">
+              <a:ext uri="{FF2B5EF4-FFF2-40B4-BE49-F238E27FC236}">
+                <a16:creationId xmlns:a16="http://schemas.microsoft.com/office/drawing/2014/main" id="{71C790CC-EDB6-4165-B379-EB6B5C9B67F4}"/>
               </a:ext>
             </a:extLst>
           </p:cNvPr>
@@ -13086,10 +12785,10 @@
       </p:sp>
       <p:sp>
         <p:nvSpPr>
-          <p:cNvPr id="81" name="rev-157">
-            <a:extLst xmlns:a="http://schemas.openxmlformats.org/drawingml/2006/main">
-              <a:ext uri="{FF2B5EF4-FFF2-40B4-BE49-F238E27FC236}">
-                <a16:creationId xmlns:a16="http://schemas.microsoft.com/office/drawing/2014/main" id="{D6A59FB3-458F-4744-84EE-162EBE2991DD}"/>
+          <p:cNvPr id="81" name="rev-150">
+            <a:extLst xmlns:a="http://schemas.openxmlformats.org/drawingml/2006/main">
+              <a:ext uri="{FF2B5EF4-FFF2-40B4-BE49-F238E27FC236}">
+                <a16:creationId xmlns:a16="http://schemas.microsoft.com/office/drawing/2014/main" id="{57CCBAAF-8CC5-4434-A58E-C44AD45C99A8}"/>
               </a:ext>
             </a:extLst>
           </p:cNvPr>
@@ -13143,10 +12842,10 @@
       </p:sp>
       <p:sp>
         <p:nvSpPr>
-          <p:cNvPr id="82" name="rev-158">
-            <a:extLst xmlns:a="http://schemas.openxmlformats.org/drawingml/2006/main">
-              <a:ext uri="{FF2B5EF4-FFF2-40B4-BE49-F238E27FC236}">
-                <a16:creationId xmlns:a16="http://schemas.microsoft.com/office/drawing/2014/main" id="{7ED285ED-5C0F-4285-9083-DD79D447E563}"/>
+          <p:cNvPr id="82" name="rev-151">
+            <a:extLst xmlns:a="http://schemas.openxmlformats.org/drawingml/2006/main">
+              <a:ext uri="{FF2B5EF4-FFF2-40B4-BE49-F238E27FC236}">
+                <a16:creationId xmlns:a16="http://schemas.microsoft.com/office/drawing/2014/main" id="{EC023ADF-91F9-4912-A6A4-0DAE53D52471}"/>
               </a:ext>
             </a:extLst>
           </p:cNvPr>
@@ -13200,10 +12899,10 @@
       </p:sp>
       <p:sp>
         <p:nvSpPr>
-          <p:cNvPr id="83" name="rev-159">
-            <a:extLst xmlns:a="http://schemas.openxmlformats.org/drawingml/2006/main">
-              <a:ext uri="{FF2B5EF4-FFF2-40B4-BE49-F238E27FC236}">
-                <a16:creationId xmlns:a16="http://schemas.microsoft.com/office/drawing/2014/main" id="{60ABE5E9-D83C-4943-840D-22ACE174BABD}"/>
+          <p:cNvPr id="83" name="rev-152">
+            <a:extLst xmlns:a="http://schemas.openxmlformats.org/drawingml/2006/main">
+              <a:ext uri="{FF2B5EF4-FFF2-40B4-BE49-F238E27FC236}">
+                <a16:creationId xmlns:a16="http://schemas.microsoft.com/office/drawing/2014/main" id="{566B6A24-3F7D-4BA2-906F-17E2D91B10AA}"/>
               </a:ext>
             </a:extLst>
           </p:cNvPr>
@@ -13249,7 +12948,7 @@
                 <a:latin typeface="Calibri"/>
                 <a:ea typeface="Calibri"/>
                 <a:cs typeface="Calibri"/>
-                <a:hlinkClick xmlns:r="http://schemas.openxmlformats.org/officeDocument/2006/relationships" r:id="R1442e06fea764793"/>
+                <a:hlinkClick xmlns:r="http://schemas.openxmlformats.org/officeDocument/2006/relationships" r:id="R0a5d6bfe41ab46b2"/>
               </a:rPr>
               <a:t>Benchmark report: nexora_benchmark/SELECTIVE_RESULTS.md</a:t>
             </a:r>
@@ -13258,10 +12957,10 @@
       </p:sp>
       <p:sp>
         <p:nvSpPr>
-          <p:cNvPr id="84" name="rev-160">
-            <a:extLst xmlns:a="http://schemas.openxmlformats.org/drawingml/2006/main">
-              <a:ext uri="{FF2B5EF4-FFF2-40B4-BE49-F238E27FC236}">
-                <a16:creationId xmlns:a16="http://schemas.microsoft.com/office/drawing/2014/main" id="{EFF85341-E1AD-42C2-B6CC-0F12CE8ADEDA}"/>
+          <p:cNvPr id="84" name="rev-153">
+            <a:extLst xmlns:a="http://schemas.openxmlformats.org/drawingml/2006/main">
+              <a:ext uri="{FF2B5EF4-FFF2-40B4-BE49-F238E27FC236}">
+                <a16:creationId xmlns:a16="http://schemas.microsoft.com/office/drawing/2014/main" id="{A3CC5B66-24D4-4301-99B3-6491FF799745}"/>
               </a:ext>
             </a:extLst>
           </p:cNvPr>
@@ -13316,7 +13015,7 @@
     </p:spTree>
     <p:extLst>
       <p:ext uri="{BB962C8B-B14F-4D97-AF65-F5344CB8AC3E}">
-        <p14:creationId xmlns:p14="http://schemas.microsoft.com/office/powerpoint/2010/main" val="1679404959"/>
+        <p14:creationId xmlns:p14="http://schemas.microsoft.com/office/powerpoint/2010/main" val="821696781"/>
       </p:ext>
     </p:extLst>
   </p:cSld>
